--- a/ah-cs/sdd/AH CS SDD Slides.pptx
+++ b/ah-cs/sdd/AH CS SDD Slides.pptx
@@ -204,7 +204,7 @@
 <file path=ppt/revisionInfo.xml><?xml version="1.0" encoding="utf-8"?>
 <p1510:revInfo xmlns:a="http://schemas.openxmlformats.org/drawingml/2006/main" xmlns:r="http://schemas.openxmlformats.org/officeDocument/2006/relationships" xmlns:p1510="http://schemas.microsoft.com/office/powerpoint/2015/10/main">
   <p1510:revLst>
-    <p1510:client id="{6DD9C1AE-9D74-4A34-AE2C-D44F4DAD3442}" v="28" dt="2026-05-31T17:10:54.576"/>
+    <p1510:client id="{6DD9C1AE-9D74-4A34-AE2C-D44F4DAD3442}" v="30" dt="2026-05-31T19:30:35.267"/>
   </p1510:revLst>
 </p1510:revInfo>
 </file>
@@ -7033,7 +7033,7 @@
           <a:p>
             <a:r>
               <a:rPr lang="en-GB" dirty="0"/>
-              <a:t>https://www.omg.org/spec/UML/2.5.1/PDF</a:t>
+              <a:t>https://www.omg.org/spec/UML/2.5.1/PDF#page=681</a:t>
             </a:r>
           </a:p>
         </p:txBody>
@@ -7650,6 +7650,10 @@
           <a:bodyPr/>
           <a:lstStyle/>
           <a:p>
+            <a:r>
+              <a:rPr lang="en-GB"/>
+              <a:t>https://www.omg.org/spec/UML/2.5.1/PDF#page=236</a:t>
+            </a:r>
             <a:endParaRPr lang="en-GB" dirty="0"/>
           </a:p>
         </p:txBody>

--- a/ah-cs/sdd/AH CS SDD Slides.pptx
+++ b/ah-cs/sdd/AH CS SDD Slides.pptx
@@ -5,7 +5,7 @@
     <p:sldMasterId id="2147483648" r:id="rId1"/>
   </p:sldMasterIdLst>
   <p:notesMasterIdLst>
-    <p:notesMasterId r:id="rId23"/>
+    <p:notesMasterId r:id="rId25"/>
   </p:notesMasterIdLst>
   <p:sldIdLst>
     <p:sldId id="434" r:id="rId2"/>
@@ -15,20 +15,22 @@
     <p:sldId id="275" r:id="rId6"/>
     <p:sldId id="888" r:id="rId7"/>
     <p:sldId id="634" r:id="rId8"/>
-    <p:sldId id="876" r:id="rId9"/>
-    <p:sldId id="875" r:id="rId10"/>
-    <p:sldId id="883" r:id="rId11"/>
-    <p:sldId id="877" r:id="rId12"/>
-    <p:sldId id="880" r:id="rId13"/>
-    <p:sldId id="878" r:id="rId14"/>
-    <p:sldId id="882" r:id="rId15"/>
-    <p:sldId id="886" r:id="rId16"/>
-    <p:sldId id="887" r:id="rId17"/>
-    <p:sldId id="881" r:id="rId18"/>
-    <p:sldId id="884" r:id="rId19"/>
-    <p:sldId id="885" r:id="rId20"/>
-    <p:sldId id="879" r:id="rId21"/>
-    <p:sldId id="496" r:id="rId22"/>
+    <p:sldId id="889" r:id="rId9"/>
+    <p:sldId id="876" r:id="rId10"/>
+    <p:sldId id="890" r:id="rId11"/>
+    <p:sldId id="875" r:id="rId12"/>
+    <p:sldId id="883" r:id="rId13"/>
+    <p:sldId id="877" r:id="rId14"/>
+    <p:sldId id="880" r:id="rId15"/>
+    <p:sldId id="878" r:id="rId16"/>
+    <p:sldId id="882" r:id="rId17"/>
+    <p:sldId id="886" r:id="rId18"/>
+    <p:sldId id="887" r:id="rId19"/>
+    <p:sldId id="881" r:id="rId20"/>
+    <p:sldId id="884" r:id="rId21"/>
+    <p:sldId id="885" r:id="rId22"/>
+    <p:sldId id="879" r:id="rId23"/>
+    <p:sldId id="496" r:id="rId24"/>
   </p:sldIdLst>
   <p:sldSz cx="12192000" cy="6858000"/>
   <p:notesSz cx="6669088" cy="9926638"/>
@@ -147,7 +149,9 @@
             <p14:sldId id="275"/>
             <p14:sldId id="888"/>
             <p14:sldId id="634"/>
+            <p14:sldId id="889"/>
             <p14:sldId id="876"/>
+            <p14:sldId id="890"/>
             <p14:sldId id="875"/>
             <p14:sldId id="883"/>
             <p14:sldId id="877"/>
@@ -201,1344 +205,20 @@
 </p:presentation>
 </file>
 
-<file path=ppt/revisionInfo.xml><?xml version="1.0" encoding="utf-8"?>
-<p1510:revInfo xmlns:a="http://schemas.openxmlformats.org/drawingml/2006/main" xmlns:r="http://schemas.openxmlformats.org/officeDocument/2006/relationships" xmlns:p1510="http://schemas.microsoft.com/office/powerpoint/2015/10/main">
-  <p1510:revLst>
-    <p1510:client id="{6DD9C1AE-9D74-4A34-AE2C-D44F4DAD3442}" v="30" dt="2026-05-31T19:30:35.267"/>
-  </p1510:revLst>
-</p1510:revInfo>
-</file>
-
 <file path=ppt/changesInfos/changesInfo1.xml><?xml version="1.0" encoding="utf-8"?>
 <pc:chgInfo xmlns:a="http://schemas.openxmlformats.org/drawingml/2006/main" xmlns:r="http://schemas.openxmlformats.org/officeDocument/2006/relationships" xmlns:ac="http://schemas.microsoft.com/office/drawing/2013/main/command" xmlns:pc="http://schemas.microsoft.com/office/powerpoint/2013/main/command">
   <pc:docChgLst>
     <pc:chgData name="Al Friend" userId="e5ed79da-d858-46d4-9eed-a7a24903f2de" providerId="ADAL" clId="{6CF5D3DD-A8C4-4611-8099-4AEB2E976A2E}"/>
     <pc:docChg chg="undo custSel addSld delSld modSld addSection delSection modSection">
-      <pc:chgData name="Al Friend" userId="e5ed79da-d858-46d4-9eed-a7a24903f2de" providerId="ADAL" clId="{6CF5D3DD-A8C4-4611-8099-4AEB2E976A2E}" dt="2026-05-31T17:24:44.112" v="1043" actId="1582"/>
+      <pc:chgData name="Al Friend" userId="e5ed79da-d858-46d4-9eed-a7a24903f2de" providerId="ADAL" clId="{6CF5D3DD-A8C4-4611-8099-4AEB2E976A2E}" dt="2026-06-02T18:36:38.164" v="1046" actId="20577"/>
       <pc:docMkLst>
         <pc:docMk/>
       </pc:docMkLst>
-      <pc:sldChg chg="del">
-        <pc:chgData name="Al Friend" userId="e5ed79da-d858-46d4-9eed-a7a24903f2de" providerId="ADAL" clId="{6CF5D3DD-A8C4-4611-8099-4AEB2E976A2E}" dt="2026-05-31T10:47:29.889" v="275" actId="47"/>
-        <pc:sldMkLst>
-          <pc:docMk/>
-          <pc:sldMk cId="562853777" sldId="336"/>
-        </pc:sldMkLst>
-      </pc:sldChg>
-      <pc:sldChg chg="del">
-        <pc:chgData name="Al Friend" userId="e5ed79da-d858-46d4-9eed-a7a24903f2de" providerId="ADAL" clId="{6CF5D3DD-A8C4-4611-8099-4AEB2E976A2E}" dt="2026-05-31T10:47:29.889" v="275" actId="47"/>
-        <pc:sldMkLst>
-          <pc:docMk/>
-          <pc:sldMk cId="3742260229" sldId="358"/>
-        </pc:sldMkLst>
-      </pc:sldChg>
-      <pc:sldChg chg="del">
-        <pc:chgData name="Al Friend" userId="e5ed79da-d858-46d4-9eed-a7a24903f2de" providerId="ADAL" clId="{6CF5D3DD-A8C4-4611-8099-4AEB2E976A2E}" dt="2026-05-31T10:48:11.354" v="280" actId="47"/>
-        <pc:sldMkLst>
-          <pc:docMk/>
-          <pc:sldMk cId="2001493673" sldId="380"/>
-        </pc:sldMkLst>
-      </pc:sldChg>
-      <pc:sldChg chg="del">
-        <pc:chgData name="Al Friend" userId="e5ed79da-d858-46d4-9eed-a7a24903f2de" providerId="ADAL" clId="{6CF5D3DD-A8C4-4611-8099-4AEB2E976A2E}" dt="2026-05-31T10:48:19.192" v="281" actId="47"/>
-        <pc:sldMkLst>
-          <pc:docMk/>
-          <pc:sldMk cId="90094969" sldId="420"/>
-        </pc:sldMkLst>
-      </pc:sldChg>
-      <pc:sldChg chg="del">
-        <pc:chgData name="Al Friend" userId="e5ed79da-d858-46d4-9eed-a7a24903f2de" providerId="ADAL" clId="{6CF5D3DD-A8C4-4611-8099-4AEB2E976A2E}" dt="2026-05-31T10:47:29.889" v="275" actId="47"/>
-        <pc:sldMkLst>
-          <pc:docMk/>
-          <pc:sldMk cId="1262159056" sldId="421"/>
-        </pc:sldMkLst>
-      </pc:sldChg>
-      <pc:sldChg chg="del">
-        <pc:chgData name="Al Friend" userId="e5ed79da-d858-46d4-9eed-a7a24903f2de" providerId="ADAL" clId="{6CF5D3DD-A8C4-4611-8099-4AEB2E976A2E}" dt="2026-05-31T10:47:29.889" v="275" actId="47"/>
-        <pc:sldMkLst>
-          <pc:docMk/>
-          <pc:sldMk cId="3146001703" sldId="422"/>
-        </pc:sldMkLst>
-      </pc:sldChg>
-      <pc:sldChg chg="del">
-        <pc:chgData name="Al Friend" userId="e5ed79da-d858-46d4-9eed-a7a24903f2de" providerId="ADAL" clId="{6CF5D3DD-A8C4-4611-8099-4AEB2E976A2E}" dt="2026-05-31T10:47:29.889" v="275" actId="47"/>
-        <pc:sldMkLst>
-          <pc:docMk/>
-          <pc:sldMk cId="3851861254" sldId="423"/>
-        </pc:sldMkLst>
-      </pc:sldChg>
-      <pc:sldChg chg="del">
-        <pc:chgData name="Al Friend" userId="e5ed79da-d858-46d4-9eed-a7a24903f2de" providerId="ADAL" clId="{6CF5D3DD-A8C4-4611-8099-4AEB2E976A2E}" dt="2026-05-31T10:47:29.889" v="275" actId="47"/>
-        <pc:sldMkLst>
-          <pc:docMk/>
-          <pc:sldMk cId="1983041276" sldId="424"/>
-        </pc:sldMkLst>
-      </pc:sldChg>
-      <pc:sldChg chg="del">
-        <pc:chgData name="Al Friend" userId="e5ed79da-d858-46d4-9eed-a7a24903f2de" providerId="ADAL" clId="{6CF5D3DD-A8C4-4611-8099-4AEB2E976A2E}" dt="2026-05-31T10:47:29.889" v="275" actId="47"/>
-        <pc:sldMkLst>
-          <pc:docMk/>
-          <pc:sldMk cId="1878748371" sldId="425"/>
-        </pc:sldMkLst>
-      </pc:sldChg>
-      <pc:sldChg chg="del">
-        <pc:chgData name="Al Friend" userId="e5ed79da-d858-46d4-9eed-a7a24903f2de" providerId="ADAL" clId="{6CF5D3DD-A8C4-4611-8099-4AEB2E976A2E}" dt="2026-05-31T10:47:29.889" v="275" actId="47"/>
-        <pc:sldMkLst>
-          <pc:docMk/>
-          <pc:sldMk cId="822755515" sldId="428"/>
-        </pc:sldMkLst>
-      </pc:sldChg>
-      <pc:sldChg chg="del">
-        <pc:chgData name="Al Friend" userId="e5ed79da-d858-46d4-9eed-a7a24903f2de" providerId="ADAL" clId="{6CF5D3DD-A8C4-4611-8099-4AEB2E976A2E}" dt="2026-05-31T10:47:48.740" v="278" actId="47"/>
-        <pc:sldMkLst>
-          <pc:docMk/>
-          <pc:sldMk cId="2570885542" sldId="437"/>
-        </pc:sldMkLst>
-      </pc:sldChg>
-      <pc:sldChg chg="del">
-        <pc:chgData name="Al Friend" userId="e5ed79da-d858-46d4-9eed-a7a24903f2de" providerId="ADAL" clId="{6CF5D3DD-A8C4-4611-8099-4AEB2E976A2E}" dt="2026-05-31T10:48:11.354" v="280" actId="47"/>
-        <pc:sldMkLst>
-          <pc:docMk/>
-          <pc:sldMk cId="3802701649" sldId="438"/>
-        </pc:sldMkLst>
-      </pc:sldChg>
-      <pc:sldChg chg="del">
-        <pc:chgData name="Al Friend" userId="e5ed79da-d858-46d4-9eed-a7a24903f2de" providerId="ADAL" clId="{6CF5D3DD-A8C4-4611-8099-4AEB2E976A2E}" dt="2026-05-31T10:47:48.740" v="278" actId="47"/>
-        <pc:sldMkLst>
-          <pc:docMk/>
-          <pc:sldMk cId="1456227709" sldId="440"/>
-        </pc:sldMkLst>
-      </pc:sldChg>
-      <pc:sldChg chg="del">
-        <pc:chgData name="Al Friend" userId="e5ed79da-d858-46d4-9eed-a7a24903f2de" providerId="ADAL" clId="{6CF5D3DD-A8C4-4611-8099-4AEB2E976A2E}" dt="2026-05-31T10:48:11.354" v="280" actId="47"/>
-        <pc:sldMkLst>
-          <pc:docMk/>
-          <pc:sldMk cId="1894983875" sldId="442"/>
-        </pc:sldMkLst>
-      </pc:sldChg>
-      <pc:sldChg chg="del">
-        <pc:chgData name="Al Friend" userId="e5ed79da-d858-46d4-9eed-a7a24903f2de" providerId="ADAL" clId="{6CF5D3DD-A8C4-4611-8099-4AEB2E976A2E}" dt="2026-05-31T10:47:54.471" v="279" actId="47"/>
-        <pc:sldMkLst>
-          <pc:docMk/>
-          <pc:sldMk cId="2328477242" sldId="443"/>
-        </pc:sldMkLst>
-      </pc:sldChg>
-      <pc:sldChg chg="del">
-        <pc:chgData name="Al Friend" userId="e5ed79da-d858-46d4-9eed-a7a24903f2de" providerId="ADAL" clId="{6CF5D3DD-A8C4-4611-8099-4AEB2E976A2E}" dt="2026-05-31T10:47:54.471" v="279" actId="47"/>
-        <pc:sldMkLst>
-          <pc:docMk/>
-          <pc:sldMk cId="171987008" sldId="444"/>
-        </pc:sldMkLst>
-      </pc:sldChg>
-      <pc:sldChg chg="del">
-        <pc:chgData name="Al Friend" userId="e5ed79da-d858-46d4-9eed-a7a24903f2de" providerId="ADAL" clId="{6CF5D3DD-A8C4-4611-8099-4AEB2E976A2E}" dt="2026-05-31T10:48:11.354" v="280" actId="47"/>
-        <pc:sldMkLst>
-          <pc:docMk/>
-          <pc:sldMk cId="3097969357" sldId="445"/>
-        </pc:sldMkLst>
-      </pc:sldChg>
-      <pc:sldChg chg="del">
-        <pc:chgData name="Al Friend" userId="e5ed79da-d858-46d4-9eed-a7a24903f2de" providerId="ADAL" clId="{6CF5D3DD-A8C4-4611-8099-4AEB2E976A2E}" dt="2026-05-31T10:48:11.354" v="280" actId="47"/>
-        <pc:sldMkLst>
-          <pc:docMk/>
-          <pc:sldMk cId="328642009" sldId="446"/>
-        </pc:sldMkLst>
-      </pc:sldChg>
-      <pc:sldChg chg="del">
-        <pc:chgData name="Al Friend" userId="e5ed79da-d858-46d4-9eed-a7a24903f2de" providerId="ADAL" clId="{6CF5D3DD-A8C4-4611-8099-4AEB2E976A2E}" dt="2026-05-31T10:47:54.471" v="279" actId="47"/>
-        <pc:sldMkLst>
-          <pc:docMk/>
-          <pc:sldMk cId="2577301597" sldId="450"/>
-        </pc:sldMkLst>
-      </pc:sldChg>
-      <pc:sldChg chg="del">
-        <pc:chgData name="Al Friend" userId="e5ed79da-d858-46d4-9eed-a7a24903f2de" providerId="ADAL" clId="{6CF5D3DD-A8C4-4611-8099-4AEB2E976A2E}" dt="2026-05-31T10:47:54.471" v="279" actId="47"/>
-        <pc:sldMkLst>
-          <pc:docMk/>
-          <pc:sldMk cId="2483932992" sldId="451"/>
-        </pc:sldMkLst>
-      </pc:sldChg>
-      <pc:sldChg chg="del">
-        <pc:chgData name="Al Friend" userId="e5ed79da-d858-46d4-9eed-a7a24903f2de" providerId="ADAL" clId="{6CF5D3DD-A8C4-4611-8099-4AEB2E976A2E}" dt="2026-05-31T10:47:54.471" v="279" actId="47"/>
-        <pc:sldMkLst>
-          <pc:docMk/>
-          <pc:sldMk cId="307598580" sldId="452"/>
-        </pc:sldMkLst>
-      </pc:sldChg>
-      <pc:sldChg chg="del">
-        <pc:chgData name="Al Friend" userId="e5ed79da-d858-46d4-9eed-a7a24903f2de" providerId="ADAL" clId="{6CF5D3DD-A8C4-4611-8099-4AEB2E976A2E}" dt="2026-05-31T10:47:54.471" v="279" actId="47"/>
-        <pc:sldMkLst>
-          <pc:docMk/>
-          <pc:sldMk cId="710849159" sldId="453"/>
-        </pc:sldMkLst>
-      </pc:sldChg>
-      <pc:sldChg chg="del">
-        <pc:chgData name="Al Friend" userId="e5ed79da-d858-46d4-9eed-a7a24903f2de" providerId="ADAL" clId="{6CF5D3DD-A8C4-4611-8099-4AEB2E976A2E}" dt="2026-05-31T10:47:54.471" v="279" actId="47"/>
-        <pc:sldMkLst>
-          <pc:docMk/>
-          <pc:sldMk cId="3835580360" sldId="454"/>
-        </pc:sldMkLst>
-      </pc:sldChg>
-      <pc:sldChg chg="del">
-        <pc:chgData name="Al Friend" userId="e5ed79da-d858-46d4-9eed-a7a24903f2de" providerId="ADAL" clId="{6CF5D3DD-A8C4-4611-8099-4AEB2E976A2E}" dt="2026-05-31T10:48:11.354" v="280" actId="47"/>
-        <pc:sldMkLst>
-          <pc:docMk/>
-          <pc:sldMk cId="370988439" sldId="456"/>
-        </pc:sldMkLst>
-      </pc:sldChg>
-      <pc:sldChg chg="del">
-        <pc:chgData name="Al Friend" userId="e5ed79da-d858-46d4-9eed-a7a24903f2de" providerId="ADAL" clId="{6CF5D3DD-A8C4-4611-8099-4AEB2E976A2E}" dt="2026-05-31T10:48:11.354" v="280" actId="47"/>
-        <pc:sldMkLst>
-          <pc:docMk/>
-          <pc:sldMk cId="2802556139" sldId="457"/>
-        </pc:sldMkLst>
-      </pc:sldChg>
-      <pc:sldChg chg="del">
-        <pc:chgData name="Al Friend" userId="e5ed79da-d858-46d4-9eed-a7a24903f2de" providerId="ADAL" clId="{6CF5D3DD-A8C4-4611-8099-4AEB2E976A2E}" dt="2026-05-31T10:48:11.354" v="280" actId="47"/>
-        <pc:sldMkLst>
-          <pc:docMk/>
-          <pc:sldMk cId="4284783190" sldId="458"/>
-        </pc:sldMkLst>
-      </pc:sldChg>
-      <pc:sldChg chg="del">
-        <pc:chgData name="Al Friend" userId="e5ed79da-d858-46d4-9eed-a7a24903f2de" providerId="ADAL" clId="{6CF5D3DD-A8C4-4611-8099-4AEB2E976A2E}" dt="2026-05-31T10:48:11.354" v="280" actId="47"/>
-        <pc:sldMkLst>
-          <pc:docMk/>
-          <pc:sldMk cId="906495385" sldId="460"/>
-        </pc:sldMkLst>
-      </pc:sldChg>
-      <pc:sldChg chg="del">
-        <pc:chgData name="Al Friend" userId="e5ed79da-d858-46d4-9eed-a7a24903f2de" providerId="ADAL" clId="{6CF5D3DD-A8C4-4611-8099-4AEB2E976A2E}" dt="2026-05-31T10:48:11.354" v="280" actId="47"/>
-        <pc:sldMkLst>
-          <pc:docMk/>
-          <pc:sldMk cId="2237164904" sldId="461"/>
-        </pc:sldMkLst>
-      </pc:sldChg>
-      <pc:sldChg chg="del">
-        <pc:chgData name="Al Friend" userId="e5ed79da-d858-46d4-9eed-a7a24903f2de" providerId="ADAL" clId="{6CF5D3DD-A8C4-4611-8099-4AEB2E976A2E}" dt="2026-05-31T10:48:11.354" v="280" actId="47"/>
-        <pc:sldMkLst>
-          <pc:docMk/>
-          <pc:sldMk cId="1219291077" sldId="462"/>
-        </pc:sldMkLst>
-      </pc:sldChg>
-      <pc:sldChg chg="del">
-        <pc:chgData name="Al Friend" userId="e5ed79da-d858-46d4-9eed-a7a24903f2de" providerId="ADAL" clId="{6CF5D3DD-A8C4-4611-8099-4AEB2E976A2E}" dt="2026-05-31T10:48:11.354" v="280" actId="47"/>
-        <pc:sldMkLst>
-          <pc:docMk/>
-          <pc:sldMk cId="813533798" sldId="463"/>
-        </pc:sldMkLst>
-      </pc:sldChg>
-      <pc:sldChg chg="del">
-        <pc:chgData name="Al Friend" userId="e5ed79da-d858-46d4-9eed-a7a24903f2de" providerId="ADAL" clId="{6CF5D3DD-A8C4-4611-8099-4AEB2E976A2E}" dt="2026-05-31T10:48:11.354" v="280" actId="47"/>
-        <pc:sldMkLst>
-          <pc:docMk/>
-          <pc:sldMk cId="1665045065" sldId="465"/>
-        </pc:sldMkLst>
-      </pc:sldChg>
-      <pc:sldChg chg="del">
-        <pc:chgData name="Al Friend" userId="e5ed79da-d858-46d4-9eed-a7a24903f2de" providerId="ADAL" clId="{6CF5D3DD-A8C4-4611-8099-4AEB2E976A2E}" dt="2026-05-31T10:48:11.354" v="280" actId="47"/>
-        <pc:sldMkLst>
-          <pc:docMk/>
-          <pc:sldMk cId="4105150459" sldId="468"/>
-        </pc:sldMkLst>
-      </pc:sldChg>
-      <pc:sldChg chg="del">
-        <pc:chgData name="Al Friend" userId="e5ed79da-d858-46d4-9eed-a7a24903f2de" providerId="ADAL" clId="{6CF5D3DD-A8C4-4611-8099-4AEB2E976A2E}" dt="2026-05-31T10:47:29.889" v="275" actId="47"/>
-        <pc:sldMkLst>
-          <pc:docMk/>
-          <pc:sldMk cId="4138570075" sldId="471"/>
-        </pc:sldMkLst>
-      </pc:sldChg>
-      <pc:sldChg chg="del">
-        <pc:chgData name="Al Friend" userId="e5ed79da-d858-46d4-9eed-a7a24903f2de" providerId="ADAL" clId="{6CF5D3DD-A8C4-4611-8099-4AEB2E976A2E}" dt="2026-05-31T10:47:29.889" v="275" actId="47"/>
-        <pc:sldMkLst>
-          <pc:docMk/>
-          <pc:sldMk cId="4207450488" sldId="472"/>
-        </pc:sldMkLst>
-      </pc:sldChg>
-      <pc:sldChg chg="del">
-        <pc:chgData name="Al Friend" userId="e5ed79da-d858-46d4-9eed-a7a24903f2de" providerId="ADAL" clId="{6CF5D3DD-A8C4-4611-8099-4AEB2E976A2E}" dt="2026-05-31T10:47:29.889" v="275" actId="47"/>
-        <pc:sldMkLst>
-          <pc:docMk/>
-          <pc:sldMk cId="1123966756" sldId="476"/>
-        </pc:sldMkLst>
-      </pc:sldChg>
-      <pc:sldChg chg="del">
-        <pc:chgData name="Al Friend" userId="e5ed79da-d858-46d4-9eed-a7a24903f2de" providerId="ADAL" clId="{6CF5D3DD-A8C4-4611-8099-4AEB2E976A2E}" dt="2026-05-31T10:47:29.889" v="275" actId="47"/>
-        <pc:sldMkLst>
-          <pc:docMk/>
-          <pc:sldMk cId="1801328822" sldId="477"/>
-        </pc:sldMkLst>
-      </pc:sldChg>
-      <pc:sldChg chg="del">
-        <pc:chgData name="Al Friend" userId="e5ed79da-d858-46d4-9eed-a7a24903f2de" providerId="ADAL" clId="{6CF5D3DD-A8C4-4611-8099-4AEB2E976A2E}" dt="2026-05-31T10:47:29.889" v="275" actId="47"/>
-        <pc:sldMkLst>
-          <pc:docMk/>
-          <pc:sldMk cId="353526583" sldId="478"/>
-        </pc:sldMkLst>
-      </pc:sldChg>
-      <pc:sldChg chg="del">
-        <pc:chgData name="Al Friend" userId="e5ed79da-d858-46d4-9eed-a7a24903f2de" providerId="ADAL" clId="{6CF5D3DD-A8C4-4611-8099-4AEB2E976A2E}" dt="2026-05-31T10:47:29.889" v="275" actId="47"/>
-        <pc:sldMkLst>
-          <pc:docMk/>
-          <pc:sldMk cId="1437776525" sldId="479"/>
-        </pc:sldMkLst>
-      </pc:sldChg>
-      <pc:sldChg chg="del">
-        <pc:chgData name="Al Friend" userId="e5ed79da-d858-46d4-9eed-a7a24903f2de" providerId="ADAL" clId="{6CF5D3DD-A8C4-4611-8099-4AEB2E976A2E}" dt="2026-05-31T10:47:29.889" v="275" actId="47"/>
-        <pc:sldMkLst>
-          <pc:docMk/>
-          <pc:sldMk cId="3531375146" sldId="480"/>
-        </pc:sldMkLst>
-      </pc:sldChg>
-      <pc:sldChg chg="del">
-        <pc:chgData name="Al Friend" userId="e5ed79da-d858-46d4-9eed-a7a24903f2de" providerId="ADAL" clId="{6CF5D3DD-A8C4-4611-8099-4AEB2E976A2E}" dt="2026-05-31T10:47:29.889" v="275" actId="47"/>
-        <pc:sldMkLst>
-          <pc:docMk/>
-          <pc:sldMk cId="2438886444" sldId="481"/>
-        </pc:sldMkLst>
-      </pc:sldChg>
-      <pc:sldChg chg="del">
-        <pc:chgData name="Al Friend" userId="e5ed79da-d858-46d4-9eed-a7a24903f2de" providerId="ADAL" clId="{6CF5D3DD-A8C4-4611-8099-4AEB2E976A2E}" dt="2026-05-31T10:47:29.889" v="275" actId="47"/>
-        <pc:sldMkLst>
-          <pc:docMk/>
-          <pc:sldMk cId="1962929106" sldId="482"/>
-        </pc:sldMkLst>
-      </pc:sldChg>
-      <pc:sldChg chg="del">
-        <pc:chgData name="Al Friend" userId="e5ed79da-d858-46d4-9eed-a7a24903f2de" providerId="ADAL" clId="{6CF5D3DD-A8C4-4611-8099-4AEB2E976A2E}" dt="2026-05-31T10:47:29.889" v="275" actId="47"/>
-        <pc:sldMkLst>
-          <pc:docMk/>
-          <pc:sldMk cId="765643102" sldId="483"/>
-        </pc:sldMkLst>
-      </pc:sldChg>
-      <pc:sldChg chg="del">
-        <pc:chgData name="Al Friend" userId="e5ed79da-d858-46d4-9eed-a7a24903f2de" providerId="ADAL" clId="{6CF5D3DD-A8C4-4611-8099-4AEB2E976A2E}" dt="2026-05-31T10:47:29.889" v="275" actId="47"/>
-        <pc:sldMkLst>
-          <pc:docMk/>
-          <pc:sldMk cId="478737394" sldId="484"/>
-        </pc:sldMkLst>
-      </pc:sldChg>
-      <pc:sldChg chg="del">
-        <pc:chgData name="Al Friend" userId="e5ed79da-d858-46d4-9eed-a7a24903f2de" providerId="ADAL" clId="{6CF5D3DD-A8C4-4611-8099-4AEB2E976A2E}" dt="2026-05-31T10:47:29.889" v="275" actId="47"/>
-        <pc:sldMkLst>
-          <pc:docMk/>
-          <pc:sldMk cId="1236895042" sldId="485"/>
-        </pc:sldMkLst>
-      </pc:sldChg>
-      <pc:sldChg chg="del">
-        <pc:chgData name="Al Friend" userId="e5ed79da-d858-46d4-9eed-a7a24903f2de" providerId="ADAL" clId="{6CF5D3DD-A8C4-4611-8099-4AEB2E976A2E}" dt="2026-05-31T10:47:29.889" v="275" actId="47"/>
-        <pc:sldMkLst>
-          <pc:docMk/>
-          <pc:sldMk cId="1514697158" sldId="486"/>
-        </pc:sldMkLst>
-      </pc:sldChg>
-      <pc:sldChg chg="del">
-        <pc:chgData name="Al Friend" userId="e5ed79da-d858-46d4-9eed-a7a24903f2de" providerId="ADAL" clId="{6CF5D3DD-A8C4-4611-8099-4AEB2E976A2E}" dt="2026-05-31T10:47:29.889" v="275" actId="47"/>
-        <pc:sldMkLst>
-          <pc:docMk/>
-          <pc:sldMk cId="1393096936" sldId="487"/>
-        </pc:sldMkLst>
-      </pc:sldChg>
-      <pc:sldChg chg="del">
-        <pc:chgData name="Al Friend" userId="e5ed79da-d858-46d4-9eed-a7a24903f2de" providerId="ADAL" clId="{6CF5D3DD-A8C4-4611-8099-4AEB2E976A2E}" dt="2026-05-31T10:47:29.889" v="275" actId="47"/>
-        <pc:sldMkLst>
-          <pc:docMk/>
-          <pc:sldMk cId="293232831" sldId="488"/>
-        </pc:sldMkLst>
-      </pc:sldChg>
-      <pc:sldChg chg="del">
-        <pc:chgData name="Al Friend" userId="e5ed79da-d858-46d4-9eed-a7a24903f2de" providerId="ADAL" clId="{6CF5D3DD-A8C4-4611-8099-4AEB2E976A2E}" dt="2026-05-31T10:47:29.889" v="275" actId="47"/>
-        <pc:sldMkLst>
-          <pc:docMk/>
-          <pc:sldMk cId="330059406" sldId="489"/>
-        </pc:sldMkLst>
-      </pc:sldChg>
-      <pc:sldChg chg="del">
-        <pc:chgData name="Al Friend" userId="e5ed79da-d858-46d4-9eed-a7a24903f2de" providerId="ADAL" clId="{6CF5D3DD-A8C4-4611-8099-4AEB2E976A2E}" dt="2026-05-31T10:47:29.889" v="275" actId="47"/>
-        <pc:sldMkLst>
-          <pc:docMk/>
-          <pc:sldMk cId="1105079564" sldId="491"/>
-        </pc:sldMkLst>
-      </pc:sldChg>
-      <pc:sldChg chg="del">
-        <pc:chgData name="Al Friend" userId="e5ed79da-d858-46d4-9eed-a7a24903f2de" providerId="ADAL" clId="{6CF5D3DD-A8C4-4611-8099-4AEB2E976A2E}" dt="2026-05-31T10:47:29.889" v="275" actId="47"/>
-        <pc:sldMkLst>
-          <pc:docMk/>
-          <pc:sldMk cId="556505236" sldId="492"/>
-        </pc:sldMkLst>
-      </pc:sldChg>
-      <pc:sldChg chg="del">
-        <pc:chgData name="Al Friend" userId="e5ed79da-d858-46d4-9eed-a7a24903f2de" providerId="ADAL" clId="{6CF5D3DD-A8C4-4611-8099-4AEB2E976A2E}" dt="2026-05-31T10:48:19.192" v="281" actId="47"/>
-        <pc:sldMkLst>
-          <pc:docMk/>
-          <pc:sldMk cId="1136100732" sldId="495"/>
-        </pc:sldMkLst>
-      </pc:sldChg>
-      <pc:sldChg chg="del">
-        <pc:chgData name="Al Friend" userId="e5ed79da-d858-46d4-9eed-a7a24903f2de" providerId="ADAL" clId="{6CF5D3DD-A8C4-4611-8099-4AEB2E976A2E}" dt="2026-05-31T10:47:44.667" v="277" actId="47"/>
-        <pc:sldMkLst>
-          <pc:docMk/>
-          <pc:sldMk cId="831658751" sldId="497"/>
-        </pc:sldMkLst>
-      </pc:sldChg>
-      <pc:sldChg chg="del">
-        <pc:chgData name="Al Friend" userId="e5ed79da-d858-46d4-9eed-a7a24903f2de" providerId="ADAL" clId="{6CF5D3DD-A8C4-4611-8099-4AEB2E976A2E}" dt="2026-05-31T10:47:44.667" v="277" actId="47"/>
-        <pc:sldMkLst>
-          <pc:docMk/>
-          <pc:sldMk cId="3844814172" sldId="498"/>
-        </pc:sldMkLst>
-      </pc:sldChg>
-      <pc:sldChg chg="del">
-        <pc:chgData name="Al Friend" userId="e5ed79da-d858-46d4-9eed-a7a24903f2de" providerId="ADAL" clId="{6CF5D3DD-A8C4-4611-8099-4AEB2E976A2E}" dt="2026-05-31T10:47:44.667" v="277" actId="47"/>
-        <pc:sldMkLst>
-          <pc:docMk/>
-          <pc:sldMk cId="1374977604" sldId="499"/>
-        </pc:sldMkLst>
-      </pc:sldChg>
-      <pc:sldChg chg="del">
-        <pc:chgData name="Al Friend" userId="e5ed79da-d858-46d4-9eed-a7a24903f2de" providerId="ADAL" clId="{6CF5D3DD-A8C4-4611-8099-4AEB2E976A2E}" dt="2026-05-31T10:47:44.667" v="277" actId="47"/>
-        <pc:sldMkLst>
-          <pc:docMk/>
-          <pc:sldMk cId="2118686002" sldId="500"/>
-        </pc:sldMkLst>
-      </pc:sldChg>
-      <pc:sldChg chg="del">
-        <pc:chgData name="Al Friend" userId="e5ed79da-d858-46d4-9eed-a7a24903f2de" providerId="ADAL" clId="{6CF5D3DD-A8C4-4611-8099-4AEB2E976A2E}" dt="2026-05-31T10:47:44.667" v="277" actId="47"/>
-        <pc:sldMkLst>
-          <pc:docMk/>
-          <pc:sldMk cId="3419363118" sldId="501"/>
-        </pc:sldMkLst>
-      </pc:sldChg>
-      <pc:sldChg chg="del">
-        <pc:chgData name="Al Friend" userId="e5ed79da-d858-46d4-9eed-a7a24903f2de" providerId="ADAL" clId="{6CF5D3DD-A8C4-4611-8099-4AEB2E976A2E}" dt="2026-05-31T10:48:19.192" v="281" actId="47"/>
-        <pc:sldMkLst>
-          <pc:docMk/>
-          <pc:sldMk cId="2982000468" sldId="502"/>
-        </pc:sldMkLst>
-      </pc:sldChg>
-      <pc:sldChg chg="del">
-        <pc:chgData name="Al Friend" userId="e5ed79da-d858-46d4-9eed-a7a24903f2de" providerId="ADAL" clId="{6CF5D3DD-A8C4-4611-8099-4AEB2E976A2E}" dt="2026-05-31T10:48:19.192" v="281" actId="47"/>
-        <pc:sldMkLst>
-          <pc:docMk/>
-          <pc:sldMk cId="1702556701" sldId="503"/>
-        </pc:sldMkLst>
-      </pc:sldChg>
-      <pc:sldChg chg="del">
-        <pc:chgData name="Al Friend" userId="e5ed79da-d858-46d4-9eed-a7a24903f2de" providerId="ADAL" clId="{6CF5D3DD-A8C4-4611-8099-4AEB2E976A2E}" dt="2026-05-31T10:48:19.192" v="281" actId="47"/>
-        <pc:sldMkLst>
-          <pc:docMk/>
-          <pc:sldMk cId="1679320925" sldId="504"/>
-        </pc:sldMkLst>
-      </pc:sldChg>
-      <pc:sldChg chg="del">
-        <pc:chgData name="Al Friend" userId="e5ed79da-d858-46d4-9eed-a7a24903f2de" providerId="ADAL" clId="{6CF5D3DD-A8C4-4611-8099-4AEB2E976A2E}" dt="2026-05-31T10:47:29.889" v="275" actId="47"/>
-        <pc:sldMkLst>
-          <pc:docMk/>
-          <pc:sldMk cId="926999632" sldId="505"/>
-        </pc:sldMkLst>
-      </pc:sldChg>
-      <pc:sldChg chg="del">
-        <pc:chgData name="Al Friend" userId="e5ed79da-d858-46d4-9eed-a7a24903f2de" providerId="ADAL" clId="{6CF5D3DD-A8C4-4611-8099-4AEB2E976A2E}" dt="2026-05-31T10:47:29.889" v="275" actId="47"/>
-        <pc:sldMkLst>
-          <pc:docMk/>
-          <pc:sldMk cId="3515013201" sldId="512"/>
-        </pc:sldMkLst>
-      </pc:sldChg>
-      <pc:sldChg chg="del">
-        <pc:chgData name="Al Friend" userId="e5ed79da-d858-46d4-9eed-a7a24903f2de" providerId="ADAL" clId="{6CF5D3DD-A8C4-4611-8099-4AEB2E976A2E}" dt="2026-05-31T10:47:29.889" v="275" actId="47"/>
-        <pc:sldMkLst>
-          <pc:docMk/>
-          <pc:sldMk cId="1037227763" sldId="514"/>
-        </pc:sldMkLst>
-      </pc:sldChg>
-      <pc:sldChg chg="del">
-        <pc:chgData name="Al Friend" userId="e5ed79da-d858-46d4-9eed-a7a24903f2de" providerId="ADAL" clId="{6CF5D3DD-A8C4-4611-8099-4AEB2E976A2E}" dt="2026-05-31T10:48:19.192" v="281" actId="47"/>
-        <pc:sldMkLst>
-          <pc:docMk/>
-          <pc:sldMk cId="303643126" sldId="516"/>
-        </pc:sldMkLst>
-      </pc:sldChg>
-      <pc:sldChg chg="del">
-        <pc:chgData name="Al Friend" userId="e5ed79da-d858-46d4-9eed-a7a24903f2de" providerId="ADAL" clId="{6CF5D3DD-A8C4-4611-8099-4AEB2E976A2E}" dt="2026-05-31T10:47:29.889" v="275" actId="47"/>
-        <pc:sldMkLst>
-          <pc:docMk/>
-          <pc:sldMk cId="2157204624" sldId="535"/>
-        </pc:sldMkLst>
-      </pc:sldChg>
-      <pc:sldChg chg="del">
-        <pc:chgData name="Al Friend" userId="e5ed79da-d858-46d4-9eed-a7a24903f2de" providerId="ADAL" clId="{6CF5D3DD-A8C4-4611-8099-4AEB2E976A2E}" dt="2026-05-31T10:47:29.889" v="275" actId="47"/>
-        <pc:sldMkLst>
-          <pc:docMk/>
-          <pc:sldMk cId="1401108545" sldId="537"/>
-        </pc:sldMkLst>
-      </pc:sldChg>
-      <pc:sldChg chg="del">
-        <pc:chgData name="Al Friend" userId="e5ed79da-d858-46d4-9eed-a7a24903f2de" providerId="ADAL" clId="{6CF5D3DD-A8C4-4611-8099-4AEB2E976A2E}" dt="2026-05-31T10:47:29.889" v="275" actId="47"/>
-        <pc:sldMkLst>
-          <pc:docMk/>
-          <pc:sldMk cId="3519238916" sldId="539"/>
-        </pc:sldMkLst>
-      </pc:sldChg>
-      <pc:sldChg chg="del">
-        <pc:chgData name="Al Friend" userId="e5ed79da-d858-46d4-9eed-a7a24903f2de" providerId="ADAL" clId="{6CF5D3DD-A8C4-4611-8099-4AEB2E976A2E}" dt="2026-05-31T10:47:29.889" v="275" actId="47"/>
-        <pc:sldMkLst>
-          <pc:docMk/>
-          <pc:sldMk cId="9835273" sldId="541"/>
-        </pc:sldMkLst>
-      </pc:sldChg>
-      <pc:sldChg chg="del">
-        <pc:chgData name="Al Friend" userId="e5ed79da-d858-46d4-9eed-a7a24903f2de" providerId="ADAL" clId="{6CF5D3DD-A8C4-4611-8099-4AEB2E976A2E}" dt="2026-05-31T10:47:29.889" v="275" actId="47"/>
-        <pc:sldMkLst>
-          <pc:docMk/>
-          <pc:sldMk cId="2523056852" sldId="545"/>
-        </pc:sldMkLst>
-      </pc:sldChg>
-      <pc:sldChg chg="del">
-        <pc:chgData name="Al Friend" userId="e5ed79da-d858-46d4-9eed-a7a24903f2de" providerId="ADAL" clId="{6CF5D3DD-A8C4-4611-8099-4AEB2E976A2E}" dt="2026-05-31T10:47:29.889" v="275" actId="47"/>
-        <pc:sldMkLst>
-          <pc:docMk/>
-          <pc:sldMk cId="2122357660" sldId="546"/>
-        </pc:sldMkLst>
-      </pc:sldChg>
-      <pc:sldChg chg="del">
-        <pc:chgData name="Al Friend" userId="e5ed79da-d858-46d4-9eed-a7a24903f2de" providerId="ADAL" clId="{6CF5D3DD-A8C4-4611-8099-4AEB2E976A2E}" dt="2026-05-31T10:47:29.889" v="275" actId="47"/>
-        <pc:sldMkLst>
-          <pc:docMk/>
-          <pc:sldMk cId="2517025096" sldId="547"/>
-        </pc:sldMkLst>
-      </pc:sldChg>
-      <pc:sldChg chg="del">
-        <pc:chgData name="Al Friend" userId="e5ed79da-d858-46d4-9eed-a7a24903f2de" providerId="ADAL" clId="{6CF5D3DD-A8C4-4611-8099-4AEB2E976A2E}" dt="2026-05-31T10:47:29.889" v="275" actId="47"/>
-        <pc:sldMkLst>
-          <pc:docMk/>
-          <pc:sldMk cId="1696205017" sldId="549"/>
-        </pc:sldMkLst>
-      </pc:sldChg>
-      <pc:sldChg chg="del">
-        <pc:chgData name="Al Friend" userId="e5ed79da-d858-46d4-9eed-a7a24903f2de" providerId="ADAL" clId="{6CF5D3DD-A8C4-4611-8099-4AEB2E976A2E}" dt="2026-05-31T10:48:11.354" v="280" actId="47"/>
-        <pc:sldMkLst>
-          <pc:docMk/>
-          <pc:sldMk cId="1426775807" sldId="550"/>
-        </pc:sldMkLst>
-      </pc:sldChg>
-      <pc:sldChg chg="del">
-        <pc:chgData name="Al Friend" userId="e5ed79da-d858-46d4-9eed-a7a24903f2de" providerId="ADAL" clId="{6CF5D3DD-A8C4-4611-8099-4AEB2E976A2E}" dt="2026-05-31T10:48:11.354" v="280" actId="47"/>
-        <pc:sldMkLst>
-          <pc:docMk/>
-          <pc:sldMk cId="2672142775" sldId="552"/>
-        </pc:sldMkLst>
-      </pc:sldChg>
-      <pc:sldChg chg="del">
-        <pc:chgData name="Al Friend" userId="e5ed79da-d858-46d4-9eed-a7a24903f2de" providerId="ADAL" clId="{6CF5D3DD-A8C4-4611-8099-4AEB2E976A2E}" dt="2026-05-31T10:48:11.354" v="280" actId="47"/>
-        <pc:sldMkLst>
-          <pc:docMk/>
-          <pc:sldMk cId="458947270" sldId="554"/>
-        </pc:sldMkLst>
-      </pc:sldChg>
-      <pc:sldChg chg="del">
-        <pc:chgData name="Al Friend" userId="e5ed79da-d858-46d4-9eed-a7a24903f2de" providerId="ADAL" clId="{6CF5D3DD-A8C4-4611-8099-4AEB2E976A2E}" dt="2026-05-31T10:48:11.354" v="280" actId="47"/>
-        <pc:sldMkLst>
-          <pc:docMk/>
-          <pc:sldMk cId="493580204" sldId="556"/>
-        </pc:sldMkLst>
-      </pc:sldChg>
-      <pc:sldChg chg="del">
-        <pc:chgData name="Al Friend" userId="e5ed79da-d858-46d4-9eed-a7a24903f2de" providerId="ADAL" clId="{6CF5D3DD-A8C4-4611-8099-4AEB2E976A2E}" dt="2026-05-31T10:48:11.354" v="280" actId="47"/>
-        <pc:sldMkLst>
-          <pc:docMk/>
-          <pc:sldMk cId="1197381379" sldId="557"/>
-        </pc:sldMkLst>
-      </pc:sldChg>
-      <pc:sldChg chg="del">
-        <pc:chgData name="Al Friend" userId="e5ed79da-d858-46d4-9eed-a7a24903f2de" providerId="ADAL" clId="{6CF5D3DD-A8C4-4611-8099-4AEB2E976A2E}" dt="2026-05-31T10:48:11.354" v="280" actId="47"/>
-        <pc:sldMkLst>
-          <pc:docMk/>
-          <pc:sldMk cId="1117637440" sldId="559"/>
-        </pc:sldMkLst>
-      </pc:sldChg>
-      <pc:sldChg chg="del">
-        <pc:chgData name="Al Friend" userId="e5ed79da-d858-46d4-9eed-a7a24903f2de" providerId="ADAL" clId="{6CF5D3DD-A8C4-4611-8099-4AEB2E976A2E}" dt="2026-05-31T10:48:11.354" v="280" actId="47"/>
-        <pc:sldMkLst>
-          <pc:docMk/>
-          <pc:sldMk cId="2489710584" sldId="560"/>
-        </pc:sldMkLst>
-      </pc:sldChg>
-      <pc:sldChg chg="del">
-        <pc:chgData name="Al Friend" userId="e5ed79da-d858-46d4-9eed-a7a24903f2de" providerId="ADAL" clId="{6CF5D3DD-A8C4-4611-8099-4AEB2E976A2E}" dt="2026-05-31T10:48:11.354" v="280" actId="47"/>
-        <pc:sldMkLst>
-          <pc:docMk/>
-          <pc:sldMk cId="3580692410" sldId="561"/>
-        </pc:sldMkLst>
-      </pc:sldChg>
-      <pc:sldChg chg="del">
-        <pc:chgData name="Al Friend" userId="e5ed79da-d858-46d4-9eed-a7a24903f2de" providerId="ADAL" clId="{6CF5D3DD-A8C4-4611-8099-4AEB2E976A2E}" dt="2026-05-31T10:47:54.471" v="279" actId="47"/>
-        <pc:sldMkLst>
-          <pc:docMk/>
-          <pc:sldMk cId="3799793334" sldId="562"/>
-        </pc:sldMkLst>
-      </pc:sldChg>
-      <pc:sldChg chg="del">
-        <pc:chgData name="Al Friend" userId="e5ed79da-d858-46d4-9eed-a7a24903f2de" providerId="ADAL" clId="{6CF5D3DD-A8C4-4611-8099-4AEB2E976A2E}" dt="2026-05-31T10:47:29.889" v="275" actId="47"/>
-        <pc:sldMkLst>
-          <pc:docMk/>
-          <pc:sldMk cId="2069570998" sldId="563"/>
-        </pc:sldMkLst>
-      </pc:sldChg>
-      <pc:sldChg chg="del">
-        <pc:chgData name="Al Friend" userId="e5ed79da-d858-46d4-9eed-a7a24903f2de" providerId="ADAL" clId="{6CF5D3DD-A8C4-4611-8099-4AEB2E976A2E}" dt="2026-05-31T10:47:29.889" v="275" actId="47"/>
-        <pc:sldMkLst>
-          <pc:docMk/>
-          <pc:sldMk cId="1226135175" sldId="564"/>
-        </pc:sldMkLst>
-      </pc:sldChg>
-      <pc:sldChg chg="del">
-        <pc:chgData name="Al Friend" userId="e5ed79da-d858-46d4-9eed-a7a24903f2de" providerId="ADAL" clId="{6CF5D3DD-A8C4-4611-8099-4AEB2E976A2E}" dt="2026-05-31T10:47:29.889" v="275" actId="47"/>
-        <pc:sldMkLst>
-          <pc:docMk/>
-          <pc:sldMk cId="2694543777" sldId="565"/>
-        </pc:sldMkLst>
-      </pc:sldChg>
-      <pc:sldChg chg="del">
-        <pc:chgData name="Al Friend" userId="e5ed79da-d858-46d4-9eed-a7a24903f2de" providerId="ADAL" clId="{6CF5D3DD-A8C4-4611-8099-4AEB2E976A2E}" dt="2026-05-31T10:47:29.889" v="275" actId="47"/>
-        <pc:sldMkLst>
-          <pc:docMk/>
-          <pc:sldMk cId="2364337226" sldId="566"/>
-        </pc:sldMkLst>
-      </pc:sldChg>
-      <pc:sldChg chg="del">
-        <pc:chgData name="Al Friend" userId="e5ed79da-d858-46d4-9eed-a7a24903f2de" providerId="ADAL" clId="{6CF5D3DD-A8C4-4611-8099-4AEB2E976A2E}" dt="2026-05-31T10:48:19.192" v="281" actId="47"/>
-        <pc:sldMkLst>
-          <pc:docMk/>
-          <pc:sldMk cId="1673138878" sldId="567"/>
-        </pc:sldMkLst>
-      </pc:sldChg>
-      <pc:sldChg chg="del">
-        <pc:chgData name="Al Friend" userId="e5ed79da-d858-46d4-9eed-a7a24903f2de" providerId="ADAL" clId="{6CF5D3DD-A8C4-4611-8099-4AEB2E976A2E}" dt="2026-05-31T10:48:19.192" v="281" actId="47"/>
-        <pc:sldMkLst>
-          <pc:docMk/>
-          <pc:sldMk cId="1233716877" sldId="568"/>
-        </pc:sldMkLst>
-      </pc:sldChg>
-      <pc:sldChg chg="del">
-        <pc:chgData name="Al Friend" userId="e5ed79da-d858-46d4-9eed-a7a24903f2de" providerId="ADAL" clId="{6CF5D3DD-A8C4-4611-8099-4AEB2E976A2E}" dt="2026-05-31T10:48:19.192" v="281" actId="47"/>
-        <pc:sldMkLst>
-          <pc:docMk/>
-          <pc:sldMk cId="2204642112" sldId="572"/>
-        </pc:sldMkLst>
-      </pc:sldChg>
-      <pc:sldChg chg="del">
-        <pc:chgData name="Al Friend" userId="e5ed79da-d858-46d4-9eed-a7a24903f2de" providerId="ADAL" clId="{6CF5D3DD-A8C4-4611-8099-4AEB2E976A2E}" dt="2026-05-31T10:48:19.192" v="281" actId="47"/>
-        <pc:sldMkLst>
-          <pc:docMk/>
-          <pc:sldMk cId="3217686171" sldId="573"/>
-        </pc:sldMkLst>
-      </pc:sldChg>
-      <pc:sldChg chg="del">
-        <pc:chgData name="Al Friend" userId="e5ed79da-d858-46d4-9eed-a7a24903f2de" providerId="ADAL" clId="{6CF5D3DD-A8C4-4611-8099-4AEB2E976A2E}" dt="2026-05-31T10:48:19.192" v="281" actId="47"/>
-        <pc:sldMkLst>
-          <pc:docMk/>
-          <pc:sldMk cId="782545373" sldId="574"/>
-        </pc:sldMkLst>
-      </pc:sldChg>
-      <pc:sldChg chg="del">
-        <pc:chgData name="Al Friend" userId="e5ed79da-d858-46d4-9eed-a7a24903f2de" providerId="ADAL" clId="{6CF5D3DD-A8C4-4611-8099-4AEB2E976A2E}" dt="2026-05-31T10:48:19.192" v="281" actId="47"/>
-        <pc:sldMkLst>
-          <pc:docMk/>
-          <pc:sldMk cId="1511439392" sldId="575"/>
-        </pc:sldMkLst>
-      </pc:sldChg>
-      <pc:sldChg chg="del">
-        <pc:chgData name="Al Friend" userId="e5ed79da-d858-46d4-9eed-a7a24903f2de" providerId="ADAL" clId="{6CF5D3DD-A8C4-4611-8099-4AEB2E976A2E}" dt="2026-05-31T10:48:19.192" v="281" actId="47"/>
-        <pc:sldMkLst>
-          <pc:docMk/>
-          <pc:sldMk cId="928485270" sldId="576"/>
-        </pc:sldMkLst>
-      </pc:sldChg>
-      <pc:sldChg chg="del">
-        <pc:chgData name="Al Friend" userId="e5ed79da-d858-46d4-9eed-a7a24903f2de" providerId="ADAL" clId="{6CF5D3DD-A8C4-4611-8099-4AEB2E976A2E}" dt="2026-05-31T10:48:19.192" v="281" actId="47"/>
-        <pc:sldMkLst>
-          <pc:docMk/>
-          <pc:sldMk cId="829510366" sldId="577"/>
-        </pc:sldMkLst>
-      </pc:sldChg>
-      <pc:sldChg chg="del">
-        <pc:chgData name="Al Friend" userId="e5ed79da-d858-46d4-9eed-a7a24903f2de" providerId="ADAL" clId="{6CF5D3DD-A8C4-4611-8099-4AEB2E976A2E}" dt="2026-05-31T10:48:19.192" v="281" actId="47"/>
-        <pc:sldMkLst>
-          <pc:docMk/>
-          <pc:sldMk cId="1934322149" sldId="578"/>
-        </pc:sldMkLst>
-      </pc:sldChg>
-      <pc:sldChg chg="del">
-        <pc:chgData name="Al Friend" userId="e5ed79da-d858-46d4-9eed-a7a24903f2de" providerId="ADAL" clId="{6CF5D3DD-A8C4-4611-8099-4AEB2E976A2E}" dt="2026-05-31T10:48:19.192" v="281" actId="47"/>
-        <pc:sldMkLst>
-          <pc:docMk/>
-          <pc:sldMk cId="3379680109" sldId="579"/>
-        </pc:sldMkLst>
-      </pc:sldChg>
-      <pc:sldChg chg="del">
-        <pc:chgData name="Al Friend" userId="e5ed79da-d858-46d4-9eed-a7a24903f2de" providerId="ADAL" clId="{6CF5D3DD-A8C4-4611-8099-4AEB2E976A2E}" dt="2026-05-31T10:48:19.192" v="281" actId="47"/>
-        <pc:sldMkLst>
-          <pc:docMk/>
-          <pc:sldMk cId="3673258037" sldId="600"/>
-        </pc:sldMkLst>
-      </pc:sldChg>
-      <pc:sldChg chg="del">
-        <pc:chgData name="Al Friend" userId="e5ed79da-d858-46d4-9eed-a7a24903f2de" providerId="ADAL" clId="{6CF5D3DD-A8C4-4611-8099-4AEB2E976A2E}" dt="2026-05-31T10:48:19.192" v="281" actId="47"/>
-        <pc:sldMkLst>
-          <pc:docMk/>
-          <pc:sldMk cId="596336617" sldId="602"/>
-        </pc:sldMkLst>
-      </pc:sldChg>
-      <pc:sldChg chg="del">
-        <pc:chgData name="Al Friend" userId="e5ed79da-d858-46d4-9eed-a7a24903f2de" providerId="ADAL" clId="{6CF5D3DD-A8C4-4611-8099-4AEB2E976A2E}" dt="2026-05-31T10:48:19.192" v="281" actId="47"/>
-        <pc:sldMkLst>
-          <pc:docMk/>
-          <pc:sldMk cId="3092738070" sldId="603"/>
-        </pc:sldMkLst>
-      </pc:sldChg>
-      <pc:sldChg chg="del">
-        <pc:chgData name="Al Friend" userId="e5ed79da-d858-46d4-9eed-a7a24903f2de" providerId="ADAL" clId="{6CF5D3DD-A8C4-4611-8099-4AEB2E976A2E}" dt="2026-05-31T10:47:44.667" v="277" actId="47"/>
-        <pc:sldMkLst>
-          <pc:docMk/>
-          <pc:sldMk cId="195889250" sldId="606"/>
-        </pc:sldMkLst>
-      </pc:sldChg>
-      <pc:sldChg chg="del">
-        <pc:chgData name="Al Friend" userId="e5ed79da-d858-46d4-9eed-a7a24903f2de" providerId="ADAL" clId="{6CF5D3DD-A8C4-4611-8099-4AEB2E976A2E}" dt="2026-05-31T10:47:44.667" v="277" actId="47"/>
-        <pc:sldMkLst>
-          <pc:docMk/>
-          <pc:sldMk cId="2607827900" sldId="607"/>
-        </pc:sldMkLst>
-      </pc:sldChg>
-      <pc:sldChg chg="del">
-        <pc:chgData name="Al Friend" userId="e5ed79da-d858-46d4-9eed-a7a24903f2de" providerId="ADAL" clId="{6CF5D3DD-A8C4-4611-8099-4AEB2E976A2E}" dt="2026-05-31T10:47:44.667" v="277" actId="47"/>
-        <pc:sldMkLst>
-          <pc:docMk/>
-          <pc:sldMk cId="2664616585" sldId="608"/>
-        </pc:sldMkLst>
-      </pc:sldChg>
-      <pc:sldChg chg="del">
-        <pc:chgData name="Al Friend" userId="e5ed79da-d858-46d4-9eed-a7a24903f2de" providerId="ADAL" clId="{6CF5D3DD-A8C4-4611-8099-4AEB2E976A2E}" dt="2026-05-31T10:47:54.471" v="279" actId="47"/>
-        <pc:sldMkLst>
-          <pc:docMk/>
-          <pc:sldMk cId="1132077490" sldId="609"/>
-        </pc:sldMkLst>
-      </pc:sldChg>
-      <pc:sldChg chg="del">
-        <pc:chgData name="Al Friend" userId="e5ed79da-d858-46d4-9eed-a7a24903f2de" providerId="ADAL" clId="{6CF5D3DD-A8C4-4611-8099-4AEB2E976A2E}" dt="2026-05-31T10:48:11.354" v="280" actId="47"/>
-        <pc:sldMkLst>
-          <pc:docMk/>
-          <pc:sldMk cId="3829790090" sldId="610"/>
-        </pc:sldMkLst>
-      </pc:sldChg>
-      <pc:sldChg chg="del">
-        <pc:chgData name="Al Friend" userId="e5ed79da-d858-46d4-9eed-a7a24903f2de" providerId="ADAL" clId="{6CF5D3DD-A8C4-4611-8099-4AEB2E976A2E}" dt="2026-05-31T10:47:29.889" v="275" actId="47"/>
-        <pc:sldMkLst>
-          <pc:docMk/>
-          <pc:sldMk cId="99839683" sldId="611"/>
-        </pc:sldMkLst>
-      </pc:sldChg>
-      <pc:sldChg chg="del">
-        <pc:chgData name="Al Friend" userId="e5ed79da-d858-46d4-9eed-a7a24903f2de" providerId="ADAL" clId="{6CF5D3DD-A8C4-4611-8099-4AEB2E976A2E}" dt="2026-05-31T10:47:29.889" v="275" actId="47"/>
-        <pc:sldMkLst>
-          <pc:docMk/>
-          <pc:sldMk cId="1725766388" sldId="612"/>
-        </pc:sldMkLst>
-      </pc:sldChg>
-      <pc:sldChg chg="del">
-        <pc:chgData name="Al Friend" userId="e5ed79da-d858-46d4-9eed-a7a24903f2de" providerId="ADAL" clId="{6CF5D3DD-A8C4-4611-8099-4AEB2E976A2E}" dt="2026-05-31T10:47:29.889" v="275" actId="47"/>
-        <pc:sldMkLst>
-          <pc:docMk/>
-          <pc:sldMk cId="2456140403" sldId="614"/>
-        </pc:sldMkLst>
-      </pc:sldChg>
-      <pc:sldChg chg="del">
-        <pc:chgData name="Al Friend" userId="e5ed79da-d858-46d4-9eed-a7a24903f2de" providerId="ADAL" clId="{6CF5D3DD-A8C4-4611-8099-4AEB2E976A2E}" dt="2026-05-31T10:47:29.889" v="275" actId="47"/>
-        <pc:sldMkLst>
-          <pc:docMk/>
-          <pc:sldMk cId="2448372155" sldId="615"/>
-        </pc:sldMkLst>
-      </pc:sldChg>
-      <pc:sldChg chg="del">
-        <pc:chgData name="Al Friend" userId="e5ed79da-d858-46d4-9eed-a7a24903f2de" providerId="ADAL" clId="{6CF5D3DD-A8C4-4611-8099-4AEB2E976A2E}" dt="2026-05-31T10:47:29.889" v="275" actId="47"/>
-        <pc:sldMkLst>
-          <pc:docMk/>
-          <pc:sldMk cId="1431497738" sldId="616"/>
-        </pc:sldMkLst>
-      </pc:sldChg>
-      <pc:sldChg chg="del">
-        <pc:chgData name="Al Friend" userId="e5ed79da-d858-46d4-9eed-a7a24903f2de" providerId="ADAL" clId="{6CF5D3DD-A8C4-4611-8099-4AEB2E976A2E}" dt="2026-05-31T10:47:29.889" v="275" actId="47"/>
-        <pc:sldMkLst>
-          <pc:docMk/>
-          <pc:sldMk cId="4042560834" sldId="617"/>
-        </pc:sldMkLst>
-      </pc:sldChg>
-      <pc:sldChg chg="del">
-        <pc:chgData name="Al Friend" userId="e5ed79da-d858-46d4-9eed-a7a24903f2de" providerId="ADAL" clId="{6CF5D3DD-A8C4-4611-8099-4AEB2E976A2E}" dt="2026-05-31T10:47:29.889" v="275" actId="47"/>
-        <pc:sldMkLst>
-          <pc:docMk/>
-          <pc:sldMk cId="3659356215" sldId="618"/>
-        </pc:sldMkLst>
-      </pc:sldChg>
-      <pc:sldChg chg="del">
-        <pc:chgData name="Al Friend" userId="e5ed79da-d858-46d4-9eed-a7a24903f2de" providerId="ADAL" clId="{6CF5D3DD-A8C4-4611-8099-4AEB2E976A2E}" dt="2026-05-31T10:47:29.889" v="275" actId="47"/>
-        <pc:sldMkLst>
-          <pc:docMk/>
-          <pc:sldMk cId="1393786595" sldId="619"/>
-        </pc:sldMkLst>
-      </pc:sldChg>
-      <pc:sldChg chg="del">
-        <pc:chgData name="Al Friend" userId="e5ed79da-d858-46d4-9eed-a7a24903f2de" providerId="ADAL" clId="{6CF5D3DD-A8C4-4611-8099-4AEB2E976A2E}" dt="2026-05-31T10:47:29.889" v="275" actId="47"/>
-        <pc:sldMkLst>
-          <pc:docMk/>
-          <pc:sldMk cId="1567249620" sldId="620"/>
-        </pc:sldMkLst>
-      </pc:sldChg>
-      <pc:sldChg chg="del">
-        <pc:chgData name="Al Friend" userId="e5ed79da-d858-46d4-9eed-a7a24903f2de" providerId="ADAL" clId="{6CF5D3DD-A8C4-4611-8099-4AEB2E976A2E}" dt="2026-05-31T10:47:29.889" v="275" actId="47"/>
-        <pc:sldMkLst>
-          <pc:docMk/>
-          <pc:sldMk cId="635506457" sldId="621"/>
-        </pc:sldMkLst>
-      </pc:sldChg>
-      <pc:sldChg chg="del">
-        <pc:chgData name="Al Friend" userId="e5ed79da-d858-46d4-9eed-a7a24903f2de" providerId="ADAL" clId="{6CF5D3DD-A8C4-4611-8099-4AEB2E976A2E}" dt="2026-05-31T10:47:29.889" v="275" actId="47"/>
-        <pc:sldMkLst>
-          <pc:docMk/>
-          <pc:sldMk cId="1269368532" sldId="622"/>
-        </pc:sldMkLst>
-      </pc:sldChg>
-      <pc:sldChg chg="del">
-        <pc:chgData name="Al Friend" userId="e5ed79da-d858-46d4-9eed-a7a24903f2de" providerId="ADAL" clId="{6CF5D3DD-A8C4-4611-8099-4AEB2E976A2E}" dt="2026-05-31T10:47:29.889" v="275" actId="47"/>
-        <pc:sldMkLst>
-          <pc:docMk/>
-          <pc:sldMk cId="515698625" sldId="623"/>
-        </pc:sldMkLst>
-      </pc:sldChg>
-      <pc:sldChg chg="del">
-        <pc:chgData name="Al Friend" userId="e5ed79da-d858-46d4-9eed-a7a24903f2de" providerId="ADAL" clId="{6CF5D3DD-A8C4-4611-8099-4AEB2E976A2E}" dt="2026-05-31T10:47:29.889" v="275" actId="47"/>
-        <pc:sldMkLst>
-          <pc:docMk/>
-          <pc:sldMk cId="910063448" sldId="624"/>
-        </pc:sldMkLst>
-      </pc:sldChg>
-      <pc:sldChg chg="del">
-        <pc:chgData name="Al Friend" userId="e5ed79da-d858-46d4-9eed-a7a24903f2de" providerId="ADAL" clId="{6CF5D3DD-A8C4-4611-8099-4AEB2E976A2E}" dt="2026-05-31T10:48:11.354" v="280" actId="47"/>
-        <pc:sldMkLst>
-          <pc:docMk/>
-          <pc:sldMk cId="4043431165" sldId="625"/>
-        </pc:sldMkLst>
-      </pc:sldChg>
-      <pc:sldChg chg="del">
-        <pc:chgData name="Al Friend" userId="e5ed79da-d858-46d4-9eed-a7a24903f2de" providerId="ADAL" clId="{6CF5D3DD-A8C4-4611-8099-4AEB2E976A2E}" dt="2026-05-31T10:48:11.354" v="280" actId="47"/>
-        <pc:sldMkLst>
-          <pc:docMk/>
-          <pc:sldMk cId="745160305" sldId="626"/>
-        </pc:sldMkLst>
-      </pc:sldChg>
-      <pc:sldChg chg="del">
-        <pc:chgData name="Al Friend" userId="e5ed79da-d858-46d4-9eed-a7a24903f2de" providerId="ADAL" clId="{6CF5D3DD-A8C4-4611-8099-4AEB2E976A2E}" dt="2026-05-31T10:48:11.354" v="280" actId="47"/>
-        <pc:sldMkLst>
-          <pc:docMk/>
-          <pc:sldMk cId="624294451" sldId="627"/>
-        </pc:sldMkLst>
-      </pc:sldChg>
-      <pc:sldChg chg="del">
-        <pc:chgData name="Al Friend" userId="e5ed79da-d858-46d4-9eed-a7a24903f2de" providerId="ADAL" clId="{6CF5D3DD-A8C4-4611-8099-4AEB2E976A2E}" dt="2026-05-31T10:48:11.354" v="280" actId="47"/>
-        <pc:sldMkLst>
-          <pc:docMk/>
-          <pc:sldMk cId="2821350884" sldId="628"/>
-        </pc:sldMkLst>
-      </pc:sldChg>
-      <pc:sldChg chg="del">
-        <pc:chgData name="Al Friend" userId="e5ed79da-d858-46d4-9eed-a7a24903f2de" providerId="ADAL" clId="{6CF5D3DD-A8C4-4611-8099-4AEB2E976A2E}" dt="2026-05-31T10:48:11.354" v="280" actId="47"/>
-        <pc:sldMkLst>
-          <pc:docMk/>
-          <pc:sldMk cId="2043302402" sldId="629"/>
-        </pc:sldMkLst>
-      </pc:sldChg>
-      <pc:sldChg chg="del">
-        <pc:chgData name="Al Friend" userId="e5ed79da-d858-46d4-9eed-a7a24903f2de" providerId="ADAL" clId="{6CF5D3DD-A8C4-4611-8099-4AEB2E976A2E}" dt="2026-05-31T10:48:11.354" v="280" actId="47"/>
-        <pc:sldMkLst>
-          <pc:docMk/>
-          <pc:sldMk cId="3121143371" sldId="630"/>
-        </pc:sldMkLst>
-      </pc:sldChg>
-      <pc:sldChg chg="del">
-        <pc:chgData name="Al Friend" userId="e5ed79da-d858-46d4-9eed-a7a24903f2de" providerId="ADAL" clId="{6CF5D3DD-A8C4-4611-8099-4AEB2E976A2E}" dt="2026-05-31T10:48:11.354" v="280" actId="47"/>
-        <pc:sldMkLst>
-          <pc:docMk/>
-          <pc:sldMk cId="193701465" sldId="631"/>
-        </pc:sldMkLst>
-      </pc:sldChg>
-      <pc:sldChg chg="del">
-        <pc:chgData name="Al Friend" userId="e5ed79da-d858-46d4-9eed-a7a24903f2de" providerId="ADAL" clId="{6CF5D3DD-A8C4-4611-8099-4AEB2E976A2E}" dt="2026-05-31T10:47:29.889" v="275" actId="47"/>
-        <pc:sldMkLst>
-          <pc:docMk/>
-          <pc:sldMk cId="4173932810" sldId="632"/>
-        </pc:sldMkLst>
-      </pc:sldChg>
-      <pc:sldChg chg="del">
-        <pc:chgData name="Al Friend" userId="e5ed79da-d858-46d4-9eed-a7a24903f2de" providerId="ADAL" clId="{6CF5D3DD-A8C4-4611-8099-4AEB2E976A2E}" dt="2026-05-31T10:47:29.889" v="275" actId="47"/>
-        <pc:sldMkLst>
-          <pc:docMk/>
-          <pc:sldMk cId="2790478087" sldId="633"/>
-        </pc:sldMkLst>
-      </pc:sldChg>
       <pc:sldChg chg="modNotesTx">
         <pc:chgData name="Al Friend" userId="e5ed79da-d858-46d4-9eed-a7a24903f2de" providerId="ADAL" clId="{6CF5D3DD-A8C4-4611-8099-4AEB2E976A2E}" dt="2026-05-31T17:19:13.800" v="1036" actId="20577"/>
         <pc:sldMkLst>
           <pc:docMk/>
           <pc:sldMk cId="3792360079" sldId="634"/>
-        </pc:sldMkLst>
-      </pc:sldChg>
-      <pc:sldChg chg="del">
-        <pc:chgData name="Al Friend" userId="e5ed79da-d858-46d4-9eed-a7a24903f2de" providerId="ADAL" clId="{6CF5D3DD-A8C4-4611-8099-4AEB2E976A2E}" dt="2026-05-31T10:48:11.354" v="280" actId="47"/>
-        <pc:sldMkLst>
-          <pc:docMk/>
-          <pc:sldMk cId="206058122" sldId="636"/>
-        </pc:sldMkLst>
-      </pc:sldChg>
-      <pc:sldChg chg="del">
-        <pc:chgData name="Al Friend" userId="e5ed79da-d858-46d4-9eed-a7a24903f2de" providerId="ADAL" clId="{6CF5D3DD-A8C4-4611-8099-4AEB2E976A2E}" dt="2026-05-31T10:48:11.354" v="280" actId="47"/>
-        <pc:sldMkLst>
-          <pc:docMk/>
-          <pc:sldMk cId="203029315" sldId="638"/>
-        </pc:sldMkLst>
-      </pc:sldChg>
-      <pc:sldChg chg="del">
-        <pc:chgData name="Al Friend" userId="e5ed79da-d858-46d4-9eed-a7a24903f2de" providerId="ADAL" clId="{6CF5D3DD-A8C4-4611-8099-4AEB2E976A2E}" dt="2026-05-31T10:48:11.354" v="280" actId="47"/>
-        <pc:sldMkLst>
-          <pc:docMk/>
-          <pc:sldMk cId="626675160" sldId="639"/>
-        </pc:sldMkLst>
-      </pc:sldChg>
-      <pc:sldChg chg="del">
-        <pc:chgData name="Al Friend" userId="e5ed79da-d858-46d4-9eed-a7a24903f2de" providerId="ADAL" clId="{6CF5D3DD-A8C4-4611-8099-4AEB2E976A2E}" dt="2026-05-31T10:48:11.354" v="280" actId="47"/>
-        <pc:sldMkLst>
-          <pc:docMk/>
-          <pc:sldMk cId="2748937002" sldId="640"/>
-        </pc:sldMkLst>
-      </pc:sldChg>
-      <pc:sldChg chg="del">
-        <pc:chgData name="Al Friend" userId="e5ed79da-d858-46d4-9eed-a7a24903f2de" providerId="ADAL" clId="{6CF5D3DD-A8C4-4611-8099-4AEB2E976A2E}" dt="2026-05-31T10:48:11.354" v="280" actId="47"/>
-        <pc:sldMkLst>
-          <pc:docMk/>
-          <pc:sldMk cId="2550659541" sldId="641"/>
-        </pc:sldMkLst>
-      </pc:sldChg>
-      <pc:sldChg chg="del">
-        <pc:chgData name="Al Friend" userId="e5ed79da-d858-46d4-9eed-a7a24903f2de" providerId="ADAL" clId="{6CF5D3DD-A8C4-4611-8099-4AEB2E976A2E}" dt="2026-05-31T10:48:11.354" v="280" actId="47"/>
-        <pc:sldMkLst>
-          <pc:docMk/>
-          <pc:sldMk cId="2724449491" sldId="642"/>
-        </pc:sldMkLst>
-      </pc:sldChg>
-      <pc:sldChg chg="del">
-        <pc:chgData name="Al Friend" userId="e5ed79da-d858-46d4-9eed-a7a24903f2de" providerId="ADAL" clId="{6CF5D3DD-A8C4-4611-8099-4AEB2E976A2E}" dt="2026-05-31T10:48:11.354" v="280" actId="47"/>
-        <pc:sldMkLst>
-          <pc:docMk/>
-          <pc:sldMk cId="2404841556" sldId="643"/>
-        </pc:sldMkLst>
-      </pc:sldChg>
-      <pc:sldChg chg="del">
-        <pc:chgData name="Al Friend" userId="e5ed79da-d858-46d4-9eed-a7a24903f2de" providerId="ADAL" clId="{6CF5D3DD-A8C4-4611-8099-4AEB2E976A2E}" dt="2026-05-31T10:48:11.354" v="280" actId="47"/>
-        <pc:sldMkLst>
-          <pc:docMk/>
-          <pc:sldMk cId="3593729528" sldId="644"/>
-        </pc:sldMkLst>
-      </pc:sldChg>
-      <pc:sldChg chg="del">
-        <pc:chgData name="Al Friend" userId="e5ed79da-d858-46d4-9eed-a7a24903f2de" providerId="ADAL" clId="{6CF5D3DD-A8C4-4611-8099-4AEB2E976A2E}" dt="2026-05-31T10:48:11.354" v="280" actId="47"/>
-        <pc:sldMkLst>
-          <pc:docMk/>
-          <pc:sldMk cId="1369337990" sldId="645"/>
-        </pc:sldMkLst>
-      </pc:sldChg>
-      <pc:sldChg chg="del">
-        <pc:chgData name="Al Friend" userId="e5ed79da-d858-46d4-9eed-a7a24903f2de" providerId="ADAL" clId="{6CF5D3DD-A8C4-4611-8099-4AEB2E976A2E}" dt="2026-05-31T10:48:11.354" v="280" actId="47"/>
-        <pc:sldMkLst>
-          <pc:docMk/>
-          <pc:sldMk cId="758771808" sldId="646"/>
-        </pc:sldMkLst>
-      </pc:sldChg>
-      <pc:sldChg chg="del">
-        <pc:chgData name="Al Friend" userId="e5ed79da-d858-46d4-9eed-a7a24903f2de" providerId="ADAL" clId="{6CF5D3DD-A8C4-4611-8099-4AEB2E976A2E}" dt="2026-05-31T10:48:19.192" v="281" actId="47"/>
-        <pc:sldMkLst>
-          <pc:docMk/>
-          <pc:sldMk cId="2262972286" sldId="814"/>
-        </pc:sldMkLst>
-      </pc:sldChg>
-      <pc:sldChg chg="del">
-        <pc:chgData name="Al Friend" userId="e5ed79da-d858-46d4-9eed-a7a24903f2de" providerId="ADAL" clId="{6CF5D3DD-A8C4-4611-8099-4AEB2E976A2E}" dt="2026-05-31T10:48:19.192" v="281" actId="47"/>
-        <pc:sldMkLst>
-          <pc:docMk/>
-          <pc:sldMk cId="2568420392" sldId="815"/>
-        </pc:sldMkLst>
-      </pc:sldChg>
-      <pc:sldChg chg="del">
-        <pc:chgData name="Al Friend" userId="e5ed79da-d858-46d4-9eed-a7a24903f2de" providerId="ADAL" clId="{6CF5D3DD-A8C4-4611-8099-4AEB2E976A2E}" dt="2026-05-31T10:48:19.192" v="281" actId="47"/>
-        <pc:sldMkLst>
-          <pc:docMk/>
-          <pc:sldMk cId="998219706" sldId="816"/>
-        </pc:sldMkLst>
-      </pc:sldChg>
-      <pc:sldChg chg="del">
-        <pc:chgData name="Al Friend" userId="e5ed79da-d858-46d4-9eed-a7a24903f2de" providerId="ADAL" clId="{6CF5D3DD-A8C4-4611-8099-4AEB2E976A2E}" dt="2026-05-31T10:48:19.192" v="281" actId="47"/>
-        <pc:sldMkLst>
-          <pc:docMk/>
-          <pc:sldMk cId="2304241816" sldId="817"/>
-        </pc:sldMkLst>
-      </pc:sldChg>
-      <pc:sldChg chg="del">
-        <pc:chgData name="Al Friend" userId="e5ed79da-d858-46d4-9eed-a7a24903f2de" providerId="ADAL" clId="{6CF5D3DD-A8C4-4611-8099-4AEB2E976A2E}" dt="2026-05-31T10:48:19.192" v="281" actId="47"/>
-        <pc:sldMkLst>
-          <pc:docMk/>
-          <pc:sldMk cId="2621208104" sldId="818"/>
-        </pc:sldMkLst>
-      </pc:sldChg>
-      <pc:sldChg chg="del">
-        <pc:chgData name="Al Friend" userId="e5ed79da-d858-46d4-9eed-a7a24903f2de" providerId="ADAL" clId="{6CF5D3DD-A8C4-4611-8099-4AEB2E976A2E}" dt="2026-05-31T10:48:19.192" v="281" actId="47"/>
-        <pc:sldMkLst>
-          <pc:docMk/>
-          <pc:sldMk cId="1249946692" sldId="820"/>
-        </pc:sldMkLst>
-      </pc:sldChg>
-      <pc:sldChg chg="del">
-        <pc:chgData name="Al Friend" userId="e5ed79da-d858-46d4-9eed-a7a24903f2de" providerId="ADAL" clId="{6CF5D3DD-A8C4-4611-8099-4AEB2E976A2E}" dt="2026-05-31T10:48:19.192" v="281" actId="47"/>
-        <pc:sldMkLst>
-          <pc:docMk/>
-          <pc:sldMk cId="839811114" sldId="821"/>
-        </pc:sldMkLst>
-      </pc:sldChg>
-      <pc:sldChg chg="del">
-        <pc:chgData name="Al Friend" userId="e5ed79da-d858-46d4-9eed-a7a24903f2de" providerId="ADAL" clId="{6CF5D3DD-A8C4-4611-8099-4AEB2E976A2E}" dt="2026-05-31T10:48:19.192" v="281" actId="47"/>
-        <pc:sldMkLst>
-          <pc:docMk/>
-          <pc:sldMk cId="1739826777" sldId="822"/>
-        </pc:sldMkLst>
-      </pc:sldChg>
-      <pc:sldChg chg="del">
-        <pc:chgData name="Al Friend" userId="e5ed79da-d858-46d4-9eed-a7a24903f2de" providerId="ADAL" clId="{6CF5D3DD-A8C4-4611-8099-4AEB2E976A2E}" dt="2026-05-31T10:48:19.192" v="281" actId="47"/>
-        <pc:sldMkLst>
-          <pc:docMk/>
-          <pc:sldMk cId="3961624521" sldId="823"/>
-        </pc:sldMkLst>
-      </pc:sldChg>
-      <pc:sldChg chg="del">
-        <pc:chgData name="Al Friend" userId="e5ed79da-d858-46d4-9eed-a7a24903f2de" providerId="ADAL" clId="{6CF5D3DD-A8C4-4611-8099-4AEB2E976A2E}" dt="2026-05-31T10:48:19.192" v="281" actId="47"/>
-        <pc:sldMkLst>
-          <pc:docMk/>
-          <pc:sldMk cId="4292795641" sldId="824"/>
-        </pc:sldMkLst>
-      </pc:sldChg>
-      <pc:sldChg chg="del">
-        <pc:chgData name="Al Friend" userId="e5ed79da-d858-46d4-9eed-a7a24903f2de" providerId="ADAL" clId="{6CF5D3DD-A8C4-4611-8099-4AEB2E976A2E}" dt="2026-05-31T10:47:29.889" v="275" actId="47"/>
-        <pc:sldMkLst>
-          <pc:docMk/>
-          <pc:sldMk cId="3771078146" sldId="825"/>
-        </pc:sldMkLst>
-      </pc:sldChg>
-      <pc:sldChg chg="del">
-        <pc:chgData name="Al Friend" userId="e5ed79da-d858-46d4-9eed-a7a24903f2de" providerId="ADAL" clId="{6CF5D3DD-A8C4-4611-8099-4AEB2E976A2E}" dt="2026-05-31T10:47:29.889" v="275" actId="47"/>
-        <pc:sldMkLst>
-          <pc:docMk/>
-          <pc:sldMk cId="897348652" sldId="826"/>
-        </pc:sldMkLst>
-      </pc:sldChg>
-      <pc:sldChg chg="del">
-        <pc:chgData name="Al Friend" userId="e5ed79da-d858-46d4-9eed-a7a24903f2de" providerId="ADAL" clId="{6CF5D3DD-A8C4-4611-8099-4AEB2E976A2E}" dt="2026-05-31T10:48:11.354" v="280" actId="47"/>
-        <pc:sldMkLst>
-          <pc:docMk/>
-          <pc:sldMk cId="3075148250" sldId="827"/>
-        </pc:sldMkLst>
-      </pc:sldChg>
-      <pc:sldChg chg="del">
-        <pc:chgData name="Al Friend" userId="e5ed79da-d858-46d4-9eed-a7a24903f2de" providerId="ADAL" clId="{6CF5D3DD-A8C4-4611-8099-4AEB2E976A2E}" dt="2026-05-31T10:48:11.354" v="280" actId="47"/>
-        <pc:sldMkLst>
-          <pc:docMk/>
-          <pc:sldMk cId="1692260887" sldId="828"/>
-        </pc:sldMkLst>
-      </pc:sldChg>
-      <pc:sldChg chg="del">
-        <pc:chgData name="Al Friend" userId="e5ed79da-d858-46d4-9eed-a7a24903f2de" providerId="ADAL" clId="{6CF5D3DD-A8C4-4611-8099-4AEB2E976A2E}" dt="2026-05-31T10:47:48.740" v="278" actId="47"/>
-        <pc:sldMkLst>
-          <pc:docMk/>
-          <pc:sldMk cId="3815233802" sldId="830"/>
-        </pc:sldMkLst>
-      </pc:sldChg>
-      <pc:sldChg chg="del">
-        <pc:chgData name="Al Friend" userId="e5ed79da-d858-46d4-9eed-a7a24903f2de" providerId="ADAL" clId="{6CF5D3DD-A8C4-4611-8099-4AEB2E976A2E}" dt="2026-05-31T10:47:44.667" v="277" actId="47"/>
-        <pc:sldMkLst>
-          <pc:docMk/>
-          <pc:sldMk cId="652055710" sldId="831"/>
-        </pc:sldMkLst>
-      </pc:sldChg>
-      <pc:sldChg chg="del">
-        <pc:chgData name="Al Friend" userId="e5ed79da-d858-46d4-9eed-a7a24903f2de" providerId="ADAL" clId="{6CF5D3DD-A8C4-4611-8099-4AEB2E976A2E}" dt="2026-05-31T10:47:44.667" v="277" actId="47"/>
-        <pc:sldMkLst>
-          <pc:docMk/>
-          <pc:sldMk cId="4014645582" sldId="832"/>
-        </pc:sldMkLst>
-      </pc:sldChg>
-      <pc:sldChg chg="del">
-        <pc:chgData name="Al Friend" userId="e5ed79da-d858-46d4-9eed-a7a24903f2de" providerId="ADAL" clId="{6CF5D3DD-A8C4-4611-8099-4AEB2E976A2E}" dt="2026-05-31T10:47:44.667" v="277" actId="47"/>
-        <pc:sldMkLst>
-          <pc:docMk/>
-          <pc:sldMk cId="4133765171" sldId="833"/>
-        </pc:sldMkLst>
-      </pc:sldChg>
-      <pc:sldChg chg="del">
-        <pc:chgData name="Al Friend" userId="e5ed79da-d858-46d4-9eed-a7a24903f2de" providerId="ADAL" clId="{6CF5D3DD-A8C4-4611-8099-4AEB2E976A2E}" dt="2026-05-31T10:47:44.667" v="277" actId="47"/>
-        <pc:sldMkLst>
-          <pc:docMk/>
-          <pc:sldMk cId="1818297475" sldId="834"/>
-        </pc:sldMkLst>
-      </pc:sldChg>
-      <pc:sldChg chg="del">
-        <pc:chgData name="Al Friend" userId="e5ed79da-d858-46d4-9eed-a7a24903f2de" providerId="ADAL" clId="{6CF5D3DD-A8C4-4611-8099-4AEB2E976A2E}" dt="2026-05-31T10:47:44.667" v="277" actId="47"/>
-        <pc:sldMkLst>
-          <pc:docMk/>
-          <pc:sldMk cId="1850962590" sldId="835"/>
-        </pc:sldMkLst>
-      </pc:sldChg>
-      <pc:sldChg chg="del">
-        <pc:chgData name="Al Friend" userId="e5ed79da-d858-46d4-9eed-a7a24903f2de" providerId="ADAL" clId="{6CF5D3DD-A8C4-4611-8099-4AEB2E976A2E}" dt="2026-05-31T10:47:54.471" v="279" actId="47"/>
-        <pc:sldMkLst>
-          <pc:docMk/>
-          <pc:sldMk cId="395973225" sldId="836"/>
-        </pc:sldMkLst>
-      </pc:sldChg>
-      <pc:sldChg chg="del">
-        <pc:chgData name="Al Friend" userId="e5ed79da-d858-46d4-9eed-a7a24903f2de" providerId="ADAL" clId="{6CF5D3DD-A8C4-4611-8099-4AEB2E976A2E}" dt="2026-05-31T10:48:11.354" v="280" actId="47"/>
-        <pc:sldMkLst>
-          <pc:docMk/>
-          <pc:sldMk cId="2517065374" sldId="837"/>
-        </pc:sldMkLst>
-      </pc:sldChg>
-      <pc:sldChg chg="del">
-        <pc:chgData name="Al Friend" userId="e5ed79da-d858-46d4-9eed-a7a24903f2de" providerId="ADAL" clId="{6CF5D3DD-A8C4-4611-8099-4AEB2E976A2E}" dt="2026-05-31T10:48:11.354" v="280" actId="47"/>
-        <pc:sldMkLst>
-          <pc:docMk/>
-          <pc:sldMk cId="2117933979" sldId="838"/>
-        </pc:sldMkLst>
-      </pc:sldChg>
-      <pc:sldChg chg="del">
-        <pc:chgData name="Al Friend" userId="e5ed79da-d858-46d4-9eed-a7a24903f2de" providerId="ADAL" clId="{6CF5D3DD-A8C4-4611-8099-4AEB2E976A2E}" dt="2026-05-31T10:48:11.354" v="280" actId="47"/>
-        <pc:sldMkLst>
-          <pc:docMk/>
-          <pc:sldMk cId="1619853656" sldId="839"/>
-        </pc:sldMkLst>
-      </pc:sldChg>
-      <pc:sldChg chg="del">
-        <pc:chgData name="Al Friend" userId="e5ed79da-d858-46d4-9eed-a7a24903f2de" providerId="ADAL" clId="{6CF5D3DD-A8C4-4611-8099-4AEB2E976A2E}" dt="2026-05-31T10:48:11.354" v="280" actId="47"/>
-        <pc:sldMkLst>
-          <pc:docMk/>
-          <pc:sldMk cId="633878952" sldId="840"/>
-        </pc:sldMkLst>
-      </pc:sldChg>
-      <pc:sldChg chg="del">
-        <pc:chgData name="Al Friend" userId="e5ed79da-d858-46d4-9eed-a7a24903f2de" providerId="ADAL" clId="{6CF5D3DD-A8C4-4611-8099-4AEB2E976A2E}" dt="2026-05-31T10:48:11.354" v="280" actId="47"/>
-        <pc:sldMkLst>
-          <pc:docMk/>
-          <pc:sldMk cId="777259054" sldId="841"/>
-        </pc:sldMkLst>
-      </pc:sldChg>
-      <pc:sldChg chg="del">
-        <pc:chgData name="Al Friend" userId="e5ed79da-d858-46d4-9eed-a7a24903f2de" providerId="ADAL" clId="{6CF5D3DD-A8C4-4611-8099-4AEB2E976A2E}" dt="2026-05-31T10:48:11.354" v="280" actId="47"/>
-        <pc:sldMkLst>
-          <pc:docMk/>
-          <pc:sldMk cId="3487229272" sldId="842"/>
-        </pc:sldMkLst>
-      </pc:sldChg>
-      <pc:sldChg chg="del">
-        <pc:chgData name="Al Friend" userId="e5ed79da-d858-46d4-9eed-a7a24903f2de" providerId="ADAL" clId="{6CF5D3DD-A8C4-4611-8099-4AEB2E976A2E}" dt="2026-05-31T10:48:19.192" v="281" actId="47"/>
-        <pc:sldMkLst>
-          <pc:docMk/>
-          <pc:sldMk cId="752824477" sldId="843"/>
-        </pc:sldMkLst>
-      </pc:sldChg>
-      <pc:sldChg chg="del">
-        <pc:chgData name="Al Friend" userId="e5ed79da-d858-46d4-9eed-a7a24903f2de" providerId="ADAL" clId="{6CF5D3DD-A8C4-4611-8099-4AEB2E976A2E}" dt="2026-05-31T10:48:19.192" v="281" actId="47"/>
-        <pc:sldMkLst>
-          <pc:docMk/>
-          <pc:sldMk cId="1509309316" sldId="844"/>
-        </pc:sldMkLst>
-      </pc:sldChg>
-      <pc:sldChg chg="del">
-        <pc:chgData name="Al Friend" userId="e5ed79da-d858-46d4-9eed-a7a24903f2de" providerId="ADAL" clId="{6CF5D3DD-A8C4-4611-8099-4AEB2E976A2E}" dt="2026-05-31T10:48:19.192" v="281" actId="47"/>
-        <pc:sldMkLst>
-          <pc:docMk/>
-          <pc:sldMk cId="3815900931" sldId="846"/>
-        </pc:sldMkLst>
-      </pc:sldChg>
-      <pc:sldChg chg="del">
-        <pc:chgData name="Al Friend" userId="e5ed79da-d858-46d4-9eed-a7a24903f2de" providerId="ADAL" clId="{6CF5D3DD-A8C4-4611-8099-4AEB2E976A2E}" dt="2026-05-31T10:48:19.192" v="281" actId="47"/>
-        <pc:sldMkLst>
-          <pc:docMk/>
-          <pc:sldMk cId="4051375629" sldId="847"/>
-        </pc:sldMkLst>
-      </pc:sldChg>
-      <pc:sldChg chg="del">
-        <pc:chgData name="Al Friend" userId="e5ed79da-d858-46d4-9eed-a7a24903f2de" providerId="ADAL" clId="{6CF5D3DD-A8C4-4611-8099-4AEB2E976A2E}" dt="2026-05-31T10:48:19.192" v="281" actId="47"/>
-        <pc:sldMkLst>
-          <pc:docMk/>
-          <pc:sldMk cId="1895888790" sldId="848"/>
-        </pc:sldMkLst>
-      </pc:sldChg>
-      <pc:sldChg chg="del">
-        <pc:chgData name="Al Friend" userId="e5ed79da-d858-46d4-9eed-a7a24903f2de" providerId="ADAL" clId="{6CF5D3DD-A8C4-4611-8099-4AEB2E976A2E}" dt="2026-05-31T10:48:19.192" v="281" actId="47"/>
-        <pc:sldMkLst>
-          <pc:docMk/>
-          <pc:sldMk cId="3911983536" sldId="849"/>
-        </pc:sldMkLst>
-      </pc:sldChg>
-      <pc:sldChg chg="del">
-        <pc:chgData name="Al Friend" userId="e5ed79da-d858-46d4-9eed-a7a24903f2de" providerId="ADAL" clId="{6CF5D3DD-A8C4-4611-8099-4AEB2E976A2E}" dt="2026-05-31T10:48:19.192" v="281" actId="47"/>
-        <pc:sldMkLst>
-          <pc:docMk/>
-          <pc:sldMk cId="2717122040" sldId="850"/>
-        </pc:sldMkLst>
-      </pc:sldChg>
-      <pc:sldChg chg="del">
-        <pc:chgData name="Al Friend" userId="e5ed79da-d858-46d4-9eed-a7a24903f2de" providerId="ADAL" clId="{6CF5D3DD-A8C4-4611-8099-4AEB2E976A2E}" dt="2026-05-31T10:48:19.192" v="281" actId="47"/>
-        <pc:sldMkLst>
-          <pc:docMk/>
-          <pc:sldMk cId="1908832260" sldId="853"/>
-        </pc:sldMkLst>
-      </pc:sldChg>
-      <pc:sldChg chg="del">
-        <pc:chgData name="Al Friend" userId="e5ed79da-d858-46d4-9eed-a7a24903f2de" providerId="ADAL" clId="{6CF5D3DD-A8C4-4611-8099-4AEB2E976A2E}" dt="2026-05-31T10:47:29.889" v="275" actId="47"/>
-        <pc:sldMkLst>
-          <pc:docMk/>
-          <pc:sldMk cId="2193289320" sldId="854"/>
-        </pc:sldMkLst>
-      </pc:sldChg>
-      <pc:sldChg chg="del">
-        <pc:chgData name="Al Friend" userId="e5ed79da-d858-46d4-9eed-a7a24903f2de" providerId="ADAL" clId="{6CF5D3DD-A8C4-4611-8099-4AEB2E976A2E}" dt="2026-05-31T10:47:29.889" v="275" actId="47"/>
-        <pc:sldMkLst>
-          <pc:docMk/>
-          <pc:sldMk cId="2449130433" sldId="855"/>
-        </pc:sldMkLst>
-      </pc:sldChg>
-      <pc:sldChg chg="del">
-        <pc:chgData name="Al Friend" userId="e5ed79da-d858-46d4-9eed-a7a24903f2de" providerId="ADAL" clId="{6CF5D3DD-A8C4-4611-8099-4AEB2E976A2E}" dt="2026-05-31T10:47:29.889" v="275" actId="47"/>
-        <pc:sldMkLst>
-          <pc:docMk/>
-          <pc:sldMk cId="2505112213" sldId="856"/>
-        </pc:sldMkLst>
-      </pc:sldChg>
-      <pc:sldChg chg="del">
-        <pc:chgData name="Al Friend" userId="e5ed79da-d858-46d4-9eed-a7a24903f2de" providerId="ADAL" clId="{6CF5D3DD-A8C4-4611-8099-4AEB2E976A2E}" dt="2026-05-31T10:47:29.889" v="275" actId="47"/>
-        <pc:sldMkLst>
-          <pc:docMk/>
-          <pc:sldMk cId="1884845285" sldId="857"/>
-        </pc:sldMkLst>
-      </pc:sldChg>
-      <pc:sldChg chg="del">
-        <pc:chgData name="Al Friend" userId="e5ed79da-d858-46d4-9eed-a7a24903f2de" providerId="ADAL" clId="{6CF5D3DD-A8C4-4611-8099-4AEB2E976A2E}" dt="2026-05-31T10:47:29.889" v="275" actId="47"/>
-        <pc:sldMkLst>
-          <pc:docMk/>
-          <pc:sldMk cId="3644562082" sldId="858"/>
-        </pc:sldMkLst>
-      </pc:sldChg>
-      <pc:sldChg chg="del">
-        <pc:chgData name="Al Friend" userId="e5ed79da-d858-46d4-9eed-a7a24903f2de" providerId="ADAL" clId="{6CF5D3DD-A8C4-4611-8099-4AEB2E976A2E}" dt="2026-05-31T10:47:29.889" v="275" actId="47"/>
-        <pc:sldMkLst>
-          <pc:docMk/>
-          <pc:sldMk cId="3263392521" sldId="859"/>
-        </pc:sldMkLst>
-      </pc:sldChg>
-      <pc:sldChg chg="del">
-        <pc:chgData name="Al Friend" userId="e5ed79da-d858-46d4-9eed-a7a24903f2de" providerId="ADAL" clId="{6CF5D3DD-A8C4-4611-8099-4AEB2E976A2E}" dt="2026-05-31T10:47:29.889" v="275" actId="47"/>
-        <pc:sldMkLst>
-          <pc:docMk/>
-          <pc:sldMk cId="2996963827" sldId="860"/>
-        </pc:sldMkLst>
-      </pc:sldChg>
-      <pc:sldChg chg="del">
-        <pc:chgData name="Al Friend" userId="e5ed79da-d858-46d4-9eed-a7a24903f2de" providerId="ADAL" clId="{6CF5D3DD-A8C4-4611-8099-4AEB2E976A2E}" dt="2026-05-31T10:48:19.192" v="281" actId="47"/>
-        <pc:sldMkLst>
-          <pc:docMk/>
-          <pc:sldMk cId="2763073266" sldId="861"/>
-        </pc:sldMkLst>
-      </pc:sldChg>
-      <pc:sldChg chg="del">
-        <pc:chgData name="Al Friend" userId="e5ed79da-d858-46d4-9eed-a7a24903f2de" providerId="ADAL" clId="{6CF5D3DD-A8C4-4611-8099-4AEB2E976A2E}" dt="2026-05-31T10:48:19.192" v="281" actId="47"/>
-        <pc:sldMkLst>
-          <pc:docMk/>
-          <pc:sldMk cId="597242855" sldId="862"/>
-        </pc:sldMkLst>
-      </pc:sldChg>
-      <pc:sldChg chg="del">
-        <pc:chgData name="Al Friend" userId="e5ed79da-d858-46d4-9eed-a7a24903f2de" providerId="ADAL" clId="{6CF5D3DD-A8C4-4611-8099-4AEB2E976A2E}" dt="2026-05-31T10:48:19.192" v="281" actId="47"/>
-        <pc:sldMkLst>
-          <pc:docMk/>
-          <pc:sldMk cId="571892223" sldId="864"/>
-        </pc:sldMkLst>
-      </pc:sldChg>
-      <pc:sldChg chg="del">
-        <pc:chgData name="Al Friend" userId="e5ed79da-d858-46d4-9eed-a7a24903f2de" providerId="ADAL" clId="{6CF5D3DD-A8C4-4611-8099-4AEB2E976A2E}" dt="2026-05-31T10:47:29.889" v="275" actId="47"/>
-        <pc:sldMkLst>
-          <pc:docMk/>
-          <pc:sldMk cId="3034192770" sldId="866"/>
-        </pc:sldMkLst>
-      </pc:sldChg>
-      <pc:sldChg chg="del">
-        <pc:chgData name="Al Friend" userId="e5ed79da-d858-46d4-9eed-a7a24903f2de" providerId="ADAL" clId="{6CF5D3DD-A8C4-4611-8099-4AEB2E976A2E}" dt="2026-05-31T10:47:29.889" v="275" actId="47"/>
-        <pc:sldMkLst>
-          <pc:docMk/>
-          <pc:sldMk cId="1080785692" sldId="867"/>
-        </pc:sldMkLst>
-      </pc:sldChg>
-      <pc:sldChg chg="del">
-        <pc:chgData name="Al Friend" userId="e5ed79da-d858-46d4-9eed-a7a24903f2de" providerId="ADAL" clId="{6CF5D3DD-A8C4-4611-8099-4AEB2E976A2E}" dt="2026-05-31T10:48:19.192" v="281" actId="47"/>
-        <pc:sldMkLst>
-          <pc:docMk/>
-          <pc:sldMk cId="2336362312" sldId="868"/>
-        </pc:sldMkLst>
-      </pc:sldChg>
-      <pc:sldChg chg="del">
-        <pc:chgData name="Al Friend" userId="e5ed79da-d858-46d4-9eed-a7a24903f2de" providerId="ADAL" clId="{6CF5D3DD-A8C4-4611-8099-4AEB2E976A2E}" dt="2026-05-31T10:48:19.192" v="281" actId="47"/>
-        <pc:sldMkLst>
-          <pc:docMk/>
-          <pc:sldMk cId="573298898" sldId="869"/>
-        </pc:sldMkLst>
-      </pc:sldChg>
-      <pc:sldChg chg="del">
-        <pc:chgData name="Al Friend" userId="e5ed79da-d858-46d4-9eed-a7a24903f2de" providerId="ADAL" clId="{6CF5D3DD-A8C4-4611-8099-4AEB2E976A2E}" dt="2026-05-31T10:48:19.192" v="281" actId="47"/>
-        <pc:sldMkLst>
-          <pc:docMk/>
-          <pc:sldMk cId="2487391323" sldId="870"/>
-        </pc:sldMkLst>
-      </pc:sldChg>
-      <pc:sldChg chg="del">
-        <pc:chgData name="Al Friend" userId="e5ed79da-d858-46d4-9eed-a7a24903f2de" providerId="ADAL" clId="{6CF5D3DD-A8C4-4611-8099-4AEB2E976A2E}" dt="2026-05-31T10:48:19.192" v="281" actId="47"/>
-        <pc:sldMkLst>
-          <pc:docMk/>
-          <pc:sldMk cId="1850097346" sldId="871"/>
-        </pc:sldMkLst>
-      </pc:sldChg>
-      <pc:sldChg chg="del">
-        <pc:chgData name="Al Friend" userId="e5ed79da-d858-46d4-9eed-a7a24903f2de" providerId="ADAL" clId="{6CF5D3DD-A8C4-4611-8099-4AEB2E976A2E}" dt="2026-05-31T10:48:19.192" v="281" actId="47"/>
-        <pc:sldMkLst>
-          <pc:docMk/>
-          <pc:sldMk cId="2194133644" sldId="872"/>
-        </pc:sldMkLst>
-      </pc:sldChg>
-      <pc:sldChg chg="del">
-        <pc:chgData name="Al Friend" userId="e5ed79da-d858-46d4-9eed-a7a24903f2de" providerId="ADAL" clId="{6CF5D3DD-A8C4-4611-8099-4AEB2E976A2E}" dt="2026-05-31T10:48:19.192" v="281" actId="47"/>
-        <pc:sldMkLst>
-          <pc:docMk/>
-          <pc:sldMk cId="127425882" sldId="873"/>
-        </pc:sldMkLst>
-      </pc:sldChg>
-      <pc:sldChg chg="del">
-        <pc:chgData name="Al Friend" userId="e5ed79da-d858-46d4-9eed-a7a24903f2de" providerId="ADAL" clId="{6CF5D3DD-A8C4-4611-8099-4AEB2E976A2E}" dt="2026-05-31T10:47:29.889" v="275" actId="47"/>
-        <pc:sldMkLst>
-          <pc:docMk/>
-          <pc:sldMk cId="75966217" sldId="874"/>
         </pc:sldMkLst>
       </pc:sldChg>
       <pc:sldChg chg="modSp mod">
@@ -1565,7 +245,7 @@
         </pc:cxnChg>
       </pc:sldChg>
       <pc:sldChg chg="addSp modSp mod">
-        <pc:chgData name="Al Friend" userId="e5ed79da-d858-46d4-9eed-a7a24903f2de" providerId="ADAL" clId="{6CF5D3DD-A8C4-4611-8099-4AEB2E976A2E}" dt="2026-05-31T17:24:44.112" v="1043" actId="1582"/>
+        <pc:chgData name="Al Friend" userId="e5ed79da-d858-46d4-9eed-a7a24903f2de" providerId="ADAL" clId="{6CF5D3DD-A8C4-4611-8099-4AEB2E976A2E}" dt="2026-06-02T18:35:19.448" v="1045" actId="1076"/>
         <pc:sldMkLst>
           <pc:docMk/>
           <pc:sldMk cId="3895107268" sldId="883"/>
@@ -1611,7 +291,7 @@
           </ac:spMkLst>
         </pc:spChg>
         <pc:spChg chg="mod">
-          <ac:chgData name="Al Friend" userId="e5ed79da-d858-46d4-9eed-a7a24903f2de" providerId="ADAL" clId="{6CF5D3DD-A8C4-4611-8099-4AEB2E976A2E}" dt="2026-05-31T17:10:55.840" v="986" actId="20577"/>
+          <ac:chgData name="Al Friend" userId="e5ed79da-d858-46d4-9eed-a7a24903f2de" providerId="ADAL" clId="{6CF5D3DD-A8C4-4611-8099-4AEB2E976A2E}" dt="2026-06-02T18:35:19.448" v="1045" actId="1076"/>
           <ac:spMkLst>
             <pc:docMk/>
             <pc:sldMk cId="3895107268" sldId="883"/>
@@ -1651,7 +331,7 @@
           </ac:cxnSpMkLst>
         </pc:cxnChg>
         <pc:cxnChg chg="mod">
-          <ac:chgData name="Al Friend" userId="e5ed79da-d858-46d4-9eed-a7a24903f2de" providerId="ADAL" clId="{6CF5D3DD-A8C4-4611-8099-4AEB2E976A2E}" dt="2026-05-31T17:08:08.074" v="973" actId="692"/>
+          <ac:chgData name="Al Friend" userId="e5ed79da-d858-46d4-9eed-a7a24903f2de" providerId="ADAL" clId="{6CF5D3DD-A8C4-4611-8099-4AEB2E976A2E}" dt="2026-06-02T18:35:14.410" v="1044" actId="14100"/>
           <ac:cxnSpMkLst>
             <pc:docMk/>
             <pc:sldMk cId="3895107268" sldId="883"/>
@@ -1660,13 +340,13 @@
         </pc:cxnChg>
       </pc:sldChg>
       <pc:sldChg chg="modSp mod">
-        <pc:chgData name="Al Friend" userId="e5ed79da-d858-46d4-9eed-a7a24903f2de" providerId="ADAL" clId="{6CF5D3DD-A8C4-4611-8099-4AEB2E976A2E}" dt="2026-05-31T11:37:54.062" v="888" actId="20577"/>
+        <pc:chgData name="Al Friend" userId="e5ed79da-d858-46d4-9eed-a7a24903f2de" providerId="ADAL" clId="{6CF5D3DD-A8C4-4611-8099-4AEB2E976A2E}" dt="2026-06-02T18:36:38.164" v="1046" actId="20577"/>
         <pc:sldMkLst>
           <pc:docMk/>
           <pc:sldMk cId="1982100101" sldId="884"/>
         </pc:sldMkLst>
         <pc:spChg chg="mod">
-          <ac:chgData name="Al Friend" userId="e5ed79da-d858-46d4-9eed-a7a24903f2de" providerId="ADAL" clId="{6CF5D3DD-A8C4-4611-8099-4AEB2E976A2E}" dt="2026-05-31T11:37:54.062" v="888" actId="20577"/>
+          <ac:chgData name="Al Friend" userId="e5ed79da-d858-46d4-9eed-a7a24903f2de" providerId="ADAL" clId="{6CF5D3DD-A8C4-4611-8099-4AEB2E976A2E}" dt="2026-06-02T18:36:38.164" v="1046" actId="20577"/>
           <ac:spMkLst>
             <pc:docMk/>
             <pc:sldMk cId="1982100101" sldId="884"/>
@@ -1750,14 +430,6 @@
             <ac:spMk id="2" creationId="{F6E5DDAC-B7CC-945D-B74A-87246E8E6368}"/>
           </ac:spMkLst>
         </pc:spChg>
-        <pc:spChg chg="del">
-          <ac:chgData name="Al Friend" userId="e5ed79da-d858-46d4-9eed-a7a24903f2de" providerId="ADAL" clId="{6CF5D3DD-A8C4-4611-8099-4AEB2E976A2E}" dt="2026-05-31T11:19:30.987" v="606" actId="478"/>
-          <ac:spMkLst>
-            <pc:docMk/>
-            <pc:sldMk cId="2689299202" sldId="887"/>
-            <ac:spMk id="3" creationId="{7B1BB58B-22F3-0540-E1DC-AFF2DB425516}"/>
-          </ac:spMkLst>
-        </pc:spChg>
         <pc:spChg chg="add mod">
           <ac:chgData name="Al Friend" userId="e5ed79da-d858-46d4-9eed-a7a24903f2de" providerId="ADAL" clId="{6CF5D3DD-A8C4-4611-8099-4AEB2E976A2E}" dt="2026-05-31T11:26:18.928" v="675" actId="12789"/>
           <ac:spMkLst>
@@ -1838,36 +510,12 @@
             <ac:spMk id="29" creationId="{41629774-E830-5865-08C7-3250472DAA8C}"/>
           </ac:spMkLst>
         </pc:spChg>
-        <pc:spChg chg="add mod">
-          <ac:chgData name="Al Friend" userId="e5ed79da-d858-46d4-9eed-a7a24903f2de" providerId="ADAL" clId="{6CF5D3DD-A8C4-4611-8099-4AEB2E976A2E}" dt="2026-05-31T11:33:53.790" v="841"/>
-          <ac:spMkLst>
-            <pc:docMk/>
-            <pc:sldMk cId="2689299202" sldId="887"/>
-            <ac:spMk id="41" creationId="{652B5BC2-4231-3325-C8DD-F695FF8D79C4}"/>
-          </ac:spMkLst>
-        </pc:spChg>
         <pc:picChg chg="add mod">
           <ac:chgData name="Al Friend" userId="e5ed79da-d858-46d4-9eed-a7a24903f2de" providerId="ADAL" clId="{6CF5D3DD-A8C4-4611-8099-4AEB2E976A2E}" dt="2026-05-31T11:24:57.711" v="653" actId="1076"/>
           <ac:picMkLst>
             <pc:docMk/>
             <pc:sldMk cId="2689299202" sldId="887"/>
             <ac:picMk id="5" creationId="{19D019E1-9343-7DD7-F11F-1ADFAEBF51C6}"/>
-          </ac:picMkLst>
-        </pc:picChg>
-        <pc:picChg chg="add del mod">
-          <ac:chgData name="Al Friend" userId="e5ed79da-d858-46d4-9eed-a7a24903f2de" providerId="ADAL" clId="{6CF5D3DD-A8C4-4611-8099-4AEB2E976A2E}" dt="2026-05-31T11:21:51.882" v="621" actId="478"/>
-          <ac:picMkLst>
-            <pc:docMk/>
-            <pc:sldMk cId="2689299202" sldId="887"/>
-            <ac:picMk id="7" creationId="{15FCA113-EC46-EE0A-DC9C-AFBD2F0442DB}"/>
-          </ac:picMkLst>
-        </pc:picChg>
-        <pc:picChg chg="add del mod">
-          <ac:chgData name="Al Friend" userId="e5ed79da-d858-46d4-9eed-a7a24903f2de" providerId="ADAL" clId="{6CF5D3DD-A8C4-4611-8099-4AEB2E976A2E}" dt="2026-05-31T11:21:48.063" v="620" actId="478"/>
-          <ac:picMkLst>
-            <pc:docMk/>
-            <pc:sldMk cId="2689299202" sldId="887"/>
-            <ac:picMk id="8" creationId="{1A78220A-BE0A-A5EB-6FD9-04296FFE0606}"/>
           </ac:picMkLst>
         </pc:picChg>
         <pc:picChg chg="add mod">
@@ -1942,22 +590,6 @@
             <ac:cxnSpMk id="31" creationId="{1FEB3678-3EC2-9435-6703-DBA4673C5740}"/>
           </ac:cxnSpMkLst>
         </pc:cxnChg>
-        <pc:cxnChg chg="add mod">
-          <ac:chgData name="Al Friend" userId="e5ed79da-d858-46d4-9eed-a7a24903f2de" providerId="ADAL" clId="{6CF5D3DD-A8C4-4611-8099-4AEB2E976A2E}" dt="2026-05-31T11:33:53.790" v="841"/>
-          <ac:cxnSpMkLst>
-            <pc:docMk/>
-            <pc:sldMk cId="2689299202" sldId="887"/>
-            <ac:cxnSpMk id="42" creationId="{79BE0326-15FA-19D1-EBFE-A8A65804F4B8}"/>
-          </ac:cxnSpMkLst>
-        </pc:cxnChg>
-        <pc:cxnChg chg="add mod">
-          <ac:chgData name="Al Friend" userId="e5ed79da-d858-46d4-9eed-a7a24903f2de" providerId="ADAL" clId="{6CF5D3DD-A8C4-4611-8099-4AEB2E976A2E}" dt="2026-05-31T11:33:53.790" v="841"/>
-          <ac:cxnSpMkLst>
-            <pc:docMk/>
-            <pc:sldMk cId="2689299202" sldId="887"/>
-            <ac:cxnSpMk id="43" creationId="{3BDE0070-2C1D-2166-A2D8-053E0F7E454C}"/>
-          </ac:cxnSpMkLst>
-        </pc:cxnChg>
       </pc:sldChg>
       <pc:sldChg chg="modSp new mod">
         <pc:chgData name="Al Friend" userId="e5ed79da-d858-46d4-9eed-a7a24903f2de" providerId="ADAL" clId="{6CF5D3DD-A8C4-4611-8099-4AEB2E976A2E}" dt="2026-05-31T17:03:32.725" v="971" actId="20577"/>
@@ -1987,7 +619,7 @@
   <pc:docChgLst>
     <pc:chgData name="Al Friend" userId="e5ed79da-d858-46d4-9eed-a7a24903f2de" providerId="ADAL" clId="{C674B5A1-E3B2-40E8-863B-82D707DB4736}"/>
     <pc:docChg chg="undo custSel addSld delSld modSld sldOrd modSection">
-      <pc:chgData name="Al Friend" userId="e5ed79da-d858-46d4-9eed-a7a24903f2de" providerId="ADAL" clId="{C674B5A1-E3B2-40E8-863B-82D707DB4736}" dt="2026-05-27T12:09:51.602" v="3444" actId="14100"/>
+      <pc:chgData name="Al Friend" userId="e5ed79da-d858-46d4-9eed-a7a24903f2de" providerId="ADAL" clId="{C674B5A1-E3B2-40E8-863B-82D707DB4736}" dt="2026-06-02T12:12:29.680" v="3599"/>
       <pc:docMkLst>
         <pc:docMk/>
       </pc:docMkLst>
@@ -2115,7 +747,7 @@
         </pc:spChg>
       </pc:sldChg>
       <pc:sldChg chg="addSp delSp modSp delAnim modAnim modNotesTx">
-        <pc:chgData name="Al Friend" userId="e5ed79da-d858-46d4-9eed-a7a24903f2de" providerId="ADAL" clId="{C674B5A1-E3B2-40E8-863B-82D707DB4736}" dt="2026-05-20T13:52:54.563" v="1857" actId="14100"/>
+        <pc:chgData name="Al Friend" userId="e5ed79da-d858-46d4-9eed-a7a24903f2de" providerId="ADAL" clId="{C674B5A1-E3B2-40E8-863B-82D707DB4736}" dt="2026-06-02T12:10:00.835" v="3569"/>
         <pc:sldMkLst>
           <pc:docMk/>
           <pc:sldMk cId="3792360079" sldId="634"/>
@@ -2289,7 +921,7 @@
         </pc:cxnChg>
       </pc:sldChg>
       <pc:sldChg chg="addSp delSp modSp add addAnim delAnim modAnim modNotesTx">
-        <pc:chgData name="Al Friend" userId="e5ed79da-d858-46d4-9eed-a7a24903f2de" providerId="ADAL" clId="{C674B5A1-E3B2-40E8-863B-82D707DB4736}" dt="2026-05-20T14:38:50.047" v="1920" actId="20577"/>
+        <pc:chgData name="Al Friend" userId="e5ed79da-d858-46d4-9eed-a7a24903f2de" providerId="ADAL" clId="{C674B5A1-E3B2-40E8-863B-82D707DB4736}" dt="2026-06-02T12:12:29.680" v="3599"/>
         <pc:sldMkLst>
           <pc:docMk/>
           <pc:sldMk cId="515075891" sldId="876"/>
@@ -2424,7 +1056,7 @@
         </pc:cxnChg>
       </pc:sldChg>
       <pc:sldChg chg="addSp delSp modSp add delAnim">
-        <pc:chgData name="Al Friend" userId="e5ed79da-d858-46d4-9eed-a7a24903f2de" providerId="ADAL" clId="{C674B5A1-E3B2-40E8-863B-82D707DB4736}" dt="2026-05-12T14:38:16.888" v="1208" actId="6549"/>
+        <pc:chgData name="Al Friend" userId="e5ed79da-d858-46d4-9eed-a7a24903f2de" providerId="ADAL" clId="{C674B5A1-E3B2-40E8-863B-82D707DB4736}" dt="2026-06-02T08:32:42.552" v="3463" actId="478"/>
         <pc:sldMkLst>
           <pc:docMk/>
           <pc:sldMk cId="1159162935" sldId="877"/>
@@ -2435,6 +1067,22 @@
             <pc:docMk/>
             <pc:sldMk cId="1159162935" sldId="877"/>
             <ac:spMk id="2" creationId="{00000000-0000-0000-0000-000000000000}"/>
+          </ac:spMkLst>
+        </pc:spChg>
+        <pc:spChg chg="del">
+          <ac:chgData name="Al Friend" userId="e5ed79da-d858-46d4-9eed-a7a24903f2de" providerId="ADAL" clId="{C674B5A1-E3B2-40E8-863B-82D707DB4736}" dt="2026-06-02T08:32:39.701" v="3462" actId="478"/>
+          <ac:spMkLst>
+            <pc:docMk/>
+            <pc:sldMk cId="1159162935" sldId="877"/>
+            <ac:spMk id="15" creationId="{A254E6C5-E390-440D-A8AE-CB82709F6CB5}"/>
+          </ac:spMkLst>
+        </pc:spChg>
+        <pc:spChg chg="del">
+          <ac:chgData name="Al Friend" userId="e5ed79da-d858-46d4-9eed-a7a24903f2de" providerId="ADAL" clId="{C674B5A1-E3B2-40E8-863B-82D707DB4736}" dt="2026-06-02T08:32:42.552" v="3463" actId="478"/>
+          <ac:spMkLst>
+            <pc:docMk/>
+            <pc:sldMk cId="1159162935" sldId="877"/>
+            <ac:spMk id="17" creationId="{2F30E93A-CA2E-4A90-876C-B218CB0B7AAB}"/>
           </ac:spMkLst>
         </pc:spChg>
         <pc:spChg chg="add del mod">
@@ -2461,8 +1109,8 @@
           </ac:spMkLst>
         </pc:spChg>
       </pc:sldChg>
-      <pc:sldChg chg="modSp add ord">
-        <pc:chgData name="Al Friend" userId="e5ed79da-d858-46d4-9eed-a7a24903f2de" providerId="ADAL" clId="{C674B5A1-E3B2-40E8-863B-82D707DB4736}" dt="2026-05-12T14:40:27.711" v="1272" actId="1076"/>
+      <pc:sldChg chg="delSp modSp add ord">
+        <pc:chgData name="Al Friend" userId="e5ed79da-d858-46d4-9eed-a7a24903f2de" providerId="ADAL" clId="{C674B5A1-E3B2-40E8-863B-82D707DB4736}" dt="2026-06-02T08:32:55.109" v="3464" actId="478"/>
         <pc:sldMkLst>
           <pc:docMk/>
           <pc:sldMk cId="519218123" sldId="880"/>
@@ -2473,6 +1121,14 @@
             <pc:docMk/>
             <pc:sldMk cId="519218123" sldId="880"/>
             <ac:spMk id="2" creationId="{00000000-0000-0000-0000-000000000000}"/>
+          </ac:spMkLst>
+        </pc:spChg>
+        <pc:spChg chg="del">
+          <ac:chgData name="Al Friend" userId="e5ed79da-d858-46d4-9eed-a7a24903f2de" providerId="ADAL" clId="{C674B5A1-E3B2-40E8-863B-82D707DB4736}" dt="2026-06-02T08:32:55.109" v="3464" actId="478"/>
+          <ac:spMkLst>
+            <pc:docMk/>
+            <pc:sldMk cId="519218123" sldId="880"/>
+            <ac:spMk id="15" creationId="{A254E6C5-E390-440D-A8AE-CB82709F6CB5}"/>
           </ac:spMkLst>
         </pc:spChg>
         <pc:spChg chg="mod">
@@ -2611,7 +1267,7 @@
         </pc:spChg>
       </pc:sldChg>
       <pc:sldChg chg="addSp delSp modSp add delAnim modNotesTx">
-        <pc:chgData name="Al Friend" userId="e5ed79da-d858-46d4-9eed-a7a24903f2de" providerId="ADAL" clId="{C674B5A1-E3B2-40E8-863B-82D707DB4736}" dt="2026-05-20T14:55:37.375" v="2053" actId="20577"/>
+        <pc:chgData name="Al Friend" userId="e5ed79da-d858-46d4-9eed-a7a24903f2de" providerId="ADAL" clId="{C674B5A1-E3B2-40E8-863B-82D707DB4736}" dt="2026-06-02T08:37:58.918" v="3534" actId="20577"/>
         <pc:sldMkLst>
           <pc:docMk/>
           <pc:sldMk cId="3895107268" sldId="883"/>
@@ -2625,7 +1281,7 @@
           </ac:spMkLst>
         </pc:spChg>
         <pc:spChg chg="mod">
-          <ac:chgData name="Al Friend" userId="e5ed79da-d858-46d4-9eed-a7a24903f2de" providerId="ADAL" clId="{C674B5A1-E3B2-40E8-863B-82D707DB4736}" dt="2026-05-20T14:54:26.755" v="2036" actId="1076"/>
+          <ac:chgData name="Al Friend" userId="e5ed79da-d858-46d4-9eed-a7a24903f2de" providerId="ADAL" clId="{C674B5A1-E3B2-40E8-863B-82D707DB4736}" dt="2026-06-02T08:37:02.219" v="3500" actId="20577"/>
           <ac:spMkLst>
             <pc:docMk/>
             <pc:sldMk cId="3895107268" sldId="883"/>
@@ -2633,7 +1289,7 @@
           </ac:spMkLst>
         </pc:spChg>
         <pc:spChg chg="add mod">
-          <ac:chgData name="Al Friend" userId="e5ed79da-d858-46d4-9eed-a7a24903f2de" providerId="ADAL" clId="{C674B5A1-E3B2-40E8-863B-82D707DB4736}" dt="2026-05-20T14:55:37.375" v="2053" actId="20577"/>
+          <ac:chgData name="Al Friend" userId="e5ed79da-d858-46d4-9eed-a7a24903f2de" providerId="ADAL" clId="{C674B5A1-E3B2-40E8-863B-82D707DB4736}" dt="2026-06-02T08:36:57.164" v="3490" actId="20577"/>
           <ac:spMkLst>
             <pc:docMk/>
             <pc:sldMk cId="3895107268" sldId="883"/>
@@ -2649,7 +1305,7 @@
           </ac:spMkLst>
         </pc:spChg>
         <pc:spChg chg="add mod">
-          <ac:chgData name="Al Friend" userId="e5ed79da-d858-46d4-9eed-a7a24903f2de" providerId="ADAL" clId="{C674B5A1-E3B2-40E8-863B-82D707DB4736}" dt="2026-05-20T14:55:12.675" v="2045" actId="12788"/>
+          <ac:chgData name="Al Friend" userId="e5ed79da-d858-46d4-9eed-a7a24903f2de" providerId="ADAL" clId="{C674B5A1-E3B2-40E8-863B-82D707DB4736}" dt="2026-06-02T08:35:38.237" v="3477" actId="1076"/>
           <ac:spMkLst>
             <pc:docMk/>
             <pc:sldMk cId="3895107268" sldId="883"/>
@@ -2689,7 +1345,7 @@
           </ac:spMkLst>
         </pc:spChg>
         <pc:cxnChg chg="add mod">
-          <ac:chgData name="Al Friend" userId="e5ed79da-d858-46d4-9eed-a7a24903f2de" providerId="ADAL" clId="{C674B5A1-E3B2-40E8-863B-82D707DB4736}" dt="2026-05-20T14:54:34.125" v="2038" actId="14100"/>
+          <ac:chgData name="Al Friend" userId="e5ed79da-d858-46d4-9eed-a7a24903f2de" providerId="ADAL" clId="{C674B5A1-E3B2-40E8-863B-82D707DB4736}" dt="2026-06-02T08:36:13.157" v="3478" actId="692"/>
           <ac:cxnSpMkLst>
             <pc:docMk/>
             <pc:sldMk cId="3895107268" sldId="883"/>
@@ -2697,7 +1353,7 @@
           </ac:cxnSpMkLst>
         </pc:cxnChg>
         <pc:cxnChg chg="add mod">
-          <ac:chgData name="Al Friend" userId="e5ed79da-d858-46d4-9eed-a7a24903f2de" providerId="ADAL" clId="{C674B5A1-E3B2-40E8-863B-82D707DB4736}" dt="2026-05-20T14:54:30.401" v="2037" actId="14100"/>
+          <ac:chgData name="Al Friend" userId="e5ed79da-d858-46d4-9eed-a7a24903f2de" providerId="ADAL" clId="{C674B5A1-E3B2-40E8-863B-82D707DB4736}" dt="2026-06-02T08:35:31.850" v="3476" actId="14100"/>
           <ac:cxnSpMkLst>
             <pc:docMk/>
             <pc:sldMk cId="3895107268" sldId="883"/>
@@ -3014,6 +1670,139 @@
             <ac:cxnSpMk id="50" creationId="{5731073C-2961-45F8-BA70-83375DBBA138}"/>
           </ac:cxnSpMkLst>
         </pc:cxnChg>
+      </pc:sldChg>
+      <pc:sldChg chg="modSp modAnim">
+        <pc:chgData name="Al Friend" userId="e5ed79da-d858-46d4-9eed-a7a24903f2de" providerId="ADAL" clId="{C674B5A1-E3B2-40E8-863B-82D707DB4736}" dt="2026-06-02T08:33:57.345" v="3475"/>
+        <pc:sldMkLst>
+          <pc:docMk/>
+          <pc:sldMk cId="2047793123" sldId="888"/>
+        </pc:sldMkLst>
+        <pc:spChg chg="mod">
+          <ac:chgData name="Al Friend" userId="e5ed79da-d858-46d4-9eed-a7a24903f2de" providerId="ADAL" clId="{C674B5A1-E3B2-40E8-863B-82D707DB4736}" dt="2026-06-02T08:31:37.863" v="3455" actId="20577"/>
+          <ac:spMkLst>
+            <pc:docMk/>
+            <pc:sldMk cId="2047793123" sldId="888"/>
+            <ac:spMk id="2" creationId="{60A374ED-F922-1F42-30DA-6139E3EEFB4E}"/>
+          </ac:spMkLst>
+        </pc:spChg>
+        <pc:spChg chg="mod">
+          <ac:chgData name="Al Friend" userId="e5ed79da-d858-46d4-9eed-a7a24903f2de" providerId="ADAL" clId="{C674B5A1-E3B2-40E8-863B-82D707DB4736}" dt="2026-06-02T08:33:27.760" v="3465" actId="948"/>
+          <ac:spMkLst>
+            <pc:docMk/>
+            <pc:sldMk cId="2047793123" sldId="888"/>
+            <ac:spMk id="3" creationId="{246B11CC-3339-C315-0BE8-FA4C1D5275B4}"/>
+          </ac:spMkLst>
+        </pc:spChg>
+      </pc:sldChg>
+      <pc:sldChg chg="delSp add modTransition delAnim">
+        <pc:chgData name="Al Friend" userId="e5ed79da-d858-46d4-9eed-a7a24903f2de" providerId="ADAL" clId="{C674B5A1-E3B2-40E8-863B-82D707DB4736}" dt="2026-06-02T12:07:28.274" v="3540" actId="478"/>
+        <pc:sldMkLst>
+          <pc:docMk/>
+          <pc:sldMk cId="2643578820" sldId="889"/>
+        </pc:sldMkLst>
+        <pc:spChg chg="del">
+          <ac:chgData name="Al Friend" userId="e5ed79da-d858-46d4-9eed-a7a24903f2de" providerId="ADAL" clId="{C674B5A1-E3B2-40E8-863B-82D707DB4736}" dt="2026-06-02T12:07:28.274" v="3540" actId="478"/>
+          <ac:spMkLst>
+            <pc:docMk/>
+            <pc:sldMk cId="2643578820" sldId="889"/>
+            <ac:spMk id="10" creationId="{3B047DC7-344F-4A56-83D8-286EB77BF4E1}"/>
+          </ac:spMkLst>
+        </pc:spChg>
+        <pc:spChg chg="del">
+          <ac:chgData name="Al Friend" userId="e5ed79da-d858-46d4-9eed-a7a24903f2de" providerId="ADAL" clId="{C674B5A1-E3B2-40E8-863B-82D707DB4736}" dt="2026-06-02T12:07:25.848" v="3539" actId="478"/>
+          <ac:spMkLst>
+            <pc:docMk/>
+            <pc:sldMk cId="2643578820" sldId="889"/>
+            <ac:spMk id="33" creationId="{20BD216E-3A07-4ACF-B399-9EE44B4195D2}"/>
+          </ac:spMkLst>
+        </pc:spChg>
+        <pc:spChg chg="del">
+          <ac:chgData name="Al Friend" userId="e5ed79da-d858-46d4-9eed-a7a24903f2de" providerId="ADAL" clId="{C674B5A1-E3B2-40E8-863B-82D707DB4736}" dt="2026-06-02T12:07:23.214" v="3537" actId="478"/>
+          <ac:spMkLst>
+            <pc:docMk/>
+            <pc:sldMk cId="2643578820" sldId="889"/>
+            <ac:spMk id="35" creationId="{4945BC8F-E969-47AB-AA94-0700AEF4950A}"/>
+          </ac:spMkLst>
+        </pc:spChg>
+        <pc:spChg chg="del">
+          <ac:chgData name="Al Friend" userId="e5ed79da-d858-46d4-9eed-a7a24903f2de" providerId="ADAL" clId="{C674B5A1-E3B2-40E8-863B-82D707DB4736}" dt="2026-06-02T12:07:24.365" v="3538" actId="478"/>
+          <ac:spMkLst>
+            <pc:docMk/>
+            <pc:sldMk cId="2643578820" sldId="889"/>
+            <ac:spMk id="36" creationId="{A596FB08-E7CA-4052-9B88-984FB2912E57}"/>
+          </ac:spMkLst>
+        </pc:spChg>
+      </pc:sldChg>
+      <pc:sldChg chg="delSp add delAnim">
+        <pc:chgData name="Al Friend" userId="e5ed79da-d858-46d4-9eed-a7a24903f2de" providerId="ADAL" clId="{C674B5A1-E3B2-40E8-863B-82D707DB4736}" dt="2026-06-02T12:10:53.993" v="3574" actId="478"/>
+        <pc:sldMkLst>
+          <pc:docMk/>
+          <pc:sldMk cId="975855965" sldId="890"/>
+        </pc:sldMkLst>
+        <pc:spChg chg="del topLvl">
+          <ac:chgData name="Al Friend" userId="e5ed79da-d858-46d4-9eed-a7a24903f2de" providerId="ADAL" clId="{C674B5A1-E3B2-40E8-863B-82D707DB4736}" dt="2026-06-02T12:10:46.638" v="3571" actId="478"/>
+          <ac:spMkLst>
+            <pc:docMk/>
+            <pc:sldMk cId="975855965" sldId="890"/>
+            <ac:spMk id="10" creationId="{3B047DC7-344F-4A56-83D8-286EB77BF4E1}"/>
+          </ac:spMkLst>
+        </pc:spChg>
+        <pc:spChg chg="del topLvl">
+          <ac:chgData name="Al Friend" userId="e5ed79da-d858-46d4-9eed-a7a24903f2de" providerId="ADAL" clId="{C674B5A1-E3B2-40E8-863B-82D707DB4736}" dt="2026-06-02T12:10:53.993" v="3574" actId="478"/>
+          <ac:spMkLst>
+            <pc:docMk/>
+            <pc:sldMk cId="975855965" sldId="890"/>
+            <ac:spMk id="13" creationId="{0CAC0334-43B5-419F-AB51-243DA6DA4779}"/>
+          </ac:spMkLst>
+        </pc:spChg>
+        <pc:spChg chg="del">
+          <ac:chgData name="Al Friend" userId="e5ed79da-d858-46d4-9eed-a7a24903f2de" providerId="ADAL" clId="{C674B5A1-E3B2-40E8-863B-82D707DB4736}" dt="2026-06-02T12:10:48.363" v="3572" actId="478"/>
+          <ac:spMkLst>
+            <pc:docMk/>
+            <pc:sldMk cId="975855965" sldId="890"/>
+            <ac:spMk id="15" creationId="{A254E6C5-E390-440D-A8AE-CB82709F6CB5}"/>
+          </ac:spMkLst>
+        </pc:spChg>
+        <pc:spChg chg="del">
+          <ac:chgData name="Al Friend" userId="e5ed79da-d858-46d4-9eed-a7a24903f2de" providerId="ADAL" clId="{C674B5A1-E3B2-40E8-863B-82D707DB4736}" dt="2026-06-02T12:10:50.170" v="3573" actId="478"/>
+          <ac:spMkLst>
+            <pc:docMk/>
+            <pc:sldMk cId="975855965" sldId="890"/>
+            <ac:spMk id="17" creationId="{2F30E93A-CA2E-4A90-876C-B218CB0B7AAB}"/>
+          </ac:spMkLst>
+        </pc:spChg>
+        <pc:grpChg chg="del">
+          <ac:chgData name="Al Friend" userId="e5ed79da-d858-46d4-9eed-a7a24903f2de" providerId="ADAL" clId="{C674B5A1-E3B2-40E8-863B-82D707DB4736}" dt="2026-06-02T12:10:46.638" v="3571" actId="478"/>
+          <ac:grpSpMkLst>
+            <pc:docMk/>
+            <pc:sldMk cId="975855965" sldId="890"/>
+            <ac:grpSpMk id="6" creationId="{0BB39DF7-79D3-4D6E-AF0C-2E487668613E}"/>
+          </ac:grpSpMkLst>
+        </pc:grpChg>
+        <pc:grpChg chg="del">
+          <ac:chgData name="Al Friend" userId="e5ed79da-d858-46d4-9eed-a7a24903f2de" providerId="ADAL" clId="{C674B5A1-E3B2-40E8-863B-82D707DB4736}" dt="2026-06-02T12:10:53.993" v="3574" actId="478"/>
+          <ac:grpSpMkLst>
+            <pc:docMk/>
+            <pc:sldMk cId="975855965" sldId="890"/>
+            <ac:grpSpMk id="8" creationId="{B33DA13A-4070-4314-8B7C-AA37D17A2E41}"/>
+          </ac:grpSpMkLst>
+        </pc:grpChg>
+        <pc:picChg chg="topLvl">
+          <ac:chgData name="Al Friend" userId="e5ed79da-d858-46d4-9eed-a7a24903f2de" providerId="ADAL" clId="{C674B5A1-E3B2-40E8-863B-82D707DB4736}" dt="2026-06-02T12:10:46.638" v="3571" actId="478"/>
+          <ac:picMkLst>
+            <pc:docMk/>
+            <pc:sldMk cId="975855965" sldId="890"/>
+            <ac:picMk id="7" creationId="{B026E70D-B3FD-4141-85F9-75190461CDA3}"/>
+          </ac:picMkLst>
+        </pc:picChg>
+        <pc:picChg chg="topLvl">
+          <ac:chgData name="Al Friend" userId="e5ed79da-d858-46d4-9eed-a7a24903f2de" providerId="ADAL" clId="{C674B5A1-E3B2-40E8-863B-82D707DB4736}" dt="2026-06-02T12:10:53.993" v="3574" actId="478"/>
+          <ac:picMkLst>
+            <pc:docMk/>
+            <pc:sldMk cId="975855965" sldId="890"/>
+            <ac:picMk id="11" creationId="{32A0F86B-CA07-4894-B384-CE8C6EE159C1}"/>
+          </ac:picMkLst>
+        </pc:picChg>
       </pc:sldChg>
     </pc:docChg>
   </pc:docChgLst>
@@ -6199,7 +4988,7 @@
           <a:p>
             <a:fld id="{0E35528A-819C-4AD3-BDC3-2CDCE7BEAF53}" type="datetimeFigureOut">
               <a:rPr lang="en-GB" smtClean="0"/>
-              <a:t>31/05/2026</a:t>
+              <a:t>02/06/2026</a:t>
             </a:fld>
             <a:endParaRPr lang="en-GB"/>
           </a:p>
@@ -6595,16 +5384,6 @@
           <a:bodyPr/>
           <a:lstStyle/>
           <a:p>
-            <a:r>
-              <a:rPr lang="en-GB" dirty="0"/>
-              <a:t>Similar to ERD</a:t>
-            </a:r>
-          </a:p>
-          <a:p>
-            <a:r>
-              <a:rPr lang="en-GB"/>
-              <a:t>https://www.edx.org/learn/software-engineering/ku-leuven-uml-class-diagrams-for-software-engineering</a:t>
-            </a:r>
             <a:endParaRPr lang="en-GB" dirty="0"/>
           </a:p>
         </p:txBody>
@@ -6626,7 +5405,7 @@
           <a:p>
             <a:fld id="{B71FE5B5-A979-4370-A255-218EAB36A5F4}" type="slidenum">
               <a:rPr lang="en-GB" smtClean="0"/>
-              <a:t>16</a:t>
+              <a:t>14</a:t>
             </a:fld>
             <a:endParaRPr lang="en-GB"/>
           </a:p>
@@ -6635,7 +5414,7 @@
     </p:spTree>
     <p:extLst>
       <p:ext uri="{BB962C8B-B14F-4D97-AF65-F5344CB8AC3E}">
-        <p14:creationId xmlns:p14="http://schemas.microsoft.com/office/powerpoint/2010/main" val="606558984"/>
+        <p14:creationId xmlns:p14="http://schemas.microsoft.com/office/powerpoint/2010/main" val="1526805618"/>
       </p:ext>
     </p:extLst>
   </p:cSld>
@@ -6690,9 +5469,10 @@
           <a:lstStyle/>
           <a:p>
             <a:r>
-              <a:rPr lang="en-GB" dirty="0"/>
-              <a:t>https://www.youtube.com/watch?v=6XrL5jXmTwM</a:t>
-            </a:r>
+              <a:rPr lang="en-GB"/>
+              <a:t>https://www.omg.org/spec/UML/2.5.1/PDF#page=236</a:t>
+            </a:r>
+            <a:endParaRPr lang="en-GB" dirty="0"/>
           </a:p>
         </p:txBody>
       </p:sp>
@@ -6703,7 +5483,7 @@
             <a:spLocks noGrp="1"/>
           </p:cNvSpPr>
           <p:nvPr>
-            <p:ph type="sldNum" sz="quarter" idx="5"/>
+            <p:ph type="sldNum" sz="quarter" idx="10"/>
           </p:nvPr>
         </p:nvSpPr>
         <p:spPr/>
@@ -6713,7 +5493,7 @@
           <a:p>
             <a:fld id="{B71FE5B5-A979-4370-A255-218EAB36A5F4}" type="slidenum">
               <a:rPr lang="en-GB" smtClean="0"/>
-              <a:t>17</a:t>
+              <a:t>16</a:t>
             </a:fld>
             <a:endParaRPr lang="en-GB"/>
           </a:p>
@@ -6722,7 +5502,7 @@
     </p:spTree>
     <p:extLst>
       <p:ext uri="{BB962C8B-B14F-4D97-AF65-F5344CB8AC3E}">
-        <p14:creationId xmlns:p14="http://schemas.microsoft.com/office/powerpoint/2010/main" val="286042277"/>
+        <p14:creationId xmlns:p14="http://schemas.microsoft.com/office/powerpoint/2010/main" val="2881217941"/>
       </p:ext>
     </p:extLst>
   </p:cSld>
@@ -6776,6 +5556,16 @@
           <a:bodyPr/>
           <a:lstStyle/>
           <a:p>
+            <a:r>
+              <a:rPr lang="en-GB" dirty="0"/>
+              <a:t>Similar to ERD</a:t>
+            </a:r>
+          </a:p>
+          <a:p>
+            <a:r>
+              <a:rPr lang="en-GB"/>
+              <a:t>https://www.edx.org/learn/software-engineering/ku-leuven-uml-class-diagrams-for-software-engineering</a:t>
+            </a:r>
             <a:endParaRPr lang="en-GB" dirty="0"/>
           </a:p>
         </p:txBody>
@@ -6806,7 +5596,7 @@
     </p:spTree>
     <p:extLst>
       <p:ext uri="{BB962C8B-B14F-4D97-AF65-F5344CB8AC3E}">
-        <p14:creationId xmlns:p14="http://schemas.microsoft.com/office/powerpoint/2010/main" val="1333487309"/>
+        <p14:creationId xmlns:p14="http://schemas.microsoft.com/office/powerpoint/2010/main" val="606558984"/>
       </p:ext>
     </p:extLst>
   </p:cSld>
@@ -6860,7 +5650,10 @@
           <a:bodyPr/>
           <a:lstStyle/>
           <a:p>
-            <a:endParaRPr lang="en-GB" dirty="0"/>
+            <a:r>
+              <a:rPr lang="en-GB" dirty="0"/>
+              <a:t>https://www.youtube.com/watch?v=6XrL5jXmTwM</a:t>
+            </a:r>
           </a:p>
         </p:txBody>
       </p:sp>
@@ -6890,7 +5683,7 @@
     </p:spTree>
     <p:extLst>
       <p:ext uri="{BB962C8B-B14F-4D97-AF65-F5344CB8AC3E}">
-        <p14:creationId xmlns:p14="http://schemas.microsoft.com/office/powerpoint/2010/main" val="1106523398"/>
+        <p14:creationId xmlns:p14="http://schemas.microsoft.com/office/powerpoint/2010/main" val="286042277"/>
       </p:ext>
     </p:extLst>
   </p:cSld>
@@ -6944,6 +5737,174 @@
           <a:bodyPr/>
           <a:lstStyle/>
           <a:p>
+            <a:endParaRPr lang="en-GB" dirty="0"/>
+          </a:p>
+        </p:txBody>
+      </p:sp>
+      <p:sp>
+        <p:nvSpPr>
+          <p:cNvPr id="4" name="Slide Number Placeholder 3"/>
+          <p:cNvSpPr>
+            <a:spLocks noGrp="1"/>
+          </p:cNvSpPr>
+          <p:nvPr>
+            <p:ph type="sldNum" sz="quarter" idx="5"/>
+          </p:nvPr>
+        </p:nvSpPr>
+        <p:spPr/>
+        <p:txBody>
+          <a:bodyPr/>
+          <a:lstStyle/>
+          <a:p>
+            <a:fld id="{B71FE5B5-A979-4370-A255-218EAB36A5F4}" type="slidenum">
+              <a:rPr lang="en-GB" smtClean="0"/>
+              <a:t>20</a:t>
+            </a:fld>
+            <a:endParaRPr lang="en-GB"/>
+          </a:p>
+        </p:txBody>
+      </p:sp>
+    </p:spTree>
+    <p:extLst>
+      <p:ext uri="{BB962C8B-B14F-4D97-AF65-F5344CB8AC3E}">
+        <p14:creationId xmlns:p14="http://schemas.microsoft.com/office/powerpoint/2010/main" val="1333487309"/>
+      </p:ext>
+    </p:extLst>
+  </p:cSld>
+  <p:clrMapOvr>
+    <a:masterClrMapping/>
+  </p:clrMapOvr>
+</p:notes>
+</file>
+
+<file path=ppt/notesSlides/notesSlide15.xml><?xml version="1.0" encoding="utf-8"?>
+<p:notes xmlns:a="http://schemas.openxmlformats.org/drawingml/2006/main" xmlns:r="http://schemas.openxmlformats.org/officeDocument/2006/relationships" xmlns:p="http://schemas.openxmlformats.org/presentationml/2006/main">
+  <p:cSld>
+    <p:spTree>
+      <p:nvGrpSpPr>
+        <p:cNvPr id="1" name=""/>
+        <p:cNvGrpSpPr/>
+        <p:nvPr/>
+      </p:nvGrpSpPr>
+      <p:grpSpPr>
+        <a:xfrm>
+          <a:off x="0" y="0"/>
+          <a:ext cx="0" cy="0"/>
+          <a:chOff x="0" y="0"/>
+          <a:chExt cx="0" cy="0"/>
+        </a:xfrm>
+      </p:grpSpPr>
+      <p:sp>
+        <p:nvSpPr>
+          <p:cNvPr id="2" name="Slide Image Placeholder 1"/>
+          <p:cNvSpPr>
+            <a:spLocks noGrp="1" noRot="1" noChangeAspect="1"/>
+          </p:cNvSpPr>
+          <p:nvPr>
+            <p:ph type="sldImg"/>
+          </p:nvPr>
+        </p:nvSpPr>
+        <p:spPr/>
+      </p:sp>
+      <p:sp>
+        <p:nvSpPr>
+          <p:cNvPr id="3" name="Notes Placeholder 2"/>
+          <p:cNvSpPr>
+            <a:spLocks noGrp="1"/>
+          </p:cNvSpPr>
+          <p:nvPr>
+            <p:ph type="body" idx="1"/>
+          </p:nvPr>
+        </p:nvSpPr>
+        <p:spPr/>
+        <p:txBody>
+          <a:bodyPr/>
+          <a:lstStyle/>
+          <a:p>
+            <a:endParaRPr lang="en-GB" dirty="0"/>
+          </a:p>
+        </p:txBody>
+      </p:sp>
+      <p:sp>
+        <p:nvSpPr>
+          <p:cNvPr id="4" name="Slide Number Placeholder 3"/>
+          <p:cNvSpPr>
+            <a:spLocks noGrp="1"/>
+          </p:cNvSpPr>
+          <p:nvPr>
+            <p:ph type="sldNum" sz="quarter" idx="5"/>
+          </p:nvPr>
+        </p:nvSpPr>
+        <p:spPr/>
+        <p:txBody>
+          <a:bodyPr/>
+          <a:lstStyle/>
+          <a:p>
+            <a:fld id="{B71FE5B5-A979-4370-A255-218EAB36A5F4}" type="slidenum">
+              <a:rPr lang="en-GB" smtClean="0"/>
+              <a:t>21</a:t>
+            </a:fld>
+            <a:endParaRPr lang="en-GB"/>
+          </a:p>
+        </p:txBody>
+      </p:sp>
+    </p:spTree>
+    <p:extLst>
+      <p:ext uri="{BB962C8B-B14F-4D97-AF65-F5344CB8AC3E}">
+        <p14:creationId xmlns:p14="http://schemas.microsoft.com/office/powerpoint/2010/main" val="1106523398"/>
+      </p:ext>
+    </p:extLst>
+  </p:cSld>
+  <p:clrMapOvr>
+    <a:masterClrMapping/>
+  </p:clrMapOvr>
+</p:notes>
+</file>
+
+<file path=ppt/notesSlides/notesSlide16.xml><?xml version="1.0" encoding="utf-8"?>
+<p:notes xmlns:a="http://schemas.openxmlformats.org/drawingml/2006/main" xmlns:r="http://schemas.openxmlformats.org/officeDocument/2006/relationships" xmlns:p="http://schemas.openxmlformats.org/presentationml/2006/main">
+  <p:cSld>
+    <p:spTree>
+      <p:nvGrpSpPr>
+        <p:cNvPr id="1" name=""/>
+        <p:cNvGrpSpPr/>
+        <p:nvPr/>
+      </p:nvGrpSpPr>
+      <p:grpSpPr>
+        <a:xfrm>
+          <a:off x="0" y="0"/>
+          <a:ext cx="0" cy="0"/>
+          <a:chOff x="0" y="0"/>
+          <a:chExt cx="0" cy="0"/>
+        </a:xfrm>
+      </p:grpSpPr>
+      <p:sp>
+        <p:nvSpPr>
+          <p:cNvPr id="2" name="Slide Image Placeholder 1"/>
+          <p:cNvSpPr>
+            <a:spLocks noGrp="1" noRot="1" noChangeAspect="1"/>
+          </p:cNvSpPr>
+          <p:nvPr>
+            <p:ph type="sldImg"/>
+          </p:nvPr>
+        </p:nvSpPr>
+        <p:spPr/>
+      </p:sp>
+      <p:sp>
+        <p:nvSpPr>
+          <p:cNvPr id="3" name="Notes Placeholder 2"/>
+          <p:cNvSpPr>
+            <a:spLocks noGrp="1"/>
+          </p:cNvSpPr>
+          <p:nvPr>
+            <p:ph type="body" idx="1"/>
+          </p:nvPr>
+        </p:nvSpPr>
+        <p:spPr/>
+        <p:txBody>
+          <a:bodyPr/>
+          <a:lstStyle/>
+          <a:p>
             <a:r>
               <a:rPr lang="en-GB" dirty="0"/>
               <a:t>Practice with records after records are have been taught (last)</a:t>
@@ -6968,7 +5929,7 @@
           <a:p>
             <a:fld id="{B71FE5B5-A979-4370-A255-218EAB36A5F4}" type="slidenum">
               <a:rPr lang="en-GB" smtClean="0"/>
-              <a:t>21</a:t>
+              <a:t>23</a:t>
             </a:fld>
             <a:endParaRPr lang="en-GB"/>
           </a:p>
@@ -7216,21 +6177,17 @@
           <a:p>
             <a:r>
               <a:rPr lang="en-GB" dirty="0"/>
-              <a:t>Primary: </a:t>
-            </a:r>
-            <a:r>
-              <a:rPr lang="en-GB" dirty="0" err="1"/>
-              <a:t>LHS</a:t>
-            </a:r>
+              <a:t>UML use case diagrams: www.youtube.com/watch?v=4emxjxonNRI</a:t>
+            </a:r>
+          </a:p>
+          <a:p>
+            <a:endParaRPr lang="en-GB" dirty="0"/>
+          </a:p>
+          <a:p>
             <a:r>
               <a:rPr lang="en-GB" dirty="0"/>
-              <a:t>		Secondary: </a:t>
-            </a:r>
-            <a:r>
-              <a:rPr lang="en-GB" dirty="0" err="1"/>
-              <a:t>RHS</a:t>
-            </a:r>
-            <a:endParaRPr lang="en-GB" dirty="0"/>
+              <a:t>Can use an icon to represent what the Actor does</a:t>
+            </a:r>
           </a:p>
         </p:txBody>
       </p:sp>
@@ -7260,7 +6217,7 @@
     </p:spTree>
     <p:extLst>
       <p:ext uri="{BB962C8B-B14F-4D97-AF65-F5344CB8AC3E}">
-        <p14:creationId xmlns:p14="http://schemas.microsoft.com/office/powerpoint/2010/main" val="369161582"/>
+        <p14:creationId xmlns:p14="http://schemas.microsoft.com/office/powerpoint/2010/main" val="104590375"/>
       </p:ext>
     </p:extLst>
   </p:cSld>
@@ -7314,6 +6271,22 @@
           <a:bodyPr/>
           <a:lstStyle/>
           <a:p>
+            <a:r>
+              <a:rPr lang="en-GB" dirty="0"/>
+              <a:t>Primary: </a:t>
+            </a:r>
+            <a:r>
+              <a:rPr lang="en-GB" dirty="0" err="1"/>
+              <a:t>LHS</a:t>
+            </a:r>
+            <a:r>
+              <a:rPr lang="en-GB" dirty="0"/>
+              <a:t>		Secondary: </a:t>
+            </a:r>
+            <a:r>
+              <a:rPr lang="en-GB" dirty="0" err="1"/>
+              <a:t>RHS</a:t>
+            </a:r>
             <a:endParaRPr lang="en-GB" dirty="0"/>
           </a:p>
         </p:txBody>
@@ -7344,7 +6317,7 @@
     </p:spTree>
     <p:extLst>
       <p:ext uri="{BB962C8B-B14F-4D97-AF65-F5344CB8AC3E}">
-        <p14:creationId xmlns:p14="http://schemas.microsoft.com/office/powerpoint/2010/main" val="3421928896"/>
+        <p14:creationId xmlns:p14="http://schemas.microsoft.com/office/powerpoint/2010/main" val="369161582"/>
       </p:ext>
     </p:extLst>
   </p:cSld>
@@ -7398,6 +6371,22 @@
           <a:bodyPr/>
           <a:lstStyle/>
           <a:p>
+            <a:r>
+              <a:rPr lang="en-GB" dirty="0"/>
+              <a:t>Primary: </a:t>
+            </a:r>
+            <a:r>
+              <a:rPr lang="en-GB" dirty="0" err="1"/>
+              <a:t>LHS</a:t>
+            </a:r>
+            <a:r>
+              <a:rPr lang="en-GB" dirty="0"/>
+              <a:t>		Secondary: </a:t>
+            </a:r>
+            <a:r>
+              <a:rPr lang="en-GB" dirty="0" err="1"/>
+              <a:t>RHS</a:t>
+            </a:r>
             <a:endParaRPr lang="en-GB" dirty="0"/>
           </a:p>
         </p:txBody>
@@ -7428,7 +6417,7 @@
     </p:spTree>
     <p:extLst>
       <p:ext uri="{BB962C8B-B14F-4D97-AF65-F5344CB8AC3E}">
-        <p14:creationId xmlns:p14="http://schemas.microsoft.com/office/powerpoint/2010/main" val="4051856832"/>
+        <p14:creationId xmlns:p14="http://schemas.microsoft.com/office/powerpoint/2010/main" val="1217900632"/>
       </p:ext>
     </p:extLst>
   </p:cSld>
@@ -7512,7 +6501,7 @@
     </p:spTree>
     <p:extLst>
       <p:ext uri="{BB962C8B-B14F-4D97-AF65-F5344CB8AC3E}">
-        <p14:creationId xmlns:p14="http://schemas.microsoft.com/office/powerpoint/2010/main" val="2059869171"/>
+        <p14:creationId xmlns:p14="http://schemas.microsoft.com/office/powerpoint/2010/main" val="3421928896"/>
       </p:ext>
     </p:extLst>
   </p:cSld>
@@ -7566,7 +6555,10 @@
           <a:bodyPr/>
           <a:lstStyle/>
           <a:p>
-            <a:endParaRPr lang="en-GB" dirty="0"/>
+            <a:r>
+              <a:rPr lang="en-GB" dirty="0"/>
+              <a:t>Arrow points to what must be done.</a:t>
+            </a:r>
           </a:p>
         </p:txBody>
       </p:sp>
@@ -7596,7 +6588,7 @@
     </p:spTree>
     <p:extLst>
       <p:ext uri="{BB962C8B-B14F-4D97-AF65-F5344CB8AC3E}">
-        <p14:creationId xmlns:p14="http://schemas.microsoft.com/office/powerpoint/2010/main" val="1526805618"/>
+        <p14:creationId xmlns:p14="http://schemas.microsoft.com/office/powerpoint/2010/main" val="4051856832"/>
       </p:ext>
     </p:extLst>
   </p:cSld>
@@ -7650,10 +6642,6 @@
           <a:bodyPr/>
           <a:lstStyle/>
           <a:p>
-            <a:r>
-              <a:rPr lang="en-GB"/>
-              <a:t>https://www.omg.org/spec/UML/2.5.1/PDF#page=236</a:t>
-            </a:r>
             <a:endParaRPr lang="en-GB" dirty="0"/>
           </a:p>
         </p:txBody>
@@ -7665,7 +6653,7 @@
             <a:spLocks noGrp="1"/>
           </p:cNvSpPr>
           <p:nvPr>
-            <p:ph type="sldNum" sz="quarter" idx="10"/>
+            <p:ph type="sldNum" sz="quarter" idx="5"/>
           </p:nvPr>
         </p:nvSpPr>
         <p:spPr/>
@@ -7675,7 +6663,7 @@
           <a:p>
             <a:fld id="{B71FE5B5-A979-4370-A255-218EAB36A5F4}" type="slidenum">
               <a:rPr lang="en-GB" smtClean="0"/>
-              <a:t>14</a:t>
+              <a:t>13</a:t>
             </a:fld>
             <a:endParaRPr lang="en-GB"/>
           </a:p>
@@ -7684,7 +6672,7 @@
     </p:spTree>
     <p:extLst>
       <p:ext uri="{BB962C8B-B14F-4D97-AF65-F5344CB8AC3E}">
-        <p14:creationId xmlns:p14="http://schemas.microsoft.com/office/powerpoint/2010/main" val="2881217941"/>
+        <p14:creationId xmlns:p14="http://schemas.microsoft.com/office/powerpoint/2010/main" val="2059869171"/>
       </p:ext>
     </p:extLst>
   </p:cSld>
@@ -7843,7 +6831,7 @@
           <a:p>
             <a:fld id="{CBBB66F6-7471-47DA-8EED-C7BCCA53B015}" type="datetimeFigureOut">
               <a:rPr lang="en-GB" smtClean="0"/>
-              <a:t>31/05/2026</a:t>
+              <a:t>02/06/2026</a:t>
             </a:fld>
             <a:endParaRPr lang="en-GB"/>
           </a:p>
@@ -8043,7 +7031,7 @@
           <a:p>
             <a:fld id="{CBBB66F6-7471-47DA-8EED-C7BCCA53B015}" type="datetimeFigureOut">
               <a:rPr lang="en-GB" smtClean="0"/>
-              <a:t>31/05/2026</a:t>
+              <a:t>02/06/2026</a:t>
             </a:fld>
             <a:endParaRPr lang="en-GB"/>
           </a:p>
@@ -8253,7 +7241,7 @@
           <a:p>
             <a:fld id="{CBBB66F6-7471-47DA-8EED-C7BCCA53B015}" type="datetimeFigureOut">
               <a:rPr lang="en-GB" smtClean="0"/>
-              <a:t>31/05/2026</a:t>
+              <a:t>02/06/2026</a:t>
             </a:fld>
             <a:endParaRPr lang="en-GB"/>
           </a:p>
@@ -8453,7 +7441,7 @@
           <a:p>
             <a:fld id="{CBBB66F6-7471-47DA-8EED-C7BCCA53B015}" type="datetimeFigureOut">
               <a:rPr lang="en-GB" smtClean="0"/>
-              <a:t>31/05/2026</a:t>
+              <a:t>02/06/2026</a:t>
             </a:fld>
             <a:endParaRPr lang="en-GB"/>
           </a:p>
@@ -8729,7 +7717,7 @@
           <a:p>
             <a:fld id="{CBBB66F6-7471-47DA-8EED-C7BCCA53B015}" type="datetimeFigureOut">
               <a:rPr lang="en-GB" smtClean="0"/>
-              <a:t>31/05/2026</a:t>
+              <a:t>02/06/2026</a:t>
             </a:fld>
             <a:endParaRPr lang="en-GB"/>
           </a:p>
@@ -8997,7 +7985,7 @@
           <a:p>
             <a:fld id="{CBBB66F6-7471-47DA-8EED-C7BCCA53B015}" type="datetimeFigureOut">
               <a:rPr lang="en-GB" smtClean="0"/>
-              <a:t>31/05/2026</a:t>
+              <a:t>02/06/2026</a:t>
             </a:fld>
             <a:endParaRPr lang="en-GB"/>
           </a:p>
@@ -9412,7 +8400,7 @@
           <a:p>
             <a:fld id="{CBBB66F6-7471-47DA-8EED-C7BCCA53B015}" type="datetimeFigureOut">
               <a:rPr lang="en-GB" smtClean="0"/>
-              <a:t>31/05/2026</a:t>
+              <a:t>02/06/2026</a:t>
             </a:fld>
             <a:endParaRPr lang="en-GB"/>
           </a:p>
@@ -9554,7 +8542,7 @@
           <a:p>
             <a:fld id="{CBBB66F6-7471-47DA-8EED-C7BCCA53B015}" type="datetimeFigureOut">
               <a:rPr lang="en-GB" smtClean="0"/>
-              <a:t>31/05/2026</a:t>
+              <a:t>02/06/2026</a:t>
             </a:fld>
             <a:endParaRPr lang="en-GB"/>
           </a:p>
@@ -9667,7 +8655,7 @@
           <a:p>
             <a:fld id="{CBBB66F6-7471-47DA-8EED-C7BCCA53B015}" type="datetimeFigureOut">
               <a:rPr lang="en-GB" smtClean="0"/>
-              <a:t>31/05/2026</a:t>
+              <a:t>02/06/2026</a:t>
             </a:fld>
             <a:endParaRPr lang="en-GB"/>
           </a:p>
@@ -9980,7 +8968,7 @@
           <a:p>
             <a:fld id="{CBBB66F6-7471-47DA-8EED-C7BCCA53B015}" type="datetimeFigureOut">
               <a:rPr lang="en-GB" smtClean="0"/>
-              <a:t>31/05/2026</a:t>
+              <a:t>02/06/2026</a:t>
             </a:fld>
             <a:endParaRPr lang="en-GB"/>
           </a:p>
@@ -10269,7 +9257,7 @@
           <a:p>
             <a:fld id="{CBBB66F6-7471-47DA-8EED-C7BCCA53B015}" type="datetimeFigureOut">
               <a:rPr lang="en-GB" smtClean="0"/>
-              <a:t>31/05/2026</a:t>
+              <a:t>02/06/2026</a:t>
             </a:fld>
             <a:endParaRPr lang="en-GB"/>
           </a:p>
@@ -10518,7 +9506,7 @@
           <a:p>
             <a:fld id="{CBBB66F6-7471-47DA-8EED-C7BCCA53B015}" type="datetimeFigureOut">
               <a:rPr lang="en-GB" smtClean="0"/>
-              <a:t>31/05/2026</a:t>
+              <a:t>02/06/2026</a:t>
             </a:fld>
             <a:endParaRPr lang="en-GB"/>
           </a:p>
@@ -11023,8 +10011,60 @@
           <a:p>
             <a:r>
               <a:rPr lang="en-GB" dirty="0"/>
-              <a:t>Use Cases - Relationships</a:t>
-            </a:r>
+              <a:t>Actors</a:t>
+            </a:r>
+          </a:p>
+        </p:txBody>
+      </p:sp>
+      <p:sp>
+        <p:nvSpPr>
+          <p:cNvPr id="5" name="Rectangle 4">
+            <a:extLst>
+              <a:ext uri="{FF2B5EF4-FFF2-40B4-BE49-F238E27FC236}">
+                <a16:creationId xmlns:a16="http://schemas.microsoft.com/office/drawing/2014/main" id="{CCE05E6E-A41D-4F17-976E-859832DCAAEB}"/>
+              </a:ext>
+            </a:extLst>
+          </p:cNvPr>
+          <p:cNvSpPr/>
+          <p:nvPr/>
+        </p:nvSpPr>
+        <p:spPr>
+          <a:xfrm>
+            <a:off x="4295775" y="1977390"/>
+            <a:ext cx="3600450" cy="4320000"/>
+          </a:xfrm>
+          <a:prstGeom prst="rect">
+            <a:avLst/>
+          </a:prstGeom>
+          <a:noFill/>
+          <a:ln w="28575">
+            <a:solidFill>
+              <a:schemeClr val="tx1"/>
+            </a:solidFill>
+          </a:ln>
+        </p:spPr>
+        <p:style>
+          <a:lnRef idx="2">
+            <a:schemeClr val="accent1">
+              <a:shade val="50000"/>
+            </a:schemeClr>
+          </a:lnRef>
+          <a:fillRef idx="1">
+            <a:schemeClr val="accent1"/>
+          </a:fillRef>
+          <a:effectRef idx="0">
+            <a:schemeClr val="accent1"/>
+          </a:effectRef>
+          <a:fontRef idx="minor">
+            <a:schemeClr val="lt1"/>
+          </a:fontRef>
+        </p:style>
+        <p:txBody>
+          <a:bodyPr rtlCol="0" anchor="ctr"/>
+          <a:lstStyle/>
+          <a:p>
+            <a:pPr algn="ctr"/>
+            <a:endParaRPr lang="en-GB" dirty="0"/>
           </a:p>
         </p:txBody>
       </p:sp>
@@ -11042,7 +10082,7 @@
         </p:nvSpPr>
         <p:spPr>
           <a:xfrm>
-            <a:off x="1055492" y="3520442"/>
+            <a:off x="5016000" y="3597390"/>
             <a:ext cx="2160000" cy="1080000"/>
           </a:xfrm>
           <a:prstGeom prst="ellipse">
@@ -11082,17 +10122,89 @@
                   <a:srgbClr val="0070C0"/>
                 </a:solidFill>
               </a:rPr>
-              <a:t>Buy drink</a:t>
+              <a:t>Use Case 2</a:t>
             </a:r>
           </a:p>
         </p:txBody>
       </p:sp>
+      <p:pic>
+        <p:nvPicPr>
+          <p:cNvPr id="7" name="Picture 6">
+            <a:extLst>
+              <a:ext uri="{FF2B5EF4-FFF2-40B4-BE49-F238E27FC236}">
+                <a16:creationId xmlns:a16="http://schemas.microsoft.com/office/drawing/2014/main" id="{B026E70D-B3FD-4141-85F9-75190461CDA3}"/>
+              </a:ext>
+            </a:extLst>
+          </p:cNvPr>
+          <p:cNvPicPr>
+            <a:picLocks noChangeAspect="1"/>
+          </p:cNvPicPr>
+          <p:nvPr/>
+        </p:nvPicPr>
+        <p:blipFill>
+          <a:blip r:embed="rId3">
+            <a:extLst>
+              <a:ext uri="{28A0092B-C50C-407E-A947-70E740481C1C}">
+                <a14:useLocalDpi xmlns:a14="http://schemas.microsoft.com/office/drawing/2010/main" val="0"/>
+              </a:ext>
+            </a:extLst>
+          </a:blip>
+          <a:stretch>
+            <a:fillRect/>
+          </a:stretch>
+        </p:blipFill>
+        <p:spPr>
+          <a:xfrm>
+            <a:off x="1412663" y="2712178"/>
+            <a:ext cx="1482940" cy="2919004"/>
+          </a:xfrm>
+          <a:prstGeom prst="rect">
+            <a:avLst/>
+          </a:prstGeom>
+        </p:spPr>
+      </p:pic>
+      <p:pic>
+        <p:nvPicPr>
+          <p:cNvPr id="11" name="Picture 10">
+            <a:extLst>
+              <a:ext uri="{FF2B5EF4-FFF2-40B4-BE49-F238E27FC236}">
+                <a16:creationId xmlns:a16="http://schemas.microsoft.com/office/drawing/2014/main" id="{32A0F86B-CA07-4894-B384-CE8C6EE159C1}"/>
+              </a:ext>
+            </a:extLst>
+          </p:cNvPr>
+          <p:cNvPicPr>
+            <a:picLocks noChangeAspect="1"/>
+          </p:cNvPicPr>
+          <p:nvPr/>
+        </p:nvPicPr>
+        <p:blipFill>
+          <a:blip r:embed="rId3">
+            <a:extLst>
+              <a:ext uri="{28A0092B-C50C-407E-A947-70E740481C1C}">
+                <a14:useLocalDpi xmlns:a14="http://schemas.microsoft.com/office/drawing/2010/main" val="0"/>
+              </a:ext>
+            </a:extLst>
+          </a:blip>
+          <a:stretch>
+            <a:fillRect/>
+          </a:stretch>
+        </p:blipFill>
+        <p:spPr>
+          <a:xfrm>
+            <a:off x="9284963" y="2712178"/>
+            <a:ext cx="1482940" cy="2919004"/>
+          </a:xfrm>
+          <a:prstGeom prst="rect">
+            <a:avLst/>
+          </a:prstGeom>
+        </p:spPr>
+      </p:pic>
       <p:sp>
         <p:nvSpPr>
-          <p:cNvPr id="21" name="Oval 20">
+          <p:cNvPr id="18" name="Rectangle 17">
             <a:extLst>
               <a:ext uri="{FF2B5EF4-FFF2-40B4-BE49-F238E27FC236}">
-                <a16:creationId xmlns:a16="http://schemas.microsoft.com/office/drawing/2014/main" id="{65F9084E-A1EA-4464-9384-FDA12CD1EE06}"/>
+                <a16:creationId xmlns:a16="http://schemas.microsoft.com/office/drawing/2014/main" id="{1B38B5A5-FF85-4F91-98A2-2BD48295D2CE}"/>
               </a:ext>
             </a:extLst>
           </p:cNvPr>
@@ -11101,7 +10213,139 @@
         </p:nvSpPr>
         <p:spPr>
           <a:xfrm>
-            <a:off x="7477051" y="2116023"/>
+            <a:off x="4648995" y="1454171"/>
+            <a:ext cx="2780185" cy="523220"/>
+          </a:xfrm>
+          <a:prstGeom prst="rect">
+            <a:avLst/>
+          </a:prstGeom>
+        </p:spPr>
+        <p:txBody>
+          <a:bodyPr wrap="none">
+            <a:spAutoFit/>
+          </a:bodyPr>
+          <a:lstStyle/>
+          <a:p>
+            <a:pPr algn="ctr"/>
+            <a:r>
+              <a:rPr lang="en-GB" sz="2800" b="1" dirty="0">
+                <a:solidFill>
+                  <a:srgbClr val="0070C0"/>
+                </a:solidFill>
+              </a:rPr>
+              <a:t>System Boundary</a:t>
+            </a:r>
+            <a:endParaRPr lang="en-GB" dirty="0">
+              <a:solidFill>
+                <a:srgbClr val="0070C0"/>
+              </a:solidFill>
+            </a:endParaRPr>
+          </a:p>
+        </p:txBody>
+      </p:sp>
+      <p:cxnSp>
+        <p:nvCxnSpPr>
+          <p:cNvPr id="12" name="Straight Connector 11">
+            <a:extLst>
+              <a:ext uri="{FF2B5EF4-FFF2-40B4-BE49-F238E27FC236}">
+                <a16:creationId xmlns:a16="http://schemas.microsoft.com/office/drawing/2014/main" id="{5DA4DAB6-55AE-451F-A496-DB8E57B81C0E}"/>
+              </a:ext>
+            </a:extLst>
+          </p:cNvPr>
+          <p:cNvCxnSpPr>
+            <a:cxnSpLocks/>
+            <a:endCxn id="9" idx="2"/>
+          </p:cNvCxnSpPr>
+          <p:nvPr/>
+        </p:nvCxnSpPr>
+        <p:spPr>
+          <a:xfrm>
+            <a:off x="2531444" y="4137390"/>
+            <a:ext cx="2484556" cy="0"/>
+          </a:xfrm>
+          <a:prstGeom prst="line">
+            <a:avLst/>
+          </a:prstGeom>
+          <a:ln w="28575">
+            <a:solidFill>
+              <a:schemeClr val="tx1"/>
+            </a:solidFill>
+          </a:ln>
+        </p:spPr>
+        <p:style>
+          <a:lnRef idx="1">
+            <a:schemeClr val="accent1"/>
+          </a:lnRef>
+          <a:fillRef idx="0">
+            <a:schemeClr val="accent1"/>
+          </a:fillRef>
+          <a:effectRef idx="0">
+            <a:schemeClr val="accent1"/>
+          </a:effectRef>
+          <a:fontRef idx="minor">
+            <a:schemeClr val="tx1"/>
+          </a:fontRef>
+        </p:style>
+      </p:cxnSp>
+      <p:cxnSp>
+        <p:nvCxnSpPr>
+          <p:cNvPr id="14" name="Straight Connector 13">
+            <a:extLst>
+              <a:ext uri="{FF2B5EF4-FFF2-40B4-BE49-F238E27FC236}">
+                <a16:creationId xmlns:a16="http://schemas.microsoft.com/office/drawing/2014/main" id="{4BC27613-8AD7-42F9-96C9-701E22C58D62}"/>
+              </a:ext>
+            </a:extLst>
+          </p:cNvPr>
+          <p:cNvCxnSpPr>
+            <a:cxnSpLocks/>
+            <a:stCxn id="27" idx="6"/>
+          </p:cNvCxnSpPr>
+          <p:nvPr/>
+        </p:nvCxnSpPr>
+        <p:spPr>
+          <a:xfrm flipV="1">
+            <a:off x="7176000" y="4137390"/>
+            <a:ext cx="2497389" cy="1333296"/>
+          </a:xfrm>
+          <a:prstGeom prst="line">
+            <a:avLst/>
+          </a:prstGeom>
+          <a:ln w="28575">
+            <a:solidFill>
+              <a:schemeClr val="tx1"/>
+            </a:solidFill>
+          </a:ln>
+        </p:spPr>
+        <p:style>
+          <a:lnRef idx="1">
+            <a:schemeClr val="accent1"/>
+          </a:lnRef>
+          <a:fillRef idx="0">
+            <a:schemeClr val="accent1"/>
+          </a:fillRef>
+          <a:effectRef idx="0">
+            <a:schemeClr val="accent1"/>
+          </a:effectRef>
+          <a:fontRef idx="minor">
+            <a:schemeClr val="tx1"/>
+          </a:fontRef>
+        </p:style>
+      </p:cxnSp>
+      <p:sp>
+        <p:nvSpPr>
+          <p:cNvPr id="26" name="Oval 25">
+            <a:extLst>
+              <a:ext uri="{FF2B5EF4-FFF2-40B4-BE49-F238E27FC236}">
+                <a16:creationId xmlns:a16="http://schemas.microsoft.com/office/drawing/2014/main" id="{B3D409DD-93B4-40DB-8A45-A1FF26971C42}"/>
+              </a:ext>
+            </a:extLst>
+          </p:cNvPr>
+          <p:cNvSpPr/>
+          <p:nvPr/>
+        </p:nvSpPr>
+        <p:spPr>
+          <a:xfrm>
+            <a:off x="5016000" y="2230687"/>
             <a:ext cx="2160000" cy="1080000"/>
           </a:xfrm>
           <a:prstGeom prst="ellipse">
@@ -11141,17 +10385,17 @@
                   <a:srgbClr val="0070C0"/>
                 </a:solidFill>
               </a:rPr>
-              <a:t>Pay</a:t>
+              <a:t>Use Case 1</a:t>
             </a:r>
           </a:p>
         </p:txBody>
       </p:sp>
       <p:sp>
         <p:nvSpPr>
-          <p:cNvPr id="22" name="Oval 21">
+          <p:cNvPr id="27" name="Oval 26">
             <a:extLst>
               <a:ext uri="{FF2B5EF4-FFF2-40B4-BE49-F238E27FC236}">
-                <a16:creationId xmlns:a16="http://schemas.microsoft.com/office/drawing/2014/main" id="{CDAB617F-D868-4AAD-BA99-EFE6D44FFB55}"/>
+                <a16:creationId xmlns:a16="http://schemas.microsoft.com/office/drawing/2014/main" id="{2584A295-72FF-468A-A6FA-4E277C254EDC}"/>
               </a:ext>
             </a:extLst>
           </p:cNvPr>
@@ -11160,7 +10404,7 @@
         </p:nvSpPr>
         <p:spPr>
           <a:xfrm>
-            <a:off x="7477051" y="4322052"/>
+            <a:off x="5016000" y="4930686"/>
             <a:ext cx="2160000" cy="1080000"/>
           </a:xfrm>
           <a:prstGeom prst="ellipse">
@@ -11200,41 +10444,38 @@
                   <a:srgbClr val="0070C0"/>
                 </a:solidFill>
               </a:rPr>
-              <a:t>Print receipt</a:t>
+              <a:t>Use Case 3</a:t>
             </a:r>
           </a:p>
         </p:txBody>
       </p:sp>
       <p:cxnSp>
         <p:nvCxnSpPr>
-          <p:cNvPr id="24" name="Straight Arrow Connector 23">
+          <p:cNvPr id="29" name="Straight Connector 28">
             <a:extLst>
               <a:ext uri="{FF2B5EF4-FFF2-40B4-BE49-F238E27FC236}">
-                <a16:creationId xmlns:a16="http://schemas.microsoft.com/office/drawing/2014/main" id="{440C0681-510B-4743-9A20-D172D0F4A65E}"/>
+                <a16:creationId xmlns:a16="http://schemas.microsoft.com/office/drawing/2014/main" id="{78E5B12E-DE80-4E14-AEB9-E9D7561A3273}"/>
               </a:ext>
             </a:extLst>
           </p:cNvPr>
           <p:cNvCxnSpPr>
             <a:cxnSpLocks/>
-            <a:endCxn id="21" idx="2"/>
+            <a:endCxn id="27" idx="2"/>
           </p:cNvCxnSpPr>
           <p:nvPr/>
         </p:nvCxnSpPr>
         <p:spPr>
-          <a:xfrm flipV="1">
-            <a:off x="3303270" y="2656023"/>
-            <a:ext cx="4173781" cy="1210168"/>
+          <a:xfrm>
+            <a:off x="2531444" y="4137389"/>
+            <a:ext cx="2484556" cy="1333297"/>
           </a:xfrm>
-          <a:prstGeom prst="straightConnector1">
+          <a:prstGeom prst="line">
             <a:avLst/>
           </a:prstGeom>
-          <a:ln w="38100">
+          <a:ln w="28575">
             <a:solidFill>
               <a:schemeClr val="tx1"/>
             </a:solidFill>
-            <a:prstDash val="dash"/>
-            <a:headEnd w="lg" len="lg"/>
-            <a:tailEnd type="arrow" w="lg" len="lg"/>
           </a:ln>
         </p:spPr>
         <p:style>
@@ -11254,34 +10495,31 @@
       </p:cxnSp>
       <p:cxnSp>
         <p:nvCxnSpPr>
-          <p:cNvPr id="27" name="Straight Arrow Connector 26">
+          <p:cNvPr id="30" name="Straight Connector 29">
             <a:extLst>
               <a:ext uri="{FF2B5EF4-FFF2-40B4-BE49-F238E27FC236}">
-                <a16:creationId xmlns:a16="http://schemas.microsoft.com/office/drawing/2014/main" id="{5FD594C9-5C27-4A4C-B85E-7B863E6D3F4E}"/>
+                <a16:creationId xmlns:a16="http://schemas.microsoft.com/office/drawing/2014/main" id="{A5305137-03E8-429E-AC65-B6B9C9CCD0EA}"/>
               </a:ext>
             </a:extLst>
           </p:cNvPr>
           <p:cNvCxnSpPr>
             <a:cxnSpLocks/>
-            <a:stCxn id="22" idx="2"/>
+            <a:endCxn id="26" idx="2"/>
           </p:cNvCxnSpPr>
           <p:nvPr/>
         </p:nvCxnSpPr>
         <p:spPr>
-          <a:xfrm flipH="1" flipV="1">
-            <a:off x="3215492" y="4322052"/>
-            <a:ext cx="4261559" cy="540000"/>
+          <a:xfrm flipV="1">
+            <a:off x="2531444" y="2770687"/>
+            <a:ext cx="2484556" cy="1366701"/>
           </a:xfrm>
-          <a:prstGeom prst="straightConnector1">
+          <a:prstGeom prst="line">
             <a:avLst/>
           </a:prstGeom>
-          <a:ln w="38100">
+          <a:ln w="28575">
             <a:solidFill>
               <a:schemeClr val="tx1"/>
             </a:solidFill>
-            <a:prstDash val="dash"/>
-            <a:headEnd w="lg" len="lg"/>
-            <a:tailEnd type="triangle" w="lg" len="lg"/>
           </a:ln>
         </p:spPr>
         <p:style>
@@ -11299,329 +10537,10 @@
           </a:fontRef>
         </p:style>
       </p:cxnSp>
-      <p:sp>
-        <p:nvSpPr>
-          <p:cNvPr id="32" name="TextBox 31">
-            <a:extLst>
-              <a:ext uri="{FF2B5EF4-FFF2-40B4-BE49-F238E27FC236}">
-                <a16:creationId xmlns:a16="http://schemas.microsoft.com/office/drawing/2014/main" id="{85CDA261-9BB5-4CC4-B2DE-8D9152BEA2AF}"/>
-              </a:ext>
-            </a:extLst>
-          </p:cNvPr>
-          <p:cNvSpPr txBox="1"/>
-          <p:nvPr/>
-        </p:nvSpPr>
-        <p:spPr>
-          <a:xfrm>
-            <a:off x="4527084" y="2934413"/>
-            <a:ext cx="1614545" cy="523220"/>
-          </a:xfrm>
-          <a:prstGeom prst="rect">
-            <a:avLst/>
-          </a:prstGeom>
-          <a:solidFill>
-            <a:srgbClr val="BDD7EE"/>
-          </a:solidFill>
-        </p:spPr>
-        <p:txBody>
-          <a:bodyPr wrap="none" rtlCol="0">
-            <a:spAutoFit/>
-          </a:bodyPr>
-          <a:lstStyle/>
-          <a:p>
-            <a:r>
-              <a:rPr lang="en-GB" sz="2800" dirty="0"/>
-              <a:t>«include»</a:t>
-            </a:r>
-          </a:p>
-        </p:txBody>
-      </p:sp>
-      <p:sp>
-        <p:nvSpPr>
-          <p:cNvPr id="33" name="TextBox 32">
-            <a:extLst>
-              <a:ext uri="{FF2B5EF4-FFF2-40B4-BE49-F238E27FC236}">
-                <a16:creationId xmlns:a16="http://schemas.microsoft.com/office/drawing/2014/main" id="{5FA2AB05-D591-4DE1-930E-0EDCED894325}"/>
-              </a:ext>
-            </a:extLst>
-          </p:cNvPr>
-          <p:cNvSpPr txBox="1"/>
-          <p:nvPr/>
-        </p:nvSpPr>
-        <p:spPr>
-          <a:xfrm>
-            <a:off x="4556867" y="4332379"/>
-            <a:ext cx="1554977" cy="523220"/>
-          </a:xfrm>
-          <a:prstGeom prst="rect">
-            <a:avLst/>
-          </a:prstGeom>
-          <a:solidFill>
-            <a:srgbClr val="BDD7EE"/>
-          </a:solidFill>
-        </p:spPr>
-        <p:txBody>
-          <a:bodyPr wrap="none" rtlCol="0">
-            <a:spAutoFit/>
-          </a:bodyPr>
-          <a:lstStyle/>
-          <a:p>
-            <a:r>
-              <a:rPr lang="en-GB" sz="2800" dirty="0"/>
-              <a:t>«extend»</a:t>
-            </a:r>
-          </a:p>
-        </p:txBody>
-      </p:sp>
-      <p:sp>
-        <p:nvSpPr>
-          <p:cNvPr id="39" name="Callout: Line with No Border 38">
-            <a:extLst>
-              <a:ext uri="{FF2B5EF4-FFF2-40B4-BE49-F238E27FC236}">
-                <a16:creationId xmlns:a16="http://schemas.microsoft.com/office/drawing/2014/main" id="{C90D3FE8-1169-4EDF-A2ED-2F943CD5C876}"/>
-              </a:ext>
-            </a:extLst>
-          </p:cNvPr>
-          <p:cNvSpPr/>
-          <p:nvPr/>
-        </p:nvSpPr>
-        <p:spPr>
-          <a:xfrm>
-            <a:off x="10128972" y="3399294"/>
-            <a:ext cx="1866456" cy="340399"/>
-          </a:xfrm>
-          <a:prstGeom prst="callout1">
-            <a:avLst>
-              <a:gd name="adj1" fmla="val 51692"/>
-              <a:gd name="adj2" fmla="val 149"/>
-              <a:gd name="adj3" fmla="val -125769"/>
-              <a:gd name="adj4" fmla="val -33854"/>
-            </a:avLst>
-          </a:prstGeom>
-          <a:noFill/>
-          <a:ln w="38100">
-            <a:solidFill>
-              <a:schemeClr val="accent6">
-                <a:lumMod val="75000"/>
-              </a:schemeClr>
-            </a:solidFill>
-            <a:headEnd w="lg" len="lg"/>
-            <a:tailEnd type="triangle" w="lg" len="lg"/>
-          </a:ln>
-        </p:spPr>
-        <p:style>
-          <a:lnRef idx="2">
-            <a:schemeClr val="accent1">
-              <a:shade val="50000"/>
-            </a:schemeClr>
-          </a:lnRef>
-          <a:fillRef idx="1">
-            <a:schemeClr val="accent1"/>
-          </a:fillRef>
-          <a:effectRef idx="0">
-            <a:schemeClr val="accent1"/>
-          </a:effectRef>
-          <a:fontRef idx="minor">
-            <a:schemeClr val="lt1"/>
-          </a:fontRef>
-        </p:style>
-        <p:txBody>
-          <a:bodyPr rtlCol="0" anchor="ctr"/>
-          <a:lstStyle/>
-          <a:p>
-            <a:r>
-              <a:rPr lang="en-GB" sz="2800" b="1" dirty="0">
-                <a:solidFill>
-                  <a:srgbClr val="7030A0"/>
-                </a:solidFill>
-              </a:rPr>
-              <a:t>Mandatory</a:t>
-            </a:r>
-          </a:p>
-        </p:txBody>
-      </p:sp>
-      <p:sp>
-        <p:nvSpPr>
-          <p:cNvPr id="40" name="Callout: Line with No Border 39">
-            <a:extLst>
-              <a:ext uri="{FF2B5EF4-FFF2-40B4-BE49-F238E27FC236}">
-                <a16:creationId xmlns:a16="http://schemas.microsoft.com/office/drawing/2014/main" id="{F0D9822E-881E-4E96-ACB0-4C7728754CF3}"/>
-              </a:ext>
-            </a:extLst>
-          </p:cNvPr>
-          <p:cNvSpPr/>
-          <p:nvPr/>
-        </p:nvSpPr>
-        <p:spPr>
-          <a:xfrm>
-            <a:off x="5869759" y="5802799"/>
-            <a:ext cx="1515814" cy="467961"/>
-          </a:xfrm>
-          <a:prstGeom prst="callout1">
-            <a:avLst>
-              <a:gd name="adj1" fmla="val 50466"/>
-              <a:gd name="adj2" fmla="val 100987"/>
-              <a:gd name="adj3" fmla="val -111356"/>
-              <a:gd name="adj4" fmla="val 133941"/>
-            </a:avLst>
-          </a:prstGeom>
-          <a:noFill/>
-          <a:ln w="38100">
-            <a:solidFill>
-              <a:schemeClr val="accent6">
-                <a:lumMod val="75000"/>
-              </a:schemeClr>
-            </a:solidFill>
-            <a:headEnd w="lg" len="lg"/>
-            <a:tailEnd type="triangle" w="lg" len="lg"/>
-          </a:ln>
-        </p:spPr>
-        <p:style>
-          <a:lnRef idx="2">
-            <a:schemeClr val="accent1">
-              <a:shade val="50000"/>
-            </a:schemeClr>
-          </a:lnRef>
-          <a:fillRef idx="1">
-            <a:schemeClr val="accent1"/>
-          </a:fillRef>
-          <a:effectRef idx="0">
-            <a:schemeClr val="accent1"/>
-          </a:effectRef>
-          <a:fontRef idx="minor">
-            <a:schemeClr val="lt1"/>
-          </a:fontRef>
-        </p:style>
-        <p:txBody>
-          <a:bodyPr rtlCol="0" anchor="ctr"/>
-          <a:lstStyle/>
-          <a:p>
-            <a:pPr algn="r"/>
-            <a:r>
-              <a:rPr lang="en-GB" sz="2800" b="1" dirty="0">
-                <a:solidFill>
-                  <a:srgbClr val="7030A0"/>
-                </a:solidFill>
-              </a:rPr>
-              <a:t>Optional</a:t>
-            </a:r>
-          </a:p>
-        </p:txBody>
-      </p:sp>
-      <p:sp>
-        <p:nvSpPr>
-          <p:cNvPr id="42" name="Rectangle 41">
-            <a:extLst>
-              <a:ext uri="{FF2B5EF4-FFF2-40B4-BE49-F238E27FC236}">
-                <a16:creationId xmlns:a16="http://schemas.microsoft.com/office/drawing/2014/main" id="{F5F9953F-5BB6-4F85-90AC-D05F2552F76A}"/>
-              </a:ext>
-            </a:extLst>
-          </p:cNvPr>
-          <p:cNvSpPr/>
-          <p:nvPr/>
-        </p:nvSpPr>
-        <p:spPr>
-          <a:xfrm>
-            <a:off x="838200" y="1537574"/>
-            <a:ext cx="9144000" cy="4053601"/>
-          </a:xfrm>
-          <a:prstGeom prst="rect">
-            <a:avLst/>
-          </a:prstGeom>
-          <a:noFill/>
-          <a:ln w="38100">
-            <a:solidFill>
-              <a:schemeClr val="tx1"/>
-            </a:solidFill>
-          </a:ln>
-        </p:spPr>
-        <p:style>
-          <a:lnRef idx="2">
-            <a:schemeClr val="accent1">
-              <a:shade val="50000"/>
-            </a:schemeClr>
-          </a:lnRef>
-          <a:fillRef idx="1">
-            <a:schemeClr val="accent1"/>
-          </a:fillRef>
-          <a:effectRef idx="0">
-            <a:schemeClr val="accent1"/>
-          </a:effectRef>
-          <a:fontRef idx="minor">
-            <a:schemeClr val="lt1"/>
-          </a:fontRef>
-        </p:style>
-        <p:txBody>
-          <a:bodyPr rtlCol="0" anchor="t" anchorCtr="0"/>
-          <a:lstStyle/>
-          <a:p>
-            <a:r>
-              <a:rPr lang="en-GB" sz="2800" b="1" dirty="0">
-                <a:solidFill>
-                  <a:schemeClr val="tx1"/>
-                </a:solidFill>
-              </a:rPr>
-              <a:t>Drinks Vending Machine</a:t>
-            </a:r>
-          </a:p>
-        </p:txBody>
-      </p:sp>
-      <p:sp>
-        <p:nvSpPr>
-          <p:cNvPr id="3" name="Rectangle 2">
-            <a:extLst>
-              <a:ext uri="{FF2B5EF4-FFF2-40B4-BE49-F238E27FC236}">
-                <a16:creationId xmlns:a16="http://schemas.microsoft.com/office/drawing/2014/main" id="{6B73F8E2-351C-B873-7A2F-0D4291693A98}"/>
-              </a:ext>
-            </a:extLst>
-          </p:cNvPr>
-          <p:cNvSpPr/>
-          <p:nvPr/>
-        </p:nvSpPr>
-        <p:spPr>
-          <a:xfrm>
-            <a:off x="838200" y="1537574"/>
-            <a:ext cx="3812381" cy="540000"/>
-          </a:xfrm>
-          <a:prstGeom prst="rect">
-            <a:avLst/>
-          </a:prstGeom>
-          <a:noFill/>
-          <a:ln w="38100">
-            <a:solidFill>
-              <a:schemeClr val="tx1"/>
-            </a:solidFill>
-          </a:ln>
-        </p:spPr>
-        <p:style>
-          <a:lnRef idx="2">
-            <a:schemeClr val="accent1">
-              <a:shade val="15000"/>
-            </a:schemeClr>
-          </a:lnRef>
-          <a:fillRef idx="1">
-            <a:schemeClr val="accent1"/>
-          </a:fillRef>
-          <a:effectRef idx="0">
-            <a:schemeClr val="accent1"/>
-          </a:effectRef>
-          <a:fontRef idx="minor">
-            <a:schemeClr val="lt1"/>
-          </a:fontRef>
-        </p:style>
-        <p:txBody>
-          <a:bodyPr rtlCol="0" anchor="ctr"/>
-          <a:lstStyle/>
-          <a:p>
-            <a:pPr algn="ctr"/>
-            <a:endParaRPr lang="en-GB"/>
-          </a:p>
-        </p:txBody>
-      </p:sp>
     </p:spTree>
     <p:extLst>
       <p:ext uri="{BB962C8B-B14F-4D97-AF65-F5344CB8AC3E}">
-        <p14:creationId xmlns:p14="http://schemas.microsoft.com/office/powerpoint/2010/main" val="3895107268"/>
+        <p14:creationId xmlns:p14="http://schemas.microsoft.com/office/powerpoint/2010/main" val="975855965"/>
       </p:ext>
     </p:extLst>
   </p:cSld>
@@ -11665,199 +10584,7 @@
           <a:p>
             <a:r>
               <a:rPr lang="en-GB" dirty="0"/>
-              <a:t>Use Case - Description</a:t>
-            </a:r>
-          </a:p>
-        </p:txBody>
-      </p:sp>
-      <p:sp>
-        <p:nvSpPr>
-          <p:cNvPr id="15" name="Rectangle 14">
-            <a:extLst>
-              <a:ext uri="{FF2B5EF4-FFF2-40B4-BE49-F238E27FC236}">
-                <a16:creationId xmlns:a16="http://schemas.microsoft.com/office/drawing/2014/main" id="{A254E6C5-E390-440D-A8AE-CB82709F6CB5}"/>
-              </a:ext>
-            </a:extLst>
-          </p:cNvPr>
-          <p:cNvSpPr/>
-          <p:nvPr/>
-        </p:nvSpPr>
-        <p:spPr>
-          <a:xfrm>
-            <a:off x="1241960" y="6060873"/>
-            <a:ext cx="2441566" cy="523220"/>
-          </a:xfrm>
-          <a:prstGeom prst="rect">
-            <a:avLst/>
-          </a:prstGeom>
-        </p:spPr>
-        <p:txBody>
-          <a:bodyPr wrap="none">
-            <a:spAutoFit/>
-          </a:bodyPr>
-          <a:lstStyle/>
-          <a:p>
-            <a:pPr algn="ctr"/>
-            <a:r>
-              <a:rPr lang="en-GB" sz="2800" b="1" dirty="0">
-                <a:solidFill>
-                  <a:srgbClr val="7030A0"/>
-                </a:solidFill>
-              </a:rPr>
-              <a:t>Use the system</a:t>
-            </a:r>
-            <a:endParaRPr lang="en-GB" dirty="0">
-              <a:solidFill>
-                <a:srgbClr val="7030A0"/>
-              </a:solidFill>
-            </a:endParaRPr>
-          </a:p>
-        </p:txBody>
-      </p:sp>
-      <p:sp>
-        <p:nvSpPr>
-          <p:cNvPr id="17" name="Rectangle 16">
-            <a:extLst>
-              <a:ext uri="{FF2B5EF4-FFF2-40B4-BE49-F238E27FC236}">
-                <a16:creationId xmlns:a16="http://schemas.microsoft.com/office/drawing/2014/main" id="{2F30E93A-CA2E-4A90-876C-B218CB0B7AAB}"/>
-              </a:ext>
-            </a:extLst>
-          </p:cNvPr>
-          <p:cNvSpPr/>
-          <p:nvPr/>
-        </p:nvSpPr>
-        <p:spPr>
-          <a:xfrm>
-            <a:off x="8191076" y="5962551"/>
-            <a:ext cx="3076355" cy="523220"/>
-          </a:xfrm>
-          <a:prstGeom prst="rect">
-            <a:avLst/>
-          </a:prstGeom>
-        </p:spPr>
-        <p:txBody>
-          <a:bodyPr wrap="none">
-            <a:spAutoFit/>
-          </a:bodyPr>
-          <a:lstStyle/>
-          <a:p>
-            <a:pPr algn="ctr"/>
-            <a:r>
-              <a:rPr lang="en-GB" sz="2800" b="1" dirty="0">
-                <a:solidFill>
-                  <a:srgbClr val="7030A0"/>
-                </a:solidFill>
-              </a:rPr>
-              <a:t>Support the system</a:t>
-            </a:r>
-            <a:endParaRPr lang="en-GB" dirty="0">
-              <a:solidFill>
-                <a:srgbClr val="7030A0"/>
-              </a:solidFill>
-            </a:endParaRPr>
-          </a:p>
-        </p:txBody>
-      </p:sp>
-      <p:sp>
-        <p:nvSpPr>
-          <p:cNvPr id="18" name="Rectangle 17">
-            <a:extLst>
-              <a:ext uri="{FF2B5EF4-FFF2-40B4-BE49-F238E27FC236}">
-                <a16:creationId xmlns:a16="http://schemas.microsoft.com/office/drawing/2014/main" id="{D88574CC-45EE-41B3-9E51-9F1267441FCF}"/>
-              </a:ext>
-            </a:extLst>
-          </p:cNvPr>
-          <p:cNvSpPr/>
-          <p:nvPr/>
-        </p:nvSpPr>
-        <p:spPr>
-          <a:xfrm>
-            <a:off x="2421256" y="1561240"/>
-            <a:ext cx="7349489" cy="2246769"/>
-          </a:xfrm>
-          <a:prstGeom prst="rect">
-            <a:avLst/>
-          </a:prstGeom>
-        </p:spPr>
-        <p:txBody>
-          <a:bodyPr wrap="square">
-            <a:spAutoFit/>
-          </a:bodyPr>
-          <a:lstStyle/>
-          <a:p>
-            <a:r>
-              <a:rPr lang="en-GB" sz="2800" dirty="0"/>
-              <a:t>A use case represents an action.</a:t>
-            </a:r>
-          </a:p>
-          <a:p>
-            <a:endParaRPr lang="en-GB" sz="2800" dirty="0"/>
-          </a:p>
-          <a:p>
-            <a:r>
-              <a:rPr lang="en-GB" sz="2800" dirty="0"/>
-              <a:t>Text: Verb – Action</a:t>
-            </a:r>
-          </a:p>
-          <a:p>
-            <a:endParaRPr lang="en-GB" sz="2800" dirty="0"/>
-          </a:p>
-          <a:p>
-            <a:r>
-              <a:rPr lang="en-GB" sz="2800" dirty="0"/>
-              <a:t>Logical order: top to bottom</a:t>
-            </a:r>
-          </a:p>
-        </p:txBody>
-      </p:sp>
-    </p:spTree>
-    <p:extLst>
-      <p:ext uri="{BB962C8B-B14F-4D97-AF65-F5344CB8AC3E}">
-        <p14:creationId xmlns:p14="http://schemas.microsoft.com/office/powerpoint/2010/main" val="1159162935"/>
-      </p:ext>
-    </p:extLst>
-  </p:cSld>
-  <p:clrMapOvr>
-    <a:masterClrMapping/>
-  </p:clrMapOvr>
-</p:sld>
-</file>
-
-<file path=ppt/slides/slide12.xml><?xml version="1.0" encoding="utf-8"?>
-<p:sld xmlns:a="http://schemas.openxmlformats.org/drawingml/2006/main" xmlns:r="http://schemas.openxmlformats.org/officeDocument/2006/relationships" xmlns:p="http://schemas.openxmlformats.org/presentationml/2006/main">
-  <p:cSld>
-    <p:spTree>
-      <p:nvGrpSpPr>
-        <p:cNvPr id="1" name=""/>
-        <p:cNvGrpSpPr/>
-        <p:nvPr/>
-      </p:nvGrpSpPr>
-      <p:grpSpPr>
-        <a:xfrm>
-          <a:off x="0" y="0"/>
-          <a:ext cx="0" cy="0"/>
-          <a:chOff x="0" y="0"/>
-          <a:chExt cx="0" cy="0"/>
-        </a:xfrm>
-      </p:grpSpPr>
-      <p:sp>
-        <p:nvSpPr>
-          <p:cNvPr id="2" name="Title 1"/>
-          <p:cNvSpPr>
-            <a:spLocks noGrp="1"/>
-          </p:cNvSpPr>
-          <p:nvPr>
-            <p:ph type="title"/>
-          </p:nvPr>
-        </p:nvSpPr>
-        <p:spPr/>
-        <p:txBody>
-          <a:bodyPr/>
-          <a:lstStyle/>
-          <a:p>
-            <a:r>
-              <a:rPr lang="en-GB" dirty="0"/>
-              <a:t>Relationship Types - Description</a:t>
+              <a:t>Actor - Description</a:t>
             </a:r>
           </a:p>
         </p:txBody>
@@ -12092,6 +10819,1356 @@
           </a:p>
         </p:txBody>
       </p:sp>
+      <p:sp>
+        <p:nvSpPr>
+          <p:cNvPr id="17" name="Rectangle 16">
+            <a:extLst>
+              <a:ext uri="{FF2B5EF4-FFF2-40B4-BE49-F238E27FC236}">
+                <a16:creationId xmlns:a16="http://schemas.microsoft.com/office/drawing/2014/main" id="{2F30E93A-CA2E-4A90-876C-B218CB0B7AAB}"/>
+              </a:ext>
+            </a:extLst>
+          </p:cNvPr>
+          <p:cNvSpPr/>
+          <p:nvPr/>
+        </p:nvSpPr>
+        <p:spPr>
+          <a:xfrm>
+            <a:off x="8191076" y="5962551"/>
+            <a:ext cx="3076355" cy="523220"/>
+          </a:xfrm>
+          <a:prstGeom prst="rect">
+            <a:avLst/>
+          </a:prstGeom>
+        </p:spPr>
+        <p:txBody>
+          <a:bodyPr wrap="none">
+            <a:spAutoFit/>
+          </a:bodyPr>
+          <a:lstStyle/>
+          <a:p>
+            <a:pPr algn="ctr"/>
+            <a:r>
+              <a:rPr lang="en-GB" sz="2800" b="1" dirty="0">
+                <a:solidFill>
+                  <a:srgbClr val="7030A0"/>
+                </a:solidFill>
+              </a:rPr>
+              <a:t>Support the system</a:t>
+            </a:r>
+            <a:endParaRPr lang="en-GB" dirty="0">
+              <a:solidFill>
+                <a:srgbClr val="7030A0"/>
+              </a:solidFill>
+            </a:endParaRPr>
+          </a:p>
+        </p:txBody>
+      </p:sp>
+      <p:sp>
+        <p:nvSpPr>
+          <p:cNvPr id="18" name="Rectangle 17">
+            <a:extLst>
+              <a:ext uri="{FF2B5EF4-FFF2-40B4-BE49-F238E27FC236}">
+                <a16:creationId xmlns:a16="http://schemas.microsoft.com/office/drawing/2014/main" id="{D88574CC-45EE-41B3-9E51-9F1267441FCF}"/>
+              </a:ext>
+            </a:extLst>
+          </p:cNvPr>
+          <p:cNvSpPr/>
+          <p:nvPr/>
+        </p:nvSpPr>
+        <p:spPr>
+          <a:xfrm>
+            <a:off x="2421256" y="1561240"/>
+            <a:ext cx="7349489" cy="2554545"/>
+          </a:xfrm>
+          <a:prstGeom prst="rect">
+            <a:avLst/>
+          </a:prstGeom>
+        </p:spPr>
+        <p:txBody>
+          <a:bodyPr wrap="square">
+            <a:spAutoFit/>
+          </a:bodyPr>
+          <a:lstStyle/>
+          <a:p>
+            <a:pPr>
+              <a:spcAft>
+                <a:spcPts val="600"/>
+              </a:spcAft>
+            </a:pPr>
+            <a:r>
+              <a:rPr lang="en-GB" sz="2800" dirty="0"/>
+              <a:t>An actor uses the system to achieve an outcome.</a:t>
+            </a:r>
+          </a:p>
+          <a:p>
+            <a:pPr lvl="4">
+              <a:spcAft>
+                <a:spcPts val="600"/>
+              </a:spcAft>
+            </a:pPr>
+            <a:r>
+              <a:rPr lang="en-GB" sz="2800" dirty="0"/>
+              <a:t>An actor can be:</a:t>
+            </a:r>
+          </a:p>
+          <a:p>
+            <a:pPr marL="2743200" lvl="5" indent="-457200">
+              <a:spcAft>
+                <a:spcPts val="600"/>
+              </a:spcAft>
+              <a:buFont typeface="Arial" panose="020B0604020202020204" pitchFamily="34" charset="0"/>
+              <a:buChar char="•"/>
+            </a:pPr>
+            <a:r>
+              <a:rPr lang="en-GB" sz="2800" dirty="0"/>
+              <a:t>a person</a:t>
+            </a:r>
+          </a:p>
+          <a:p>
+            <a:pPr marL="2743200" lvl="5" indent="-457200">
+              <a:spcAft>
+                <a:spcPts val="600"/>
+              </a:spcAft>
+              <a:buFont typeface="Arial" panose="020B0604020202020204" pitchFamily="34" charset="0"/>
+              <a:buChar char="•"/>
+            </a:pPr>
+            <a:r>
+              <a:rPr lang="en-GB" sz="2800" dirty="0"/>
+              <a:t>an organisation</a:t>
+            </a:r>
+          </a:p>
+          <a:p>
+            <a:pPr marL="2743200" lvl="5" indent="-457200">
+              <a:spcAft>
+                <a:spcPts val="600"/>
+              </a:spcAft>
+              <a:buFont typeface="Arial" panose="020B0604020202020204" pitchFamily="34" charset="0"/>
+              <a:buChar char="•"/>
+            </a:pPr>
+            <a:r>
+              <a:rPr lang="en-GB" sz="2800" dirty="0"/>
+              <a:t>another system</a:t>
+            </a:r>
+          </a:p>
+        </p:txBody>
+      </p:sp>
+      <p:cxnSp>
+        <p:nvCxnSpPr>
+          <p:cNvPr id="29" name="Straight Connector 28">
+            <a:extLst>
+              <a:ext uri="{FF2B5EF4-FFF2-40B4-BE49-F238E27FC236}">
+                <a16:creationId xmlns:a16="http://schemas.microsoft.com/office/drawing/2014/main" id="{FA43D775-B13A-41BA-A1F8-00B3CC6C3F2F}"/>
+              </a:ext>
+            </a:extLst>
+          </p:cNvPr>
+          <p:cNvCxnSpPr>
+            <a:cxnSpLocks/>
+          </p:cNvCxnSpPr>
+          <p:nvPr/>
+        </p:nvCxnSpPr>
+        <p:spPr>
+          <a:xfrm flipH="1">
+            <a:off x="3204213" y="4532781"/>
+            <a:ext cx="5783570" cy="0"/>
+          </a:xfrm>
+          <a:prstGeom prst="line">
+            <a:avLst/>
+          </a:prstGeom>
+          <a:ln w="44450">
+            <a:solidFill>
+              <a:schemeClr val="tx1"/>
+            </a:solidFill>
+            <a:tailEnd type="triangle" w="lg" len="lg"/>
+          </a:ln>
+        </p:spPr>
+        <p:style>
+          <a:lnRef idx="1">
+            <a:schemeClr val="accent1"/>
+          </a:lnRef>
+          <a:fillRef idx="0">
+            <a:schemeClr val="accent1"/>
+          </a:fillRef>
+          <a:effectRef idx="0">
+            <a:schemeClr val="accent1"/>
+          </a:effectRef>
+          <a:fontRef idx="minor">
+            <a:schemeClr val="tx1"/>
+          </a:fontRef>
+        </p:style>
+      </p:cxnSp>
+    </p:spTree>
+    <p:extLst>
+      <p:ext uri="{BB962C8B-B14F-4D97-AF65-F5344CB8AC3E}">
+        <p14:creationId xmlns:p14="http://schemas.microsoft.com/office/powerpoint/2010/main" val="237343473"/>
+      </p:ext>
+    </p:extLst>
+  </p:cSld>
+  <p:clrMapOvr>
+    <a:masterClrMapping/>
+  </p:clrMapOvr>
+  <p:timing>
+    <p:tnLst>
+      <p:par>
+        <p:cTn id="1" dur="indefinite" restart="never" nodeType="tmRoot">
+          <p:childTnLst>
+            <p:seq concurrent="1" nextAc="seek">
+              <p:cTn id="2" dur="indefinite" nodeType="mainSeq">
+                <p:childTnLst>
+                  <p:par>
+                    <p:cTn id="3" fill="hold">
+                      <p:stCondLst>
+                        <p:cond delay="indefinite"/>
+                      </p:stCondLst>
+                      <p:childTnLst>
+                        <p:par>
+                          <p:cTn id="4" fill="hold">
+                            <p:stCondLst>
+                              <p:cond delay="0"/>
+                            </p:stCondLst>
+                            <p:childTnLst>
+                              <p:par>
+                                <p:cTn id="5" presetID="22" presetClass="entr" presetSubtype="8" fill="hold" nodeType="clickEffect">
+                                  <p:stCondLst>
+                                    <p:cond delay="0"/>
+                                  </p:stCondLst>
+                                  <p:childTnLst>
+                                    <p:set>
+                                      <p:cBhvr>
+                                        <p:cTn id="6" dur="1" fill="hold">
+                                          <p:stCondLst>
+                                            <p:cond delay="0"/>
+                                          </p:stCondLst>
+                                        </p:cTn>
+                                        <p:tgtEl>
+                                          <p:spTgt spid="29"/>
+                                        </p:tgtEl>
+                                        <p:attrNameLst>
+                                          <p:attrName>style.visibility</p:attrName>
+                                        </p:attrNameLst>
+                                      </p:cBhvr>
+                                      <p:to>
+                                        <p:strVal val="visible"/>
+                                      </p:to>
+                                    </p:set>
+                                    <p:animEffect transition="in" filter="wipe(left)">
+                                      <p:cBhvr>
+                                        <p:cTn id="7" dur="500"/>
+                                        <p:tgtEl>
+                                          <p:spTgt spid="29"/>
+                                        </p:tgtEl>
+                                      </p:cBhvr>
+                                    </p:animEffect>
+                                  </p:childTnLst>
+                                </p:cTn>
+                              </p:par>
+                            </p:childTnLst>
+                          </p:cTn>
+                        </p:par>
+                      </p:childTnLst>
+                    </p:cTn>
+                  </p:par>
+                  <p:par>
+                    <p:cTn id="8" fill="hold">
+                      <p:stCondLst>
+                        <p:cond delay="indefinite"/>
+                      </p:stCondLst>
+                      <p:childTnLst>
+                        <p:par>
+                          <p:cTn id="9" fill="hold">
+                            <p:stCondLst>
+                              <p:cond delay="0"/>
+                            </p:stCondLst>
+                            <p:childTnLst>
+                              <p:par>
+                                <p:cTn id="10" presetID="22" presetClass="entr" presetSubtype="1" fill="hold" nodeType="clickEffect">
+                                  <p:stCondLst>
+                                    <p:cond delay="0"/>
+                                  </p:stCondLst>
+                                  <p:childTnLst>
+                                    <p:set>
+                                      <p:cBhvr>
+                                        <p:cTn id="11" dur="1" fill="hold">
+                                          <p:stCondLst>
+                                            <p:cond delay="0"/>
+                                          </p:stCondLst>
+                                        </p:cTn>
+                                        <p:tgtEl>
+                                          <p:spTgt spid="30"/>
+                                        </p:tgtEl>
+                                        <p:attrNameLst>
+                                          <p:attrName>style.visibility</p:attrName>
+                                        </p:attrNameLst>
+                                      </p:cBhvr>
+                                      <p:to>
+                                        <p:strVal val="visible"/>
+                                      </p:to>
+                                    </p:set>
+                                    <p:animEffect transition="in" filter="wipe(up)">
+                                      <p:cBhvr>
+                                        <p:cTn id="12" dur="500"/>
+                                        <p:tgtEl>
+                                          <p:spTgt spid="30"/>
+                                        </p:tgtEl>
+                                      </p:cBhvr>
+                                    </p:animEffect>
+                                  </p:childTnLst>
+                                </p:cTn>
+                              </p:par>
+                            </p:childTnLst>
+                          </p:cTn>
+                        </p:par>
+                      </p:childTnLst>
+                    </p:cTn>
+                  </p:par>
+                  <p:par>
+                    <p:cTn id="13" fill="hold">
+                      <p:stCondLst>
+                        <p:cond delay="indefinite"/>
+                      </p:stCondLst>
+                      <p:childTnLst>
+                        <p:par>
+                          <p:cTn id="14" fill="hold">
+                            <p:stCondLst>
+                              <p:cond delay="0"/>
+                            </p:stCondLst>
+                            <p:childTnLst>
+                              <p:par>
+                                <p:cTn id="15" presetID="22" presetClass="entr" presetSubtype="1" fill="hold" nodeType="clickEffect">
+                                  <p:stCondLst>
+                                    <p:cond delay="0"/>
+                                  </p:stCondLst>
+                                  <p:childTnLst>
+                                    <p:set>
+                                      <p:cBhvr>
+                                        <p:cTn id="16" dur="1" fill="hold">
+                                          <p:stCondLst>
+                                            <p:cond delay="0"/>
+                                          </p:stCondLst>
+                                        </p:cTn>
+                                        <p:tgtEl>
+                                          <p:spTgt spid="31"/>
+                                        </p:tgtEl>
+                                        <p:attrNameLst>
+                                          <p:attrName>style.visibility</p:attrName>
+                                        </p:attrNameLst>
+                                      </p:cBhvr>
+                                      <p:to>
+                                        <p:strVal val="visible"/>
+                                      </p:to>
+                                    </p:set>
+                                    <p:animEffect transition="in" filter="wipe(up)">
+                                      <p:cBhvr>
+                                        <p:cTn id="17" dur="500"/>
+                                        <p:tgtEl>
+                                          <p:spTgt spid="31"/>
+                                        </p:tgtEl>
+                                      </p:cBhvr>
+                                    </p:animEffect>
+                                  </p:childTnLst>
+                                </p:cTn>
+                              </p:par>
+                            </p:childTnLst>
+                          </p:cTn>
+                        </p:par>
+                      </p:childTnLst>
+                    </p:cTn>
+                  </p:par>
+                </p:childTnLst>
+              </p:cTn>
+              <p:prevCondLst>
+                <p:cond evt="onPrev" delay="0">
+                  <p:tgtEl>
+                    <p:sldTgt/>
+                  </p:tgtEl>
+                </p:cond>
+              </p:prevCondLst>
+              <p:nextCondLst>
+                <p:cond evt="onNext" delay="0">
+                  <p:tgtEl>
+                    <p:sldTgt/>
+                  </p:tgtEl>
+                </p:cond>
+              </p:nextCondLst>
+            </p:seq>
+          </p:childTnLst>
+        </p:cTn>
+      </p:par>
+    </p:tnLst>
+  </p:timing>
+</p:sld>
+</file>
+
+<file path=ppt/slides/slide12.xml><?xml version="1.0" encoding="utf-8"?>
+<p:sld xmlns:a="http://schemas.openxmlformats.org/drawingml/2006/main" xmlns:r="http://schemas.openxmlformats.org/officeDocument/2006/relationships" xmlns:p="http://schemas.openxmlformats.org/presentationml/2006/main">
+  <p:cSld>
+    <p:spTree>
+      <p:nvGrpSpPr>
+        <p:cNvPr id="1" name=""/>
+        <p:cNvGrpSpPr/>
+        <p:nvPr/>
+      </p:nvGrpSpPr>
+      <p:grpSpPr>
+        <a:xfrm>
+          <a:off x="0" y="0"/>
+          <a:ext cx="0" cy="0"/>
+          <a:chOff x="0" y="0"/>
+          <a:chExt cx="0" cy="0"/>
+        </a:xfrm>
+      </p:grpSpPr>
+      <p:sp>
+        <p:nvSpPr>
+          <p:cNvPr id="2" name="Title 1"/>
+          <p:cNvSpPr>
+            <a:spLocks noGrp="1"/>
+          </p:cNvSpPr>
+          <p:nvPr>
+            <p:ph type="title"/>
+          </p:nvPr>
+        </p:nvSpPr>
+        <p:spPr/>
+        <p:txBody>
+          <a:bodyPr/>
+          <a:lstStyle/>
+          <a:p>
+            <a:r>
+              <a:rPr lang="en-GB" dirty="0"/>
+              <a:t>Use Cases - Relationships</a:t>
+            </a:r>
+          </a:p>
+        </p:txBody>
+      </p:sp>
+      <p:sp>
+        <p:nvSpPr>
+          <p:cNvPr id="9" name="Oval 8">
+            <a:extLst>
+              <a:ext uri="{FF2B5EF4-FFF2-40B4-BE49-F238E27FC236}">
+                <a16:creationId xmlns:a16="http://schemas.microsoft.com/office/drawing/2014/main" id="{EE2EFB0E-AB56-4E96-9F15-7393AA54BFAA}"/>
+              </a:ext>
+            </a:extLst>
+          </p:cNvPr>
+          <p:cNvSpPr/>
+          <p:nvPr/>
+        </p:nvSpPr>
+        <p:spPr>
+          <a:xfrm>
+            <a:off x="1055492" y="3520442"/>
+            <a:ext cx="2160000" cy="1080000"/>
+          </a:xfrm>
+          <a:prstGeom prst="ellipse">
+            <a:avLst/>
+          </a:prstGeom>
+          <a:noFill/>
+          <a:ln w="28575">
+            <a:solidFill>
+              <a:schemeClr val="tx1"/>
+            </a:solidFill>
+          </a:ln>
+        </p:spPr>
+        <p:style>
+          <a:lnRef idx="2">
+            <a:schemeClr val="accent1">
+              <a:shade val="50000"/>
+            </a:schemeClr>
+          </a:lnRef>
+          <a:fillRef idx="1">
+            <a:schemeClr val="accent1"/>
+          </a:fillRef>
+          <a:effectRef idx="0">
+            <a:schemeClr val="accent1"/>
+          </a:effectRef>
+          <a:fontRef idx="minor">
+            <a:schemeClr val="lt1"/>
+          </a:fontRef>
+        </p:style>
+        <p:txBody>
+          <a:bodyPr rtlCol="0" anchor="ctr"/>
+          <a:lstStyle/>
+          <a:p>
+            <a:pPr algn="ctr"/>
+            <a:r>
+              <a:rPr lang="en-GB" sz="2800" b="1" dirty="0">
+                <a:solidFill>
+                  <a:srgbClr val="0070C0"/>
+                </a:solidFill>
+              </a:rPr>
+              <a:t>Pay</a:t>
+            </a:r>
+          </a:p>
+        </p:txBody>
+      </p:sp>
+      <p:sp>
+        <p:nvSpPr>
+          <p:cNvPr id="21" name="Oval 20">
+            <a:extLst>
+              <a:ext uri="{FF2B5EF4-FFF2-40B4-BE49-F238E27FC236}">
+                <a16:creationId xmlns:a16="http://schemas.microsoft.com/office/drawing/2014/main" id="{65F9084E-A1EA-4464-9384-FDA12CD1EE06}"/>
+              </a:ext>
+            </a:extLst>
+          </p:cNvPr>
+          <p:cNvSpPr/>
+          <p:nvPr/>
+        </p:nvSpPr>
+        <p:spPr>
+          <a:xfrm>
+            <a:off x="7477051" y="2116023"/>
+            <a:ext cx="2160000" cy="1080000"/>
+          </a:xfrm>
+          <a:prstGeom prst="ellipse">
+            <a:avLst/>
+          </a:prstGeom>
+          <a:noFill/>
+          <a:ln w="28575">
+            <a:solidFill>
+              <a:schemeClr val="tx1"/>
+            </a:solidFill>
+          </a:ln>
+        </p:spPr>
+        <p:style>
+          <a:lnRef idx="2">
+            <a:schemeClr val="accent1">
+              <a:shade val="50000"/>
+            </a:schemeClr>
+          </a:lnRef>
+          <a:fillRef idx="1">
+            <a:schemeClr val="accent1"/>
+          </a:fillRef>
+          <a:effectRef idx="0">
+            <a:schemeClr val="accent1"/>
+          </a:effectRef>
+          <a:fontRef idx="minor">
+            <a:schemeClr val="lt1"/>
+          </a:fontRef>
+        </p:style>
+        <p:txBody>
+          <a:bodyPr rtlCol="0" anchor="ctr"/>
+          <a:lstStyle/>
+          <a:p>
+            <a:pPr algn="ctr"/>
+            <a:r>
+              <a:rPr lang="en-GB" sz="2800" b="1" dirty="0">
+                <a:solidFill>
+                  <a:srgbClr val="0070C0"/>
+                </a:solidFill>
+              </a:rPr>
+              <a:t>Select drink</a:t>
+            </a:r>
+          </a:p>
+        </p:txBody>
+      </p:sp>
+      <p:sp>
+        <p:nvSpPr>
+          <p:cNvPr id="22" name="Oval 21">
+            <a:extLst>
+              <a:ext uri="{FF2B5EF4-FFF2-40B4-BE49-F238E27FC236}">
+                <a16:creationId xmlns:a16="http://schemas.microsoft.com/office/drawing/2014/main" id="{CDAB617F-D868-4AAD-BA99-EFE6D44FFB55}"/>
+              </a:ext>
+            </a:extLst>
+          </p:cNvPr>
+          <p:cNvSpPr/>
+          <p:nvPr/>
+        </p:nvSpPr>
+        <p:spPr>
+          <a:xfrm>
+            <a:off x="7477051" y="4322052"/>
+            <a:ext cx="2160000" cy="1080000"/>
+          </a:xfrm>
+          <a:prstGeom prst="ellipse">
+            <a:avLst/>
+          </a:prstGeom>
+          <a:noFill/>
+          <a:ln w="28575">
+            <a:solidFill>
+              <a:schemeClr val="tx1"/>
+            </a:solidFill>
+          </a:ln>
+        </p:spPr>
+        <p:style>
+          <a:lnRef idx="2">
+            <a:schemeClr val="accent1">
+              <a:shade val="50000"/>
+            </a:schemeClr>
+          </a:lnRef>
+          <a:fillRef idx="1">
+            <a:schemeClr val="accent1"/>
+          </a:fillRef>
+          <a:effectRef idx="0">
+            <a:schemeClr val="accent1"/>
+          </a:effectRef>
+          <a:fontRef idx="minor">
+            <a:schemeClr val="lt1"/>
+          </a:fontRef>
+        </p:style>
+        <p:txBody>
+          <a:bodyPr rtlCol="0" anchor="ctr"/>
+          <a:lstStyle/>
+          <a:p>
+            <a:pPr algn="ctr"/>
+            <a:r>
+              <a:rPr lang="en-GB" sz="2800" b="1" dirty="0">
+                <a:solidFill>
+                  <a:srgbClr val="0070C0"/>
+                </a:solidFill>
+              </a:rPr>
+              <a:t>Print receipt</a:t>
+            </a:r>
+          </a:p>
+        </p:txBody>
+      </p:sp>
+      <p:cxnSp>
+        <p:nvCxnSpPr>
+          <p:cNvPr id="24" name="Straight Arrow Connector 23">
+            <a:extLst>
+              <a:ext uri="{FF2B5EF4-FFF2-40B4-BE49-F238E27FC236}">
+                <a16:creationId xmlns:a16="http://schemas.microsoft.com/office/drawing/2014/main" id="{440C0681-510B-4743-9A20-D172D0F4A65E}"/>
+              </a:ext>
+            </a:extLst>
+          </p:cNvPr>
+          <p:cNvCxnSpPr>
+            <a:cxnSpLocks/>
+            <a:endCxn id="21" idx="2"/>
+          </p:cNvCxnSpPr>
+          <p:nvPr/>
+        </p:nvCxnSpPr>
+        <p:spPr>
+          <a:xfrm flipV="1">
+            <a:off x="3303270" y="2656023"/>
+            <a:ext cx="4173781" cy="1210168"/>
+          </a:xfrm>
+          <a:prstGeom prst="straightConnector1">
+            <a:avLst/>
+          </a:prstGeom>
+          <a:ln w="38100">
+            <a:solidFill>
+              <a:schemeClr val="tx1"/>
+            </a:solidFill>
+            <a:prstDash val="dash"/>
+            <a:headEnd w="lg" len="lg"/>
+            <a:tailEnd type="triangle" w="lg" len="lg"/>
+          </a:ln>
+        </p:spPr>
+        <p:style>
+          <a:lnRef idx="1">
+            <a:schemeClr val="accent1"/>
+          </a:lnRef>
+          <a:fillRef idx="0">
+            <a:schemeClr val="accent1"/>
+          </a:fillRef>
+          <a:effectRef idx="0">
+            <a:schemeClr val="accent1"/>
+          </a:effectRef>
+          <a:fontRef idx="minor">
+            <a:schemeClr val="tx1"/>
+          </a:fontRef>
+        </p:style>
+      </p:cxnSp>
+      <p:cxnSp>
+        <p:nvCxnSpPr>
+          <p:cNvPr id="27" name="Straight Arrow Connector 26">
+            <a:extLst>
+              <a:ext uri="{FF2B5EF4-FFF2-40B4-BE49-F238E27FC236}">
+                <a16:creationId xmlns:a16="http://schemas.microsoft.com/office/drawing/2014/main" id="{5FD594C9-5C27-4A4C-B85E-7B863E6D3F4E}"/>
+              </a:ext>
+            </a:extLst>
+          </p:cNvPr>
+          <p:cNvCxnSpPr>
+            <a:cxnSpLocks/>
+            <a:stCxn id="22" idx="2"/>
+          </p:cNvCxnSpPr>
+          <p:nvPr/>
+        </p:nvCxnSpPr>
+        <p:spPr>
+          <a:xfrm flipH="1" flipV="1">
+            <a:off x="3215492" y="4265234"/>
+            <a:ext cx="4261559" cy="596818"/>
+          </a:xfrm>
+          <a:prstGeom prst="straightConnector1">
+            <a:avLst/>
+          </a:prstGeom>
+          <a:ln w="38100">
+            <a:solidFill>
+              <a:schemeClr val="tx1"/>
+            </a:solidFill>
+            <a:prstDash val="dash"/>
+            <a:headEnd w="lg" len="lg"/>
+            <a:tailEnd type="triangle" w="lg" len="lg"/>
+          </a:ln>
+        </p:spPr>
+        <p:style>
+          <a:lnRef idx="1">
+            <a:schemeClr val="accent1"/>
+          </a:lnRef>
+          <a:fillRef idx="0">
+            <a:schemeClr val="accent1"/>
+          </a:fillRef>
+          <a:effectRef idx="0">
+            <a:schemeClr val="accent1"/>
+          </a:effectRef>
+          <a:fontRef idx="minor">
+            <a:schemeClr val="tx1"/>
+          </a:fontRef>
+        </p:style>
+      </p:cxnSp>
+      <p:sp>
+        <p:nvSpPr>
+          <p:cNvPr id="32" name="TextBox 31">
+            <a:extLst>
+              <a:ext uri="{FF2B5EF4-FFF2-40B4-BE49-F238E27FC236}">
+                <a16:creationId xmlns:a16="http://schemas.microsoft.com/office/drawing/2014/main" id="{85CDA261-9BB5-4CC4-B2DE-8D9152BEA2AF}"/>
+              </a:ext>
+            </a:extLst>
+          </p:cNvPr>
+          <p:cNvSpPr txBox="1"/>
+          <p:nvPr/>
+        </p:nvSpPr>
+        <p:spPr>
+          <a:xfrm>
+            <a:off x="4602927" y="2961325"/>
+            <a:ext cx="1614545" cy="523220"/>
+          </a:xfrm>
+          <a:prstGeom prst="rect">
+            <a:avLst/>
+          </a:prstGeom>
+          <a:solidFill>
+            <a:srgbClr val="BDD7EE"/>
+          </a:solidFill>
+        </p:spPr>
+        <p:txBody>
+          <a:bodyPr wrap="none" rtlCol="0">
+            <a:spAutoFit/>
+          </a:bodyPr>
+          <a:lstStyle/>
+          <a:p>
+            <a:r>
+              <a:rPr lang="en-GB" sz="2800" dirty="0"/>
+              <a:t>«include»</a:t>
+            </a:r>
+          </a:p>
+        </p:txBody>
+      </p:sp>
+      <p:sp>
+        <p:nvSpPr>
+          <p:cNvPr id="33" name="TextBox 32">
+            <a:extLst>
+              <a:ext uri="{FF2B5EF4-FFF2-40B4-BE49-F238E27FC236}">
+                <a16:creationId xmlns:a16="http://schemas.microsoft.com/office/drawing/2014/main" id="{5FA2AB05-D591-4DE1-930E-0EDCED894325}"/>
+              </a:ext>
+            </a:extLst>
+          </p:cNvPr>
+          <p:cNvSpPr txBox="1"/>
+          <p:nvPr/>
+        </p:nvSpPr>
+        <p:spPr>
+          <a:xfrm>
+            <a:off x="4612671" y="4302033"/>
+            <a:ext cx="1554977" cy="523220"/>
+          </a:xfrm>
+          <a:prstGeom prst="rect">
+            <a:avLst/>
+          </a:prstGeom>
+          <a:solidFill>
+            <a:srgbClr val="BDD7EE"/>
+          </a:solidFill>
+        </p:spPr>
+        <p:txBody>
+          <a:bodyPr wrap="none" rtlCol="0">
+            <a:spAutoFit/>
+          </a:bodyPr>
+          <a:lstStyle/>
+          <a:p>
+            <a:r>
+              <a:rPr lang="en-GB" sz="2800" dirty="0"/>
+              <a:t>«extend»</a:t>
+            </a:r>
+          </a:p>
+        </p:txBody>
+      </p:sp>
+      <p:sp>
+        <p:nvSpPr>
+          <p:cNvPr id="39" name="Callout: Line with No Border 38">
+            <a:extLst>
+              <a:ext uri="{FF2B5EF4-FFF2-40B4-BE49-F238E27FC236}">
+                <a16:creationId xmlns:a16="http://schemas.microsoft.com/office/drawing/2014/main" id="{C90D3FE8-1169-4EDF-A2ED-2F943CD5C876}"/>
+              </a:ext>
+            </a:extLst>
+          </p:cNvPr>
+          <p:cNvSpPr/>
+          <p:nvPr/>
+        </p:nvSpPr>
+        <p:spPr>
+          <a:xfrm>
+            <a:off x="10128972" y="3399294"/>
+            <a:ext cx="1866456" cy="340399"/>
+          </a:xfrm>
+          <a:prstGeom prst="callout1">
+            <a:avLst>
+              <a:gd name="adj1" fmla="val 51692"/>
+              <a:gd name="adj2" fmla="val 149"/>
+              <a:gd name="adj3" fmla="val -125769"/>
+              <a:gd name="adj4" fmla="val -33854"/>
+            </a:avLst>
+          </a:prstGeom>
+          <a:noFill/>
+          <a:ln w="38100">
+            <a:solidFill>
+              <a:schemeClr val="accent6">
+                <a:lumMod val="75000"/>
+              </a:schemeClr>
+            </a:solidFill>
+            <a:headEnd w="lg" len="lg"/>
+            <a:tailEnd type="triangle" w="lg" len="lg"/>
+          </a:ln>
+        </p:spPr>
+        <p:style>
+          <a:lnRef idx="2">
+            <a:schemeClr val="accent1">
+              <a:shade val="50000"/>
+            </a:schemeClr>
+          </a:lnRef>
+          <a:fillRef idx="1">
+            <a:schemeClr val="accent1"/>
+          </a:fillRef>
+          <a:effectRef idx="0">
+            <a:schemeClr val="accent1"/>
+          </a:effectRef>
+          <a:fontRef idx="minor">
+            <a:schemeClr val="lt1"/>
+          </a:fontRef>
+        </p:style>
+        <p:txBody>
+          <a:bodyPr rtlCol="0" anchor="ctr"/>
+          <a:lstStyle/>
+          <a:p>
+            <a:r>
+              <a:rPr lang="en-GB" sz="2800" b="1" dirty="0">
+                <a:solidFill>
+                  <a:srgbClr val="7030A0"/>
+                </a:solidFill>
+              </a:rPr>
+              <a:t>Mandatory</a:t>
+            </a:r>
+          </a:p>
+        </p:txBody>
+      </p:sp>
+      <p:sp>
+        <p:nvSpPr>
+          <p:cNvPr id="40" name="Callout: Line with No Border 39">
+            <a:extLst>
+              <a:ext uri="{FF2B5EF4-FFF2-40B4-BE49-F238E27FC236}">
+                <a16:creationId xmlns:a16="http://schemas.microsoft.com/office/drawing/2014/main" id="{F0D9822E-881E-4E96-ACB0-4C7728754CF3}"/>
+              </a:ext>
+            </a:extLst>
+          </p:cNvPr>
+          <p:cNvSpPr/>
+          <p:nvPr/>
+        </p:nvSpPr>
+        <p:spPr>
+          <a:xfrm>
+            <a:off x="5869759" y="5802799"/>
+            <a:ext cx="1515814" cy="467961"/>
+          </a:xfrm>
+          <a:prstGeom prst="callout1">
+            <a:avLst>
+              <a:gd name="adj1" fmla="val 50466"/>
+              <a:gd name="adj2" fmla="val 100987"/>
+              <a:gd name="adj3" fmla="val -111356"/>
+              <a:gd name="adj4" fmla="val 133941"/>
+            </a:avLst>
+          </a:prstGeom>
+          <a:noFill/>
+          <a:ln w="38100">
+            <a:solidFill>
+              <a:schemeClr val="accent6">
+                <a:lumMod val="75000"/>
+              </a:schemeClr>
+            </a:solidFill>
+            <a:headEnd w="lg" len="lg"/>
+            <a:tailEnd type="triangle" w="lg" len="lg"/>
+          </a:ln>
+        </p:spPr>
+        <p:style>
+          <a:lnRef idx="2">
+            <a:schemeClr val="accent1">
+              <a:shade val="50000"/>
+            </a:schemeClr>
+          </a:lnRef>
+          <a:fillRef idx="1">
+            <a:schemeClr val="accent1"/>
+          </a:fillRef>
+          <a:effectRef idx="0">
+            <a:schemeClr val="accent1"/>
+          </a:effectRef>
+          <a:fontRef idx="minor">
+            <a:schemeClr val="lt1"/>
+          </a:fontRef>
+        </p:style>
+        <p:txBody>
+          <a:bodyPr rtlCol="0" anchor="ctr"/>
+          <a:lstStyle/>
+          <a:p>
+            <a:pPr algn="r"/>
+            <a:r>
+              <a:rPr lang="en-GB" sz="2800" b="1" dirty="0">
+                <a:solidFill>
+                  <a:srgbClr val="7030A0"/>
+                </a:solidFill>
+              </a:rPr>
+              <a:t>Optional</a:t>
+            </a:r>
+          </a:p>
+        </p:txBody>
+      </p:sp>
+      <p:sp>
+        <p:nvSpPr>
+          <p:cNvPr id="42" name="Rectangle 41">
+            <a:extLst>
+              <a:ext uri="{FF2B5EF4-FFF2-40B4-BE49-F238E27FC236}">
+                <a16:creationId xmlns:a16="http://schemas.microsoft.com/office/drawing/2014/main" id="{F5F9953F-5BB6-4F85-90AC-D05F2552F76A}"/>
+              </a:ext>
+            </a:extLst>
+          </p:cNvPr>
+          <p:cNvSpPr/>
+          <p:nvPr/>
+        </p:nvSpPr>
+        <p:spPr>
+          <a:xfrm>
+            <a:off x="838200" y="1537574"/>
+            <a:ext cx="9144000" cy="4053601"/>
+          </a:xfrm>
+          <a:prstGeom prst="rect">
+            <a:avLst/>
+          </a:prstGeom>
+          <a:noFill/>
+          <a:ln w="38100">
+            <a:solidFill>
+              <a:schemeClr val="tx1"/>
+            </a:solidFill>
+          </a:ln>
+        </p:spPr>
+        <p:style>
+          <a:lnRef idx="2">
+            <a:schemeClr val="accent1">
+              <a:shade val="50000"/>
+            </a:schemeClr>
+          </a:lnRef>
+          <a:fillRef idx="1">
+            <a:schemeClr val="accent1"/>
+          </a:fillRef>
+          <a:effectRef idx="0">
+            <a:schemeClr val="accent1"/>
+          </a:effectRef>
+          <a:fontRef idx="minor">
+            <a:schemeClr val="lt1"/>
+          </a:fontRef>
+        </p:style>
+        <p:txBody>
+          <a:bodyPr rtlCol="0" anchor="t" anchorCtr="0"/>
+          <a:lstStyle/>
+          <a:p>
+            <a:r>
+              <a:rPr lang="en-GB" sz="2800" b="1" dirty="0">
+                <a:solidFill>
+                  <a:schemeClr val="tx1"/>
+                </a:solidFill>
+              </a:rPr>
+              <a:t>Drinks Vending Machine</a:t>
+            </a:r>
+          </a:p>
+        </p:txBody>
+      </p:sp>
+      <p:sp>
+        <p:nvSpPr>
+          <p:cNvPr id="3" name="Rectangle 2">
+            <a:extLst>
+              <a:ext uri="{FF2B5EF4-FFF2-40B4-BE49-F238E27FC236}">
+                <a16:creationId xmlns:a16="http://schemas.microsoft.com/office/drawing/2014/main" id="{6B73F8E2-351C-B873-7A2F-0D4291693A98}"/>
+              </a:ext>
+            </a:extLst>
+          </p:cNvPr>
+          <p:cNvSpPr/>
+          <p:nvPr/>
+        </p:nvSpPr>
+        <p:spPr>
+          <a:xfrm>
+            <a:off x="838200" y="1537574"/>
+            <a:ext cx="3812381" cy="540000"/>
+          </a:xfrm>
+          <a:prstGeom prst="rect">
+            <a:avLst/>
+          </a:prstGeom>
+          <a:noFill/>
+          <a:ln w="38100">
+            <a:solidFill>
+              <a:schemeClr val="tx1"/>
+            </a:solidFill>
+          </a:ln>
+        </p:spPr>
+        <p:style>
+          <a:lnRef idx="2">
+            <a:schemeClr val="accent1">
+              <a:shade val="15000"/>
+            </a:schemeClr>
+          </a:lnRef>
+          <a:fillRef idx="1">
+            <a:schemeClr val="accent1"/>
+          </a:fillRef>
+          <a:effectRef idx="0">
+            <a:schemeClr val="accent1"/>
+          </a:effectRef>
+          <a:fontRef idx="minor">
+            <a:schemeClr val="lt1"/>
+          </a:fontRef>
+        </p:style>
+        <p:txBody>
+          <a:bodyPr rtlCol="0" anchor="ctr"/>
+          <a:lstStyle/>
+          <a:p>
+            <a:pPr algn="ctr"/>
+            <a:endParaRPr lang="en-GB"/>
+          </a:p>
+        </p:txBody>
+      </p:sp>
+    </p:spTree>
+    <p:extLst>
+      <p:ext uri="{BB962C8B-B14F-4D97-AF65-F5344CB8AC3E}">
+        <p14:creationId xmlns:p14="http://schemas.microsoft.com/office/powerpoint/2010/main" val="3895107268"/>
+      </p:ext>
+    </p:extLst>
+  </p:cSld>
+  <p:clrMapOvr>
+    <a:masterClrMapping/>
+  </p:clrMapOvr>
+</p:sld>
+</file>
+
+<file path=ppt/slides/slide13.xml><?xml version="1.0" encoding="utf-8"?>
+<p:sld xmlns:a="http://schemas.openxmlformats.org/drawingml/2006/main" xmlns:r="http://schemas.openxmlformats.org/officeDocument/2006/relationships" xmlns:p="http://schemas.openxmlformats.org/presentationml/2006/main">
+  <p:cSld>
+    <p:spTree>
+      <p:nvGrpSpPr>
+        <p:cNvPr id="1" name=""/>
+        <p:cNvGrpSpPr/>
+        <p:nvPr/>
+      </p:nvGrpSpPr>
+      <p:grpSpPr>
+        <a:xfrm>
+          <a:off x="0" y="0"/>
+          <a:ext cx="0" cy="0"/>
+          <a:chOff x="0" y="0"/>
+          <a:chExt cx="0" cy="0"/>
+        </a:xfrm>
+      </p:grpSpPr>
+      <p:sp>
+        <p:nvSpPr>
+          <p:cNvPr id="2" name="Title 1"/>
+          <p:cNvSpPr>
+            <a:spLocks noGrp="1"/>
+          </p:cNvSpPr>
+          <p:nvPr>
+            <p:ph type="title"/>
+          </p:nvPr>
+        </p:nvSpPr>
+        <p:spPr/>
+        <p:txBody>
+          <a:bodyPr/>
+          <a:lstStyle/>
+          <a:p>
+            <a:r>
+              <a:rPr lang="en-GB" dirty="0"/>
+              <a:t>Use Case - Description</a:t>
+            </a:r>
+          </a:p>
+        </p:txBody>
+      </p:sp>
+      <p:sp>
+        <p:nvSpPr>
+          <p:cNvPr id="18" name="Rectangle 17">
+            <a:extLst>
+              <a:ext uri="{FF2B5EF4-FFF2-40B4-BE49-F238E27FC236}">
+                <a16:creationId xmlns:a16="http://schemas.microsoft.com/office/drawing/2014/main" id="{D88574CC-45EE-41B3-9E51-9F1267441FCF}"/>
+              </a:ext>
+            </a:extLst>
+          </p:cNvPr>
+          <p:cNvSpPr/>
+          <p:nvPr/>
+        </p:nvSpPr>
+        <p:spPr>
+          <a:xfrm>
+            <a:off x="2421256" y="1561240"/>
+            <a:ext cx="7349489" cy="2246769"/>
+          </a:xfrm>
+          <a:prstGeom prst="rect">
+            <a:avLst/>
+          </a:prstGeom>
+        </p:spPr>
+        <p:txBody>
+          <a:bodyPr wrap="square">
+            <a:spAutoFit/>
+          </a:bodyPr>
+          <a:lstStyle/>
+          <a:p>
+            <a:r>
+              <a:rPr lang="en-GB" sz="2800" dirty="0"/>
+              <a:t>A use case represents an action.</a:t>
+            </a:r>
+          </a:p>
+          <a:p>
+            <a:endParaRPr lang="en-GB" sz="2800" dirty="0"/>
+          </a:p>
+          <a:p>
+            <a:r>
+              <a:rPr lang="en-GB" sz="2800" dirty="0"/>
+              <a:t>Text: Verb – Action</a:t>
+            </a:r>
+          </a:p>
+          <a:p>
+            <a:endParaRPr lang="en-GB" sz="2800" dirty="0"/>
+          </a:p>
+          <a:p>
+            <a:r>
+              <a:rPr lang="en-GB" sz="2800" dirty="0"/>
+              <a:t>Logical order: top to bottom</a:t>
+            </a:r>
+          </a:p>
+        </p:txBody>
+      </p:sp>
+    </p:spTree>
+    <p:extLst>
+      <p:ext uri="{BB962C8B-B14F-4D97-AF65-F5344CB8AC3E}">
+        <p14:creationId xmlns:p14="http://schemas.microsoft.com/office/powerpoint/2010/main" val="1159162935"/>
+      </p:ext>
+    </p:extLst>
+  </p:cSld>
+  <p:clrMapOvr>
+    <a:masterClrMapping/>
+  </p:clrMapOvr>
+</p:sld>
+</file>
+
+<file path=ppt/slides/slide14.xml><?xml version="1.0" encoding="utf-8"?>
+<p:sld xmlns:a="http://schemas.openxmlformats.org/drawingml/2006/main" xmlns:r="http://schemas.openxmlformats.org/officeDocument/2006/relationships" xmlns:p="http://schemas.openxmlformats.org/presentationml/2006/main">
+  <p:cSld>
+    <p:spTree>
+      <p:nvGrpSpPr>
+        <p:cNvPr id="1" name=""/>
+        <p:cNvGrpSpPr/>
+        <p:nvPr/>
+      </p:nvGrpSpPr>
+      <p:grpSpPr>
+        <a:xfrm>
+          <a:off x="0" y="0"/>
+          <a:ext cx="0" cy="0"/>
+          <a:chOff x="0" y="0"/>
+          <a:chExt cx="0" cy="0"/>
+        </a:xfrm>
+      </p:grpSpPr>
+      <p:sp>
+        <p:nvSpPr>
+          <p:cNvPr id="2" name="Title 1"/>
+          <p:cNvSpPr>
+            <a:spLocks noGrp="1"/>
+          </p:cNvSpPr>
+          <p:nvPr>
+            <p:ph type="title"/>
+          </p:nvPr>
+        </p:nvSpPr>
+        <p:spPr/>
+        <p:txBody>
+          <a:bodyPr/>
+          <a:lstStyle/>
+          <a:p>
+            <a:r>
+              <a:rPr lang="en-GB" dirty="0"/>
+              <a:t>Relationship Types - Description</a:t>
+            </a:r>
+          </a:p>
+        </p:txBody>
+      </p:sp>
+      <p:grpSp>
+        <p:nvGrpSpPr>
+          <p:cNvPr id="30" name="Group 29">
+            <a:extLst>
+              <a:ext uri="{FF2B5EF4-FFF2-40B4-BE49-F238E27FC236}">
+                <a16:creationId xmlns:a16="http://schemas.microsoft.com/office/drawing/2014/main" id="{418821E3-9E37-4A8C-BAE7-32612F048C17}"/>
+              </a:ext>
+            </a:extLst>
+          </p:cNvPr>
+          <p:cNvGrpSpPr/>
+          <p:nvPr/>
+        </p:nvGrpSpPr>
+        <p:grpSpPr>
+          <a:xfrm>
+            <a:off x="1721273" y="2712178"/>
+            <a:ext cx="1482940" cy="3293587"/>
+            <a:chOff x="1721273" y="2712178"/>
+            <a:chExt cx="1482940" cy="3293587"/>
+          </a:xfrm>
+        </p:grpSpPr>
+        <p:pic>
+          <p:nvPicPr>
+            <p:cNvPr id="7" name="Picture 6">
+              <a:extLst>
+                <a:ext uri="{FF2B5EF4-FFF2-40B4-BE49-F238E27FC236}">
+                  <a16:creationId xmlns:a16="http://schemas.microsoft.com/office/drawing/2014/main" id="{B026E70D-B3FD-4141-85F9-75190461CDA3}"/>
+                </a:ext>
+              </a:extLst>
+            </p:cNvPr>
+            <p:cNvPicPr>
+              <a:picLocks noChangeAspect="1"/>
+            </p:cNvPicPr>
+            <p:nvPr/>
+          </p:nvPicPr>
+          <p:blipFill>
+            <a:blip r:embed="rId3">
+              <a:extLst>
+                <a:ext uri="{28A0092B-C50C-407E-A947-70E740481C1C}">
+                  <a14:useLocalDpi xmlns:a14="http://schemas.microsoft.com/office/drawing/2010/main" val="0"/>
+                </a:ext>
+              </a:extLst>
+            </a:blip>
+            <a:stretch>
+              <a:fillRect/>
+            </a:stretch>
+          </p:blipFill>
+          <p:spPr>
+            <a:xfrm>
+              <a:off x="1721273" y="2712178"/>
+              <a:ext cx="1482940" cy="2919004"/>
+            </a:xfrm>
+            <a:prstGeom prst="rect">
+              <a:avLst/>
+            </a:prstGeom>
+          </p:spPr>
+        </p:pic>
+        <p:sp>
+          <p:nvSpPr>
+            <p:cNvPr id="10" name="Rectangle 9">
+              <a:extLst>
+                <a:ext uri="{FF2B5EF4-FFF2-40B4-BE49-F238E27FC236}">
+                  <a16:creationId xmlns:a16="http://schemas.microsoft.com/office/drawing/2014/main" id="{3B047DC7-344F-4A56-83D8-286EB77BF4E1}"/>
+                </a:ext>
+              </a:extLst>
+            </p:cNvPr>
+            <p:cNvSpPr/>
+            <p:nvPr/>
+          </p:nvSpPr>
+          <p:spPr>
+            <a:xfrm>
+              <a:off x="1994507" y="5482545"/>
+              <a:ext cx="936475" cy="523220"/>
+            </a:xfrm>
+            <a:prstGeom prst="rect">
+              <a:avLst/>
+            </a:prstGeom>
+          </p:spPr>
+          <p:txBody>
+            <a:bodyPr wrap="none">
+              <a:spAutoFit/>
+            </a:bodyPr>
+            <a:lstStyle/>
+            <a:p>
+              <a:pPr algn="ctr"/>
+              <a:r>
+                <a:rPr lang="en-GB" sz="2800" b="1" dirty="0"/>
+                <a:t>Pupil</a:t>
+              </a:r>
+              <a:endParaRPr lang="en-GB" dirty="0"/>
+            </a:p>
+          </p:txBody>
+        </p:sp>
+      </p:grpSp>
+      <p:grpSp>
+        <p:nvGrpSpPr>
+          <p:cNvPr id="31" name="Group 30">
+            <a:extLst>
+              <a:ext uri="{FF2B5EF4-FFF2-40B4-BE49-F238E27FC236}">
+                <a16:creationId xmlns:a16="http://schemas.microsoft.com/office/drawing/2014/main" id="{E9063C33-BE31-459D-AC9C-7ECDA468C472}"/>
+              </a:ext>
+            </a:extLst>
+          </p:cNvPr>
+          <p:cNvGrpSpPr/>
+          <p:nvPr/>
+        </p:nvGrpSpPr>
+        <p:grpSpPr>
+          <a:xfrm>
+            <a:off x="8987783" y="2712178"/>
+            <a:ext cx="1482940" cy="3293587"/>
+            <a:chOff x="8987783" y="2712178"/>
+            <a:chExt cx="1482940" cy="3293587"/>
+          </a:xfrm>
+        </p:grpSpPr>
+        <p:pic>
+          <p:nvPicPr>
+            <p:cNvPr id="11" name="Picture 10">
+              <a:extLst>
+                <a:ext uri="{FF2B5EF4-FFF2-40B4-BE49-F238E27FC236}">
+                  <a16:creationId xmlns:a16="http://schemas.microsoft.com/office/drawing/2014/main" id="{32A0F86B-CA07-4894-B384-CE8C6EE159C1}"/>
+                </a:ext>
+              </a:extLst>
+            </p:cNvPr>
+            <p:cNvPicPr>
+              <a:picLocks noChangeAspect="1"/>
+            </p:cNvPicPr>
+            <p:nvPr/>
+          </p:nvPicPr>
+          <p:blipFill>
+            <a:blip r:embed="rId3">
+              <a:extLst>
+                <a:ext uri="{28A0092B-C50C-407E-A947-70E740481C1C}">
+                  <a14:useLocalDpi xmlns:a14="http://schemas.microsoft.com/office/drawing/2010/main" val="0"/>
+                </a:ext>
+              </a:extLst>
+            </a:blip>
+            <a:stretch>
+              <a:fillRect/>
+            </a:stretch>
+          </p:blipFill>
+          <p:spPr>
+            <a:xfrm>
+              <a:off x="8987783" y="2712178"/>
+              <a:ext cx="1482940" cy="2919004"/>
+            </a:xfrm>
+            <a:prstGeom prst="rect">
+              <a:avLst/>
+            </a:prstGeom>
+          </p:spPr>
+        </p:pic>
+        <p:sp>
+          <p:nvSpPr>
+            <p:cNvPr id="13" name="Rectangle 12">
+              <a:extLst>
+                <a:ext uri="{FF2B5EF4-FFF2-40B4-BE49-F238E27FC236}">
+                  <a16:creationId xmlns:a16="http://schemas.microsoft.com/office/drawing/2014/main" id="{0CAC0334-43B5-419F-AB51-243DA6DA4779}"/>
+                </a:ext>
+              </a:extLst>
+            </p:cNvPr>
+            <p:cNvSpPr/>
+            <p:nvPr/>
+          </p:nvSpPr>
+          <p:spPr>
+            <a:xfrm>
+              <a:off x="9107991" y="5482545"/>
+              <a:ext cx="1242521" cy="523220"/>
+            </a:xfrm>
+            <a:prstGeom prst="rect">
+              <a:avLst/>
+            </a:prstGeom>
+          </p:spPr>
+          <p:txBody>
+            <a:bodyPr wrap="none">
+              <a:spAutoFit/>
+            </a:bodyPr>
+            <a:lstStyle/>
+            <a:p>
+              <a:pPr algn="ctr"/>
+              <a:r>
+                <a:rPr lang="en-GB" sz="2800" b="1" dirty="0"/>
+                <a:t>Prefect</a:t>
+              </a:r>
+              <a:endParaRPr lang="en-GB" dirty="0"/>
+            </a:p>
+          </p:txBody>
+        </p:sp>
+      </p:grpSp>
       <p:sp>
         <p:nvSpPr>
           <p:cNvPr id="17" name="Rectangle 16">
@@ -12454,7 +12531,7 @@
 </p:sld>
 </file>
 
-<file path=ppt/slides/slide13.xml><?xml version="1.0" encoding="utf-8"?>
+<file path=ppt/slides/slide15.xml><?xml version="1.0" encoding="utf-8"?>
 <p:sld xmlns:a="http://schemas.openxmlformats.org/drawingml/2006/main" xmlns:r="http://schemas.openxmlformats.org/officeDocument/2006/relationships" xmlns:p="http://schemas.openxmlformats.org/presentationml/2006/main">
   <p:cSld>
     <p:spTree>
@@ -12532,7 +12609,7 @@
 </p:sld>
 </file>
 
-<file path=ppt/slides/slide14.xml><?xml version="1.0" encoding="utf-8"?>
+<file path=ppt/slides/slide16.xml><?xml version="1.0" encoding="utf-8"?>
 <p:sld xmlns:a="http://schemas.openxmlformats.org/drawingml/2006/main" xmlns:r="http://schemas.openxmlformats.org/officeDocument/2006/relationships" xmlns:p="http://schemas.openxmlformats.org/presentationml/2006/main">
   <p:cSld>
     <p:spTree>
@@ -12739,7 +12816,7 @@
 </p:sld>
 </file>
 
-<file path=ppt/slides/slide15.xml><?xml version="1.0" encoding="utf-8"?>
+<file path=ppt/slides/slide17.xml><?xml version="1.0" encoding="utf-8"?>
 <p:sld xmlns:a="http://schemas.openxmlformats.org/drawingml/2006/main" xmlns:r="http://schemas.openxmlformats.org/officeDocument/2006/relationships" xmlns:p="http://schemas.openxmlformats.org/presentationml/2006/main">
   <p:cSld>
     <p:spTree>
@@ -12881,7 +12958,7 @@
 </p:sld>
 </file>
 
-<file path=ppt/slides/slide16.xml><?xml version="1.0" encoding="utf-8"?>
+<file path=ppt/slides/slide18.xml><?xml version="1.0" encoding="utf-8"?>
 <p:sld xmlns:a="http://schemas.openxmlformats.org/drawingml/2006/main" xmlns:r="http://schemas.openxmlformats.org/officeDocument/2006/relationships" xmlns:p="http://schemas.openxmlformats.org/presentationml/2006/main">
   <p:cSld>
     <p:spTree>
@@ -13771,7 +13848,7 @@
 </p:sld>
 </file>
 
-<file path=ppt/slides/slide17.xml><?xml version="1.0" encoding="utf-8"?>
+<file path=ppt/slides/slide19.xml><?xml version="1.0" encoding="utf-8"?>
 <p:sld xmlns:a="http://schemas.openxmlformats.org/drawingml/2006/main" xmlns:r="http://schemas.openxmlformats.org/officeDocument/2006/relationships" xmlns:p="http://schemas.openxmlformats.org/presentationml/2006/main">
   <p:cSld>
     <p:spTree>
@@ -14485,7 +14562,672 @@
 </p:sld>
 </file>
 
-<file path=ppt/slides/slide18.xml><?xml version="1.0" encoding="utf-8"?>
+<file path=ppt/slides/slide2.xml><?xml version="1.0" encoding="utf-8"?>
+<p:sld xmlns:a="http://schemas.openxmlformats.org/drawingml/2006/main" xmlns:r="http://schemas.openxmlformats.org/officeDocument/2006/relationships" xmlns:p="http://schemas.openxmlformats.org/presentationml/2006/main">
+  <p:cSld>
+    <p:spTree>
+      <p:nvGrpSpPr>
+        <p:cNvPr id="1" name=""/>
+        <p:cNvGrpSpPr/>
+        <p:nvPr/>
+      </p:nvGrpSpPr>
+      <p:grpSpPr>
+        <a:xfrm>
+          <a:off x="0" y="0"/>
+          <a:ext cx="0" cy="0"/>
+          <a:chOff x="0" y="0"/>
+          <a:chExt cx="0" cy="0"/>
+        </a:xfrm>
+      </p:grpSpPr>
+      <p:sp>
+        <p:nvSpPr>
+          <p:cNvPr id="2" name="Title 1"/>
+          <p:cNvSpPr>
+            <a:spLocks noGrp="1"/>
+          </p:cNvSpPr>
+          <p:nvPr>
+            <p:ph type="title"/>
+          </p:nvPr>
+        </p:nvSpPr>
+        <p:spPr/>
+        <p:txBody>
+          <a:bodyPr/>
+          <a:lstStyle/>
+          <a:p>
+            <a:r>
+              <a:rPr lang="en-GB"/>
+              <a:t>Plan</a:t>
+            </a:r>
+          </a:p>
+        </p:txBody>
+      </p:sp>
+      <p:graphicFrame>
+        <p:nvGraphicFramePr>
+          <p:cNvPr id="5" name="Content Placeholder 4"/>
+          <p:cNvGraphicFramePr>
+            <a:graphicFrameLocks noGrp="1"/>
+          </p:cNvGraphicFramePr>
+          <p:nvPr>
+            <p:ph idx="1"/>
+            <p:extLst>
+              <p:ext uri="{D42A27DB-BD31-4B8C-83A1-F6EECF244321}">
+                <p14:modId xmlns:p14="http://schemas.microsoft.com/office/powerpoint/2010/main" val="812181180"/>
+              </p:ext>
+            </p:extLst>
+          </p:nvPr>
+        </p:nvGraphicFramePr>
+        <p:xfrm>
+          <a:off x="2042160" y="1825625"/>
+          <a:ext cx="8107680" cy="4351338"/>
+        </p:xfrm>
+        <a:graphic>
+          <a:graphicData uri="http://schemas.openxmlformats.org/drawingml/2006/diagram">
+            <dgm:relIds xmlns:dgm="http://schemas.openxmlformats.org/drawingml/2006/diagram" xmlns:r="http://schemas.openxmlformats.org/officeDocument/2006/relationships" r:dm="rId3" r:lo="rId4" r:qs="rId5" r:cs="rId6"/>
+          </a:graphicData>
+        </a:graphic>
+      </p:graphicFrame>
+      <p:sp>
+        <p:nvSpPr>
+          <p:cNvPr id="3" name="TextBox 2">
+            <a:extLst>
+              <a:ext uri="{FF2B5EF4-FFF2-40B4-BE49-F238E27FC236}">
+                <a16:creationId xmlns:a16="http://schemas.microsoft.com/office/drawing/2014/main" id="{6A97AC26-082B-45FF-807A-F23AA3F80267}"/>
+              </a:ext>
+            </a:extLst>
+          </p:cNvPr>
+          <p:cNvSpPr txBox="1"/>
+          <p:nvPr/>
+        </p:nvSpPr>
+        <p:spPr>
+          <a:xfrm rot="16200000">
+            <a:off x="9968919" y="2907341"/>
+            <a:ext cx="1541576" cy="646331"/>
+          </a:xfrm>
+          <a:prstGeom prst="rect">
+            <a:avLst/>
+          </a:prstGeom>
+          <a:noFill/>
+        </p:spPr>
+        <p:txBody>
+          <a:bodyPr wrap="none" rtlCol="0">
+            <a:spAutoFit/>
+          </a:bodyPr>
+          <a:lstStyle/>
+          <a:p>
+            <a:pPr algn="ctr"/>
+            <a:r>
+              <a:rPr lang="en-GB" sz="3600" b="1" dirty="0">
+                <a:solidFill>
+                  <a:srgbClr val="FF0000"/>
+                </a:solidFill>
+              </a:rPr>
+              <a:t>Project</a:t>
+            </a:r>
+            <a:endParaRPr lang="en-GB" b="1" dirty="0">
+              <a:solidFill>
+                <a:srgbClr val="FF0000"/>
+              </a:solidFill>
+            </a:endParaRPr>
+          </a:p>
+        </p:txBody>
+      </p:sp>
+    </p:spTree>
+    <p:extLst>
+      <p:ext uri="{BB962C8B-B14F-4D97-AF65-F5344CB8AC3E}">
+        <p14:creationId xmlns:p14="http://schemas.microsoft.com/office/powerpoint/2010/main" val="3688620620"/>
+      </p:ext>
+    </p:extLst>
+  </p:cSld>
+  <p:clrMapOvr>
+    <a:masterClrMapping/>
+  </p:clrMapOvr>
+  <p:timing>
+    <p:tnLst>
+      <p:par>
+        <p:cTn id="1" dur="indefinite" restart="never" nodeType="tmRoot">
+          <p:childTnLst>
+            <p:seq concurrent="1" nextAc="seek">
+              <p:cTn id="2" dur="indefinite" nodeType="mainSeq">
+                <p:childTnLst>
+                  <p:par>
+                    <p:cTn id="3" fill="hold">
+                      <p:stCondLst>
+                        <p:cond delay="indefinite"/>
+                      </p:stCondLst>
+                      <p:childTnLst>
+                        <p:par>
+                          <p:cTn id="4" fill="hold">
+                            <p:stCondLst>
+                              <p:cond delay="0"/>
+                            </p:stCondLst>
+                            <p:childTnLst>
+                              <p:par>
+                                <p:cTn id="5" presetID="22" presetClass="entr" presetSubtype="8" fill="hold" grpId="0" nodeType="clickEffect">
+                                  <p:stCondLst>
+                                    <p:cond delay="0"/>
+                                  </p:stCondLst>
+                                  <p:childTnLst>
+                                    <p:set>
+                                      <p:cBhvr>
+                                        <p:cTn id="6" dur="1" fill="hold">
+                                          <p:stCondLst>
+                                            <p:cond delay="0"/>
+                                          </p:stCondLst>
+                                        </p:cTn>
+                                        <p:tgtEl>
+                                          <p:spTgt spid="5">
+                                            <p:graphicEl>
+                                              <a:dgm id="{DFA48299-B840-4714-A5F6-769C74D74113}"/>
+                                            </p:graphicEl>
+                                          </p:spTgt>
+                                        </p:tgtEl>
+                                        <p:attrNameLst>
+                                          <p:attrName>style.visibility</p:attrName>
+                                        </p:attrNameLst>
+                                      </p:cBhvr>
+                                      <p:to>
+                                        <p:strVal val="visible"/>
+                                      </p:to>
+                                    </p:set>
+                                    <p:animEffect transition="in" filter="wipe(left)">
+                                      <p:cBhvr>
+                                        <p:cTn id="7" dur="500"/>
+                                        <p:tgtEl>
+                                          <p:spTgt spid="5">
+                                            <p:graphicEl>
+                                              <a:dgm id="{DFA48299-B840-4714-A5F6-769C74D74113}"/>
+                                            </p:graphicEl>
+                                          </p:spTgt>
+                                        </p:tgtEl>
+                                      </p:cBhvr>
+                                    </p:animEffect>
+                                  </p:childTnLst>
+                                </p:cTn>
+                              </p:par>
+                            </p:childTnLst>
+                          </p:cTn>
+                        </p:par>
+                        <p:par>
+                          <p:cTn id="8" fill="hold">
+                            <p:stCondLst>
+                              <p:cond delay="500"/>
+                            </p:stCondLst>
+                            <p:childTnLst>
+                              <p:par>
+                                <p:cTn id="9" presetID="22" presetClass="entr" presetSubtype="8" fill="hold" grpId="0" nodeType="afterEffect">
+                                  <p:stCondLst>
+                                    <p:cond delay="0"/>
+                                  </p:stCondLst>
+                                  <p:childTnLst>
+                                    <p:set>
+                                      <p:cBhvr>
+                                        <p:cTn id="10" dur="1" fill="hold">
+                                          <p:stCondLst>
+                                            <p:cond delay="0"/>
+                                          </p:stCondLst>
+                                        </p:cTn>
+                                        <p:tgtEl>
+                                          <p:spTgt spid="5">
+                                            <p:graphicEl>
+                                              <a:dgm id="{19C32B8D-512E-49A1-A0E6-109384C61E4D}"/>
+                                            </p:graphicEl>
+                                          </p:spTgt>
+                                        </p:tgtEl>
+                                        <p:attrNameLst>
+                                          <p:attrName>style.visibility</p:attrName>
+                                        </p:attrNameLst>
+                                      </p:cBhvr>
+                                      <p:to>
+                                        <p:strVal val="visible"/>
+                                      </p:to>
+                                    </p:set>
+                                    <p:animEffect transition="in" filter="wipe(left)">
+                                      <p:cBhvr>
+                                        <p:cTn id="11" dur="2000"/>
+                                        <p:tgtEl>
+                                          <p:spTgt spid="5">
+                                            <p:graphicEl>
+                                              <a:dgm id="{19C32B8D-512E-49A1-A0E6-109384C61E4D}"/>
+                                            </p:graphicEl>
+                                          </p:spTgt>
+                                        </p:tgtEl>
+                                      </p:cBhvr>
+                                    </p:animEffect>
+                                  </p:childTnLst>
+                                </p:cTn>
+                              </p:par>
+                            </p:childTnLst>
+                          </p:cTn>
+                        </p:par>
+                      </p:childTnLst>
+                    </p:cTn>
+                  </p:par>
+                  <p:par>
+                    <p:cTn id="12" fill="hold">
+                      <p:stCondLst>
+                        <p:cond delay="indefinite"/>
+                      </p:stCondLst>
+                      <p:childTnLst>
+                        <p:par>
+                          <p:cTn id="13" fill="hold">
+                            <p:stCondLst>
+                              <p:cond delay="0"/>
+                            </p:stCondLst>
+                            <p:childTnLst>
+                              <p:par>
+                                <p:cTn id="14" presetID="22" presetClass="entr" presetSubtype="8" fill="hold" grpId="0" nodeType="clickEffect">
+                                  <p:stCondLst>
+                                    <p:cond delay="0"/>
+                                  </p:stCondLst>
+                                  <p:childTnLst>
+                                    <p:set>
+                                      <p:cBhvr>
+                                        <p:cTn id="15" dur="1" fill="hold">
+                                          <p:stCondLst>
+                                            <p:cond delay="0"/>
+                                          </p:stCondLst>
+                                        </p:cTn>
+                                        <p:tgtEl>
+                                          <p:spTgt spid="5">
+                                            <p:graphicEl>
+                                              <a:dgm id="{AAD30B60-88C6-4919-B6DD-9F480459E84E}"/>
+                                            </p:graphicEl>
+                                          </p:spTgt>
+                                        </p:tgtEl>
+                                        <p:attrNameLst>
+                                          <p:attrName>style.visibility</p:attrName>
+                                        </p:attrNameLst>
+                                      </p:cBhvr>
+                                      <p:to>
+                                        <p:strVal val="visible"/>
+                                      </p:to>
+                                    </p:set>
+                                    <p:animEffect transition="in" filter="wipe(left)">
+                                      <p:cBhvr>
+                                        <p:cTn id="16" dur="500"/>
+                                        <p:tgtEl>
+                                          <p:spTgt spid="5">
+                                            <p:graphicEl>
+                                              <a:dgm id="{AAD30B60-88C6-4919-B6DD-9F480459E84E}"/>
+                                            </p:graphicEl>
+                                          </p:spTgt>
+                                        </p:tgtEl>
+                                      </p:cBhvr>
+                                    </p:animEffect>
+                                  </p:childTnLst>
+                                </p:cTn>
+                              </p:par>
+                            </p:childTnLst>
+                          </p:cTn>
+                        </p:par>
+                        <p:par>
+                          <p:cTn id="17" fill="hold">
+                            <p:stCondLst>
+                              <p:cond delay="500"/>
+                            </p:stCondLst>
+                            <p:childTnLst>
+                              <p:par>
+                                <p:cTn id="18" presetID="22" presetClass="entr" presetSubtype="8" fill="hold" grpId="0" nodeType="afterEffect">
+                                  <p:stCondLst>
+                                    <p:cond delay="0"/>
+                                  </p:stCondLst>
+                                  <p:childTnLst>
+                                    <p:set>
+                                      <p:cBhvr>
+                                        <p:cTn id="19" dur="1" fill="hold">
+                                          <p:stCondLst>
+                                            <p:cond delay="0"/>
+                                          </p:stCondLst>
+                                        </p:cTn>
+                                        <p:tgtEl>
+                                          <p:spTgt spid="5">
+                                            <p:graphicEl>
+                                              <a:dgm id="{0DFDFC6D-8604-4378-B6A3-6A6720006C95}"/>
+                                            </p:graphicEl>
+                                          </p:spTgt>
+                                        </p:tgtEl>
+                                        <p:attrNameLst>
+                                          <p:attrName>style.visibility</p:attrName>
+                                        </p:attrNameLst>
+                                      </p:cBhvr>
+                                      <p:to>
+                                        <p:strVal val="visible"/>
+                                      </p:to>
+                                    </p:set>
+                                    <p:animEffect transition="in" filter="wipe(left)">
+                                      <p:cBhvr>
+                                        <p:cTn id="20" dur="2000"/>
+                                        <p:tgtEl>
+                                          <p:spTgt spid="5">
+                                            <p:graphicEl>
+                                              <a:dgm id="{0DFDFC6D-8604-4378-B6A3-6A6720006C95}"/>
+                                            </p:graphicEl>
+                                          </p:spTgt>
+                                        </p:tgtEl>
+                                      </p:cBhvr>
+                                    </p:animEffect>
+                                  </p:childTnLst>
+                                </p:cTn>
+                              </p:par>
+                            </p:childTnLst>
+                          </p:cTn>
+                        </p:par>
+                      </p:childTnLst>
+                    </p:cTn>
+                  </p:par>
+                  <p:par>
+                    <p:cTn id="21" fill="hold">
+                      <p:stCondLst>
+                        <p:cond delay="indefinite"/>
+                      </p:stCondLst>
+                      <p:childTnLst>
+                        <p:par>
+                          <p:cTn id="22" fill="hold">
+                            <p:stCondLst>
+                              <p:cond delay="0"/>
+                            </p:stCondLst>
+                            <p:childTnLst>
+                              <p:par>
+                                <p:cTn id="23" presetID="22" presetClass="entr" presetSubtype="8" fill="hold" grpId="0" nodeType="clickEffect">
+                                  <p:stCondLst>
+                                    <p:cond delay="0"/>
+                                  </p:stCondLst>
+                                  <p:childTnLst>
+                                    <p:set>
+                                      <p:cBhvr>
+                                        <p:cTn id="24" dur="1" fill="hold">
+                                          <p:stCondLst>
+                                            <p:cond delay="0"/>
+                                          </p:stCondLst>
+                                        </p:cTn>
+                                        <p:tgtEl>
+                                          <p:spTgt spid="5">
+                                            <p:graphicEl>
+                                              <a:dgm id="{13389968-BA24-47B6-8473-359CF30A7B68}"/>
+                                            </p:graphicEl>
+                                          </p:spTgt>
+                                        </p:tgtEl>
+                                        <p:attrNameLst>
+                                          <p:attrName>style.visibility</p:attrName>
+                                        </p:attrNameLst>
+                                      </p:cBhvr>
+                                      <p:to>
+                                        <p:strVal val="visible"/>
+                                      </p:to>
+                                    </p:set>
+                                    <p:animEffect transition="in" filter="wipe(left)">
+                                      <p:cBhvr>
+                                        <p:cTn id="25" dur="500"/>
+                                        <p:tgtEl>
+                                          <p:spTgt spid="5">
+                                            <p:graphicEl>
+                                              <a:dgm id="{13389968-BA24-47B6-8473-359CF30A7B68}"/>
+                                            </p:graphicEl>
+                                          </p:spTgt>
+                                        </p:tgtEl>
+                                      </p:cBhvr>
+                                    </p:animEffect>
+                                  </p:childTnLst>
+                                </p:cTn>
+                              </p:par>
+                            </p:childTnLst>
+                          </p:cTn>
+                        </p:par>
+                        <p:par>
+                          <p:cTn id="26" fill="hold">
+                            <p:stCondLst>
+                              <p:cond delay="500"/>
+                            </p:stCondLst>
+                            <p:childTnLst>
+                              <p:par>
+                                <p:cTn id="27" presetID="22" presetClass="entr" presetSubtype="8" fill="hold" grpId="0" nodeType="afterEffect">
+                                  <p:stCondLst>
+                                    <p:cond delay="0"/>
+                                  </p:stCondLst>
+                                  <p:childTnLst>
+                                    <p:set>
+                                      <p:cBhvr>
+                                        <p:cTn id="28" dur="1" fill="hold">
+                                          <p:stCondLst>
+                                            <p:cond delay="0"/>
+                                          </p:stCondLst>
+                                        </p:cTn>
+                                        <p:tgtEl>
+                                          <p:spTgt spid="5">
+                                            <p:graphicEl>
+                                              <a:dgm id="{7B327266-A4CF-4A7C-A1A8-A8419A288BA3}"/>
+                                            </p:graphicEl>
+                                          </p:spTgt>
+                                        </p:tgtEl>
+                                        <p:attrNameLst>
+                                          <p:attrName>style.visibility</p:attrName>
+                                        </p:attrNameLst>
+                                      </p:cBhvr>
+                                      <p:to>
+                                        <p:strVal val="visible"/>
+                                      </p:to>
+                                    </p:set>
+                                    <p:animEffect transition="in" filter="wipe(left)">
+                                      <p:cBhvr>
+                                        <p:cTn id="29" dur="2000"/>
+                                        <p:tgtEl>
+                                          <p:spTgt spid="5">
+                                            <p:graphicEl>
+                                              <a:dgm id="{7B327266-A4CF-4A7C-A1A8-A8419A288BA3}"/>
+                                            </p:graphicEl>
+                                          </p:spTgt>
+                                        </p:tgtEl>
+                                      </p:cBhvr>
+                                    </p:animEffect>
+                                  </p:childTnLst>
+                                </p:cTn>
+                              </p:par>
+                            </p:childTnLst>
+                          </p:cTn>
+                        </p:par>
+                      </p:childTnLst>
+                    </p:cTn>
+                  </p:par>
+                  <p:par>
+                    <p:cTn id="30" fill="hold">
+                      <p:stCondLst>
+                        <p:cond delay="indefinite"/>
+                      </p:stCondLst>
+                      <p:childTnLst>
+                        <p:par>
+                          <p:cTn id="31" fill="hold">
+                            <p:stCondLst>
+                              <p:cond delay="0"/>
+                            </p:stCondLst>
+                            <p:childTnLst>
+                              <p:par>
+                                <p:cTn id="32" presetID="22" presetClass="entr" presetSubtype="4" fill="hold" grpId="0" nodeType="clickEffect">
+                                  <p:stCondLst>
+                                    <p:cond delay="0"/>
+                                  </p:stCondLst>
+                                  <p:childTnLst>
+                                    <p:set>
+                                      <p:cBhvr>
+                                        <p:cTn id="33" dur="1" fill="hold">
+                                          <p:stCondLst>
+                                            <p:cond delay="0"/>
+                                          </p:stCondLst>
+                                        </p:cTn>
+                                        <p:tgtEl>
+                                          <p:spTgt spid="3"/>
+                                        </p:tgtEl>
+                                        <p:attrNameLst>
+                                          <p:attrName>style.visibility</p:attrName>
+                                        </p:attrNameLst>
+                                      </p:cBhvr>
+                                      <p:to>
+                                        <p:strVal val="visible"/>
+                                      </p:to>
+                                    </p:set>
+                                    <p:animEffect transition="in" filter="wipe(down)">
+                                      <p:cBhvr>
+                                        <p:cTn id="34" dur="1000"/>
+                                        <p:tgtEl>
+                                          <p:spTgt spid="3"/>
+                                        </p:tgtEl>
+                                      </p:cBhvr>
+                                    </p:animEffect>
+                                  </p:childTnLst>
+                                </p:cTn>
+                              </p:par>
+                            </p:childTnLst>
+                          </p:cTn>
+                        </p:par>
+                      </p:childTnLst>
+                    </p:cTn>
+                  </p:par>
+                  <p:par>
+                    <p:cTn id="35" fill="hold">
+                      <p:stCondLst>
+                        <p:cond delay="indefinite"/>
+                      </p:stCondLst>
+                      <p:childTnLst>
+                        <p:par>
+                          <p:cTn id="36" fill="hold">
+                            <p:stCondLst>
+                              <p:cond delay="0"/>
+                            </p:stCondLst>
+                            <p:childTnLst>
+                              <p:par>
+                                <p:cTn id="37" presetID="22" presetClass="entr" presetSubtype="8" fill="hold" grpId="0" nodeType="clickEffect">
+                                  <p:stCondLst>
+                                    <p:cond delay="0"/>
+                                  </p:stCondLst>
+                                  <p:childTnLst>
+                                    <p:set>
+                                      <p:cBhvr>
+                                        <p:cTn id="38" dur="1" fill="hold">
+                                          <p:stCondLst>
+                                            <p:cond delay="0"/>
+                                          </p:stCondLst>
+                                        </p:cTn>
+                                        <p:tgtEl>
+                                          <p:spTgt spid="5">
+                                            <p:graphicEl>
+                                              <a:dgm id="{EB2E52AE-8FCF-47D0-B499-CFCFAF1883A9}"/>
+                                            </p:graphicEl>
+                                          </p:spTgt>
+                                        </p:tgtEl>
+                                        <p:attrNameLst>
+                                          <p:attrName>style.visibility</p:attrName>
+                                        </p:attrNameLst>
+                                      </p:cBhvr>
+                                      <p:to>
+                                        <p:strVal val="visible"/>
+                                      </p:to>
+                                    </p:set>
+                                    <p:animEffect transition="in" filter="wipe(left)">
+                                      <p:cBhvr>
+                                        <p:cTn id="39" dur="500"/>
+                                        <p:tgtEl>
+                                          <p:spTgt spid="5">
+                                            <p:graphicEl>
+                                              <a:dgm id="{EB2E52AE-8FCF-47D0-B499-CFCFAF1883A9}"/>
+                                            </p:graphicEl>
+                                          </p:spTgt>
+                                        </p:tgtEl>
+                                      </p:cBhvr>
+                                    </p:animEffect>
+                                  </p:childTnLst>
+                                </p:cTn>
+                              </p:par>
+                            </p:childTnLst>
+                          </p:cTn>
+                        </p:par>
+                        <p:par>
+                          <p:cTn id="40" fill="hold">
+                            <p:stCondLst>
+                              <p:cond delay="500"/>
+                            </p:stCondLst>
+                            <p:childTnLst>
+                              <p:par>
+                                <p:cTn id="41" presetID="22" presetClass="entr" presetSubtype="8" fill="hold" grpId="0" nodeType="afterEffect">
+                                  <p:stCondLst>
+                                    <p:cond delay="0"/>
+                                  </p:stCondLst>
+                                  <p:childTnLst>
+                                    <p:set>
+                                      <p:cBhvr>
+                                        <p:cTn id="42" dur="1" fill="hold">
+                                          <p:stCondLst>
+                                            <p:cond delay="0"/>
+                                          </p:stCondLst>
+                                        </p:cTn>
+                                        <p:tgtEl>
+                                          <p:spTgt spid="5">
+                                            <p:graphicEl>
+                                              <a:dgm id="{C92F1771-01AA-4FF3-B7EC-0229DB7A592C}"/>
+                                            </p:graphicEl>
+                                          </p:spTgt>
+                                        </p:tgtEl>
+                                        <p:attrNameLst>
+                                          <p:attrName>style.visibility</p:attrName>
+                                        </p:attrNameLst>
+                                      </p:cBhvr>
+                                      <p:to>
+                                        <p:strVal val="visible"/>
+                                      </p:to>
+                                    </p:set>
+                                    <p:animEffect transition="in" filter="wipe(left)">
+                                      <p:cBhvr>
+                                        <p:cTn id="43" dur="2000"/>
+                                        <p:tgtEl>
+                                          <p:spTgt spid="5">
+                                            <p:graphicEl>
+                                              <a:dgm id="{C92F1771-01AA-4FF3-B7EC-0229DB7A592C}"/>
+                                            </p:graphicEl>
+                                          </p:spTgt>
+                                        </p:tgtEl>
+                                      </p:cBhvr>
+                                    </p:animEffect>
+                                  </p:childTnLst>
+                                </p:cTn>
+                              </p:par>
+                            </p:childTnLst>
+                          </p:cTn>
+                        </p:par>
+                      </p:childTnLst>
+                    </p:cTn>
+                  </p:par>
+                </p:childTnLst>
+              </p:cTn>
+              <p:prevCondLst>
+                <p:cond evt="onPrev" delay="0">
+                  <p:tgtEl>
+                    <p:sldTgt/>
+                  </p:tgtEl>
+                </p:cond>
+              </p:prevCondLst>
+              <p:nextCondLst>
+                <p:cond evt="onNext" delay="0">
+                  <p:tgtEl>
+                    <p:sldTgt/>
+                  </p:tgtEl>
+                </p:cond>
+              </p:nextCondLst>
+            </p:seq>
+          </p:childTnLst>
+        </p:cTn>
+      </p:par>
+    </p:tnLst>
+    <p:bldLst>
+      <p:bldGraphic spid="5" grpId="0" uiExpand="1">
+        <p:bldSub>
+          <a:bldDgm bld="one"/>
+        </p:bldSub>
+      </p:bldGraphic>
+      <p:bldP spid="3" grpId="0"/>
+    </p:bldLst>
+  </p:timing>
+</p:sld>
+</file>
+
+<file path=ppt/slides/slide20.xml><?xml version="1.0" encoding="utf-8"?>
 <p:sld xmlns:a="http://schemas.openxmlformats.org/drawingml/2006/main" xmlns:r="http://schemas.openxmlformats.org/officeDocument/2006/relationships" xmlns:p="http://schemas.openxmlformats.org/presentationml/2006/main">
   <p:cSld>
     <p:spTree>
@@ -15327,8 +16069,8 @@
         </p:nvSpPr>
         <p:spPr>
           <a:xfrm>
-            <a:off x="1702440" y="6251111"/>
-            <a:ext cx="8787149" cy="523220"/>
+            <a:off x="1603054" y="6251111"/>
+            <a:ext cx="8985922" cy="523220"/>
           </a:xfrm>
           <a:prstGeom prst="rect">
             <a:avLst/>
@@ -15347,7 +16089,7 @@
                   <a:srgbClr val="FF0000"/>
                 </a:solidFill>
               </a:rPr>
-              <a:t>Private properties / methods only accessible to the object </a:t>
+              <a:t>Private properties / methods only accessible to the object! </a:t>
             </a:r>
             <a:endParaRPr lang="en-GB" sz="2800" b="1" dirty="0">
               <a:solidFill>
@@ -15370,7 +16112,7 @@
 </p:sld>
 </file>
 
-<file path=ppt/slides/slide19.xml><?xml version="1.0" encoding="utf-8"?>
+<file path=ppt/slides/slide21.xml><?xml version="1.0" encoding="utf-8"?>
 <p:sld xmlns:a="http://schemas.openxmlformats.org/drawingml/2006/main" xmlns:r="http://schemas.openxmlformats.org/officeDocument/2006/relationships" xmlns:p="http://schemas.openxmlformats.org/presentationml/2006/main">
   <p:cSld>
     <p:spTree>
@@ -16892,672 +17634,7 @@
 </p:sld>
 </file>
 
-<file path=ppt/slides/slide2.xml><?xml version="1.0" encoding="utf-8"?>
-<p:sld xmlns:a="http://schemas.openxmlformats.org/drawingml/2006/main" xmlns:r="http://schemas.openxmlformats.org/officeDocument/2006/relationships" xmlns:p="http://schemas.openxmlformats.org/presentationml/2006/main">
-  <p:cSld>
-    <p:spTree>
-      <p:nvGrpSpPr>
-        <p:cNvPr id="1" name=""/>
-        <p:cNvGrpSpPr/>
-        <p:nvPr/>
-      </p:nvGrpSpPr>
-      <p:grpSpPr>
-        <a:xfrm>
-          <a:off x="0" y="0"/>
-          <a:ext cx="0" cy="0"/>
-          <a:chOff x="0" y="0"/>
-          <a:chExt cx="0" cy="0"/>
-        </a:xfrm>
-      </p:grpSpPr>
-      <p:sp>
-        <p:nvSpPr>
-          <p:cNvPr id="2" name="Title 1"/>
-          <p:cNvSpPr>
-            <a:spLocks noGrp="1"/>
-          </p:cNvSpPr>
-          <p:nvPr>
-            <p:ph type="title"/>
-          </p:nvPr>
-        </p:nvSpPr>
-        <p:spPr/>
-        <p:txBody>
-          <a:bodyPr/>
-          <a:lstStyle/>
-          <a:p>
-            <a:r>
-              <a:rPr lang="en-GB"/>
-              <a:t>Plan</a:t>
-            </a:r>
-          </a:p>
-        </p:txBody>
-      </p:sp>
-      <p:graphicFrame>
-        <p:nvGraphicFramePr>
-          <p:cNvPr id="5" name="Content Placeholder 4"/>
-          <p:cNvGraphicFramePr>
-            <a:graphicFrameLocks noGrp="1"/>
-          </p:cNvGraphicFramePr>
-          <p:nvPr>
-            <p:ph idx="1"/>
-            <p:extLst>
-              <p:ext uri="{D42A27DB-BD31-4B8C-83A1-F6EECF244321}">
-                <p14:modId xmlns:p14="http://schemas.microsoft.com/office/powerpoint/2010/main" val="812181180"/>
-              </p:ext>
-            </p:extLst>
-          </p:nvPr>
-        </p:nvGraphicFramePr>
-        <p:xfrm>
-          <a:off x="2042160" y="1825625"/>
-          <a:ext cx="8107680" cy="4351338"/>
-        </p:xfrm>
-        <a:graphic>
-          <a:graphicData uri="http://schemas.openxmlformats.org/drawingml/2006/diagram">
-            <dgm:relIds xmlns:dgm="http://schemas.openxmlformats.org/drawingml/2006/diagram" xmlns:r="http://schemas.openxmlformats.org/officeDocument/2006/relationships" r:dm="rId3" r:lo="rId4" r:qs="rId5" r:cs="rId6"/>
-          </a:graphicData>
-        </a:graphic>
-      </p:graphicFrame>
-      <p:sp>
-        <p:nvSpPr>
-          <p:cNvPr id="3" name="TextBox 2">
-            <a:extLst>
-              <a:ext uri="{FF2B5EF4-FFF2-40B4-BE49-F238E27FC236}">
-                <a16:creationId xmlns:a16="http://schemas.microsoft.com/office/drawing/2014/main" id="{6A97AC26-082B-45FF-807A-F23AA3F80267}"/>
-              </a:ext>
-            </a:extLst>
-          </p:cNvPr>
-          <p:cNvSpPr txBox="1"/>
-          <p:nvPr/>
-        </p:nvSpPr>
-        <p:spPr>
-          <a:xfrm rot="16200000">
-            <a:off x="9968919" y="2907341"/>
-            <a:ext cx="1541576" cy="646331"/>
-          </a:xfrm>
-          <a:prstGeom prst="rect">
-            <a:avLst/>
-          </a:prstGeom>
-          <a:noFill/>
-        </p:spPr>
-        <p:txBody>
-          <a:bodyPr wrap="none" rtlCol="0">
-            <a:spAutoFit/>
-          </a:bodyPr>
-          <a:lstStyle/>
-          <a:p>
-            <a:pPr algn="ctr"/>
-            <a:r>
-              <a:rPr lang="en-GB" sz="3600" b="1" dirty="0">
-                <a:solidFill>
-                  <a:srgbClr val="FF0000"/>
-                </a:solidFill>
-              </a:rPr>
-              <a:t>Project</a:t>
-            </a:r>
-            <a:endParaRPr lang="en-GB" b="1" dirty="0">
-              <a:solidFill>
-                <a:srgbClr val="FF0000"/>
-              </a:solidFill>
-            </a:endParaRPr>
-          </a:p>
-        </p:txBody>
-      </p:sp>
-    </p:spTree>
-    <p:extLst>
-      <p:ext uri="{BB962C8B-B14F-4D97-AF65-F5344CB8AC3E}">
-        <p14:creationId xmlns:p14="http://schemas.microsoft.com/office/powerpoint/2010/main" val="3688620620"/>
-      </p:ext>
-    </p:extLst>
-  </p:cSld>
-  <p:clrMapOvr>
-    <a:masterClrMapping/>
-  </p:clrMapOvr>
-  <p:timing>
-    <p:tnLst>
-      <p:par>
-        <p:cTn id="1" dur="indefinite" restart="never" nodeType="tmRoot">
-          <p:childTnLst>
-            <p:seq concurrent="1" nextAc="seek">
-              <p:cTn id="2" dur="indefinite" nodeType="mainSeq">
-                <p:childTnLst>
-                  <p:par>
-                    <p:cTn id="3" fill="hold">
-                      <p:stCondLst>
-                        <p:cond delay="indefinite"/>
-                      </p:stCondLst>
-                      <p:childTnLst>
-                        <p:par>
-                          <p:cTn id="4" fill="hold">
-                            <p:stCondLst>
-                              <p:cond delay="0"/>
-                            </p:stCondLst>
-                            <p:childTnLst>
-                              <p:par>
-                                <p:cTn id="5" presetID="22" presetClass="entr" presetSubtype="8" fill="hold" grpId="0" nodeType="clickEffect">
-                                  <p:stCondLst>
-                                    <p:cond delay="0"/>
-                                  </p:stCondLst>
-                                  <p:childTnLst>
-                                    <p:set>
-                                      <p:cBhvr>
-                                        <p:cTn id="6" dur="1" fill="hold">
-                                          <p:stCondLst>
-                                            <p:cond delay="0"/>
-                                          </p:stCondLst>
-                                        </p:cTn>
-                                        <p:tgtEl>
-                                          <p:spTgt spid="5">
-                                            <p:graphicEl>
-                                              <a:dgm id="{DFA48299-B840-4714-A5F6-769C74D74113}"/>
-                                            </p:graphicEl>
-                                          </p:spTgt>
-                                        </p:tgtEl>
-                                        <p:attrNameLst>
-                                          <p:attrName>style.visibility</p:attrName>
-                                        </p:attrNameLst>
-                                      </p:cBhvr>
-                                      <p:to>
-                                        <p:strVal val="visible"/>
-                                      </p:to>
-                                    </p:set>
-                                    <p:animEffect transition="in" filter="wipe(left)">
-                                      <p:cBhvr>
-                                        <p:cTn id="7" dur="500"/>
-                                        <p:tgtEl>
-                                          <p:spTgt spid="5">
-                                            <p:graphicEl>
-                                              <a:dgm id="{DFA48299-B840-4714-A5F6-769C74D74113}"/>
-                                            </p:graphicEl>
-                                          </p:spTgt>
-                                        </p:tgtEl>
-                                      </p:cBhvr>
-                                    </p:animEffect>
-                                  </p:childTnLst>
-                                </p:cTn>
-                              </p:par>
-                            </p:childTnLst>
-                          </p:cTn>
-                        </p:par>
-                        <p:par>
-                          <p:cTn id="8" fill="hold">
-                            <p:stCondLst>
-                              <p:cond delay="500"/>
-                            </p:stCondLst>
-                            <p:childTnLst>
-                              <p:par>
-                                <p:cTn id="9" presetID="22" presetClass="entr" presetSubtype="8" fill="hold" grpId="0" nodeType="afterEffect">
-                                  <p:stCondLst>
-                                    <p:cond delay="0"/>
-                                  </p:stCondLst>
-                                  <p:childTnLst>
-                                    <p:set>
-                                      <p:cBhvr>
-                                        <p:cTn id="10" dur="1" fill="hold">
-                                          <p:stCondLst>
-                                            <p:cond delay="0"/>
-                                          </p:stCondLst>
-                                        </p:cTn>
-                                        <p:tgtEl>
-                                          <p:spTgt spid="5">
-                                            <p:graphicEl>
-                                              <a:dgm id="{19C32B8D-512E-49A1-A0E6-109384C61E4D}"/>
-                                            </p:graphicEl>
-                                          </p:spTgt>
-                                        </p:tgtEl>
-                                        <p:attrNameLst>
-                                          <p:attrName>style.visibility</p:attrName>
-                                        </p:attrNameLst>
-                                      </p:cBhvr>
-                                      <p:to>
-                                        <p:strVal val="visible"/>
-                                      </p:to>
-                                    </p:set>
-                                    <p:animEffect transition="in" filter="wipe(left)">
-                                      <p:cBhvr>
-                                        <p:cTn id="11" dur="2000"/>
-                                        <p:tgtEl>
-                                          <p:spTgt spid="5">
-                                            <p:graphicEl>
-                                              <a:dgm id="{19C32B8D-512E-49A1-A0E6-109384C61E4D}"/>
-                                            </p:graphicEl>
-                                          </p:spTgt>
-                                        </p:tgtEl>
-                                      </p:cBhvr>
-                                    </p:animEffect>
-                                  </p:childTnLst>
-                                </p:cTn>
-                              </p:par>
-                            </p:childTnLst>
-                          </p:cTn>
-                        </p:par>
-                      </p:childTnLst>
-                    </p:cTn>
-                  </p:par>
-                  <p:par>
-                    <p:cTn id="12" fill="hold">
-                      <p:stCondLst>
-                        <p:cond delay="indefinite"/>
-                      </p:stCondLst>
-                      <p:childTnLst>
-                        <p:par>
-                          <p:cTn id="13" fill="hold">
-                            <p:stCondLst>
-                              <p:cond delay="0"/>
-                            </p:stCondLst>
-                            <p:childTnLst>
-                              <p:par>
-                                <p:cTn id="14" presetID="22" presetClass="entr" presetSubtype="8" fill="hold" grpId="0" nodeType="clickEffect">
-                                  <p:stCondLst>
-                                    <p:cond delay="0"/>
-                                  </p:stCondLst>
-                                  <p:childTnLst>
-                                    <p:set>
-                                      <p:cBhvr>
-                                        <p:cTn id="15" dur="1" fill="hold">
-                                          <p:stCondLst>
-                                            <p:cond delay="0"/>
-                                          </p:stCondLst>
-                                        </p:cTn>
-                                        <p:tgtEl>
-                                          <p:spTgt spid="5">
-                                            <p:graphicEl>
-                                              <a:dgm id="{AAD30B60-88C6-4919-B6DD-9F480459E84E}"/>
-                                            </p:graphicEl>
-                                          </p:spTgt>
-                                        </p:tgtEl>
-                                        <p:attrNameLst>
-                                          <p:attrName>style.visibility</p:attrName>
-                                        </p:attrNameLst>
-                                      </p:cBhvr>
-                                      <p:to>
-                                        <p:strVal val="visible"/>
-                                      </p:to>
-                                    </p:set>
-                                    <p:animEffect transition="in" filter="wipe(left)">
-                                      <p:cBhvr>
-                                        <p:cTn id="16" dur="500"/>
-                                        <p:tgtEl>
-                                          <p:spTgt spid="5">
-                                            <p:graphicEl>
-                                              <a:dgm id="{AAD30B60-88C6-4919-B6DD-9F480459E84E}"/>
-                                            </p:graphicEl>
-                                          </p:spTgt>
-                                        </p:tgtEl>
-                                      </p:cBhvr>
-                                    </p:animEffect>
-                                  </p:childTnLst>
-                                </p:cTn>
-                              </p:par>
-                            </p:childTnLst>
-                          </p:cTn>
-                        </p:par>
-                        <p:par>
-                          <p:cTn id="17" fill="hold">
-                            <p:stCondLst>
-                              <p:cond delay="500"/>
-                            </p:stCondLst>
-                            <p:childTnLst>
-                              <p:par>
-                                <p:cTn id="18" presetID="22" presetClass="entr" presetSubtype="8" fill="hold" grpId="0" nodeType="afterEffect">
-                                  <p:stCondLst>
-                                    <p:cond delay="0"/>
-                                  </p:stCondLst>
-                                  <p:childTnLst>
-                                    <p:set>
-                                      <p:cBhvr>
-                                        <p:cTn id="19" dur="1" fill="hold">
-                                          <p:stCondLst>
-                                            <p:cond delay="0"/>
-                                          </p:stCondLst>
-                                        </p:cTn>
-                                        <p:tgtEl>
-                                          <p:spTgt spid="5">
-                                            <p:graphicEl>
-                                              <a:dgm id="{0DFDFC6D-8604-4378-B6A3-6A6720006C95}"/>
-                                            </p:graphicEl>
-                                          </p:spTgt>
-                                        </p:tgtEl>
-                                        <p:attrNameLst>
-                                          <p:attrName>style.visibility</p:attrName>
-                                        </p:attrNameLst>
-                                      </p:cBhvr>
-                                      <p:to>
-                                        <p:strVal val="visible"/>
-                                      </p:to>
-                                    </p:set>
-                                    <p:animEffect transition="in" filter="wipe(left)">
-                                      <p:cBhvr>
-                                        <p:cTn id="20" dur="2000"/>
-                                        <p:tgtEl>
-                                          <p:spTgt spid="5">
-                                            <p:graphicEl>
-                                              <a:dgm id="{0DFDFC6D-8604-4378-B6A3-6A6720006C95}"/>
-                                            </p:graphicEl>
-                                          </p:spTgt>
-                                        </p:tgtEl>
-                                      </p:cBhvr>
-                                    </p:animEffect>
-                                  </p:childTnLst>
-                                </p:cTn>
-                              </p:par>
-                            </p:childTnLst>
-                          </p:cTn>
-                        </p:par>
-                      </p:childTnLst>
-                    </p:cTn>
-                  </p:par>
-                  <p:par>
-                    <p:cTn id="21" fill="hold">
-                      <p:stCondLst>
-                        <p:cond delay="indefinite"/>
-                      </p:stCondLst>
-                      <p:childTnLst>
-                        <p:par>
-                          <p:cTn id="22" fill="hold">
-                            <p:stCondLst>
-                              <p:cond delay="0"/>
-                            </p:stCondLst>
-                            <p:childTnLst>
-                              <p:par>
-                                <p:cTn id="23" presetID="22" presetClass="entr" presetSubtype="8" fill="hold" grpId="0" nodeType="clickEffect">
-                                  <p:stCondLst>
-                                    <p:cond delay="0"/>
-                                  </p:stCondLst>
-                                  <p:childTnLst>
-                                    <p:set>
-                                      <p:cBhvr>
-                                        <p:cTn id="24" dur="1" fill="hold">
-                                          <p:stCondLst>
-                                            <p:cond delay="0"/>
-                                          </p:stCondLst>
-                                        </p:cTn>
-                                        <p:tgtEl>
-                                          <p:spTgt spid="5">
-                                            <p:graphicEl>
-                                              <a:dgm id="{13389968-BA24-47B6-8473-359CF30A7B68}"/>
-                                            </p:graphicEl>
-                                          </p:spTgt>
-                                        </p:tgtEl>
-                                        <p:attrNameLst>
-                                          <p:attrName>style.visibility</p:attrName>
-                                        </p:attrNameLst>
-                                      </p:cBhvr>
-                                      <p:to>
-                                        <p:strVal val="visible"/>
-                                      </p:to>
-                                    </p:set>
-                                    <p:animEffect transition="in" filter="wipe(left)">
-                                      <p:cBhvr>
-                                        <p:cTn id="25" dur="500"/>
-                                        <p:tgtEl>
-                                          <p:spTgt spid="5">
-                                            <p:graphicEl>
-                                              <a:dgm id="{13389968-BA24-47B6-8473-359CF30A7B68}"/>
-                                            </p:graphicEl>
-                                          </p:spTgt>
-                                        </p:tgtEl>
-                                      </p:cBhvr>
-                                    </p:animEffect>
-                                  </p:childTnLst>
-                                </p:cTn>
-                              </p:par>
-                            </p:childTnLst>
-                          </p:cTn>
-                        </p:par>
-                        <p:par>
-                          <p:cTn id="26" fill="hold">
-                            <p:stCondLst>
-                              <p:cond delay="500"/>
-                            </p:stCondLst>
-                            <p:childTnLst>
-                              <p:par>
-                                <p:cTn id="27" presetID="22" presetClass="entr" presetSubtype="8" fill="hold" grpId="0" nodeType="afterEffect">
-                                  <p:stCondLst>
-                                    <p:cond delay="0"/>
-                                  </p:stCondLst>
-                                  <p:childTnLst>
-                                    <p:set>
-                                      <p:cBhvr>
-                                        <p:cTn id="28" dur="1" fill="hold">
-                                          <p:stCondLst>
-                                            <p:cond delay="0"/>
-                                          </p:stCondLst>
-                                        </p:cTn>
-                                        <p:tgtEl>
-                                          <p:spTgt spid="5">
-                                            <p:graphicEl>
-                                              <a:dgm id="{7B327266-A4CF-4A7C-A1A8-A8419A288BA3}"/>
-                                            </p:graphicEl>
-                                          </p:spTgt>
-                                        </p:tgtEl>
-                                        <p:attrNameLst>
-                                          <p:attrName>style.visibility</p:attrName>
-                                        </p:attrNameLst>
-                                      </p:cBhvr>
-                                      <p:to>
-                                        <p:strVal val="visible"/>
-                                      </p:to>
-                                    </p:set>
-                                    <p:animEffect transition="in" filter="wipe(left)">
-                                      <p:cBhvr>
-                                        <p:cTn id="29" dur="2000"/>
-                                        <p:tgtEl>
-                                          <p:spTgt spid="5">
-                                            <p:graphicEl>
-                                              <a:dgm id="{7B327266-A4CF-4A7C-A1A8-A8419A288BA3}"/>
-                                            </p:graphicEl>
-                                          </p:spTgt>
-                                        </p:tgtEl>
-                                      </p:cBhvr>
-                                    </p:animEffect>
-                                  </p:childTnLst>
-                                </p:cTn>
-                              </p:par>
-                            </p:childTnLst>
-                          </p:cTn>
-                        </p:par>
-                      </p:childTnLst>
-                    </p:cTn>
-                  </p:par>
-                  <p:par>
-                    <p:cTn id="30" fill="hold">
-                      <p:stCondLst>
-                        <p:cond delay="indefinite"/>
-                      </p:stCondLst>
-                      <p:childTnLst>
-                        <p:par>
-                          <p:cTn id="31" fill="hold">
-                            <p:stCondLst>
-                              <p:cond delay="0"/>
-                            </p:stCondLst>
-                            <p:childTnLst>
-                              <p:par>
-                                <p:cTn id="32" presetID="22" presetClass="entr" presetSubtype="4" fill="hold" grpId="0" nodeType="clickEffect">
-                                  <p:stCondLst>
-                                    <p:cond delay="0"/>
-                                  </p:stCondLst>
-                                  <p:childTnLst>
-                                    <p:set>
-                                      <p:cBhvr>
-                                        <p:cTn id="33" dur="1" fill="hold">
-                                          <p:stCondLst>
-                                            <p:cond delay="0"/>
-                                          </p:stCondLst>
-                                        </p:cTn>
-                                        <p:tgtEl>
-                                          <p:spTgt spid="3"/>
-                                        </p:tgtEl>
-                                        <p:attrNameLst>
-                                          <p:attrName>style.visibility</p:attrName>
-                                        </p:attrNameLst>
-                                      </p:cBhvr>
-                                      <p:to>
-                                        <p:strVal val="visible"/>
-                                      </p:to>
-                                    </p:set>
-                                    <p:animEffect transition="in" filter="wipe(down)">
-                                      <p:cBhvr>
-                                        <p:cTn id="34" dur="1000"/>
-                                        <p:tgtEl>
-                                          <p:spTgt spid="3"/>
-                                        </p:tgtEl>
-                                      </p:cBhvr>
-                                    </p:animEffect>
-                                  </p:childTnLst>
-                                </p:cTn>
-                              </p:par>
-                            </p:childTnLst>
-                          </p:cTn>
-                        </p:par>
-                      </p:childTnLst>
-                    </p:cTn>
-                  </p:par>
-                  <p:par>
-                    <p:cTn id="35" fill="hold">
-                      <p:stCondLst>
-                        <p:cond delay="indefinite"/>
-                      </p:stCondLst>
-                      <p:childTnLst>
-                        <p:par>
-                          <p:cTn id="36" fill="hold">
-                            <p:stCondLst>
-                              <p:cond delay="0"/>
-                            </p:stCondLst>
-                            <p:childTnLst>
-                              <p:par>
-                                <p:cTn id="37" presetID="22" presetClass="entr" presetSubtype="8" fill="hold" grpId="0" nodeType="clickEffect">
-                                  <p:stCondLst>
-                                    <p:cond delay="0"/>
-                                  </p:stCondLst>
-                                  <p:childTnLst>
-                                    <p:set>
-                                      <p:cBhvr>
-                                        <p:cTn id="38" dur="1" fill="hold">
-                                          <p:stCondLst>
-                                            <p:cond delay="0"/>
-                                          </p:stCondLst>
-                                        </p:cTn>
-                                        <p:tgtEl>
-                                          <p:spTgt spid="5">
-                                            <p:graphicEl>
-                                              <a:dgm id="{EB2E52AE-8FCF-47D0-B499-CFCFAF1883A9}"/>
-                                            </p:graphicEl>
-                                          </p:spTgt>
-                                        </p:tgtEl>
-                                        <p:attrNameLst>
-                                          <p:attrName>style.visibility</p:attrName>
-                                        </p:attrNameLst>
-                                      </p:cBhvr>
-                                      <p:to>
-                                        <p:strVal val="visible"/>
-                                      </p:to>
-                                    </p:set>
-                                    <p:animEffect transition="in" filter="wipe(left)">
-                                      <p:cBhvr>
-                                        <p:cTn id="39" dur="500"/>
-                                        <p:tgtEl>
-                                          <p:spTgt spid="5">
-                                            <p:graphicEl>
-                                              <a:dgm id="{EB2E52AE-8FCF-47D0-B499-CFCFAF1883A9}"/>
-                                            </p:graphicEl>
-                                          </p:spTgt>
-                                        </p:tgtEl>
-                                      </p:cBhvr>
-                                    </p:animEffect>
-                                  </p:childTnLst>
-                                </p:cTn>
-                              </p:par>
-                            </p:childTnLst>
-                          </p:cTn>
-                        </p:par>
-                        <p:par>
-                          <p:cTn id="40" fill="hold">
-                            <p:stCondLst>
-                              <p:cond delay="500"/>
-                            </p:stCondLst>
-                            <p:childTnLst>
-                              <p:par>
-                                <p:cTn id="41" presetID="22" presetClass="entr" presetSubtype="8" fill="hold" grpId="0" nodeType="afterEffect">
-                                  <p:stCondLst>
-                                    <p:cond delay="0"/>
-                                  </p:stCondLst>
-                                  <p:childTnLst>
-                                    <p:set>
-                                      <p:cBhvr>
-                                        <p:cTn id="42" dur="1" fill="hold">
-                                          <p:stCondLst>
-                                            <p:cond delay="0"/>
-                                          </p:stCondLst>
-                                        </p:cTn>
-                                        <p:tgtEl>
-                                          <p:spTgt spid="5">
-                                            <p:graphicEl>
-                                              <a:dgm id="{C92F1771-01AA-4FF3-B7EC-0229DB7A592C}"/>
-                                            </p:graphicEl>
-                                          </p:spTgt>
-                                        </p:tgtEl>
-                                        <p:attrNameLst>
-                                          <p:attrName>style.visibility</p:attrName>
-                                        </p:attrNameLst>
-                                      </p:cBhvr>
-                                      <p:to>
-                                        <p:strVal val="visible"/>
-                                      </p:to>
-                                    </p:set>
-                                    <p:animEffect transition="in" filter="wipe(left)">
-                                      <p:cBhvr>
-                                        <p:cTn id="43" dur="2000"/>
-                                        <p:tgtEl>
-                                          <p:spTgt spid="5">
-                                            <p:graphicEl>
-                                              <a:dgm id="{C92F1771-01AA-4FF3-B7EC-0229DB7A592C}"/>
-                                            </p:graphicEl>
-                                          </p:spTgt>
-                                        </p:tgtEl>
-                                      </p:cBhvr>
-                                    </p:animEffect>
-                                  </p:childTnLst>
-                                </p:cTn>
-                              </p:par>
-                            </p:childTnLst>
-                          </p:cTn>
-                        </p:par>
-                      </p:childTnLst>
-                    </p:cTn>
-                  </p:par>
-                </p:childTnLst>
-              </p:cTn>
-              <p:prevCondLst>
-                <p:cond evt="onPrev" delay="0">
-                  <p:tgtEl>
-                    <p:sldTgt/>
-                  </p:tgtEl>
-                </p:cond>
-              </p:prevCondLst>
-              <p:nextCondLst>
-                <p:cond evt="onNext" delay="0">
-                  <p:tgtEl>
-                    <p:sldTgt/>
-                  </p:tgtEl>
-                </p:cond>
-              </p:nextCondLst>
-            </p:seq>
-          </p:childTnLst>
-        </p:cTn>
-      </p:par>
-    </p:tnLst>
-    <p:bldLst>
-      <p:bldGraphic spid="5" grpId="0" uiExpand="1">
-        <p:bldSub>
-          <a:bldDgm bld="one"/>
-        </p:bldSub>
-      </p:bldGraphic>
-      <p:bldP spid="3" grpId="0"/>
-    </p:bldLst>
-  </p:timing>
-</p:sld>
-</file>
-
-<file path=ppt/slides/slide20.xml><?xml version="1.0" encoding="utf-8"?>
+<file path=ppt/slides/slide22.xml><?xml version="1.0" encoding="utf-8"?>
 <p:sld xmlns:a="http://schemas.openxmlformats.org/drawingml/2006/main" xmlns:r="http://schemas.openxmlformats.org/officeDocument/2006/relationships" xmlns:p="http://schemas.openxmlformats.org/presentationml/2006/main">
   <p:cSld>
     <p:spTree>
@@ -17631,7 +17708,7 @@
 </p:sld>
 </file>
 
-<file path=ppt/slides/slide21.xml><?xml version="1.0" encoding="utf-8"?>
+<file path=ppt/slides/slide23.xml><?xml version="1.0" encoding="utf-8"?>
 <p:sld xmlns:a="http://schemas.openxmlformats.org/drawingml/2006/main" xmlns:r="http://schemas.openxmlformats.org/officeDocument/2006/relationships" xmlns:p="http://schemas.openxmlformats.org/presentationml/2006/main">
   <p:cSld>
     <p:spTree>
@@ -18775,7 +18852,7 @@
           <a:p>
             <a:r>
               <a:rPr lang="en-GB" dirty="0"/>
-              <a:t>Use Case</a:t>
+              <a:t>Use Case Diagram</a:t>
             </a:r>
           </a:p>
         </p:txBody>
@@ -18801,18 +18878,33 @@
           <a:bodyPr/>
           <a:lstStyle/>
           <a:p>
+            <a:pPr>
+              <a:spcAft>
+                <a:spcPts val="1200"/>
+              </a:spcAft>
+            </a:pPr>
             <a:r>
               <a:rPr lang="en-GB" dirty="0"/>
-              <a:t>a way to capture the requirements of systems</a:t>
-            </a:r>
-          </a:p>
-          <a:p>
+              <a:t>a way to capture the requirements of a system</a:t>
+            </a:r>
+          </a:p>
+          <a:p>
+            <a:pPr>
+              <a:spcAft>
+                <a:spcPts val="1200"/>
+              </a:spcAft>
+            </a:pPr>
             <a:r>
               <a:rPr lang="en-GB" dirty="0"/>
               <a:t>a specification of behaviour</a:t>
             </a:r>
           </a:p>
           <a:p>
+            <a:pPr>
+              <a:spcAft>
+                <a:spcPts val="1200"/>
+              </a:spcAft>
+            </a:pPr>
             <a:r>
               <a:rPr lang="en-GB" dirty="0"/>
               <a:t>an Actor is a role: a person, a thing, a database, …</a:t>
@@ -18830,6 +18922,222 @@
   <p:clrMapOvr>
     <a:masterClrMapping/>
   </p:clrMapOvr>
+  <p:timing>
+    <p:tnLst>
+      <p:par>
+        <p:cTn id="1" dur="indefinite" restart="never" nodeType="tmRoot">
+          <p:childTnLst>
+            <p:seq concurrent="1" nextAc="seek">
+              <p:cTn id="2" dur="indefinite" nodeType="mainSeq">
+                <p:childTnLst>
+                  <p:par>
+                    <p:cTn id="3" fill="hold">
+                      <p:stCondLst>
+                        <p:cond delay="indefinite"/>
+                      </p:stCondLst>
+                      <p:childTnLst>
+                        <p:par>
+                          <p:cTn id="4" fill="hold">
+                            <p:stCondLst>
+                              <p:cond delay="0"/>
+                            </p:stCondLst>
+                            <p:childTnLst>
+                              <p:par>
+                                <p:cTn id="5" presetID="22" presetClass="entr" presetSubtype="8" fill="hold" grpId="0" nodeType="clickEffect">
+                                  <p:stCondLst>
+                                    <p:cond delay="0"/>
+                                  </p:stCondLst>
+                                  <p:childTnLst>
+                                    <p:set>
+                                      <p:cBhvr>
+                                        <p:cTn id="6" dur="1" fill="hold">
+                                          <p:stCondLst>
+                                            <p:cond delay="0"/>
+                                          </p:stCondLst>
+                                        </p:cTn>
+                                        <p:tgtEl>
+                                          <p:spTgt spid="3">
+                                            <p:txEl>
+                                              <p:pRg st="0" end="0"/>
+                                            </p:txEl>
+                                          </p:spTgt>
+                                        </p:tgtEl>
+                                        <p:attrNameLst>
+                                          <p:attrName>style.visibility</p:attrName>
+                                        </p:attrNameLst>
+                                      </p:cBhvr>
+                                      <p:to>
+                                        <p:strVal val="visible"/>
+                                      </p:to>
+                                    </p:set>
+                                    <p:animEffect transition="in" filter="wipe(left)">
+                                      <p:cBhvr>
+                                        <p:cTn id="7" dur="2000"/>
+                                        <p:tgtEl>
+                                          <p:spTgt spid="3">
+                                            <p:txEl>
+                                              <p:pRg st="0" end="0"/>
+                                            </p:txEl>
+                                          </p:spTgt>
+                                        </p:tgtEl>
+                                      </p:cBhvr>
+                                    </p:animEffect>
+                                  </p:childTnLst>
+                                </p:cTn>
+                              </p:par>
+                            </p:childTnLst>
+                          </p:cTn>
+                        </p:par>
+                      </p:childTnLst>
+                    </p:cTn>
+                  </p:par>
+                  <p:par>
+                    <p:cTn id="8" fill="hold">
+                      <p:stCondLst>
+                        <p:cond delay="indefinite"/>
+                      </p:stCondLst>
+                      <p:childTnLst>
+                        <p:par>
+                          <p:cTn id="9" fill="hold">
+                            <p:stCondLst>
+                              <p:cond delay="0"/>
+                            </p:stCondLst>
+                            <p:childTnLst>
+                              <p:par>
+                                <p:cTn id="10" presetID="22" presetClass="entr" presetSubtype="8" fill="hold" grpId="0" nodeType="clickEffect">
+                                  <p:stCondLst>
+                                    <p:cond delay="0"/>
+                                  </p:stCondLst>
+                                  <p:childTnLst>
+                                    <p:set>
+                                      <p:cBhvr>
+                                        <p:cTn id="11" dur="1" fill="hold">
+                                          <p:stCondLst>
+                                            <p:cond delay="0"/>
+                                          </p:stCondLst>
+                                        </p:cTn>
+                                        <p:tgtEl>
+                                          <p:spTgt spid="3">
+                                            <p:txEl>
+                                              <p:pRg st="1" end="1"/>
+                                            </p:txEl>
+                                          </p:spTgt>
+                                        </p:tgtEl>
+                                        <p:attrNameLst>
+                                          <p:attrName>style.visibility</p:attrName>
+                                        </p:attrNameLst>
+                                      </p:cBhvr>
+                                      <p:to>
+                                        <p:strVal val="visible"/>
+                                      </p:to>
+                                    </p:set>
+                                    <p:animEffect transition="in" filter="wipe(left)">
+                                      <p:cBhvr>
+                                        <p:cTn id="12" dur="1500"/>
+                                        <p:tgtEl>
+                                          <p:spTgt spid="3">
+                                            <p:txEl>
+                                              <p:pRg st="1" end="1"/>
+                                            </p:txEl>
+                                          </p:spTgt>
+                                        </p:tgtEl>
+                                      </p:cBhvr>
+                                    </p:animEffect>
+                                  </p:childTnLst>
+                                </p:cTn>
+                              </p:par>
+                            </p:childTnLst>
+                          </p:cTn>
+                        </p:par>
+                      </p:childTnLst>
+                    </p:cTn>
+                  </p:par>
+                  <p:par>
+                    <p:cTn id="13" fill="hold">
+                      <p:stCondLst>
+                        <p:cond delay="indefinite"/>
+                      </p:stCondLst>
+                      <p:childTnLst>
+                        <p:par>
+                          <p:cTn id="14" fill="hold">
+                            <p:stCondLst>
+                              <p:cond delay="0"/>
+                            </p:stCondLst>
+                            <p:childTnLst>
+                              <p:par>
+                                <p:cTn id="15" presetID="22" presetClass="entr" presetSubtype="8" fill="hold" grpId="0" nodeType="clickEffect">
+                                  <p:stCondLst>
+                                    <p:cond delay="0"/>
+                                  </p:stCondLst>
+                                  <p:childTnLst>
+                                    <p:set>
+                                      <p:cBhvr>
+                                        <p:cTn id="16" dur="1" fill="hold">
+                                          <p:stCondLst>
+                                            <p:cond delay="0"/>
+                                          </p:stCondLst>
+                                        </p:cTn>
+                                        <p:tgtEl>
+                                          <p:spTgt spid="3">
+                                            <p:txEl>
+                                              <p:pRg st="2" end="2"/>
+                                            </p:txEl>
+                                          </p:spTgt>
+                                        </p:tgtEl>
+                                        <p:attrNameLst>
+                                          <p:attrName>style.visibility</p:attrName>
+                                        </p:attrNameLst>
+                                      </p:cBhvr>
+                                      <p:to>
+                                        <p:strVal val="visible"/>
+                                      </p:to>
+                                    </p:set>
+                                    <p:animEffect transition="in" filter="wipe(left)">
+                                      <p:cBhvr>
+                                        <p:cTn id="17" dur="2000"/>
+                                        <p:tgtEl>
+                                          <p:spTgt spid="3">
+                                            <p:txEl>
+                                              <p:pRg st="2" end="2"/>
+                                            </p:txEl>
+                                          </p:spTgt>
+                                        </p:tgtEl>
+                                      </p:cBhvr>
+                                    </p:animEffect>
+                                  </p:childTnLst>
+                                </p:cTn>
+                              </p:par>
+                            </p:childTnLst>
+                          </p:cTn>
+                        </p:par>
+                      </p:childTnLst>
+                    </p:cTn>
+                  </p:par>
+                </p:childTnLst>
+              </p:cTn>
+              <p:prevCondLst>
+                <p:cond evt="onPrev" delay="0">
+                  <p:tgtEl>
+                    <p:sldTgt/>
+                  </p:tgtEl>
+                </p:cond>
+              </p:prevCondLst>
+              <p:nextCondLst>
+                <p:cond evt="onNext" delay="0">
+                  <p:tgtEl>
+                    <p:sldTgt/>
+                  </p:tgtEl>
+                </p:cond>
+              </p:nextCondLst>
+            </p:seq>
+          </p:childTnLst>
+        </p:cTn>
+      </p:par>
+    </p:tnLst>
+    <p:bldLst>
+      <p:bldP spid="3" grpId="0" uiExpand="1" build="p"/>
+    </p:bldLst>
+  </p:timing>
 </p:sld>
 </file>
 
@@ -19263,6 +19571,668 @@
                             </p:stCondLst>
                             <p:childTnLst>
                               <p:par>
+                                <p:cTn id="5" presetID="22" presetClass="entr" presetSubtype="4" fill="hold" grpId="0" nodeType="clickEffect">
+                                  <p:stCondLst>
+                                    <p:cond delay="0"/>
+                                  </p:stCondLst>
+                                  <p:childTnLst>
+                                    <p:set>
+                                      <p:cBhvr>
+                                        <p:cTn id="6" dur="1" fill="hold">
+                                          <p:stCondLst>
+                                            <p:cond delay="0"/>
+                                          </p:stCondLst>
+                                        </p:cTn>
+                                        <p:tgtEl>
+                                          <p:spTgt spid="5"/>
+                                        </p:tgtEl>
+                                        <p:attrNameLst>
+                                          <p:attrName>style.visibility</p:attrName>
+                                        </p:attrNameLst>
+                                      </p:cBhvr>
+                                      <p:to>
+                                        <p:strVal val="visible"/>
+                                      </p:to>
+                                    </p:set>
+                                    <p:animEffect transition="in" filter="wipe(down)">
+                                      <p:cBhvr>
+                                        <p:cTn id="7" dur="1500"/>
+                                        <p:tgtEl>
+                                          <p:spTgt spid="5"/>
+                                        </p:tgtEl>
+                                      </p:cBhvr>
+                                    </p:animEffect>
+                                  </p:childTnLst>
+                                </p:cTn>
+                              </p:par>
+                            </p:childTnLst>
+                          </p:cTn>
+                        </p:par>
+                        <p:par>
+                          <p:cTn id="8" fill="hold">
+                            <p:stCondLst>
+                              <p:cond delay="1500"/>
+                            </p:stCondLst>
+                            <p:childTnLst>
+                              <p:par>
+                                <p:cTn id="9" presetID="22" presetClass="entr" presetSubtype="8" fill="hold" grpId="0" nodeType="afterEffect">
+                                  <p:stCondLst>
+                                    <p:cond delay="0"/>
+                                  </p:stCondLst>
+                                  <p:childTnLst>
+                                    <p:set>
+                                      <p:cBhvr>
+                                        <p:cTn id="10" dur="1" fill="hold">
+                                          <p:stCondLst>
+                                            <p:cond delay="0"/>
+                                          </p:stCondLst>
+                                        </p:cTn>
+                                        <p:tgtEl>
+                                          <p:spTgt spid="33"/>
+                                        </p:tgtEl>
+                                        <p:attrNameLst>
+                                          <p:attrName>style.visibility</p:attrName>
+                                        </p:attrNameLst>
+                                      </p:cBhvr>
+                                      <p:to>
+                                        <p:strVal val="visible"/>
+                                      </p:to>
+                                    </p:set>
+                                    <p:animEffect transition="in" filter="wipe(left)">
+                                      <p:cBhvr>
+                                        <p:cTn id="11" dur="1000"/>
+                                        <p:tgtEl>
+                                          <p:spTgt spid="33"/>
+                                        </p:tgtEl>
+                                      </p:cBhvr>
+                                    </p:animEffect>
+                                  </p:childTnLst>
+                                </p:cTn>
+                              </p:par>
+                            </p:childTnLst>
+                          </p:cTn>
+                        </p:par>
+                      </p:childTnLst>
+                    </p:cTn>
+                  </p:par>
+                  <p:par>
+                    <p:cTn id="12" fill="hold">
+                      <p:stCondLst>
+                        <p:cond delay="indefinite"/>
+                      </p:stCondLst>
+                      <p:childTnLst>
+                        <p:par>
+                          <p:cTn id="13" fill="hold">
+                            <p:stCondLst>
+                              <p:cond delay="0"/>
+                            </p:stCondLst>
+                            <p:childTnLst>
+                              <p:par>
+                                <p:cTn id="14" presetID="22" presetClass="entr" presetSubtype="8" fill="hold" grpId="0" nodeType="clickEffect">
+                                  <p:stCondLst>
+                                    <p:cond delay="0"/>
+                                  </p:stCondLst>
+                                  <p:childTnLst>
+                                    <p:set>
+                                      <p:cBhvr>
+                                        <p:cTn id="15" dur="1" fill="hold">
+                                          <p:stCondLst>
+                                            <p:cond delay="0"/>
+                                          </p:stCondLst>
+                                        </p:cTn>
+                                        <p:tgtEl>
+                                          <p:spTgt spid="9"/>
+                                        </p:tgtEl>
+                                        <p:attrNameLst>
+                                          <p:attrName>style.visibility</p:attrName>
+                                        </p:attrNameLst>
+                                      </p:cBhvr>
+                                      <p:to>
+                                        <p:strVal val="visible"/>
+                                      </p:to>
+                                    </p:set>
+                                    <p:animEffect transition="in" filter="wipe(left)">
+                                      <p:cBhvr>
+                                        <p:cTn id="16" dur="1000"/>
+                                        <p:tgtEl>
+                                          <p:spTgt spid="9"/>
+                                        </p:tgtEl>
+                                      </p:cBhvr>
+                                    </p:animEffect>
+                                  </p:childTnLst>
+                                </p:cTn>
+                              </p:par>
+                            </p:childTnLst>
+                          </p:cTn>
+                        </p:par>
+                        <p:par>
+                          <p:cTn id="17" fill="hold">
+                            <p:stCondLst>
+                              <p:cond delay="1000"/>
+                            </p:stCondLst>
+                            <p:childTnLst>
+                              <p:par>
+                                <p:cTn id="18" presetID="22" presetClass="entr" presetSubtype="8" fill="hold" grpId="0" nodeType="afterEffect">
+                                  <p:stCondLst>
+                                    <p:cond delay="0"/>
+                                  </p:stCondLst>
+                                  <p:childTnLst>
+                                    <p:set>
+                                      <p:cBhvr>
+                                        <p:cTn id="19" dur="1" fill="hold">
+                                          <p:stCondLst>
+                                            <p:cond delay="0"/>
+                                          </p:stCondLst>
+                                        </p:cTn>
+                                        <p:tgtEl>
+                                          <p:spTgt spid="35"/>
+                                        </p:tgtEl>
+                                        <p:attrNameLst>
+                                          <p:attrName>style.visibility</p:attrName>
+                                        </p:attrNameLst>
+                                      </p:cBhvr>
+                                      <p:to>
+                                        <p:strVal val="visible"/>
+                                      </p:to>
+                                    </p:set>
+                                    <p:animEffect transition="in" filter="wipe(left)">
+                                      <p:cBhvr>
+                                        <p:cTn id="20" dur="750"/>
+                                        <p:tgtEl>
+                                          <p:spTgt spid="35"/>
+                                        </p:tgtEl>
+                                      </p:cBhvr>
+                                    </p:animEffect>
+                                  </p:childTnLst>
+                                </p:cTn>
+                              </p:par>
+                            </p:childTnLst>
+                          </p:cTn>
+                        </p:par>
+                      </p:childTnLst>
+                    </p:cTn>
+                  </p:par>
+                  <p:par>
+                    <p:cTn id="21" fill="hold">
+                      <p:stCondLst>
+                        <p:cond delay="indefinite"/>
+                      </p:stCondLst>
+                      <p:childTnLst>
+                        <p:par>
+                          <p:cTn id="22" fill="hold">
+                            <p:stCondLst>
+                              <p:cond delay="0"/>
+                            </p:stCondLst>
+                            <p:childTnLst>
+                              <p:par>
+                                <p:cTn id="23" presetID="22" presetClass="entr" presetSubtype="4" fill="hold" nodeType="clickEffect">
+                                  <p:stCondLst>
+                                    <p:cond delay="0"/>
+                                  </p:stCondLst>
+                                  <p:childTnLst>
+                                    <p:set>
+                                      <p:cBhvr>
+                                        <p:cTn id="24" dur="1" fill="hold">
+                                          <p:stCondLst>
+                                            <p:cond delay="0"/>
+                                          </p:stCondLst>
+                                        </p:cTn>
+                                        <p:tgtEl>
+                                          <p:spTgt spid="7"/>
+                                        </p:tgtEl>
+                                        <p:attrNameLst>
+                                          <p:attrName>style.visibility</p:attrName>
+                                        </p:attrNameLst>
+                                      </p:cBhvr>
+                                      <p:to>
+                                        <p:strVal val="visible"/>
+                                      </p:to>
+                                    </p:set>
+                                    <p:animEffect transition="in" filter="wipe(down)">
+                                      <p:cBhvr>
+                                        <p:cTn id="25" dur="1500"/>
+                                        <p:tgtEl>
+                                          <p:spTgt spid="7"/>
+                                        </p:tgtEl>
+                                      </p:cBhvr>
+                                    </p:animEffect>
+                                  </p:childTnLst>
+                                </p:cTn>
+                              </p:par>
+                            </p:childTnLst>
+                          </p:cTn>
+                        </p:par>
+                        <p:par>
+                          <p:cTn id="26" fill="hold">
+                            <p:stCondLst>
+                              <p:cond delay="1500"/>
+                            </p:stCondLst>
+                            <p:childTnLst>
+                              <p:par>
+                                <p:cTn id="27" presetID="22" presetClass="entr" presetSubtype="8" fill="hold" grpId="0" nodeType="afterEffect">
+                                  <p:stCondLst>
+                                    <p:cond delay="0"/>
+                                  </p:stCondLst>
+                                  <p:childTnLst>
+                                    <p:set>
+                                      <p:cBhvr>
+                                        <p:cTn id="28" dur="1" fill="hold">
+                                          <p:stCondLst>
+                                            <p:cond delay="0"/>
+                                          </p:stCondLst>
+                                        </p:cTn>
+                                        <p:tgtEl>
+                                          <p:spTgt spid="10"/>
+                                        </p:tgtEl>
+                                        <p:attrNameLst>
+                                          <p:attrName>style.visibility</p:attrName>
+                                        </p:attrNameLst>
+                                      </p:cBhvr>
+                                      <p:to>
+                                        <p:strVal val="visible"/>
+                                      </p:to>
+                                    </p:set>
+                                    <p:animEffect transition="in" filter="wipe(left)">
+                                      <p:cBhvr>
+                                        <p:cTn id="29" dur="500"/>
+                                        <p:tgtEl>
+                                          <p:spTgt spid="10"/>
+                                        </p:tgtEl>
+                                      </p:cBhvr>
+                                    </p:animEffect>
+                                  </p:childTnLst>
+                                </p:cTn>
+                              </p:par>
+                            </p:childTnLst>
+                          </p:cTn>
+                        </p:par>
+                      </p:childTnLst>
+                    </p:cTn>
+                  </p:par>
+                  <p:par>
+                    <p:cTn id="30" fill="hold">
+                      <p:stCondLst>
+                        <p:cond delay="indefinite"/>
+                      </p:stCondLst>
+                      <p:childTnLst>
+                        <p:par>
+                          <p:cTn id="31" fill="hold">
+                            <p:stCondLst>
+                              <p:cond delay="0"/>
+                            </p:stCondLst>
+                            <p:childTnLst>
+                              <p:par>
+                                <p:cTn id="32" presetID="22" presetClass="entr" presetSubtype="8" fill="hold" nodeType="clickEffect">
+                                  <p:stCondLst>
+                                    <p:cond delay="0"/>
+                                  </p:stCondLst>
+                                  <p:childTnLst>
+                                    <p:set>
+                                      <p:cBhvr>
+                                        <p:cTn id="33" dur="1" fill="hold">
+                                          <p:stCondLst>
+                                            <p:cond delay="0"/>
+                                          </p:stCondLst>
+                                        </p:cTn>
+                                        <p:tgtEl>
+                                          <p:spTgt spid="12"/>
+                                        </p:tgtEl>
+                                        <p:attrNameLst>
+                                          <p:attrName>style.visibility</p:attrName>
+                                        </p:attrNameLst>
+                                      </p:cBhvr>
+                                      <p:to>
+                                        <p:strVal val="visible"/>
+                                      </p:to>
+                                    </p:set>
+                                    <p:animEffect transition="in" filter="wipe(left)">
+                                      <p:cBhvr>
+                                        <p:cTn id="34" dur="2000"/>
+                                        <p:tgtEl>
+                                          <p:spTgt spid="12"/>
+                                        </p:tgtEl>
+                                      </p:cBhvr>
+                                    </p:animEffect>
+                                  </p:childTnLst>
+                                </p:cTn>
+                              </p:par>
+                            </p:childTnLst>
+                          </p:cTn>
+                        </p:par>
+                        <p:par>
+                          <p:cTn id="35" fill="hold">
+                            <p:stCondLst>
+                              <p:cond delay="2000"/>
+                            </p:stCondLst>
+                            <p:childTnLst>
+                              <p:par>
+                                <p:cTn id="36" presetID="22" presetClass="entr" presetSubtype="8" fill="hold" grpId="0" nodeType="afterEffect">
+                                  <p:stCondLst>
+                                    <p:cond delay="0"/>
+                                  </p:stCondLst>
+                                  <p:childTnLst>
+                                    <p:set>
+                                      <p:cBhvr>
+                                        <p:cTn id="37" dur="1" fill="hold">
+                                          <p:stCondLst>
+                                            <p:cond delay="0"/>
+                                          </p:stCondLst>
+                                        </p:cTn>
+                                        <p:tgtEl>
+                                          <p:spTgt spid="36"/>
+                                        </p:tgtEl>
+                                        <p:attrNameLst>
+                                          <p:attrName>style.visibility</p:attrName>
+                                        </p:attrNameLst>
+                                      </p:cBhvr>
+                                      <p:to>
+                                        <p:strVal val="visible"/>
+                                      </p:to>
+                                    </p:set>
+                                    <p:animEffect transition="in" filter="wipe(left)">
+                                      <p:cBhvr>
+                                        <p:cTn id="38" dur="1000"/>
+                                        <p:tgtEl>
+                                          <p:spTgt spid="36"/>
+                                        </p:tgtEl>
+                                      </p:cBhvr>
+                                    </p:animEffect>
+                                  </p:childTnLst>
+                                </p:cTn>
+                              </p:par>
+                            </p:childTnLst>
+                          </p:cTn>
+                        </p:par>
+                      </p:childTnLst>
+                    </p:cTn>
+                  </p:par>
+                </p:childTnLst>
+              </p:cTn>
+              <p:prevCondLst>
+                <p:cond evt="onPrev" delay="0">
+                  <p:tgtEl>
+                    <p:sldTgt/>
+                  </p:tgtEl>
+                </p:cond>
+              </p:prevCondLst>
+              <p:nextCondLst>
+                <p:cond evt="onNext" delay="0">
+                  <p:tgtEl>
+                    <p:sldTgt/>
+                  </p:tgtEl>
+                </p:cond>
+              </p:nextCondLst>
+            </p:seq>
+          </p:childTnLst>
+        </p:cTn>
+      </p:par>
+    </p:tnLst>
+    <p:bldLst>
+      <p:bldP spid="5" grpId="0" animBg="1"/>
+      <p:bldP spid="9" grpId="0" animBg="1"/>
+      <p:bldP spid="10" grpId="0"/>
+      <p:bldP spid="33" grpId="0"/>
+      <p:bldP spid="35" grpId="0"/>
+      <p:bldP spid="36" grpId="0"/>
+    </p:bldLst>
+  </p:timing>
+</p:sld>
+</file>
+
+<file path=ppt/slides/slide8.xml><?xml version="1.0" encoding="utf-8"?>
+<p:sld xmlns:a="http://schemas.openxmlformats.org/drawingml/2006/main" xmlns:r="http://schemas.openxmlformats.org/officeDocument/2006/relationships" xmlns:p="http://schemas.openxmlformats.org/presentationml/2006/main" show="0">
+  <p:cSld>
+    <p:spTree>
+      <p:nvGrpSpPr>
+        <p:cNvPr id="1" name=""/>
+        <p:cNvGrpSpPr/>
+        <p:nvPr/>
+      </p:nvGrpSpPr>
+      <p:grpSpPr>
+        <a:xfrm>
+          <a:off x="0" y="0"/>
+          <a:ext cx="0" cy="0"/>
+          <a:chOff x="0" y="0"/>
+          <a:chExt cx="0" cy="0"/>
+        </a:xfrm>
+      </p:grpSpPr>
+      <p:sp>
+        <p:nvSpPr>
+          <p:cNvPr id="2" name="Title 1"/>
+          <p:cNvSpPr>
+            <a:spLocks noGrp="1"/>
+          </p:cNvSpPr>
+          <p:nvPr>
+            <p:ph type="title"/>
+          </p:nvPr>
+        </p:nvSpPr>
+        <p:spPr/>
+        <p:txBody>
+          <a:bodyPr/>
+          <a:lstStyle/>
+          <a:p>
+            <a:r>
+              <a:rPr lang="en-GB" dirty="0"/>
+              <a:t>Use Case Diagram – Overview</a:t>
+            </a:r>
+          </a:p>
+        </p:txBody>
+      </p:sp>
+      <p:sp>
+        <p:nvSpPr>
+          <p:cNvPr id="5" name="Rectangle 4">
+            <a:extLst>
+              <a:ext uri="{FF2B5EF4-FFF2-40B4-BE49-F238E27FC236}">
+                <a16:creationId xmlns:a16="http://schemas.microsoft.com/office/drawing/2014/main" id="{CCE05E6E-A41D-4F17-976E-859832DCAAEB}"/>
+              </a:ext>
+            </a:extLst>
+          </p:cNvPr>
+          <p:cNvSpPr/>
+          <p:nvPr/>
+        </p:nvSpPr>
+        <p:spPr>
+          <a:xfrm>
+            <a:off x="6804660" y="2011680"/>
+            <a:ext cx="3600450" cy="4320000"/>
+          </a:xfrm>
+          <a:prstGeom prst="rect">
+            <a:avLst/>
+          </a:prstGeom>
+          <a:noFill/>
+          <a:ln w="28575">
+            <a:solidFill>
+              <a:schemeClr val="tx1"/>
+            </a:solidFill>
+          </a:ln>
+        </p:spPr>
+        <p:style>
+          <a:lnRef idx="2">
+            <a:schemeClr val="accent1">
+              <a:shade val="50000"/>
+            </a:schemeClr>
+          </a:lnRef>
+          <a:fillRef idx="1">
+            <a:schemeClr val="accent1"/>
+          </a:fillRef>
+          <a:effectRef idx="0">
+            <a:schemeClr val="accent1"/>
+          </a:effectRef>
+          <a:fontRef idx="minor">
+            <a:schemeClr val="lt1"/>
+          </a:fontRef>
+        </p:style>
+        <p:txBody>
+          <a:bodyPr rtlCol="0" anchor="ctr"/>
+          <a:lstStyle/>
+          <a:p>
+            <a:pPr algn="ctr"/>
+            <a:endParaRPr lang="en-GB" dirty="0"/>
+          </a:p>
+        </p:txBody>
+      </p:sp>
+      <p:pic>
+        <p:nvPicPr>
+          <p:cNvPr id="7" name="Picture 6">
+            <a:extLst>
+              <a:ext uri="{FF2B5EF4-FFF2-40B4-BE49-F238E27FC236}">
+                <a16:creationId xmlns:a16="http://schemas.microsoft.com/office/drawing/2014/main" id="{B026E70D-B3FD-4141-85F9-75190461CDA3}"/>
+              </a:ext>
+            </a:extLst>
+          </p:cNvPr>
+          <p:cNvPicPr>
+            <a:picLocks noChangeAspect="1"/>
+          </p:cNvPicPr>
+          <p:nvPr/>
+        </p:nvPicPr>
+        <p:blipFill>
+          <a:blip r:embed="rId3">
+            <a:extLst>
+              <a:ext uri="{28A0092B-C50C-407E-A947-70E740481C1C}">
+                <a14:useLocalDpi xmlns:a14="http://schemas.microsoft.com/office/drawing/2010/main" val="0"/>
+              </a:ext>
+            </a:extLst>
+          </a:blip>
+          <a:stretch>
+            <a:fillRect/>
+          </a:stretch>
+        </p:blipFill>
+        <p:spPr>
+          <a:xfrm>
+            <a:off x="1721270" y="2712178"/>
+            <a:ext cx="1482940" cy="2919004"/>
+          </a:xfrm>
+          <a:prstGeom prst="rect">
+            <a:avLst/>
+          </a:prstGeom>
+        </p:spPr>
+      </p:pic>
+      <p:sp>
+        <p:nvSpPr>
+          <p:cNvPr id="9" name="Oval 8">
+            <a:extLst>
+              <a:ext uri="{FF2B5EF4-FFF2-40B4-BE49-F238E27FC236}">
+                <a16:creationId xmlns:a16="http://schemas.microsoft.com/office/drawing/2014/main" id="{EE2EFB0E-AB56-4E96-9F15-7393AA54BFAA}"/>
+              </a:ext>
+            </a:extLst>
+          </p:cNvPr>
+          <p:cNvSpPr/>
+          <p:nvPr/>
+        </p:nvSpPr>
+        <p:spPr>
+          <a:xfrm>
+            <a:off x="7524885" y="3631680"/>
+            <a:ext cx="2160000" cy="1080000"/>
+          </a:xfrm>
+          <a:prstGeom prst="ellipse">
+            <a:avLst/>
+          </a:prstGeom>
+          <a:noFill/>
+          <a:ln w="28575">
+            <a:solidFill>
+              <a:schemeClr val="tx1"/>
+            </a:solidFill>
+          </a:ln>
+        </p:spPr>
+        <p:style>
+          <a:lnRef idx="2">
+            <a:schemeClr val="accent1">
+              <a:shade val="50000"/>
+            </a:schemeClr>
+          </a:lnRef>
+          <a:fillRef idx="1">
+            <a:schemeClr val="accent1"/>
+          </a:fillRef>
+          <a:effectRef idx="0">
+            <a:schemeClr val="accent1"/>
+          </a:effectRef>
+          <a:fontRef idx="minor">
+            <a:schemeClr val="lt1"/>
+          </a:fontRef>
+        </p:style>
+        <p:txBody>
+          <a:bodyPr rtlCol="0" anchor="ctr"/>
+          <a:lstStyle/>
+          <a:p>
+            <a:pPr algn="ctr"/>
+            <a:endParaRPr lang="en-GB"/>
+          </a:p>
+        </p:txBody>
+      </p:sp>
+      <p:cxnSp>
+        <p:nvCxnSpPr>
+          <p:cNvPr id="12" name="Straight Connector 11">
+            <a:extLst>
+              <a:ext uri="{FF2B5EF4-FFF2-40B4-BE49-F238E27FC236}">
+                <a16:creationId xmlns:a16="http://schemas.microsoft.com/office/drawing/2014/main" id="{5DA4DAB6-55AE-451F-A496-DB8E57B81C0E}"/>
+              </a:ext>
+            </a:extLst>
+          </p:cNvPr>
+          <p:cNvCxnSpPr>
+            <a:cxnSpLocks/>
+            <a:endCxn id="9" idx="2"/>
+          </p:cNvCxnSpPr>
+          <p:nvPr/>
+        </p:nvCxnSpPr>
+        <p:spPr>
+          <a:xfrm>
+            <a:off x="2960473" y="4171680"/>
+            <a:ext cx="4564412" cy="0"/>
+          </a:xfrm>
+          <a:prstGeom prst="line">
+            <a:avLst/>
+          </a:prstGeom>
+          <a:ln w="28575">
+            <a:solidFill>
+              <a:schemeClr val="tx1"/>
+            </a:solidFill>
+          </a:ln>
+        </p:spPr>
+        <p:style>
+          <a:lnRef idx="1">
+            <a:schemeClr val="accent1"/>
+          </a:lnRef>
+          <a:fillRef idx="0">
+            <a:schemeClr val="accent1"/>
+          </a:fillRef>
+          <a:effectRef idx="0">
+            <a:schemeClr val="accent1"/>
+          </a:effectRef>
+          <a:fontRef idx="minor">
+            <a:schemeClr val="tx1"/>
+          </a:fontRef>
+        </p:style>
+      </p:cxnSp>
+    </p:spTree>
+    <p:extLst>
+      <p:ext uri="{BB962C8B-B14F-4D97-AF65-F5344CB8AC3E}">
+        <p14:creationId xmlns:p14="http://schemas.microsoft.com/office/powerpoint/2010/main" val="2643578820"/>
+      </p:ext>
+    </p:extLst>
+  </p:cSld>
+  <p:clrMapOvr>
+    <a:masterClrMapping/>
+  </p:clrMapOvr>
+  <p:timing>
+    <p:tnLst>
+      <p:par>
+        <p:cTn id="1" dur="indefinite" restart="never" nodeType="tmRoot">
+          <p:childTnLst>
+            <p:seq concurrent="1" nextAc="seek">
+              <p:cTn id="2" dur="indefinite" nodeType="mainSeq">
+                <p:childTnLst>
+                  <p:par>
+                    <p:cTn id="3" fill="hold">
+                      <p:stCondLst>
+                        <p:cond delay="indefinite"/>
+                      </p:stCondLst>
+                      <p:childTnLst>
+                        <p:par>
+                          <p:cTn id="4" fill="hold">
+                            <p:stCondLst>
+                              <p:cond delay="0"/>
+                            </p:stCondLst>
+                            <p:childTnLst>
+                              <p:par>
                                 <p:cTn id="5" presetID="22" presetClass="entr" presetSubtype="8" fill="hold" grpId="0" nodeType="clickEffect">
                                   <p:stCondLst>
                                     <p:cond delay="0"/>
@@ -19316,7 +20286,7 @@
                             </p:stCondLst>
                             <p:childTnLst>
                               <p:par>
-                                <p:cTn id="10" presetID="22" presetClass="entr" presetSubtype="8" fill="hold" grpId="0" nodeType="clickEffect">
+                                <p:cTn id="10" presetID="22" presetClass="entr" presetSubtype="4" fill="hold" nodeType="clickEffect">
                                   <p:stCondLst>
                                     <p:cond delay="0"/>
                                   </p:stCondLst>
@@ -19329,7 +20299,7 @@
                                           </p:stCondLst>
                                         </p:cTn>
                                         <p:tgtEl>
-                                          <p:spTgt spid="33"/>
+                                          <p:spTgt spid="7"/>
                                         </p:tgtEl>
                                         <p:attrNameLst>
                                           <p:attrName>style.visibility</p:attrName>
@@ -19339,11 +20309,11 @@
                                         <p:strVal val="visible"/>
                                       </p:to>
                                     </p:set>
-                                    <p:animEffect transition="in" filter="wipe(left)">
+                                    <p:animEffect transition="in" filter="wipe(down)">
                                       <p:cBhvr>
                                         <p:cTn id="12" dur="500"/>
                                         <p:tgtEl>
-                                          <p:spTgt spid="33"/>
+                                          <p:spTgt spid="7"/>
                                         </p:tgtEl>
                                       </p:cBhvr>
                                     </p:animEffect>
@@ -19369,7 +20339,7 @@
                             </p:stCondLst>
                             <p:childTnLst>
                               <p:par>
-                                <p:cTn id="15" presetID="22" presetClass="entr" presetSubtype="4" fill="hold" nodeType="clickEffect">
+                                <p:cTn id="15" presetID="22" presetClass="entr" presetSubtype="8" fill="hold" grpId="0" nodeType="clickEffect">
                                   <p:stCondLst>
                                     <p:cond delay="0"/>
                                   </p:stCondLst>
@@ -19382,7 +20352,7 @@
                                           </p:stCondLst>
                                         </p:cTn>
                                         <p:tgtEl>
-                                          <p:spTgt spid="7"/>
+                                          <p:spTgt spid="9"/>
                                         </p:tgtEl>
                                         <p:attrNameLst>
                                           <p:attrName>style.visibility</p:attrName>
@@ -19392,11 +20362,11 @@
                                         <p:strVal val="visible"/>
                                       </p:to>
                                     </p:set>
-                                    <p:animEffect transition="in" filter="wipe(down)">
+                                    <p:animEffect transition="in" filter="wipe(left)">
                                       <p:cBhvr>
                                         <p:cTn id="17" dur="500"/>
                                         <p:tgtEl>
-                                          <p:spTgt spid="7"/>
+                                          <p:spTgt spid="9"/>
                                         </p:tgtEl>
                                       </p:cBhvr>
                                     </p:animEffect>
@@ -19422,7 +20392,7 @@
                             </p:stCondLst>
                             <p:childTnLst>
                               <p:par>
-                                <p:cTn id="20" presetID="22" presetClass="entr" presetSubtype="8" fill="hold" grpId="0" nodeType="clickEffect">
+                                <p:cTn id="20" presetID="22" presetClass="entr" presetSubtype="8" fill="hold" nodeType="clickEffect">
                                   <p:stCondLst>
                                     <p:cond delay="0"/>
                                   </p:stCondLst>
@@ -19430,165 +20400,6 @@
                                     <p:set>
                                       <p:cBhvr>
                                         <p:cTn id="21" dur="1" fill="hold">
-                                          <p:stCondLst>
-                                            <p:cond delay="0"/>
-                                          </p:stCondLst>
-                                        </p:cTn>
-                                        <p:tgtEl>
-                                          <p:spTgt spid="10"/>
-                                        </p:tgtEl>
-                                        <p:attrNameLst>
-                                          <p:attrName>style.visibility</p:attrName>
-                                        </p:attrNameLst>
-                                      </p:cBhvr>
-                                      <p:to>
-                                        <p:strVal val="visible"/>
-                                      </p:to>
-                                    </p:set>
-                                    <p:animEffect transition="in" filter="wipe(left)">
-                                      <p:cBhvr>
-                                        <p:cTn id="22" dur="500"/>
-                                        <p:tgtEl>
-                                          <p:spTgt spid="10"/>
-                                        </p:tgtEl>
-                                      </p:cBhvr>
-                                    </p:animEffect>
-                                  </p:childTnLst>
-                                </p:cTn>
-                              </p:par>
-                            </p:childTnLst>
-                          </p:cTn>
-                        </p:par>
-                      </p:childTnLst>
-                    </p:cTn>
-                  </p:par>
-                  <p:par>
-                    <p:cTn id="23" fill="hold">
-                      <p:stCondLst>
-                        <p:cond delay="indefinite"/>
-                      </p:stCondLst>
-                      <p:childTnLst>
-                        <p:par>
-                          <p:cTn id="24" fill="hold">
-                            <p:stCondLst>
-                              <p:cond delay="0"/>
-                            </p:stCondLst>
-                            <p:childTnLst>
-                              <p:par>
-                                <p:cTn id="25" presetID="22" presetClass="entr" presetSubtype="8" fill="hold" grpId="0" nodeType="clickEffect">
-                                  <p:stCondLst>
-                                    <p:cond delay="0"/>
-                                  </p:stCondLst>
-                                  <p:childTnLst>
-                                    <p:set>
-                                      <p:cBhvr>
-                                        <p:cTn id="26" dur="1" fill="hold">
-                                          <p:stCondLst>
-                                            <p:cond delay="0"/>
-                                          </p:stCondLst>
-                                        </p:cTn>
-                                        <p:tgtEl>
-                                          <p:spTgt spid="9"/>
-                                        </p:tgtEl>
-                                        <p:attrNameLst>
-                                          <p:attrName>style.visibility</p:attrName>
-                                        </p:attrNameLst>
-                                      </p:cBhvr>
-                                      <p:to>
-                                        <p:strVal val="visible"/>
-                                      </p:to>
-                                    </p:set>
-                                    <p:animEffect transition="in" filter="wipe(left)">
-                                      <p:cBhvr>
-                                        <p:cTn id="27" dur="500"/>
-                                        <p:tgtEl>
-                                          <p:spTgt spid="9"/>
-                                        </p:tgtEl>
-                                      </p:cBhvr>
-                                    </p:animEffect>
-                                  </p:childTnLst>
-                                </p:cTn>
-                              </p:par>
-                            </p:childTnLst>
-                          </p:cTn>
-                        </p:par>
-                      </p:childTnLst>
-                    </p:cTn>
-                  </p:par>
-                  <p:par>
-                    <p:cTn id="28" fill="hold">
-                      <p:stCondLst>
-                        <p:cond delay="indefinite"/>
-                      </p:stCondLst>
-                      <p:childTnLst>
-                        <p:par>
-                          <p:cTn id="29" fill="hold">
-                            <p:stCondLst>
-                              <p:cond delay="0"/>
-                            </p:stCondLst>
-                            <p:childTnLst>
-                              <p:par>
-                                <p:cTn id="30" presetID="22" presetClass="entr" presetSubtype="4" fill="hold" grpId="0" nodeType="clickEffect">
-                                  <p:stCondLst>
-                                    <p:cond delay="0"/>
-                                  </p:stCondLst>
-                                  <p:childTnLst>
-                                    <p:set>
-                                      <p:cBhvr>
-                                        <p:cTn id="31" dur="1" fill="hold">
-                                          <p:stCondLst>
-                                            <p:cond delay="0"/>
-                                          </p:stCondLst>
-                                        </p:cTn>
-                                        <p:tgtEl>
-                                          <p:spTgt spid="35"/>
-                                        </p:tgtEl>
-                                        <p:attrNameLst>
-                                          <p:attrName>style.visibility</p:attrName>
-                                        </p:attrNameLst>
-                                      </p:cBhvr>
-                                      <p:to>
-                                        <p:strVal val="visible"/>
-                                      </p:to>
-                                    </p:set>
-                                    <p:animEffect transition="in" filter="wipe(down)">
-                                      <p:cBhvr>
-                                        <p:cTn id="32" dur="500"/>
-                                        <p:tgtEl>
-                                          <p:spTgt spid="35"/>
-                                        </p:tgtEl>
-                                      </p:cBhvr>
-                                    </p:animEffect>
-                                  </p:childTnLst>
-                                </p:cTn>
-                              </p:par>
-                            </p:childTnLst>
-                          </p:cTn>
-                        </p:par>
-                      </p:childTnLst>
-                    </p:cTn>
-                  </p:par>
-                  <p:par>
-                    <p:cTn id="33" fill="hold">
-                      <p:stCondLst>
-                        <p:cond delay="indefinite"/>
-                      </p:stCondLst>
-                      <p:childTnLst>
-                        <p:par>
-                          <p:cTn id="34" fill="hold">
-                            <p:stCondLst>
-                              <p:cond delay="0"/>
-                            </p:stCondLst>
-                            <p:childTnLst>
-                              <p:par>
-                                <p:cTn id="35" presetID="22" presetClass="entr" presetSubtype="8" fill="hold" nodeType="clickEffect">
-                                  <p:stCondLst>
-                                    <p:cond delay="0"/>
-                                  </p:stCondLst>
-                                  <p:childTnLst>
-                                    <p:set>
-                                      <p:cBhvr>
-                                        <p:cTn id="36" dur="1" fill="hold">
                                           <p:stCondLst>
                                             <p:cond delay="0"/>
                                           </p:stCondLst>
@@ -19606,62 +20417,9 @@
                                     </p:set>
                                     <p:animEffect transition="in" filter="wipe(left)">
                                       <p:cBhvr>
-                                        <p:cTn id="37" dur="500"/>
+                                        <p:cTn id="22" dur="500"/>
                                         <p:tgtEl>
                                           <p:spTgt spid="12"/>
-                                        </p:tgtEl>
-                                      </p:cBhvr>
-                                    </p:animEffect>
-                                  </p:childTnLst>
-                                </p:cTn>
-                              </p:par>
-                            </p:childTnLst>
-                          </p:cTn>
-                        </p:par>
-                      </p:childTnLst>
-                    </p:cTn>
-                  </p:par>
-                  <p:par>
-                    <p:cTn id="38" fill="hold">
-                      <p:stCondLst>
-                        <p:cond delay="indefinite"/>
-                      </p:stCondLst>
-                      <p:childTnLst>
-                        <p:par>
-                          <p:cTn id="39" fill="hold">
-                            <p:stCondLst>
-                              <p:cond delay="0"/>
-                            </p:stCondLst>
-                            <p:childTnLst>
-                              <p:par>
-                                <p:cTn id="40" presetID="22" presetClass="entr" presetSubtype="8" fill="hold" grpId="0" nodeType="clickEffect">
-                                  <p:stCondLst>
-                                    <p:cond delay="0"/>
-                                  </p:stCondLst>
-                                  <p:childTnLst>
-                                    <p:set>
-                                      <p:cBhvr>
-                                        <p:cTn id="41" dur="1" fill="hold">
-                                          <p:stCondLst>
-                                            <p:cond delay="0"/>
-                                          </p:stCondLst>
-                                        </p:cTn>
-                                        <p:tgtEl>
-                                          <p:spTgt spid="36"/>
-                                        </p:tgtEl>
-                                        <p:attrNameLst>
-                                          <p:attrName>style.visibility</p:attrName>
-                                        </p:attrNameLst>
-                                      </p:cBhvr>
-                                      <p:to>
-                                        <p:strVal val="visible"/>
-                                      </p:to>
-                                    </p:set>
-                                    <p:animEffect transition="in" filter="wipe(left)">
-                                      <p:cBhvr>
-                                        <p:cTn id="42" dur="500"/>
-                                        <p:tgtEl>
-                                          <p:spTgt spid="36"/>
                                         </p:tgtEl>
                                       </p:cBhvr>
                                     </p:animEffect>
@@ -19698,16 +20456,12 @@
     <p:bldLst>
       <p:bldP spid="5" grpId="0" animBg="1"/>
       <p:bldP spid="9" grpId="0" animBg="1"/>
-      <p:bldP spid="10" grpId="0"/>
-      <p:bldP spid="33" grpId="0"/>
-      <p:bldP spid="35" grpId="0"/>
-      <p:bldP spid="36" grpId="0"/>
     </p:bldLst>
   </p:timing>
 </p:sld>
 </file>
 
-<file path=ppt/slides/slide8.xml><?xml version="1.0" encoding="utf-8"?>
+<file path=ppt/slides/slide9.xml><?xml version="1.0" encoding="utf-8"?>
 <p:sld xmlns:a="http://schemas.openxmlformats.org/drawingml/2006/main" xmlns:r="http://schemas.openxmlformats.org/officeDocument/2006/relationships" xmlns:p="http://schemas.openxmlformats.org/presentationml/2006/main">
   <p:cSld>
     <p:spTree>
@@ -20549,7 +21303,7 @@
                                     </p:set>
                                     <p:animEffect transition="in" filter="wipe(up)">
                                       <p:cBhvr>
-                                        <p:cTn id="7" dur="500"/>
+                                        <p:cTn id="7" dur="1500"/>
                                         <p:tgtEl>
                                           <p:spTgt spid="6"/>
                                         </p:tgtEl>
@@ -20577,7 +21331,7 @@
                             </p:stCondLst>
                             <p:childTnLst>
                               <p:par>
-                                <p:cTn id="10" presetID="22" presetClass="entr" presetSubtype="1" fill="hold" nodeType="clickEffect">
+                                <p:cTn id="10" presetID="22" presetClass="entr" presetSubtype="8" fill="hold" grpId="0" nodeType="clickEffect">
                                   <p:stCondLst>
                                     <p:cond delay="0"/>
                                   </p:stCondLst>
@@ -20585,6 +21339,164 @@
                                     <p:set>
                                       <p:cBhvr>
                                         <p:cTn id="11" dur="1" fill="hold">
+                                          <p:stCondLst>
+                                            <p:cond delay="0"/>
+                                          </p:stCondLst>
+                                        </p:cTn>
+                                        <p:tgtEl>
+                                          <p:spTgt spid="15"/>
+                                        </p:tgtEl>
+                                        <p:attrNameLst>
+                                          <p:attrName>style.visibility</p:attrName>
+                                        </p:attrNameLst>
+                                      </p:cBhvr>
+                                      <p:to>
+                                        <p:strVal val="visible"/>
+                                      </p:to>
+                                    </p:set>
+                                    <p:animEffect transition="in" filter="wipe(left)">
+                                      <p:cBhvr>
+                                        <p:cTn id="12" dur="500"/>
+                                        <p:tgtEl>
+                                          <p:spTgt spid="15"/>
+                                        </p:tgtEl>
+                                      </p:cBhvr>
+                                    </p:animEffect>
+                                  </p:childTnLst>
+                                </p:cTn>
+                              </p:par>
+                              <p:par>
+                                <p:cTn id="13" presetID="22" presetClass="entr" presetSubtype="8" fill="hold" nodeType="withEffect">
+                                  <p:stCondLst>
+                                    <p:cond delay="0"/>
+                                  </p:stCondLst>
+                                  <p:childTnLst>
+                                    <p:set>
+                                      <p:cBhvr>
+                                        <p:cTn id="14" dur="1" fill="hold">
+                                          <p:stCondLst>
+                                            <p:cond delay="0"/>
+                                          </p:stCondLst>
+                                        </p:cTn>
+                                        <p:tgtEl>
+                                          <p:spTgt spid="30"/>
+                                        </p:tgtEl>
+                                        <p:attrNameLst>
+                                          <p:attrName>style.visibility</p:attrName>
+                                        </p:attrNameLst>
+                                      </p:cBhvr>
+                                      <p:to>
+                                        <p:strVal val="visible"/>
+                                      </p:to>
+                                    </p:set>
+                                    <p:animEffect transition="in" filter="wipe(left)">
+                                      <p:cBhvr>
+                                        <p:cTn id="15" dur="500"/>
+                                        <p:tgtEl>
+                                          <p:spTgt spid="30"/>
+                                        </p:tgtEl>
+                                      </p:cBhvr>
+                                    </p:animEffect>
+                                  </p:childTnLst>
+                                </p:cTn>
+                              </p:par>
+                              <p:par>
+                                <p:cTn id="16" presetID="22" presetClass="entr" presetSubtype="8" fill="hold" nodeType="withEffect">
+                                  <p:stCondLst>
+                                    <p:cond delay="0"/>
+                                  </p:stCondLst>
+                                  <p:childTnLst>
+                                    <p:set>
+                                      <p:cBhvr>
+                                        <p:cTn id="17" dur="1" fill="hold">
+                                          <p:stCondLst>
+                                            <p:cond delay="0"/>
+                                          </p:stCondLst>
+                                        </p:cTn>
+                                        <p:tgtEl>
+                                          <p:spTgt spid="12"/>
+                                        </p:tgtEl>
+                                        <p:attrNameLst>
+                                          <p:attrName>style.visibility</p:attrName>
+                                        </p:attrNameLst>
+                                      </p:cBhvr>
+                                      <p:to>
+                                        <p:strVal val="visible"/>
+                                      </p:to>
+                                    </p:set>
+                                    <p:animEffect transition="in" filter="wipe(left)">
+                                      <p:cBhvr>
+                                        <p:cTn id="18" dur="500"/>
+                                        <p:tgtEl>
+                                          <p:spTgt spid="12"/>
+                                        </p:tgtEl>
+                                      </p:cBhvr>
+                                    </p:animEffect>
+                                  </p:childTnLst>
+                                </p:cTn>
+                              </p:par>
+                              <p:par>
+                                <p:cTn id="19" presetID="22" presetClass="entr" presetSubtype="8" fill="hold" nodeType="withEffect">
+                                  <p:stCondLst>
+                                    <p:cond delay="0"/>
+                                  </p:stCondLst>
+                                  <p:childTnLst>
+                                    <p:set>
+                                      <p:cBhvr>
+                                        <p:cTn id="20" dur="1" fill="hold">
+                                          <p:stCondLst>
+                                            <p:cond delay="0"/>
+                                          </p:stCondLst>
+                                        </p:cTn>
+                                        <p:tgtEl>
+                                          <p:spTgt spid="29"/>
+                                        </p:tgtEl>
+                                        <p:attrNameLst>
+                                          <p:attrName>style.visibility</p:attrName>
+                                        </p:attrNameLst>
+                                      </p:cBhvr>
+                                      <p:to>
+                                        <p:strVal val="visible"/>
+                                      </p:to>
+                                    </p:set>
+                                    <p:animEffect transition="in" filter="wipe(left)">
+                                      <p:cBhvr>
+                                        <p:cTn id="21" dur="500"/>
+                                        <p:tgtEl>
+                                          <p:spTgt spid="29"/>
+                                        </p:tgtEl>
+                                      </p:cBhvr>
+                                    </p:animEffect>
+                                  </p:childTnLst>
+                                </p:cTn>
+                              </p:par>
+                            </p:childTnLst>
+                          </p:cTn>
+                        </p:par>
+                      </p:childTnLst>
+                    </p:cTn>
+                  </p:par>
+                  <p:par>
+                    <p:cTn id="22" fill="hold">
+                      <p:stCondLst>
+                        <p:cond delay="indefinite"/>
+                      </p:stCondLst>
+                      <p:childTnLst>
+                        <p:par>
+                          <p:cTn id="23" fill="hold">
+                            <p:stCondLst>
+                              <p:cond delay="0"/>
+                            </p:stCondLst>
+                            <p:childTnLst>
+                              <p:par>
+                                <p:cTn id="24" presetID="22" presetClass="entr" presetSubtype="1" fill="hold" nodeType="clickEffect">
+                                  <p:stCondLst>
+                                    <p:cond delay="0"/>
+                                  </p:stCondLst>
+                                  <p:childTnLst>
+                                    <p:set>
+                                      <p:cBhvr>
+                                        <p:cTn id="25" dur="1" fill="hold">
                                           <p:stCondLst>
                                             <p:cond delay="0"/>
                                           </p:stCondLst>
@@ -20602,7 +21514,7 @@
                                     </p:set>
                                     <p:animEffect transition="in" filter="wipe(up)">
                                       <p:cBhvr>
-                                        <p:cTn id="12" dur="500"/>
+                                        <p:cTn id="26" dur="2000"/>
                                         <p:tgtEl>
                                           <p:spTgt spid="8"/>
                                         </p:tgtEl>
@@ -20618,32 +21530,32 @@
                     </p:cTn>
                   </p:par>
                   <p:par>
-                    <p:cTn id="13" fill="hold">
+                    <p:cTn id="27" fill="hold">
                       <p:stCondLst>
                         <p:cond delay="indefinite"/>
                       </p:stCondLst>
                       <p:childTnLst>
                         <p:par>
-                          <p:cTn id="14" fill="hold">
+                          <p:cTn id="28" fill="hold">
                             <p:stCondLst>
                               <p:cond delay="0"/>
                             </p:stCondLst>
                             <p:childTnLst>
                               <p:par>
-                                <p:cTn id="15" presetID="22" presetClass="entr" presetSubtype="8" fill="hold" grpId="0" nodeType="clickEffect">
+                                <p:cTn id="29" presetID="22" presetClass="entr" presetSubtype="2" fill="hold" nodeType="clickEffect">
                                   <p:stCondLst>
                                     <p:cond delay="0"/>
                                   </p:stCondLst>
                                   <p:childTnLst>
                                     <p:set>
                                       <p:cBhvr>
-                                        <p:cTn id="16" dur="1" fill="hold">
+                                        <p:cTn id="30" dur="1" fill="hold">
                                           <p:stCondLst>
                                             <p:cond delay="0"/>
                                           </p:stCondLst>
                                         </p:cTn>
                                         <p:tgtEl>
-                                          <p:spTgt spid="15"/>
+                                          <p:spTgt spid="14"/>
                                         </p:tgtEl>
                                         <p:attrNameLst>
                                           <p:attrName>style.visibility</p:attrName>
@@ -20653,11 +21565,11 @@
                                         <p:strVal val="visible"/>
                                       </p:to>
                                     </p:set>
-                                    <p:animEffect transition="in" filter="wipe(left)">
+                                    <p:animEffect transition="in" filter="wipe(right)">
                                       <p:cBhvr>
-                                        <p:cTn id="17" dur="500"/>
+                                        <p:cTn id="31" dur="500"/>
                                         <p:tgtEl>
-                                          <p:spTgt spid="15"/>
+                                          <p:spTgt spid="14"/>
                                         </p:tgtEl>
                                       </p:cBhvr>
                                     </p:animEffect>
@@ -20671,26 +21583,26 @@
                     </p:cTn>
                   </p:par>
                   <p:par>
-                    <p:cTn id="18" fill="hold">
+                    <p:cTn id="32" fill="hold">
                       <p:stCondLst>
                         <p:cond delay="indefinite"/>
                       </p:stCondLst>
                       <p:childTnLst>
                         <p:par>
-                          <p:cTn id="19" fill="hold">
+                          <p:cTn id="33" fill="hold">
                             <p:stCondLst>
                               <p:cond delay="0"/>
                             </p:stCondLst>
                             <p:childTnLst>
                               <p:par>
-                                <p:cTn id="20" presetID="22" presetClass="entr" presetSubtype="8" fill="hold" grpId="0" nodeType="clickEffect">
+                                <p:cTn id="34" presetID="22" presetClass="entr" presetSubtype="8" fill="hold" grpId="0" nodeType="clickEffect">
                                   <p:stCondLst>
                                     <p:cond delay="0"/>
                                   </p:stCondLst>
                                   <p:childTnLst>
                                     <p:set>
                                       <p:cBhvr>
-                                        <p:cTn id="21" dur="1" fill="hold">
+                                        <p:cTn id="35" dur="1" fill="hold">
                                           <p:stCondLst>
                                             <p:cond delay="0"/>
                                           </p:stCondLst>
@@ -20708,7 +21620,7 @@
                                     </p:set>
                                     <p:animEffect transition="in" filter="wipe(left)">
                                       <p:cBhvr>
-                                        <p:cTn id="22" dur="500"/>
+                                        <p:cTn id="36" dur="500"/>
                                         <p:tgtEl>
                                           <p:spTgt spid="17"/>
                                         </p:tgtEl>
@@ -20748,654 +21660,6 @@
       <p:bldP spid="15" grpId="0"/>
       <p:bldP spid="17" grpId="0"/>
     </p:bldLst>
-  </p:timing>
-</p:sld>
-</file>
-
-<file path=ppt/slides/slide9.xml><?xml version="1.0" encoding="utf-8"?>
-<p:sld xmlns:a="http://schemas.openxmlformats.org/drawingml/2006/main" xmlns:r="http://schemas.openxmlformats.org/officeDocument/2006/relationships" xmlns:p="http://schemas.openxmlformats.org/presentationml/2006/main">
-  <p:cSld>
-    <p:spTree>
-      <p:nvGrpSpPr>
-        <p:cNvPr id="1" name=""/>
-        <p:cNvGrpSpPr/>
-        <p:nvPr/>
-      </p:nvGrpSpPr>
-      <p:grpSpPr>
-        <a:xfrm>
-          <a:off x="0" y="0"/>
-          <a:ext cx="0" cy="0"/>
-          <a:chOff x="0" y="0"/>
-          <a:chExt cx="0" cy="0"/>
-        </a:xfrm>
-      </p:grpSpPr>
-      <p:sp>
-        <p:nvSpPr>
-          <p:cNvPr id="2" name="Title 1"/>
-          <p:cNvSpPr>
-            <a:spLocks noGrp="1"/>
-          </p:cNvSpPr>
-          <p:nvPr>
-            <p:ph type="title"/>
-          </p:nvPr>
-        </p:nvSpPr>
-        <p:spPr/>
-        <p:txBody>
-          <a:bodyPr/>
-          <a:lstStyle/>
-          <a:p>
-            <a:r>
-              <a:rPr lang="en-GB" dirty="0"/>
-              <a:t>Actor - Description</a:t>
-            </a:r>
-          </a:p>
-        </p:txBody>
-      </p:sp>
-      <p:grpSp>
-        <p:nvGrpSpPr>
-          <p:cNvPr id="30" name="Group 29">
-            <a:extLst>
-              <a:ext uri="{FF2B5EF4-FFF2-40B4-BE49-F238E27FC236}">
-                <a16:creationId xmlns:a16="http://schemas.microsoft.com/office/drawing/2014/main" id="{418821E3-9E37-4A8C-BAE7-32612F048C17}"/>
-              </a:ext>
-            </a:extLst>
-          </p:cNvPr>
-          <p:cNvGrpSpPr/>
-          <p:nvPr/>
-        </p:nvGrpSpPr>
-        <p:grpSpPr>
-          <a:xfrm>
-            <a:off x="1721273" y="2712178"/>
-            <a:ext cx="1482940" cy="3293587"/>
-            <a:chOff x="1721273" y="2712178"/>
-            <a:chExt cx="1482940" cy="3293587"/>
-          </a:xfrm>
-        </p:grpSpPr>
-        <p:pic>
-          <p:nvPicPr>
-            <p:cNvPr id="7" name="Picture 6">
-              <a:extLst>
-                <a:ext uri="{FF2B5EF4-FFF2-40B4-BE49-F238E27FC236}">
-                  <a16:creationId xmlns:a16="http://schemas.microsoft.com/office/drawing/2014/main" id="{B026E70D-B3FD-4141-85F9-75190461CDA3}"/>
-                </a:ext>
-              </a:extLst>
-            </p:cNvPr>
-            <p:cNvPicPr>
-              <a:picLocks noChangeAspect="1"/>
-            </p:cNvPicPr>
-            <p:nvPr/>
-          </p:nvPicPr>
-          <p:blipFill>
-            <a:blip r:embed="rId3">
-              <a:extLst>
-                <a:ext uri="{28A0092B-C50C-407E-A947-70E740481C1C}">
-                  <a14:useLocalDpi xmlns:a14="http://schemas.microsoft.com/office/drawing/2010/main" val="0"/>
-                </a:ext>
-              </a:extLst>
-            </a:blip>
-            <a:stretch>
-              <a:fillRect/>
-            </a:stretch>
-          </p:blipFill>
-          <p:spPr>
-            <a:xfrm>
-              <a:off x="1721273" y="2712178"/>
-              <a:ext cx="1482940" cy="2919004"/>
-            </a:xfrm>
-            <a:prstGeom prst="rect">
-              <a:avLst/>
-            </a:prstGeom>
-          </p:spPr>
-        </p:pic>
-        <p:sp>
-          <p:nvSpPr>
-            <p:cNvPr id="10" name="Rectangle 9">
-              <a:extLst>
-                <a:ext uri="{FF2B5EF4-FFF2-40B4-BE49-F238E27FC236}">
-                  <a16:creationId xmlns:a16="http://schemas.microsoft.com/office/drawing/2014/main" id="{3B047DC7-344F-4A56-83D8-286EB77BF4E1}"/>
-                </a:ext>
-              </a:extLst>
-            </p:cNvPr>
-            <p:cNvSpPr/>
-            <p:nvPr/>
-          </p:nvSpPr>
-          <p:spPr>
-            <a:xfrm>
-              <a:off x="1994507" y="5482545"/>
-              <a:ext cx="936475" cy="523220"/>
-            </a:xfrm>
-            <a:prstGeom prst="rect">
-              <a:avLst/>
-            </a:prstGeom>
-          </p:spPr>
-          <p:txBody>
-            <a:bodyPr wrap="none">
-              <a:spAutoFit/>
-            </a:bodyPr>
-            <a:lstStyle/>
-            <a:p>
-              <a:pPr algn="ctr"/>
-              <a:r>
-                <a:rPr lang="en-GB" sz="2800" b="1" dirty="0"/>
-                <a:t>Pupil</a:t>
-              </a:r>
-              <a:endParaRPr lang="en-GB" dirty="0"/>
-            </a:p>
-          </p:txBody>
-        </p:sp>
-      </p:grpSp>
-      <p:grpSp>
-        <p:nvGrpSpPr>
-          <p:cNvPr id="31" name="Group 30">
-            <a:extLst>
-              <a:ext uri="{FF2B5EF4-FFF2-40B4-BE49-F238E27FC236}">
-                <a16:creationId xmlns:a16="http://schemas.microsoft.com/office/drawing/2014/main" id="{E9063C33-BE31-459D-AC9C-7ECDA468C472}"/>
-              </a:ext>
-            </a:extLst>
-          </p:cNvPr>
-          <p:cNvGrpSpPr/>
-          <p:nvPr/>
-        </p:nvGrpSpPr>
-        <p:grpSpPr>
-          <a:xfrm>
-            <a:off x="8987783" y="2712178"/>
-            <a:ext cx="1482940" cy="3293587"/>
-            <a:chOff x="8987783" y="2712178"/>
-            <a:chExt cx="1482940" cy="3293587"/>
-          </a:xfrm>
-        </p:grpSpPr>
-        <p:pic>
-          <p:nvPicPr>
-            <p:cNvPr id="11" name="Picture 10">
-              <a:extLst>
-                <a:ext uri="{FF2B5EF4-FFF2-40B4-BE49-F238E27FC236}">
-                  <a16:creationId xmlns:a16="http://schemas.microsoft.com/office/drawing/2014/main" id="{32A0F86B-CA07-4894-B384-CE8C6EE159C1}"/>
-                </a:ext>
-              </a:extLst>
-            </p:cNvPr>
-            <p:cNvPicPr>
-              <a:picLocks noChangeAspect="1"/>
-            </p:cNvPicPr>
-            <p:nvPr/>
-          </p:nvPicPr>
-          <p:blipFill>
-            <a:blip r:embed="rId3">
-              <a:extLst>
-                <a:ext uri="{28A0092B-C50C-407E-A947-70E740481C1C}">
-                  <a14:useLocalDpi xmlns:a14="http://schemas.microsoft.com/office/drawing/2010/main" val="0"/>
-                </a:ext>
-              </a:extLst>
-            </a:blip>
-            <a:stretch>
-              <a:fillRect/>
-            </a:stretch>
-          </p:blipFill>
-          <p:spPr>
-            <a:xfrm>
-              <a:off x="8987783" y="2712178"/>
-              <a:ext cx="1482940" cy="2919004"/>
-            </a:xfrm>
-            <a:prstGeom prst="rect">
-              <a:avLst/>
-            </a:prstGeom>
-          </p:spPr>
-        </p:pic>
-        <p:sp>
-          <p:nvSpPr>
-            <p:cNvPr id="13" name="Rectangle 12">
-              <a:extLst>
-                <a:ext uri="{FF2B5EF4-FFF2-40B4-BE49-F238E27FC236}">
-                  <a16:creationId xmlns:a16="http://schemas.microsoft.com/office/drawing/2014/main" id="{0CAC0334-43B5-419F-AB51-243DA6DA4779}"/>
-                </a:ext>
-              </a:extLst>
-            </p:cNvPr>
-            <p:cNvSpPr/>
-            <p:nvPr/>
-          </p:nvSpPr>
-          <p:spPr>
-            <a:xfrm>
-              <a:off x="9107991" y="5482545"/>
-              <a:ext cx="1242521" cy="523220"/>
-            </a:xfrm>
-            <a:prstGeom prst="rect">
-              <a:avLst/>
-            </a:prstGeom>
-          </p:spPr>
-          <p:txBody>
-            <a:bodyPr wrap="none">
-              <a:spAutoFit/>
-            </a:bodyPr>
-            <a:lstStyle/>
-            <a:p>
-              <a:pPr algn="ctr"/>
-              <a:r>
-                <a:rPr lang="en-GB" sz="2800" b="1" dirty="0"/>
-                <a:t>Prefect</a:t>
-              </a:r>
-              <a:endParaRPr lang="en-GB" dirty="0"/>
-            </a:p>
-          </p:txBody>
-        </p:sp>
-      </p:grpSp>
-      <p:sp>
-        <p:nvSpPr>
-          <p:cNvPr id="15" name="Rectangle 14">
-            <a:extLst>
-              <a:ext uri="{FF2B5EF4-FFF2-40B4-BE49-F238E27FC236}">
-                <a16:creationId xmlns:a16="http://schemas.microsoft.com/office/drawing/2014/main" id="{A254E6C5-E390-440D-A8AE-CB82709F6CB5}"/>
-              </a:ext>
-            </a:extLst>
-          </p:cNvPr>
-          <p:cNvSpPr/>
-          <p:nvPr/>
-        </p:nvSpPr>
-        <p:spPr>
-          <a:xfrm>
-            <a:off x="1241960" y="6060873"/>
-            <a:ext cx="2441566" cy="523220"/>
-          </a:xfrm>
-          <a:prstGeom prst="rect">
-            <a:avLst/>
-          </a:prstGeom>
-        </p:spPr>
-        <p:txBody>
-          <a:bodyPr wrap="none">
-            <a:spAutoFit/>
-          </a:bodyPr>
-          <a:lstStyle/>
-          <a:p>
-            <a:pPr algn="ctr"/>
-            <a:r>
-              <a:rPr lang="en-GB" sz="2800" b="1" dirty="0">
-                <a:solidFill>
-                  <a:srgbClr val="7030A0"/>
-                </a:solidFill>
-              </a:rPr>
-              <a:t>Use the system</a:t>
-            </a:r>
-            <a:endParaRPr lang="en-GB" dirty="0">
-              <a:solidFill>
-                <a:srgbClr val="7030A0"/>
-              </a:solidFill>
-            </a:endParaRPr>
-          </a:p>
-        </p:txBody>
-      </p:sp>
-      <p:sp>
-        <p:nvSpPr>
-          <p:cNvPr id="17" name="Rectangle 16">
-            <a:extLst>
-              <a:ext uri="{FF2B5EF4-FFF2-40B4-BE49-F238E27FC236}">
-                <a16:creationId xmlns:a16="http://schemas.microsoft.com/office/drawing/2014/main" id="{2F30E93A-CA2E-4A90-876C-B218CB0B7AAB}"/>
-              </a:ext>
-            </a:extLst>
-          </p:cNvPr>
-          <p:cNvSpPr/>
-          <p:nvPr/>
-        </p:nvSpPr>
-        <p:spPr>
-          <a:xfrm>
-            <a:off x="8191076" y="5962551"/>
-            <a:ext cx="3076355" cy="523220"/>
-          </a:xfrm>
-          <a:prstGeom prst="rect">
-            <a:avLst/>
-          </a:prstGeom>
-        </p:spPr>
-        <p:txBody>
-          <a:bodyPr wrap="none">
-            <a:spAutoFit/>
-          </a:bodyPr>
-          <a:lstStyle/>
-          <a:p>
-            <a:pPr algn="ctr"/>
-            <a:r>
-              <a:rPr lang="en-GB" sz="2800" b="1" dirty="0">
-                <a:solidFill>
-                  <a:srgbClr val="7030A0"/>
-                </a:solidFill>
-              </a:rPr>
-              <a:t>Support the system</a:t>
-            </a:r>
-            <a:endParaRPr lang="en-GB" dirty="0">
-              <a:solidFill>
-                <a:srgbClr val="7030A0"/>
-              </a:solidFill>
-            </a:endParaRPr>
-          </a:p>
-        </p:txBody>
-      </p:sp>
-      <p:sp>
-        <p:nvSpPr>
-          <p:cNvPr id="18" name="Rectangle 17">
-            <a:extLst>
-              <a:ext uri="{FF2B5EF4-FFF2-40B4-BE49-F238E27FC236}">
-                <a16:creationId xmlns:a16="http://schemas.microsoft.com/office/drawing/2014/main" id="{D88574CC-45EE-41B3-9E51-9F1267441FCF}"/>
-              </a:ext>
-            </a:extLst>
-          </p:cNvPr>
-          <p:cNvSpPr/>
-          <p:nvPr/>
-        </p:nvSpPr>
-        <p:spPr>
-          <a:xfrm>
-            <a:off x="2421256" y="1561240"/>
-            <a:ext cx="7349489" cy="2554545"/>
-          </a:xfrm>
-          <a:prstGeom prst="rect">
-            <a:avLst/>
-          </a:prstGeom>
-        </p:spPr>
-        <p:txBody>
-          <a:bodyPr wrap="square">
-            <a:spAutoFit/>
-          </a:bodyPr>
-          <a:lstStyle/>
-          <a:p>
-            <a:pPr>
-              <a:spcAft>
-                <a:spcPts val="600"/>
-              </a:spcAft>
-            </a:pPr>
-            <a:r>
-              <a:rPr lang="en-GB" sz="2800" dirty="0"/>
-              <a:t>An actor uses the system to achieve an outcome.</a:t>
-            </a:r>
-          </a:p>
-          <a:p>
-            <a:pPr lvl="4">
-              <a:spcAft>
-                <a:spcPts val="600"/>
-              </a:spcAft>
-            </a:pPr>
-            <a:r>
-              <a:rPr lang="en-GB" sz="2800" dirty="0"/>
-              <a:t>An actor can be:</a:t>
-            </a:r>
-          </a:p>
-          <a:p>
-            <a:pPr marL="2743200" lvl="5" indent="-457200">
-              <a:spcAft>
-                <a:spcPts val="600"/>
-              </a:spcAft>
-              <a:buFont typeface="Arial" panose="020B0604020202020204" pitchFamily="34" charset="0"/>
-              <a:buChar char="•"/>
-            </a:pPr>
-            <a:r>
-              <a:rPr lang="en-GB" sz="2800" dirty="0"/>
-              <a:t>a person</a:t>
-            </a:r>
-          </a:p>
-          <a:p>
-            <a:pPr marL="2743200" lvl="5" indent="-457200">
-              <a:spcAft>
-                <a:spcPts val="600"/>
-              </a:spcAft>
-              <a:buFont typeface="Arial" panose="020B0604020202020204" pitchFamily="34" charset="0"/>
-              <a:buChar char="•"/>
-            </a:pPr>
-            <a:r>
-              <a:rPr lang="en-GB" sz="2800" dirty="0"/>
-              <a:t>an organisation</a:t>
-            </a:r>
-          </a:p>
-          <a:p>
-            <a:pPr marL="2743200" lvl="5" indent="-457200">
-              <a:spcAft>
-                <a:spcPts val="600"/>
-              </a:spcAft>
-              <a:buFont typeface="Arial" panose="020B0604020202020204" pitchFamily="34" charset="0"/>
-              <a:buChar char="•"/>
-            </a:pPr>
-            <a:r>
-              <a:rPr lang="en-GB" sz="2800" dirty="0"/>
-              <a:t>another system</a:t>
-            </a:r>
-          </a:p>
-        </p:txBody>
-      </p:sp>
-      <p:cxnSp>
-        <p:nvCxnSpPr>
-          <p:cNvPr id="29" name="Straight Connector 28">
-            <a:extLst>
-              <a:ext uri="{FF2B5EF4-FFF2-40B4-BE49-F238E27FC236}">
-                <a16:creationId xmlns:a16="http://schemas.microsoft.com/office/drawing/2014/main" id="{FA43D775-B13A-41BA-A1F8-00B3CC6C3F2F}"/>
-              </a:ext>
-            </a:extLst>
-          </p:cNvPr>
-          <p:cNvCxnSpPr>
-            <a:cxnSpLocks/>
-          </p:cNvCxnSpPr>
-          <p:nvPr/>
-        </p:nvCxnSpPr>
-        <p:spPr>
-          <a:xfrm flipH="1">
-            <a:off x="3204213" y="4532781"/>
-            <a:ext cx="5783570" cy="0"/>
-          </a:xfrm>
-          <a:prstGeom prst="line">
-            <a:avLst/>
-          </a:prstGeom>
-          <a:ln w="44450">
-            <a:solidFill>
-              <a:schemeClr val="tx1"/>
-            </a:solidFill>
-            <a:tailEnd type="triangle" w="lg" len="lg"/>
-          </a:ln>
-        </p:spPr>
-        <p:style>
-          <a:lnRef idx="1">
-            <a:schemeClr val="accent1"/>
-          </a:lnRef>
-          <a:fillRef idx="0">
-            <a:schemeClr val="accent1"/>
-          </a:fillRef>
-          <a:effectRef idx="0">
-            <a:schemeClr val="accent1"/>
-          </a:effectRef>
-          <a:fontRef idx="minor">
-            <a:schemeClr val="tx1"/>
-          </a:fontRef>
-        </p:style>
-      </p:cxnSp>
-    </p:spTree>
-    <p:extLst>
-      <p:ext uri="{BB962C8B-B14F-4D97-AF65-F5344CB8AC3E}">
-        <p14:creationId xmlns:p14="http://schemas.microsoft.com/office/powerpoint/2010/main" val="237343473"/>
-      </p:ext>
-    </p:extLst>
-  </p:cSld>
-  <p:clrMapOvr>
-    <a:masterClrMapping/>
-  </p:clrMapOvr>
-  <p:timing>
-    <p:tnLst>
-      <p:par>
-        <p:cTn id="1" dur="indefinite" restart="never" nodeType="tmRoot">
-          <p:childTnLst>
-            <p:seq concurrent="1" nextAc="seek">
-              <p:cTn id="2" dur="indefinite" nodeType="mainSeq">
-                <p:childTnLst>
-                  <p:par>
-                    <p:cTn id="3" fill="hold">
-                      <p:stCondLst>
-                        <p:cond delay="indefinite"/>
-                      </p:stCondLst>
-                      <p:childTnLst>
-                        <p:par>
-                          <p:cTn id="4" fill="hold">
-                            <p:stCondLst>
-                              <p:cond delay="0"/>
-                            </p:stCondLst>
-                            <p:childTnLst>
-                              <p:par>
-                                <p:cTn id="5" presetID="22" presetClass="entr" presetSubtype="8" fill="hold" nodeType="clickEffect">
-                                  <p:stCondLst>
-                                    <p:cond delay="0"/>
-                                  </p:stCondLst>
-                                  <p:childTnLst>
-                                    <p:set>
-                                      <p:cBhvr>
-                                        <p:cTn id="6" dur="1" fill="hold">
-                                          <p:stCondLst>
-                                            <p:cond delay="0"/>
-                                          </p:stCondLst>
-                                        </p:cTn>
-                                        <p:tgtEl>
-                                          <p:spTgt spid="29"/>
-                                        </p:tgtEl>
-                                        <p:attrNameLst>
-                                          <p:attrName>style.visibility</p:attrName>
-                                        </p:attrNameLst>
-                                      </p:cBhvr>
-                                      <p:to>
-                                        <p:strVal val="visible"/>
-                                      </p:to>
-                                    </p:set>
-                                    <p:animEffect transition="in" filter="wipe(left)">
-                                      <p:cBhvr>
-                                        <p:cTn id="7" dur="500"/>
-                                        <p:tgtEl>
-                                          <p:spTgt spid="29"/>
-                                        </p:tgtEl>
-                                      </p:cBhvr>
-                                    </p:animEffect>
-                                  </p:childTnLst>
-                                </p:cTn>
-                              </p:par>
-                            </p:childTnLst>
-                          </p:cTn>
-                        </p:par>
-                      </p:childTnLst>
-                    </p:cTn>
-                  </p:par>
-                  <p:par>
-                    <p:cTn id="8" fill="hold">
-                      <p:stCondLst>
-                        <p:cond delay="indefinite"/>
-                      </p:stCondLst>
-                      <p:childTnLst>
-                        <p:par>
-                          <p:cTn id="9" fill="hold">
-                            <p:stCondLst>
-                              <p:cond delay="0"/>
-                            </p:stCondLst>
-                            <p:childTnLst>
-                              <p:par>
-                                <p:cTn id="10" presetID="22" presetClass="entr" presetSubtype="1" fill="hold" nodeType="clickEffect">
-                                  <p:stCondLst>
-                                    <p:cond delay="0"/>
-                                  </p:stCondLst>
-                                  <p:childTnLst>
-                                    <p:set>
-                                      <p:cBhvr>
-                                        <p:cTn id="11" dur="1" fill="hold">
-                                          <p:stCondLst>
-                                            <p:cond delay="0"/>
-                                          </p:stCondLst>
-                                        </p:cTn>
-                                        <p:tgtEl>
-                                          <p:spTgt spid="30"/>
-                                        </p:tgtEl>
-                                        <p:attrNameLst>
-                                          <p:attrName>style.visibility</p:attrName>
-                                        </p:attrNameLst>
-                                      </p:cBhvr>
-                                      <p:to>
-                                        <p:strVal val="visible"/>
-                                      </p:to>
-                                    </p:set>
-                                    <p:animEffect transition="in" filter="wipe(up)">
-                                      <p:cBhvr>
-                                        <p:cTn id="12" dur="500"/>
-                                        <p:tgtEl>
-                                          <p:spTgt spid="30"/>
-                                        </p:tgtEl>
-                                      </p:cBhvr>
-                                    </p:animEffect>
-                                  </p:childTnLst>
-                                </p:cTn>
-                              </p:par>
-                            </p:childTnLst>
-                          </p:cTn>
-                        </p:par>
-                      </p:childTnLst>
-                    </p:cTn>
-                  </p:par>
-                  <p:par>
-                    <p:cTn id="13" fill="hold">
-                      <p:stCondLst>
-                        <p:cond delay="indefinite"/>
-                      </p:stCondLst>
-                      <p:childTnLst>
-                        <p:par>
-                          <p:cTn id="14" fill="hold">
-                            <p:stCondLst>
-                              <p:cond delay="0"/>
-                            </p:stCondLst>
-                            <p:childTnLst>
-                              <p:par>
-                                <p:cTn id="15" presetID="22" presetClass="entr" presetSubtype="1" fill="hold" nodeType="clickEffect">
-                                  <p:stCondLst>
-                                    <p:cond delay="0"/>
-                                  </p:stCondLst>
-                                  <p:childTnLst>
-                                    <p:set>
-                                      <p:cBhvr>
-                                        <p:cTn id="16" dur="1" fill="hold">
-                                          <p:stCondLst>
-                                            <p:cond delay="0"/>
-                                          </p:stCondLst>
-                                        </p:cTn>
-                                        <p:tgtEl>
-                                          <p:spTgt spid="31"/>
-                                        </p:tgtEl>
-                                        <p:attrNameLst>
-                                          <p:attrName>style.visibility</p:attrName>
-                                        </p:attrNameLst>
-                                      </p:cBhvr>
-                                      <p:to>
-                                        <p:strVal val="visible"/>
-                                      </p:to>
-                                    </p:set>
-                                    <p:animEffect transition="in" filter="wipe(up)">
-                                      <p:cBhvr>
-                                        <p:cTn id="17" dur="500"/>
-                                        <p:tgtEl>
-                                          <p:spTgt spid="31"/>
-                                        </p:tgtEl>
-                                      </p:cBhvr>
-                                    </p:animEffect>
-                                  </p:childTnLst>
-                                </p:cTn>
-                              </p:par>
-                            </p:childTnLst>
-                          </p:cTn>
-                        </p:par>
-                      </p:childTnLst>
-                    </p:cTn>
-                  </p:par>
-                </p:childTnLst>
-              </p:cTn>
-              <p:prevCondLst>
-                <p:cond evt="onPrev" delay="0">
-                  <p:tgtEl>
-                    <p:sldTgt/>
-                  </p:tgtEl>
-                </p:cond>
-              </p:prevCondLst>
-              <p:nextCondLst>
-                <p:cond evt="onNext" delay="0">
-                  <p:tgtEl>
-                    <p:sldTgt/>
-                  </p:tgtEl>
-                </p:cond>
-              </p:nextCondLst>
-            </p:seq>
-          </p:childTnLst>
-        </p:cTn>
-      </p:par>
-    </p:tnLst>
   </p:timing>
 </p:sld>
 </file>

--- a/ah-cs/sdd/AH CS SDD Slides.pptx
+++ b/ah-cs/sdd/AH CS SDD Slides.pptx
@@ -205,15 +205,30 @@
 </p:presentation>
 </file>
 
+<file path=ppt/revisionInfo.xml><?xml version="1.0" encoding="utf-8"?>
+<p1510:revInfo xmlns:a="http://schemas.openxmlformats.org/drawingml/2006/main" xmlns:r="http://schemas.openxmlformats.org/officeDocument/2006/relationships" xmlns:p1510="http://schemas.microsoft.com/office/powerpoint/2015/10/main">
+  <p1510:revLst>
+    <p1510:client id="{6DD9C1AE-9D74-4A34-AE2C-D44F4DAD3442}" v="100" dt="2026-06-03T21:47:20.660"/>
+  </p1510:revLst>
+</p1510:revInfo>
+</file>
+
 <file path=ppt/changesInfos/changesInfo1.xml><?xml version="1.0" encoding="utf-8"?>
 <pc:chgInfo xmlns:a="http://schemas.openxmlformats.org/drawingml/2006/main" xmlns:r="http://schemas.openxmlformats.org/officeDocument/2006/relationships" xmlns:ac="http://schemas.microsoft.com/office/drawing/2013/main/command" xmlns:pc="http://schemas.microsoft.com/office/powerpoint/2013/main/command">
   <pc:docChgLst>
     <pc:chgData name="Al Friend" userId="e5ed79da-d858-46d4-9eed-a7a24903f2de" providerId="ADAL" clId="{6CF5D3DD-A8C4-4611-8099-4AEB2E976A2E}"/>
     <pc:docChg chg="undo custSel addSld delSld modSld addSection delSection modSection">
-      <pc:chgData name="Al Friend" userId="e5ed79da-d858-46d4-9eed-a7a24903f2de" providerId="ADAL" clId="{6CF5D3DD-A8C4-4611-8099-4AEB2E976A2E}" dt="2026-06-02T18:36:38.164" v="1046" actId="20577"/>
+      <pc:chgData name="Al Friend" userId="e5ed79da-d858-46d4-9eed-a7a24903f2de" providerId="ADAL" clId="{6CF5D3DD-A8C4-4611-8099-4AEB2E976A2E}" dt="2026-06-03T21:48:32.149" v="1191"/>
       <pc:docMkLst>
         <pc:docMk/>
       </pc:docMkLst>
+      <pc:sldChg chg="modNotesTx">
+        <pc:chgData name="Al Friend" userId="e5ed79da-d858-46d4-9eed-a7a24903f2de" providerId="ADAL" clId="{6CF5D3DD-A8C4-4611-8099-4AEB2E976A2E}" dt="2026-06-03T21:35:12.578" v="1047" actId="6549"/>
+        <pc:sldMkLst>
+          <pc:docMk/>
+          <pc:sldMk cId="3861154840" sldId="496"/>
+        </pc:sldMkLst>
+      </pc:sldChg>
       <pc:sldChg chg="modNotesTx">
         <pc:chgData name="Al Friend" userId="e5ed79da-d858-46d4-9eed-a7a24903f2de" providerId="ADAL" clId="{6CF5D3DD-A8C4-4611-8099-4AEB2E976A2E}" dt="2026-05-31T17:19:13.800" v="1036" actId="20577"/>
         <pc:sldMkLst>
@@ -243,6 +258,13 @@
             <ac:cxnSpMk id="29" creationId="{FA43D775-B13A-41BA-A1F8-00B3CC6C3F2F}"/>
           </ac:cxnSpMkLst>
         </pc:cxnChg>
+      </pc:sldChg>
+      <pc:sldChg chg="addAnim delAnim modAnim">
+        <pc:chgData name="Al Friend" userId="e5ed79da-d858-46d4-9eed-a7a24903f2de" providerId="ADAL" clId="{6CF5D3DD-A8C4-4611-8099-4AEB2E976A2E}" dt="2026-06-03T21:44:53.993" v="1122"/>
+        <pc:sldMkLst>
+          <pc:docMk/>
+          <pc:sldMk cId="1900925123" sldId="881"/>
+        </pc:sldMkLst>
       </pc:sldChg>
       <pc:sldChg chg="addSp modSp mod">
         <pc:chgData name="Al Friend" userId="e5ed79da-d858-46d4-9eed-a7a24903f2de" providerId="ADAL" clId="{6CF5D3DD-A8C4-4611-8099-4AEB2E976A2E}" dt="2026-06-02T18:35:19.448" v="1045" actId="1076"/>
@@ -339,12 +361,28 @@
           </ac:cxnSpMkLst>
         </pc:cxnChg>
       </pc:sldChg>
-      <pc:sldChg chg="modSp mod">
-        <pc:chgData name="Al Friend" userId="e5ed79da-d858-46d4-9eed-a7a24903f2de" providerId="ADAL" clId="{6CF5D3DD-A8C4-4611-8099-4AEB2E976A2E}" dt="2026-06-02T18:36:38.164" v="1046" actId="20577"/>
+      <pc:sldChg chg="modSp mod addAnim delAnim modAnim">
+        <pc:chgData name="Al Friend" userId="e5ed79da-d858-46d4-9eed-a7a24903f2de" providerId="ADAL" clId="{6CF5D3DD-A8C4-4611-8099-4AEB2E976A2E}" dt="2026-06-03T21:48:32.149" v="1191"/>
         <pc:sldMkLst>
           <pc:docMk/>
           <pc:sldMk cId="1982100101" sldId="884"/>
         </pc:sldMkLst>
+        <pc:spChg chg="mod">
+          <ac:chgData name="Al Friend" userId="e5ed79da-d858-46d4-9eed-a7a24903f2de" providerId="ADAL" clId="{6CF5D3DD-A8C4-4611-8099-4AEB2E976A2E}" dt="2026-06-03T21:35:57.579" v="1049" actId="20577"/>
+          <ac:spMkLst>
+            <pc:docMk/>
+            <pc:sldMk cId="1982100101" sldId="884"/>
+            <ac:spMk id="18" creationId="{D3DE1068-9C54-4D92-A45F-8DEAD06D3824}"/>
+          </ac:spMkLst>
+        </pc:spChg>
+        <pc:spChg chg="mod">
+          <ac:chgData name="Al Friend" userId="e5ed79da-d858-46d4-9eed-a7a24903f2de" providerId="ADAL" clId="{6CF5D3DD-A8C4-4611-8099-4AEB2E976A2E}" dt="2026-06-03T21:48:05.654" v="1188" actId="1036"/>
+          <ac:spMkLst>
+            <pc:docMk/>
+            <pc:sldMk cId="1982100101" sldId="884"/>
+            <ac:spMk id="22" creationId="{26E50561-9E7A-49B1-BF1B-897BB0D6CA6D}"/>
+          </ac:spMkLst>
+        </pc:spChg>
         <pc:spChg chg="mod">
           <ac:chgData name="Al Friend" userId="e5ed79da-d858-46d4-9eed-a7a24903f2de" providerId="ADAL" clId="{6CF5D3DD-A8C4-4611-8099-4AEB2E976A2E}" dt="2026-06-02T18:36:38.164" v="1046" actId="20577"/>
           <ac:spMkLst>
@@ -355,11 +393,35 @@
         </pc:spChg>
       </pc:sldChg>
       <pc:sldChg chg="modSp mod">
-        <pc:chgData name="Al Friend" userId="e5ed79da-d858-46d4-9eed-a7a24903f2de" providerId="ADAL" clId="{6CF5D3DD-A8C4-4611-8099-4AEB2E976A2E}" dt="2026-05-31T11:43:21.196" v="892" actId="1076"/>
+        <pc:chgData name="Al Friend" userId="e5ed79da-d858-46d4-9eed-a7a24903f2de" providerId="ADAL" clId="{6CF5D3DD-A8C4-4611-8099-4AEB2E976A2E}" dt="2026-06-03T21:36:10.802" v="1055" actId="20577"/>
         <pc:sldMkLst>
           <pc:docMk/>
           <pc:sldMk cId="294841495" sldId="885"/>
         </pc:sldMkLst>
+        <pc:spChg chg="mod">
+          <ac:chgData name="Al Friend" userId="e5ed79da-d858-46d4-9eed-a7a24903f2de" providerId="ADAL" clId="{6CF5D3DD-A8C4-4611-8099-4AEB2E976A2E}" dt="2026-06-03T21:36:04.006" v="1051" actId="20577"/>
+          <ac:spMkLst>
+            <pc:docMk/>
+            <pc:sldMk cId="294841495" sldId="885"/>
+            <ac:spMk id="18" creationId="{D3DE1068-9C54-4D92-A45F-8DEAD06D3824}"/>
+          </ac:spMkLst>
+        </pc:spChg>
+        <pc:spChg chg="mod">
+          <ac:chgData name="Al Friend" userId="e5ed79da-d858-46d4-9eed-a7a24903f2de" providerId="ADAL" clId="{6CF5D3DD-A8C4-4611-8099-4AEB2E976A2E}" dt="2026-06-03T21:36:07.773" v="1053" actId="20577"/>
+          <ac:spMkLst>
+            <pc:docMk/>
+            <pc:sldMk cId="294841495" sldId="885"/>
+            <ac:spMk id="27" creationId="{DBEA44BA-2065-4960-99BA-43573E7581B5}"/>
+          </ac:spMkLst>
+        </pc:spChg>
+        <pc:spChg chg="mod">
+          <ac:chgData name="Al Friend" userId="e5ed79da-d858-46d4-9eed-a7a24903f2de" providerId="ADAL" clId="{6CF5D3DD-A8C4-4611-8099-4AEB2E976A2E}" dt="2026-06-03T21:36:10.802" v="1055" actId="20577"/>
+          <ac:spMkLst>
+            <pc:docMk/>
+            <pc:sldMk cId="294841495" sldId="885"/>
+            <ac:spMk id="34" creationId="{33D21E20-5786-42ED-A48F-1F8E03BC725B}"/>
+          </ac:spMkLst>
+        </pc:spChg>
         <pc:spChg chg="mod">
           <ac:chgData name="Al Friend" userId="e5ed79da-d858-46d4-9eed-a7a24903f2de" providerId="ADAL" clId="{6CF5D3DD-A8C4-4611-8099-4AEB2E976A2E}" dt="2026-05-31T11:43:21.196" v="892" actId="1076"/>
           <ac:spMkLst>
@@ -416,8 +478,8 @@
           </ac:spMkLst>
         </pc:spChg>
       </pc:sldChg>
-      <pc:sldChg chg="addSp delSp modSp new mod modNotesTx">
-        <pc:chgData name="Al Friend" userId="e5ed79da-d858-46d4-9eed-a7a24903f2de" providerId="ADAL" clId="{6CF5D3DD-A8C4-4611-8099-4AEB2E976A2E}" dt="2026-05-31T11:50:56.534" v="893" actId="20577"/>
+      <pc:sldChg chg="addSp delSp modSp new mod modAnim modNotesTx">
+        <pc:chgData name="Al Friend" userId="e5ed79da-d858-46d4-9eed-a7a24903f2de" providerId="ADAL" clId="{6CF5D3DD-A8C4-4611-8099-4AEB2E976A2E}" dt="2026-06-03T21:40:30.786" v="1083"/>
         <pc:sldMkLst>
           <pc:docMk/>
           <pc:sldMk cId="2689299202" sldId="887"/>
@@ -4988,7 +5050,7 @@
           <a:p>
             <a:fld id="{0E35528A-819C-4AD3-BDC3-2CDCE7BEAF53}" type="datetimeFigureOut">
               <a:rPr lang="en-GB" smtClean="0"/>
-              <a:t>02/06/2026</a:t>
+              <a:t>03/06/2026</a:t>
             </a:fld>
             <a:endParaRPr lang="en-GB"/>
           </a:p>
@@ -5905,10 +5967,7 @@
           <a:bodyPr/>
           <a:lstStyle/>
           <a:p>
-            <a:r>
-              <a:rPr lang="en-GB" dirty="0"/>
-              <a:t>Practice with records after records are have been taught (last)</a:t>
-            </a:r>
+            <a:endParaRPr lang="en-GB" dirty="0"/>
           </a:p>
         </p:txBody>
       </p:sp>
@@ -6831,7 +6890,7 @@
           <a:p>
             <a:fld id="{CBBB66F6-7471-47DA-8EED-C7BCCA53B015}" type="datetimeFigureOut">
               <a:rPr lang="en-GB" smtClean="0"/>
-              <a:t>02/06/2026</a:t>
+              <a:t>03/06/2026</a:t>
             </a:fld>
             <a:endParaRPr lang="en-GB"/>
           </a:p>
@@ -7031,7 +7090,7 @@
           <a:p>
             <a:fld id="{CBBB66F6-7471-47DA-8EED-C7BCCA53B015}" type="datetimeFigureOut">
               <a:rPr lang="en-GB" smtClean="0"/>
-              <a:t>02/06/2026</a:t>
+              <a:t>03/06/2026</a:t>
             </a:fld>
             <a:endParaRPr lang="en-GB"/>
           </a:p>
@@ -7241,7 +7300,7 @@
           <a:p>
             <a:fld id="{CBBB66F6-7471-47DA-8EED-C7BCCA53B015}" type="datetimeFigureOut">
               <a:rPr lang="en-GB" smtClean="0"/>
-              <a:t>02/06/2026</a:t>
+              <a:t>03/06/2026</a:t>
             </a:fld>
             <a:endParaRPr lang="en-GB"/>
           </a:p>
@@ -7441,7 +7500,7 @@
           <a:p>
             <a:fld id="{CBBB66F6-7471-47DA-8EED-C7BCCA53B015}" type="datetimeFigureOut">
               <a:rPr lang="en-GB" smtClean="0"/>
-              <a:t>02/06/2026</a:t>
+              <a:t>03/06/2026</a:t>
             </a:fld>
             <a:endParaRPr lang="en-GB"/>
           </a:p>
@@ -7717,7 +7776,7 @@
           <a:p>
             <a:fld id="{CBBB66F6-7471-47DA-8EED-C7BCCA53B015}" type="datetimeFigureOut">
               <a:rPr lang="en-GB" smtClean="0"/>
-              <a:t>02/06/2026</a:t>
+              <a:t>03/06/2026</a:t>
             </a:fld>
             <a:endParaRPr lang="en-GB"/>
           </a:p>
@@ -7985,7 +8044,7 @@
           <a:p>
             <a:fld id="{CBBB66F6-7471-47DA-8EED-C7BCCA53B015}" type="datetimeFigureOut">
               <a:rPr lang="en-GB" smtClean="0"/>
-              <a:t>02/06/2026</a:t>
+              <a:t>03/06/2026</a:t>
             </a:fld>
             <a:endParaRPr lang="en-GB"/>
           </a:p>
@@ -8400,7 +8459,7 @@
           <a:p>
             <a:fld id="{CBBB66F6-7471-47DA-8EED-C7BCCA53B015}" type="datetimeFigureOut">
               <a:rPr lang="en-GB" smtClean="0"/>
-              <a:t>02/06/2026</a:t>
+              <a:t>03/06/2026</a:t>
             </a:fld>
             <a:endParaRPr lang="en-GB"/>
           </a:p>
@@ -8542,7 +8601,7 @@
           <a:p>
             <a:fld id="{CBBB66F6-7471-47DA-8EED-C7BCCA53B015}" type="datetimeFigureOut">
               <a:rPr lang="en-GB" smtClean="0"/>
-              <a:t>02/06/2026</a:t>
+              <a:t>03/06/2026</a:t>
             </a:fld>
             <a:endParaRPr lang="en-GB"/>
           </a:p>
@@ -8655,7 +8714,7 @@
           <a:p>
             <a:fld id="{CBBB66F6-7471-47DA-8EED-C7BCCA53B015}" type="datetimeFigureOut">
               <a:rPr lang="en-GB" smtClean="0"/>
-              <a:t>02/06/2026</a:t>
+              <a:t>03/06/2026</a:t>
             </a:fld>
             <a:endParaRPr lang="en-GB"/>
           </a:p>
@@ -8968,7 +9027,7 @@
           <a:p>
             <a:fld id="{CBBB66F6-7471-47DA-8EED-C7BCCA53B015}" type="datetimeFigureOut">
               <a:rPr lang="en-GB" smtClean="0"/>
-              <a:t>02/06/2026</a:t>
+              <a:t>03/06/2026</a:t>
             </a:fld>
             <a:endParaRPr lang="en-GB"/>
           </a:p>
@@ -9257,7 +9316,7 @@
           <a:p>
             <a:fld id="{CBBB66F6-7471-47DA-8EED-C7BCCA53B015}" type="datetimeFigureOut">
               <a:rPr lang="en-GB" smtClean="0"/>
-              <a:t>02/06/2026</a:t>
+              <a:t>03/06/2026</a:t>
             </a:fld>
             <a:endParaRPr lang="en-GB"/>
           </a:p>
@@ -9506,7 +9565,7 @@
           <a:p>
             <a:fld id="{CBBB66F6-7471-47DA-8EED-C7BCCA53B015}" type="datetimeFigureOut">
               <a:rPr lang="en-GB" smtClean="0"/>
-              <a:t>02/06/2026</a:t>
+              <a:t>03/06/2026</a:t>
             </a:fld>
             <a:endParaRPr lang="en-GB"/>
           </a:p>
@@ -13845,6 +13904,892 @@
   <p:clrMapOvr>
     <a:masterClrMapping/>
   </p:clrMapOvr>
+  <p:timing>
+    <p:tnLst>
+      <p:par>
+        <p:cTn id="1" dur="indefinite" restart="never" nodeType="tmRoot">
+          <p:childTnLst>
+            <p:seq concurrent="1" nextAc="seek">
+              <p:cTn id="2" dur="indefinite" nodeType="mainSeq">
+                <p:childTnLst>
+                  <p:par>
+                    <p:cTn id="3" fill="hold">
+                      <p:stCondLst>
+                        <p:cond delay="indefinite"/>
+                      </p:stCondLst>
+                      <p:childTnLst>
+                        <p:par>
+                          <p:cTn id="4" fill="hold">
+                            <p:stCondLst>
+                              <p:cond delay="0"/>
+                            </p:stCondLst>
+                            <p:childTnLst>
+                              <p:par>
+                                <p:cTn id="5" presetID="22" presetClass="entr" presetSubtype="4" fill="hold" nodeType="clickEffect">
+                                  <p:stCondLst>
+                                    <p:cond delay="0"/>
+                                  </p:stCondLst>
+                                  <p:childTnLst>
+                                    <p:set>
+                                      <p:cBhvr>
+                                        <p:cTn id="6" dur="1" fill="hold">
+                                          <p:stCondLst>
+                                            <p:cond delay="0"/>
+                                          </p:stCondLst>
+                                        </p:cTn>
+                                        <p:tgtEl>
+                                          <p:spTgt spid="11"/>
+                                        </p:tgtEl>
+                                        <p:attrNameLst>
+                                          <p:attrName>style.visibility</p:attrName>
+                                        </p:attrNameLst>
+                                      </p:cBhvr>
+                                      <p:to>
+                                        <p:strVal val="visible"/>
+                                      </p:to>
+                                    </p:set>
+                                    <p:animEffect transition="in" filter="wipe(down)">
+                                      <p:cBhvr>
+                                        <p:cTn id="7" dur="1000"/>
+                                        <p:tgtEl>
+                                          <p:spTgt spid="11"/>
+                                        </p:tgtEl>
+                                      </p:cBhvr>
+                                    </p:animEffect>
+                                  </p:childTnLst>
+                                </p:cTn>
+                              </p:par>
+                              <p:par>
+                                <p:cTn id="8" presetID="22" presetClass="entr" presetSubtype="4" fill="hold" nodeType="withEffect">
+                                  <p:stCondLst>
+                                    <p:cond delay="0"/>
+                                  </p:stCondLst>
+                                  <p:childTnLst>
+                                    <p:set>
+                                      <p:cBhvr>
+                                        <p:cTn id="9" dur="1" fill="hold">
+                                          <p:stCondLst>
+                                            <p:cond delay="0"/>
+                                          </p:stCondLst>
+                                        </p:cTn>
+                                        <p:tgtEl>
+                                          <p:spTgt spid="13"/>
+                                        </p:tgtEl>
+                                        <p:attrNameLst>
+                                          <p:attrName>style.visibility</p:attrName>
+                                        </p:attrNameLst>
+                                      </p:cBhvr>
+                                      <p:to>
+                                        <p:strVal val="visible"/>
+                                      </p:to>
+                                    </p:set>
+                                    <p:animEffect transition="in" filter="wipe(down)">
+                                      <p:cBhvr>
+                                        <p:cTn id="10" dur="1000"/>
+                                        <p:tgtEl>
+                                          <p:spTgt spid="13"/>
+                                        </p:tgtEl>
+                                      </p:cBhvr>
+                                    </p:animEffect>
+                                  </p:childTnLst>
+                                </p:cTn>
+                              </p:par>
+                              <p:par>
+                                <p:cTn id="11" presetID="22" presetClass="entr" presetSubtype="4" fill="hold" nodeType="withEffect">
+                                  <p:stCondLst>
+                                    <p:cond delay="0"/>
+                                  </p:stCondLst>
+                                  <p:childTnLst>
+                                    <p:set>
+                                      <p:cBhvr>
+                                        <p:cTn id="12" dur="1" fill="hold">
+                                          <p:stCondLst>
+                                            <p:cond delay="0"/>
+                                          </p:stCondLst>
+                                        </p:cTn>
+                                        <p:tgtEl>
+                                          <p:spTgt spid="9"/>
+                                        </p:tgtEl>
+                                        <p:attrNameLst>
+                                          <p:attrName>style.visibility</p:attrName>
+                                        </p:attrNameLst>
+                                      </p:cBhvr>
+                                      <p:to>
+                                        <p:strVal val="visible"/>
+                                      </p:to>
+                                    </p:set>
+                                    <p:animEffect transition="in" filter="wipe(down)">
+                                      <p:cBhvr>
+                                        <p:cTn id="13" dur="1000"/>
+                                        <p:tgtEl>
+                                          <p:spTgt spid="9"/>
+                                        </p:tgtEl>
+                                      </p:cBhvr>
+                                    </p:animEffect>
+                                  </p:childTnLst>
+                                </p:cTn>
+                              </p:par>
+                              <p:par>
+                                <p:cTn id="14" presetID="22" presetClass="entr" presetSubtype="4" fill="hold" nodeType="withEffect">
+                                  <p:stCondLst>
+                                    <p:cond delay="0"/>
+                                  </p:stCondLst>
+                                  <p:childTnLst>
+                                    <p:set>
+                                      <p:cBhvr>
+                                        <p:cTn id="15" dur="1" fill="hold">
+                                          <p:stCondLst>
+                                            <p:cond delay="0"/>
+                                          </p:stCondLst>
+                                        </p:cTn>
+                                        <p:tgtEl>
+                                          <p:spTgt spid="5"/>
+                                        </p:tgtEl>
+                                        <p:attrNameLst>
+                                          <p:attrName>style.visibility</p:attrName>
+                                        </p:attrNameLst>
+                                      </p:cBhvr>
+                                      <p:to>
+                                        <p:strVal val="visible"/>
+                                      </p:to>
+                                    </p:set>
+                                    <p:animEffect transition="in" filter="wipe(down)">
+                                      <p:cBhvr>
+                                        <p:cTn id="16" dur="1000"/>
+                                        <p:tgtEl>
+                                          <p:spTgt spid="5"/>
+                                        </p:tgtEl>
+                                      </p:cBhvr>
+                                    </p:animEffect>
+                                  </p:childTnLst>
+                                </p:cTn>
+                              </p:par>
+                            </p:childTnLst>
+                          </p:cTn>
+                        </p:par>
+                      </p:childTnLst>
+                    </p:cTn>
+                  </p:par>
+                  <p:par>
+                    <p:cTn id="17" fill="hold">
+                      <p:stCondLst>
+                        <p:cond delay="indefinite"/>
+                      </p:stCondLst>
+                      <p:childTnLst>
+                        <p:par>
+                          <p:cTn id="18" fill="hold">
+                            <p:stCondLst>
+                              <p:cond delay="0"/>
+                            </p:stCondLst>
+                            <p:childTnLst>
+                              <p:par>
+                                <p:cTn id="19" presetID="22" presetClass="entr" presetSubtype="8" fill="hold" grpId="0" nodeType="clickEffect">
+                                  <p:stCondLst>
+                                    <p:cond delay="0"/>
+                                  </p:stCondLst>
+                                  <p:childTnLst>
+                                    <p:set>
+                                      <p:cBhvr>
+                                        <p:cTn id="20" dur="1" fill="hold">
+                                          <p:stCondLst>
+                                            <p:cond delay="0"/>
+                                          </p:stCondLst>
+                                        </p:cTn>
+                                        <p:tgtEl>
+                                          <p:spTgt spid="20"/>
+                                        </p:tgtEl>
+                                        <p:attrNameLst>
+                                          <p:attrName>style.visibility</p:attrName>
+                                        </p:attrNameLst>
+                                      </p:cBhvr>
+                                      <p:to>
+                                        <p:strVal val="visible"/>
+                                      </p:to>
+                                    </p:set>
+                                    <p:animEffect transition="in" filter="wipe(left)">
+                                      <p:cBhvr>
+                                        <p:cTn id="21" dur="1000"/>
+                                        <p:tgtEl>
+                                          <p:spTgt spid="20"/>
+                                        </p:tgtEl>
+                                      </p:cBhvr>
+                                    </p:animEffect>
+                                  </p:childTnLst>
+                                </p:cTn>
+                              </p:par>
+                            </p:childTnLst>
+                          </p:cTn>
+                        </p:par>
+                      </p:childTnLst>
+                    </p:cTn>
+                  </p:par>
+                  <p:par>
+                    <p:cTn id="22" fill="hold">
+                      <p:stCondLst>
+                        <p:cond delay="indefinite"/>
+                      </p:stCondLst>
+                      <p:childTnLst>
+                        <p:par>
+                          <p:cTn id="23" fill="hold">
+                            <p:stCondLst>
+                              <p:cond delay="0"/>
+                            </p:stCondLst>
+                            <p:childTnLst>
+                              <p:par>
+                                <p:cTn id="24" presetID="22" presetClass="entr" presetSubtype="4" fill="hold" nodeType="clickEffect">
+                                  <p:stCondLst>
+                                    <p:cond delay="0"/>
+                                  </p:stCondLst>
+                                  <p:childTnLst>
+                                    <p:set>
+                                      <p:cBhvr>
+                                        <p:cTn id="25" dur="1" fill="hold">
+                                          <p:stCondLst>
+                                            <p:cond delay="0"/>
+                                          </p:stCondLst>
+                                        </p:cTn>
+                                        <p:tgtEl>
+                                          <p:spTgt spid="15"/>
+                                        </p:tgtEl>
+                                        <p:attrNameLst>
+                                          <p:attrName>style.visibility</p:attrName>
+                                        </p:attrNameLst>
+                                      </p:cBhvr>
+                                      <p:to>
+                                        <p:strVal val="visible"/>
+                                      </p:to>
+                                    </p:set>
+                                    <p:animEffect transition="in" filter="wipe(down)">
+                                      <p:cBhvr>
+                                        <p:cTn id="26" dur="1000"/>
+                                        <p:tgtEl>
+                                          <p:spTgt spid="15"/>
+                                        </p:tgtEl>
+                                      </p:cBhvr>
+                                    </p:animEffect>
+                                  </p:childTnLst>
+                                </p:cTn>
+                              </p:par>
+                              <p:par>
+                                <p:cTn id="27" presetID="22" presetClass="entr" presetSubtype="4" fill="hold" nodeType="withEffect">
+                                  <p:stCondLst>
+                                    <p:cond delay="0"/>
+                                  </p:stCondLst>
+                                  <p:childTnLst>
+                                    <p:set>
+                                      <p:cBhvr>
+                                        <p:cTn id="28" dur="1" fill="hold">
+                                          <p:stCondLst>
+                                            <p:cond delay="0"/>
+                                          </p:stCondLst>
+                                        </p:cTn>
+                                        <p:tgtEl>
+                                          <p:spTgt spid="17"/>
+                                        </p:tgtEl>
+                                        <p:attrNameLst>
+                                          <p:attrName>style.visibility</p:attrName>
+                                        </p:attrNameLst>
+                                      </p:cBhvr>
+                                      <p:to>
+                                        <p:strVal val="visible"/>
+                                      </p:to>
+                                    </p:set>
+                                    <p:animEffect transition="in" filter="wipe(down)">
+                                      <p:cBhvr>
+                                        <p:cTn id="29" dur="1000"/>
+                                        <p:tgtEl>
+                                          <p:spTgt spid="17"/>
+                                        </p:tgtEl>
+                                      </p:cBhvr>
+                                    </p:animEffect>
+                                  </p:childTnLst>
+                                </p:cTn>
+                              </p:par>
+                              <p:par>
+                                <p:cTn id="30" presetID="22" presetClass="entr" presetSubtype="4" fill="hold" nodeType="withEffect">
+                                  <p:stCondLst>
+                                    <p:cond delay="0"/>
+                                  </p:stCondLst>
+                                  <p:childTnLst>
+                                    <p:set>
+                                      <p:cBhvr>
+                                        <p:cTn id="31" dur="1" fill="hold">
+                                          <p:stCondLst>
+                                            <p:cond delay="0"/>
+                                          </p:stCondLst>
+                                        </p:cTn>
+                                        <p:tgtEl>
+                                          <p:spTgt spid="19"/>
+                                        </p:tgtEl>
+                                        <p:attrNameLst>
+                                          <p:attrName>style.visibility</p:attrName>
+                                        </p:attrNameLst>
+                                      </p:cBhvr>
+                                      <p:to>
+                                        <p:strVal val="visible"/>
+                                      </p:to>
+                                    </p:set>
+                                    <p:animEffect transition="in" filter="wipe(down)">
+                                      <p:cBhvr>
+                                        <p:cTn id="32" dur="1000"/>
+                                        <p:tgtEl>
+                                          <p:spTgt spid="19"/>
+                                        </p:tgtEl>
+                                      </p:cBhvr>
+                                    </p:animEffect>
+                                  </p:childTnLst>
+                                </p:cTn>
+                              </p:par>
+                              <p:par>
+                                <p:cTn id="33" presetID="22" presetClass="entr" presetSubtype="4" fill="hold" nodeType="withEffect">
+                                  <p:stCondLst>
+                                    <p:cond delay="0"/>
+                                  </p:stCondLst>
+                                  <p:childTnLst>
+                                    <p:set>
+                                      <p:cBhvr>
+                                        <p:cTn id="34" dur="1" fill="hold">
+                                          <p:stCondLst>
+                                            <p:cond delay="0"/>
+                                          </p:stCondLst>
+                                        </p:cTn>
+                                        <p:tgtEl>
+                                          <p:spTgt spid="18"/>
+                                        </p:tgtEl>
+                                        <p:attrNameLst>
+                                          <p:attrName>style.visibility</p:attrName>
+                                        </p:attrNameLst>
+                                      </p:cBhvr>
+                                      <p:to>
+                                        <p:strVal val="visible"/>
+                                      </p:to>
+                                    </p:set>
+                                    <p:animEffect transition="in" filter="wipe(down)">
+                                      <p:cBhvr>
+                                        <p:cTn id="35" dur="1000"/>
+                                        <p:tgtEl>
+                                          <p:spTgt spid="18"/>
+                                        </p:tgtEl>
+                                      </p:cBhvr>
+                                    </p:animEffect>
+                                  </p:childTnLst>
+                                </p:cTn>
+                              </p:par>
+                            </p:childTnLst>
+                          </p:cTn>
+                        </p:par>
+                      </p:childTnLst>
+                    </p:cTn>
+                  </p:par>
+                  <p:par>
+                    <p:cTn id="36" fill="hold">
+                      <p:stCondLst>
+                        <p:cond delay="indefinite"/>
+                      </p:stCondLst>
+                      <p:childTnLst>
+                        <p:par>
+                          <p:cTn id="37" fill="hold">
+                            <p:stCondLst>
+                              <p:cond delay="0"/>
+                            </p:stCondLst>
+                            <p:childTnLst>
+                              <p:par>
+                                <p:cTn id="38" presetID="22" presetClass="entr" presetSubtype="8" fill="hold" grpId="0" nodeType="clickEffect">
+                                  <p:stCondLst>
+                                    <p:cond delay="0"/>
+                                  </p:stCondLst>
+                                  <p:childTnLst>
+                                    <p:set>
+                                      <p:cBhvr>
+                                        <p:cTn id="39" dur="1" fill="hold">
+                                          <p:stCondLst>
+                                            <p:cond delay="0"/>
+                                          </p:stCondLst>
+                                        </p:cTn>
+                                        <p:tgtEl>
+                                          <p:spTgt spid="21"/>
+                                        </p:tgtEl>
+                                        <p:attrNameLst>
+                                          <p:attrName>style.visibility</p:attrName>
+                                        </p:attrNameLst>
+                                      </p:cBhvr>
+                                      <p:to>
+                                        <p:strVal val="visible"/>
+                                      </p:to>
+                                    </p:set>
+                                    <p:animEffect transition="in" filter="wipe(left)">
+                                      <p:cBhvr>
+                                        <p:cTn id="40" dur="1000"/>
+                                        <p:tgtEl>
+                                          <p:spTgt spid="21"/>
+                                        </p:tgtEl>
+                                      </p:cBhvr>
+                                    </p:animEffect>
+                                  </p:childTnLst>
+                                </p:cTn>
+                              </p:par>
+                            </p:childTnLst>
+                          </p:cTn>
+                        </p:par>
+                      </p:childTnLst>
+                    </p:cTn>
+                  </p:par>
+                  <p:par>
+                    <p:cTn id="41" fill="hold">
+                      <p:stCondLst>
+                        <p:cond delay="indefinite"/>
+                      </p:stCondLst>
+                      <p:childTnLst>
+                        <p:par>
+                          <p:cTn id="42" fill="hold">
+                            <p:stCondLst>
+                              <p:cond delay="0"/>
+                            </p:stCondLst>
+                            <p:childTnLst>
+                              <p:par>
+                                <p:cTn id="43" presetID="22" presetClass="entr" presetSubtype="8" fill="hold" grpId="0" nodeType="clickEffect">
+                                  <p:stCondLst>
+                                    <p:cond delay="0"/>
+                                  </p:stCondLst>
+                                  <p:childTnLst>
+                                    <p:set>
+                                      <p:cBhvr>
+                                        <p:cTn id="44" dur="1" fill="hold">
+                                          <p:stCondLst>
+                                            <p:cond delay="0"/>
+                                          </p:stCondLst>
+                                        </p:cTn>
+                                        <p:tgtEl>
+                                          <p:spTgt spid="23"/>
+                                        </p:tgtEl>
+                                        <p:attrNameLst>
+                                          <p:attrName>style.visibility</p:attrName>
+                                        </p:attrNameLst>
+                                      </p:cBhvr>
+                                      <p:to>
+                                        <p:strVal val="visible"/>
+                                      </p:to>
+                                    </p:set>
+                                    <p:animEffect transition="in" filter="wipe(left)">
+                                      <p:cBhvr>
+                                        <p:cTn id="45" dur="1000"/>
+                                        <p:tgtEl>
+                                          <p:spTgt spid="23"/>
+                                        </p:tgtEl>
+                                      </p:cBhvr>
+                                    </p:animEffect>
+                                  </p:childTnLst>
+                                </p:cTn>
+                              </p:par>
+                              <p:par>
+                                <p:cTn id="46" presetID="22" presetClass="entr" presetSubtype="8" fill="hold" grpId="0" nodeType="withEffect">
+                                  <p:stCondLst>
+                                    <p:cond delay="0"/>
+                                  </p:stCondLst>
+                                  <p:childTnLst>
+                                    <p:set>
+                                      <p:cBhvr>
+                                        <p:cTn id="47" dur="1" fill="hold">
+                                          <p:stCondLst>
+                                            <p:cond delay="0"/>
+                                          </p:stCondLst>
+                                        </p:cTn>
+                                        <p:tgtEl>
+                                          <p:spTgt spid="24"/>
+                                        </p:tgtEl>
+                                        <p:attrNameLst>
+                                          <p:attrName>style.visibility</p:attrName>
+                                        </p:attrNameLst>
+                                      </p:cBhvr>
+                                      <p:to>
+                                        <p:strVal val="visible"/>
+                                      </p:to>
+                                    </p:set>
+                                    <p:animEffect transition="in" filter="wipe(left)">
+                                      <p:cBhvr>
+                                        <p:cTn id="48" dur="1000"/>
+                                        <p:tgtEl>
+                                          <p:spTgt spid="24"/>
+                                        </p:tgtEl>
+                                      </p:cBhvr>
+                                    </p:animEffect>
+                                  </p:childTnLst>
+                                </p:cTn>
+                              </p:par>
+                              <p:par>
+                                <p:cTn id="49" presetID="22" presetClass="entr" presetSubtype="8" fill="hold" grpId="0" nodeType="withEffect">
+                                  <p:stCondLst>
+                                    <p:cond delay="0"/>
+                                  </p:stCondLst>
+                                  <p:childTnLst>
+                                    <p:set>
+                                      <p:cBhvr>
+                                        <p:cTn id="50" dur="1" fill="hold">
+                                          <p:stCondLst>
+                                            <p:cond delay="0"/>
+                                          </p:stCondLst>
+                                        </p:cTn>
+                                        <p:tgtEl>
+                                          <p:spTgt spid="25"/>
+                                        </p:tgtEl>
+                                        <p:attrNameLst>
+                                          <p:attrName>style.visibility</p:attrName>
+                                        </p:attrNameLst>
+                                      </p:cBhvr>
+                                      <p:to>
+                                        <p:strVal val="visible"/>
+                                      </p:to>
+                                    </p:set>
+                                    <p:animEffect transition="in" filter="wipe(left)">
+                                      <p:cBhvr>
+                                        <p:cTn id="51" dur="1000"/>
+                                        <p:tgtEl>
+                                          <p:spTgt spid="25"/>
+                                        </p:tgtEl>
+                                      </p:cBhvr>
+                                    </p:animEffect>
+                                  </p:childTnLst>
+                                </p:cTn>
+                              </p:par>
+                              <p:par>
+                                <p:cTn id="52" presetID="22" presetClass="entr" presetSubtype="8" fill="hold" grpId="0" nodeType="withEffect">
+                                  <p:stCondLst>
+                                    <p:cond delay="0"/>
+                                  </p:stCondLst>
+                                  <p:childTnLst>
+                                    <p:set>
+                                      <p:cBhvr>
+                                        <p:cTn id="53" dur="1" fill="hold">
+                                          <p:stCondLst>
+                                            <p:cond delay="0"/>
+                                          </p:stCondLst>
+                                        </p:cTn>
+                                        <p:tgtEl>
+                                          <p:spTgt spid="26"/>
+                                        </p:tgtEl>
+                                        <p:attrNameLst>
+                                          <p:attrName>style.visibility</p:attrName>
+                                        </p:attrNameLst>
+                                      </p:cBhvr>
+                                      <p:to>
+                                        <p:strVal val="visible"/>
+                                      </p:to>
+                                    </p:set>
+                                    <p:animEffect transition="in" filter="wipe(left)">
+                                      <p:cBhvr>
+                                        <p:cTn id="54" dur="1000"/>
+                                        <p:tgtEl>
+                                          <p:spTgt spid="26"/>
+                                        </p:tgtEl>
+                                      </p:cBhvr>
+                                    </p:animEffect>
+                                  </p:childTnLst>
+                                </p:cTn>
+                              </p:par>
+                            </p:childTnLst>
+                          </p:cTn>
+                        </p:par>
+                      </p:childTnLst>
+                    </p:cTn>
+                  </p:par>
+                  <p:par>
+                    <p:cTn id="55" fill="hold">
+                      <p:stCondLst>
+                        <p:cond delay="indefinite"/>
+                      </p:stCondLst>
+                      <p:childTnLst>
+                        <p:par>
+                          <p:cTn id="56" fill="hold">
+                            <p:stCondLst>
+                              <p:cond delay="0"/>
+                            </p:stCondLst>
+                            <p:childTnLst>
+                              <p:par>
+                                <p:cTn id="57" presetID="22" presetClass="entr" presetSubtype="8" fill="hold" grpId="0" nodeType="clickEffect">
+                                  <p:stCondLst>
+                                    <p:cond delay="0"/>
+                                  </p:stCondLst>
+                                  <p:childTnLst>
+                                    <p:set>
+                                      <p:cBhvr>
+                                        <p:cTn id="58" dur="1" fill="hold">
+                                          <p:stCondLst>
+                                            <p:cond delay="0"/>
+                                          </p:stCondLst>
+                                        </p:cTn>
+                                        <p:tgtEl>
+                                          <p:spTgt spid="22"/>
+                                        </p:tgtEl>
+                                        <p:attrNameLst>
+                                          <p:attrName>style.visibility</p:attrName>
+                                        </p:attrNameLst>
+                                      </p:cBhvr>
+                                      <p:to>
+                                        <p:strVal val="visible"/>
+                                      </p:to>
+                                    </p:set>
+                                    <p:animEffect transition="in" filter="wipe(left)">
+                                      <p:cBhvr>
+                                        <p:cTn id="59" dur="1500"/>
+                                        <p:tgtEl>
+                                          <p:spTgt spid="22"/>
+                                        </p:tgtEl>
+                                      </p:cBhvr>
+                                    </p:animEffect>
+                                  </p:childTnLst>
+                                </p:cTn>
+                              </p:par>
+                            </p:childTnLst>
+                          </p:cTn>
+                        </p:par>
+                      </p:childTnLst>
+                    </p:cTn>
+                  </p:par>
+                  <p:par>
+                    <p:cTn id="60" fill="hold">
+                      <p:stCondLst>
+                        <p:cond delay="indefinite"/>
+                      </p:stCondLst>
+                      <p:childTnLst>
+                        <p:par>
+                          <p:cTn id="61" fill="hold">
+                            <p:stCondLst>
+                              <p:cond delay="0"/>
+                            </p:stCondLst>
+                            <p:childTnLst>
+                              <p:par>
+                                <p:cTn id="62" presetID="22" presetClass="entr" presetSubtype="8" fill="hold" grpId="0" nodeType="clickEffect">
+                                  <p:stCondLst>
+                                    <p:cond delay="0"/>
+                                  </p:stCondLst>
+                                  <p:childTnLst>
+                                    <p:set>
+                                      <p:cBhvr>
+                                        <p:cTn id="63" dur="1" fill="hold">
+                                          <p:stCondLst>
+                                            <p:cond delay="0"/>
+                                          </p:stCondLst>
+                                        </p:cTn>
+                                        <p:tgtEl>
+                                          <p:spTgt spid="27"/>
+                                        </p:tgtEl>
+                                        <p:attrNameLst>
+                                          <p:attrName>style.visibility</p:attrName>
+                                        </p:attrNameLst>
+                                      </p:cBhvr>
+                                      <p:to>
+                                        <p:strVal val="visible"/>
+                                      </p:to>
+                                    </p:set>
+                                    <p:animEffect transition="in" filter="wipe(left)">
+                                      <p:cBhvr>
+                                        <p:cTn id="64" dur="1000"/>
+                                        <p:tgtEl>
+                                          <p:spTgt spid="27"/>
+                                        </p:tgtEl>
+                                      </p:cBhvr>
+                                    </p:animEffect>
+                                  </p:childTnLst>
+                                </p:cTn>
+                              </p:par>
+                              <p:par>
+                                <p:cTn id="65" presetID="22" presetClass="entr" presetSubtype="8" fill="hold" grpId="0" nodeType="withEffect">
+                                  <p:stCondLst>
+                                    <p:cond delay="0"/>
+                                  </p:stCondLst>
+                                  <p:childTnLst>
+                                    <p:set>
+                                      <p:cBhvr>
+                                        <p:cTn id="66" dur="1" fill="hold">
+                                          <p:stCondLst>
+                                            <p:cond delay="0"/>
+                                          </p:stCondLst>
+                                        </p:cTn>
+                                        <p:tgtEl>
+                                          <p:spTgt spid="28"/>
+                                        </p:tgtEl>
+                                        <p:attrNameLst>
+                                          <p:attrName>style.visibility</p:attrName>
+                                        </p:attrNameLst>
+                                      </p:cBhvr>
+                                      <p:to>
+                                        <p:strVal val="visible"/>
+                                      </p:to>
+                                    </p:set>
+                                    <p:animEffect transition="in" filter="wipe(left)">
+                                      <p:cBhvr>
+                                        <p:cTn id="67" dur="1000"/>
+                                        <p:tgtEl>
+                                          <p:spTgt spid="28"/>
+                                        </p:tgtEl>
+                                      </p:cBhvr>
+                                    </p:animEffect>
+                                  </p:childTnLst>
+                                </p:cTn>
+                              </p:par>
+                            </p:childTnLst>
+                          </p:cTn>
+                        </p:par>
+                      </p:childTnLst>
+                    </p:cTn>
+                  </p:par>
+                  <p:par>
+                    <p:cTn id="68" fill="hold">
+                      <p:stCondLst>
+                        <p:cond delay="indefinite"/>
+                      </p:stCondLst>
+                      <p:childTnLst>
+                        <p:par>
+                          <p:cTn id="69" fill="hold">
+                            <p:stCondLst>
+                              <p:cond delay="0"/>
+                            </p:stCondLst>
+                            <p:childTnLst>
+                              <p:par>
+                                <p:cTn id="70" presetID="22" presetClass="entr" presetSubtype="4" fill="hold" grpId="0" nodeType="clickEffect">
+                                  <p:stCondLst>
+                                    <p:cond delay="0"/>
+                                  </p:stCondLst>
+                                  <p:childTnLst>
+                                    <p:set>
+                                      <p:cBhvr>
+                                        <p:cTn id="71" dur="1" fill="hold">
+                                          <p:stCondLst>
+                                            <p:cond delay="0"/>
+                                          </p:stCondLst>
+                                        </p:cTn>
+                                        <p:tgtEl>
+                                          <p:spTgt spid="29"/>
+                                        </p:tgtEl>
+                                        <p:attrNameLst>
+                                          <p:attrName>style.visibility</p:attrName>
+                                        </p:attrNameLst>
+                                      </p:cBhvr>
+                                      <p:to>
+                                        <p:strVal val="visible"/>
+                                      </p:to>
+                                    </p:set>
+                                    <p:animEffect transition="in" filter="wipe(down)">
+                                      <p:cBhvr>
+                                        <p:cTn id="72" dur="1500"/>
+                                        <p:tgtEl>
+                                          <p:spTgt spid="29"/>
+                                        </p:tgtEl>
+                                      </p:cBhvr>
+                                    </p:animEffect>
+                                  </p:childTnLst>
+                                </p:cTn>
+                              </p:par>
+                              <p:par>
+                                <p:cTn id="73" presetID="22" presetClass="entr" presetSubtype="4" fill="hold" nodeType="withEffect">
+                                  <p:stCondLst>
+                                    <p:cond delay="0"/>
+                                  </p:stCondLst>
+                                  <p:childTnLst>
+                                    <p:set>
+                                      <p:cBhvr>
+                                        <p:cTn id="74" dur="1" fill="hold">
+                                          <p:stCondLst>
+                                            <p:cond delay="0"/>
+                                          </p:stCondLst>
+                                        </p:cTn>
+                                        <p:tgtEl>
+                                          <p:spTgt spid="31"/>
+                                        </p:tgtEl>
+                                        <p:attrNameLst>
+                                          <p:attrName>style.visibility</p:attrName>
+                                        </p:attrNameLst>
+                                      </p:cBhvr>
+                                      <p:to>
+                                        <p:strVal val="visible"/>
+                                      </p:to>
+                                    </p:set>
+                                    <p:animEffect transition="in" filter="wipe(down)">
+                                      <p:cBhvr>
+                                        <p:cTn id="75" dur="1500"/>
+                                        <p:tgtEl>
+                                          <p:spTgt spid="31"/>
+                                        </p:tgtEl>
+                                      </p:cBhvr>
+                                    </p:animEffect>
+                                  </p:childTnLst>
+                                </p:cTn>
+                              </p:par>
+                              <p:par>
+                                <p:cTn id="76" presetID="22" presetClass="entr" presetSubtype="4" fill="hold" nodeType="withEffect">
+                                  <p:stCondLst>
+                                    <p:cond delay="0"/>
+                                  </p:stCondLst>
+                                  <p:childTnLst>
+                                    <p:set>
+                                      <p:cBhvr>
+                                        <p:cTn id="77" dur="1" fill="hold">
+                                          <p:stCondLst>
+                                            <p:cond delay="0"/>
+                                          </p:stCondLst>
+                                        </p:cTn>
+                                        <p:tgtEl>
+                                          <p:spTgt spid="30"/>
+                                        </p:tgtEl>
+                                        <p:attrNameLst>
+                                          <p:attrName>style.visibility</p:attrName>
+                                        </p:attrNameLst>
+                                      </p:cBhvr>
+                                      <p:to>
+                                        <p:strVal val="visible"/>
+                                      </p:to>
+                                    </p:set>
+                                    <p:animEffect transition="in" filter="wipe(down)">
+                                      <p:cBhvr>
+                                        <p:cTn id="78" dur="1500"/>
+                                        <p:tgtEl>
+                                          <p:spTgt spid="30"/>
+                                        </p:tgtEl>
+                                      </p:cBhvr>
+                                    </p:animEffect>
+                                  </p:childTnLst>
+                                </p:cTn>
+                              </p:par>
+                            </p:childTnLst>
+                          </p:cTn>
+                        </p:par>
+                      </p:childTnLst>
+                    </p:cTn>
+                  </p:par>
+                </p:childTnLst>
+              </p:cTn>
+              <p:prevCondLst>
+                <p:cond evt="onPrev" delay="0">
+                  <p:tgtEl>
+                    <p:sldTgt/>
+                  </p:tgtEl>
+                </p:cond>
+              </p:prevCondLst>
+              <p:nextCondLst>
+                <p:cond evt="onNext" delay="0">
+                  <p:tgtEl>
+                    <p:sldTgt/>
+                  </p:tgtEl>
+                </p:cond>
+              </p:nextCondLst>
+            </p:seq>
+          </p:childTnLst>
+        </p:cTn>
+      </p:par>
+    </p:tnLst>
+    <p:bldLst>
+      <p:bldP spid="20" grpId="0"/>
+      <p:bldP spid="21" grpId="0"/>
+      <p:bldP spid="22" grpId="0"/>
+      <p:bldP spid="23" grpId="0"/>
+      <p:bldP spid="24" grpId="0"/>
+      <p:bldP spid="25" grpId="0"/>
+      <p:bldP spid="26" grpId="0"/>
+      <p:bldP spid="27" grpId="0" animBg="1"/>
+      <p:bldP spid="28" grpId="0" animBg="1"/>
+      <p:bldP spid="29" grpId="0"/>
+    </p:bldLst>
+  </p:timing>
 </p:sld>
 </file>
 
@@ -14559,6 +15504,443 @@
   <p:clrMapOvr>
     <a:masterClrMapping/>
   </p:clrMapOvr>
+  <p:timing>
+    <p:tnLst>
+      <p:par>
+        <p:cTn id="1" dur="indefinite" restart="never" nodeType="tmRoot">
+          <p:childTnLst>
+            <p:seq concurrent="1" nextAc="seek">
+              <p:cTn id="2" dur="indefinite" nodeType="mainSeq">
+                <p:childTnLst>
+                  <p:par>
+                    <p:cTn id="3" fill="hold">
+                      <p:stCondLst>
+                        <p:cond delay="indefinite"/>
+                      </p:stCondLst>
+                      <p:childTnLst>
+                        <p:par>
+                          <p:cTn id="4" fill="hold">
+                            <p:stCondLst>
+                              <p:cond delay="0"/>
+                            </p:stCondLst>
+                            <p:childTnLst>
+                              <p:par>
+                                <p:cTn id="5" presetID="22" presetClass="entr" presetSubtype="8" fill="hold" grpId="0" nodeType="clickEffect">
+                                  <p:stCondLst>
+                                    <p:cond delay="0"/>
+                                  </p:stCondLst>
+                                  <p:childTnLst>
+                                    <p:set>
+                                      <p:cBhvr>
+                                        <p:cTn id="6" dur="1" fill="hold">
+                                          <p:stCondLst>
+                                            <p:cond delay="0"/>
+                                          </p:stCondLst>
+                                        </p:cTn>
+                                        <p:tgtEl>
+                                          <p:spTgt spid="15"/>
+                                        </p:tgtEl>
+                                        <p:attrNameLst>
+                                          <p:attrName>style.visibility</p:attrName>
+                                        </p:attrNameLst>
+                                      </p:cBhvr>
+                                      <p:to>
+                                        <p:strVal val="visible"/>
+                                      </p:to>
+                                    </p:set>
+                                    <p:animEffect transition="in" filter="wipe(left)">
+                                      <p:cBhvr>
+                                        <p:cTn id="7" dur="1500"/>
+                                        <p:tgtEl>
+                                          <p:spTgt spid="15"/>
+                                        </p:tgtEl>
+                                      </p:cBhvr>
+                                    </p:animEffect>
+                                  </p:childTnLst>
+                                </p:cTn>
+                              </p:par>
+                            </p:childTnLst>
+                          </p:cTn>
+                        </p:par>
+                        <p:par>
+                          <p:cTn id="8" fill="hold">
+                            <p:stCondLst>
+                              <p:cond delay="1500"/>
+                            </p:stCondLst>
+                            <p:childTnLst>
+                              <p:par>
+                                <p:cTn id="9" presetID="22" presetClass="entr" presetSubtype="8" fill="hold" grpId="0" nodeType="afterEffect">
+                                  <p:stCondLst>
+                                    <p:cond delay="0"/>
+                                  </p:stCondLst>
+                                  <p:childTnLst>
+                                    <p:set>
+                                      <p:cBhvr>
+                                        <p:cTn id="10" dur="1" fill="hold">
+                                          <p:stCondLst>
+                                            <p:cond delay="0"/>
+                                          </p:stCondLst>
+                                        </p:cTn>
+                                        <p:tgtEl>
+                                          <p:spTgt spid="16"/>
+                                        </p:tgtEl>
+                                        <p:attrNameLst>
+                                          <p:attrName>style.visibility</p:attrName>
+                                        </p:attrNameLst>
+                                      </p:cBhvr>
+                                      <p:to>
+                                        <p:strVal val="visible"/>
+                                      </p:to>
+                                    </p:set>
+                                    <p:animEffect transition="in" filter="wipe(left)">
+                                      <p:cBhvr>
+                                        <p:cTn id="11" dur="1000"/>
+                                        <p:tgtEl>
+                                          <p:spTgt spid="16"/>
+                                        </p:tgtEl>
+                                      </p:cBhvr>
+                                    </p:animEffect>
+                                  </p:childTnLst>
+                                </p:cTn>
+                              </p:par>
+                            </p:childTnLst>
+                          </p:cTn>
+                        </p:par>
+                      </p:childTnLst>
+                    </p:cTn>
+                  </p:par>
+                  <p:par>
+                    <p:cTn id="12" fill="hold">
+                      <p:stCondLst>
+                        <p:cond delay="indefinite"/>
+                      </p:stCondLst>
+                      <p:childTnLst>
+                        <p:par>
+                          <p:cTn id="13" fill="hold">
+                            <p:stCondLst>
+                              <p:cond delay="0"/>
+                            </p:stCondLst>
+                            <p:childTnLst>
+                              <p:par>
+                                <p:cTn id="14" presetID="22" presetClass="entr" presetSubtype="8" fill="hold" grpId="0" nodeType="clickEffect">
+                                  <p:stCondLst>
+                                    <p:cond delay="0"/>
+                                  </p:stCondLst>
+                                  <p:childTnLst>
+                                    <p:set>
+                                      <p:cBhvr>
+                                        <p:cTn id="15" dur="1" fill="hold">
+                                          <p:stCondLst>
+                                            <p:cond delay="0"/>
+                                          </p:stCondLst>
+                                        </p:cTn>
+                                        <p:tgtEl>
+                                          <p:spTgt spid="13"/>
+                                        </p:tgtEl>
+                                        <p:attrNameLst>
+                                          <p:attrName>style.visibility</p:attrName>
+                                        </p:attrNameLst>
+                                      </p:cBhvr>
+                                      <p:to>
+                                        <p:strVal val="visible"/>
+                                      </p:to>
+                                    </p:set>
+                                    <p:animEffect transition="in" filter="wipe(left)">
+                                      <p:cBhvr>
+                                        <p:cTn id="16" dur="1500"/>
+                                        <p:tgtEl>
+                                          <p:spTgt spid="13"/>
+                                        </p:tgtEl>
+                                      </p:cBhvr>
+                                    </p:animEffect>
+                                  </p:childTnLst>
+                                </p:cTn>
+                              </p:par>
+                            </p:childTnLst>
+                          </p:cTn>
+                        </p:par>
+                        <p:par>
+                          <p:cTn id="17" fill="hold">
+                            <p:stCondLst>
+                              <p:cond delay="1500"/>
+                            </p:stCondLst>
+                            <p:childTnLst>
+                              <p:par>
+                                <p:cTn id="18" presetID="22" presetClass="entr" presetSubtype="1" fill="hold" grpId="0" nodeType="afterEffect">
+                                  <p:stCondLst>
+                                    <p:cond delay="0"/>
+                                  </p:stCondLst>
+                                  <p:childTnLst>
+                                    <p:set>
+                                      <p:cBhvr>
+                                        <p:cTn id="19" dur="1" fill="hold">
+                                          <p:stCondLst>
+                                            <p:cond delay="0"/>
+                                          </p:stCondLst>
+                                        </p:cTn>
+                                        <p:tgtEl>
+                                          <p:spTgt spid="17"/>
+                                        </p:tgtEl>
+                                        <p:attrNameLst>
+                                          <p:attrName>style.visibility</p:attrName>
+                                        </p:attrNameLst>
+                                      </p:cBhvr>
+                                      <p:to>
+                                        <p:strVal val="visible"/>
+                                      </p:to>
+                                    </p:set>
+                                    <p:animEffect transition="in" filter="wipe(up)">
+                                      <p:cBhvr>
+                                        <p:cTn id="20" dur="1000"/>
+                                        <p:tgtEl>
+                                          <p:spTgt spid="17"/>
+                                        </p:tgtEl>
+                                      </p:cBhvr>
+                                    </p:animEffect>
+                                  </p:childTnLst>
+                                </p:cTn>
+                              </p:par>
+                            </p:childTnLst>
+                          </p:cTn>
+                        </p:par>
+                      </p:childTnLst>
+                    </p:cTn>
+                  </p:par>
+                  <p:par>
+                    <p:cTn id="21" fill="hold">
+                      <p:stCondLst>
+                        <p:cond delay="indefinite"/>
+                      </p:stCondLst>
+                      <p:childTnLst>
+                        <p:par>
+                          <p:cTn id="22" fill="hold">
+                            <p:stCondLst>
+                              <p:cond delay="0"/>
+                            </p:stCondLst>
+                            <p:childTnLst>
+                              <p:par>
+                                <p:cTn id="23" presetID="22" presetClass="entr" presetSubtype="8" fill="hold" grpId="0" nodeType="clickEffect">
+                                  <p:stCondLst>
+                                    <p:cond delay="0"/>
+                                  </p:stCondLst>
+                                  <p:childTnLst>
+                                    <p:set>
+                                      <p:cBhvr>
+                                        <p:cTn id="24" dur="1" fill="hold">
+                                          <p:stCondLst>
+                                            <p:cond delay="0"/>
+                                          </p:stCondLst>
+                                        </p:cTn>
+                                        <p:tgtEl>
+                                          <p:spTgt spid="14"/>
+                                        </p:tgtEl>
+                                        <p:attrNameLst>
+                                          <p:attrName>style.visibility</p:attrName>
+                                        </p:attrNameLst>
+                                      </p:cBhvr>
+                                      <p:to>
+                                        <p:strVal val="visible"/>
+                                      </p:to>
+                                    </p:set>
+                                    <p:animEffect transition="in" filter="wipe(left)">
+                                      <p:cBhvr>
+                                        <p:cTn id="25" dur="1500"/>
+                                        <p:tgtEl>
+                                          <p:spTgt spid="14"/>
+                                        </p:tgtEl>
+                                      </p:cBhvr>
+                                    </p:animEffect>
+                                  </p:childTnLst>
+                                </p:cTn>
+                              </p:par>
+                            </p:childTnLst>
+                          </p:cTn>
+                        </p:par>
+                        <p:par>
+                          <p:cTn id="26" fill="hold">
+                            <p:stCondLst>
+                              <p:cond delay="1500"/>
+                            </p:stCondLst>
+                            <p:childTnLst>
+                              <p:par>
+                                <p:cTn id="27" presetID="22" presetClass="entr" presetSubtype="1" fill="hold" grpId="0" nodeType="afterEffect">
+                                  <p:stCondLst>
+                                    <p:cond delay="0"/>
+                                  </p:stCondLst>
+                                  <p:childTnLst>
+                                    <p:set>
+                                      <p:cBhvr>
+                                        <p:cTn id="28" dur="1" fill="hold">
+                                          <p:stCondLst>
+                                            <p:cond delay="0"/>
+                                          </p:stCondLst>
+                                        </p:cTn>
+                                        <p:tgtEl>
+                                          <p:spTgt spid="18"/>
+                                        </p:tgtEl>
+                                        <p:attrNameLst>
+                                          <p:attrName>style.visibility</p:attrName>
+                                        </p:attrNameLst>
+                                      </p:cBhvr>
+                                      <p:to>
+                                        <p:strVal val="visible"/>
+                                      </p:to>
+                                    </p:set>
+                                    <p:animEffect transition="in" filter="wipe(up)">
+                                      <p:cBhvr>
+                                        <p:cTn id="29" dur="1000"/>
+                                        <p:tgtEl>
+                                          <p:spTgt spid="18"/>
+                                        </p:tgtEl>
+                                      </p:cBhvr>
+                                    </p:animEffect>
+                                  </p:childTnLst>
+                                </p:cTn>
+                              </p:par>
+                            </p:childTnLst>
+                          </p:cTn>
+                        </p:par>
+                      </p:childTnLst>
+                    </p:cTn>
+                  </p:par>
+                  <p:par>
+                    <p:cTn id="30" fill="hold">
+                      <p:stCondLst>
+                        <p:cond delay="indefinite"/>
+                      </p:stCondLst>
+                      <p:childTnLst>
+                        <p:par>
+                          <p:cTn id="31" fill="hold">
+                            <p:stCondLst>
+                              <p:cond delay="0"/>
+                            </p:stCondLst>
+                            <p:childTnLst>
+                              <p:par>
+                                <p:cTn id="32" presetID="22" presetClass="entr" presetSubtype="8" fill="hold" grpId="0" nodeType="clickEffect">
+                                  <p:stCondLst>
+                                    <p:cond delay="0"/>
+                                  </p:stCondLst>
+                                  <p:childTnLst>
+                                    <p:set>
+                                      <p:cBhvr>
+                                        <p:cTn id="33" dur="1" fill="hold">
+                                          <p:stCondLst>
+                                            <p:cond delay="0"/>
+                                          </p:stCondLst>
+                                        </p:cTn>
+                                        <p:tgtEl>
+                                          <p:spTgt spid="19"/>
+                                        </p:tgtEl>
+                                        <p:attrNameLst>
+                                          <p:attrName>style.visibility</p:attrName>
+                                        </p:attrNameLst>
+                                      </p:cBhvr>
+                                      <p:to>
+                                        <p:strVal val="visible"/>
+                                      </p:to>
+                                    </p:set>
+                                    <p:animEffect transition="in" filter="wipe(left)">
+                                      <p:cBhvr>
+                                        <p:cTn id="34" dur="1000"/>
+                                        <p:tgtEl>
+                                          <p:spTgt spid="19"/>
+                                        </p:tgtEl>
+                                      </p:cBhvr>
+                                    </p:animEffect>
+                                  </p:childTnLst>
+                                </p:cTn>
+                              </p:par>
+                            </p:childTnLst>
+                          </p:cTn>
+                        </p:par>
+                      </p:childTnLst>
+                    </p:cTn>
+                  </p:par>
+                  <p:par>
+                    <p:cTn id="35" fill="hold">
+                      <p:stCondLst>
+                        <p:cond delay="indefinite"/>
+                      </p:stCondLst>
+                      <p:childTnLst>
+                        <p:par>
+                          <p:cTn id="36" fill="hold">
+                            <p:stCondLst>
+                              <p:cond delay="0"/>
+                            </p:stCondLst>
+                            <p:childTnLst>
+                              <p:par>
+                                <p:cTn id="37" presetID="22" presetClass="entr" presetSubtype="8" fill="hold" grpId="0" nodeType="clickEffect">
+                                  <p:stCondLst>
+                                    <p:cond delay="0"/>
+                                  </p:stCondLst>
+                                  <p:childTnLst>
+                                    <p:set>
+                                      <p:cBhvr>
+                                        <p:cTn id="38" dur="1" fill="hold">
+                                          <p:stCondLst>
+                                            <p:cond delay="0"/>
+                                          </p:stCondLst>
+                                        </p:cTn>
+                                        <p:tgtEl>
+                                          <p:spTgt spid="20"/>
+                                        </p:tgtEl>
+                                        <p:attrNameLst>
+                                          <p:attrName>style.visibility</p:attrName>
+                                        </p:attrNameLst>
+                                      </p:cBhvr>
+                                      <p:to>
+                                        <p:strVal val="visible"/>
+                                      </p:to>
+                                    </p:set>
+                                    <p:animEffect transition="in" filter="wipe(left)">
+                                      <p:cBhvr>
+                                        <p:cTn id="39" dur="1000"/>
+                                        <p:tgtEl>
+                                          <p:spTgt spid="20"/>
+                                        </p:tgtEl>
+                                      </p:cBhvr>
+                                    </p:animEffect>
+                                  </p:childTnLst>
+                                </p:cTn>
+                              </p:par>
+                            </p:childTnLst>
+                          </p:cTn>
+                        </p:par>
+                      </p:childTnLst>
+                    </p:cTn>
+                  </p:par>
+                </p:childTnLst>
+              </p:cTn>
+              <p:prevCondLst>
+                <p:cond evt="onPrev" delay="0">
+                  <p:tgtEl>
+                    <p:sldTgt/>
+                  </p:tgtEl>
+                </p:cond>
+              </p:prevCondLst>
+              <p:nextCondLst>
+                <p:cond evt="onNext" delay="0">
+                  <p:tgtEl>
+                    <p:sldTgt/>
+                  </p:tgtEl>
+                </p:cond>
+              </p:nextCondLst>
+            </p:seq>
+          </p:childTnLst>
+        </p:cTn>
+      </p:par>
+    </p:tnLst>
+    <p:bldLst>
+      <p:bldP spid="13" grpId="0" animBg="1"/>
+      <p:bldP spid="14" grpId="0" animBg="1"/>
+      <p:bldP spid="15" grpId="0" animBg="1"/>
+      <p:bldP spid="16" grpId="0"/>
+      <p:bldP spid="17" grpId="0"/>
+      <p:bldP spid="18" grpId="0"/>
+      <p:bldP spid="19" grpId="0" animBg="1"/>
+      <p:bldP spid="20" grpId="0" animBg="1"/>
+    </p:bldLst>
+  </p:timing>
 </p:sld>
 </file>
 
@@ -15812,7 +17194,7 @@
                   <a:schemeClr val="accent1"/>
                 </a:solidFill>
               </a:rPr>
-              <a:t> person()</a:t>
+              <a:t> Person()</a:t>
             </a:r>
           </a:p>
           <a:p>
@@ -16002,8 +17384,8 @@
         </p:nvSpPr>
         <p:spPr>
           <a:xfrm flipH="1">
-            <a:off x="7149564" y="3983777"/>
-            <a:ext cx="4669056" cy="946553"/>
+            <a:off x="7149564" y="4249261"/>
+            <a:ext cx="4669056" cy="459183"/>
           </a:xfrm>
           <a:prstGeom prst="callout1">
             <a:avLst>
@@ -16109,6 +17491,771 @@
   <p:clrMapOvr>
     <a:masterClrMapping/>
   </p:clrMapOvr>
+  <p:timing>
+    <p:tnLst>
+      <p:par>
+        <p:cTn id="1" dur="indefinite" restart="never" nodeType="tmRoot">
+          <p:childTnLst>
+            <p:seq concurrent="1" nextAc="seek">
+              <p:cTn id="2" dur="indefinite" nodeType="mainSeq">
+                <p:childTnLst>
+                  <p:par>
+                    <p:cTn id="3" fill="hold">
+                      <p:stCondLst>
+                        <p:cond delay="indefinite"/>
+                      </p:stCondLst>
+                      <p:childTnLst>
+                        <p:par>
+                          <p:cTn id="4" fill="hold">
+                            <p:stCondLst>
+                              <p:cond delay="0"/>
+                            </p:stCondLst>
+                            <p:childTnLst>
+                              <p:par>
+                                <p:cTn id="5" presetID="22" presetClass="entr" presetSubtype="8" fill="hold" grpId="0" nodeType="clickEffect">
+                                  <p:stCondLst>
+                                    <p:cond delay="0"/>
+                                  </p:stCondLst>
+                                  <p:childTnLst>
+                                    <p:set>
+                                      <p:cBhvr>
+                                        <p:cTn id="6" dur="1" fill="hold">
+                                          <p:stCondLst>
+                                            <p:cond delay="0"/>
+                                          </p:stCondLst>
+                                        </p:cTn>
+                                        <p:tgtEl>
+                                          <p:spTgt spid="15"/>
+                                        </p:tgtEl>
+                                        <p:attrNameLst>
+                                          <p:attrName>style.visibility</p:attrName>
+                                        </p:attrNameLst>
+                                      </p:cBhvr>
+                                      <p:to>
+                                        <p:strVal val="visible"/>
+                                      </p:to>
+                                    </p:set>
+                                    <p:animEffect transition="in" filter="wipe(left)">
+                                      <p:cBhvr>
+                                        <p:cTn id="7" dur="1000"/>
+                                        <p:tgtEl>
+                                          <p:spTgt spid="15"/>
+                                        </p:tgtEl>
+                                      </p:cBhvr>
+                                    </p:animEffect>
+                                  </p:childTnLst>
+                                </p:cTn>
+                              </p:par>
+                            </p:childTnLst>
+                          </p:cTn>
+                        </p:par>
+                        <p:par>
+                          <p:cTn id="8" fill="hold">
+                            <p:stCondLst>
+                              <p:cond delay="1000"/>
+                            </p:stCondLst>
+                            <p:childTnLst>
+                              <p:par>
+                                <p:cTn id="9" presetID="22" presetClass="entr" presetSubtype="8" fill="hold" grpId="0" nodeType="afterEffect">
+                                  <p:stCondLst>
+                                    <p:cond delay="0"/>
+                                  </p:stCondLst>
+                                  <p:childTnLst>
+                                    <p:set>
+                                      <p:cBhvr>
+                                        <p:cTn id="10" dur="1" fill="hold">
+                                          <p:stCondLst>
+                                            <p:cond delay="0"/>
+                                          </p:stCondLst>
+                                        </p:cTn>
+                                        <p:tgtEl>
+                                          <p:spTgt spid="16"/>
+                                        </p:tgtEl>
+                                        <p:attrNameLst>
+                                          <p:attrName>style.visibility</p:attrName>
+                                        </p:attrNameLst>
+                                      </p:cBhvr>
+                                      <p:to>
+                                        <p:strVal val="visible"/>
+                                      </p:to>
+                                    </p:set>
+                                    <p:animEffect transition="in" filter="wipe(left)">
+                                      <p:cBhvr>
+                                        <p:cTn id="11" dur="1000"/>
+                                        <p:tgtEl>
+                                          <p:spTgt spid="16"/>
+                                        </p:tgtEl>
+                                      </p:cBhvr>
+                                    </p:animEffect>
+                                  </p:childTnLst>
+                                </p:cTn>
+                              </p:par>
+                            </p:childTnLst>
+                          </p:cTn>
+                        </p:par>
+                      </p:childTnLst>
+                    </p:cTn>
+                  </p:par>
+                  <p:par>
+                    <p:cTn id="12" fill="hold">
+                      <p:stCondLst>
+                        <p:cond delay="indefinite"/>
+                      </p:stCondLst>
+                      <p:childTnLst>
+                        <p:par>
+                          <p:cTn id="13" fill="hold">
+                            <p:stCondLst>
+                              <p:cond delay="0"/>
+                            </p:stCondLst>
+                            <p:childTnLst>
+                              <p:par>
+                                <p:cTn id="14" presetID="22" presetClass="entr" presetSubtype="8" fill="hold" grpId="0" nodeType="clickEffect">
+                                  <p:stCondLst>
+                                    <p:cond delay="0"/>
+                                  </p:stCondLst>
+                                  <p:childTnLst>
+                                    <p:set>
+                                      <p:cBhvr>
+                                        <p:cTn id="15" dur="1" fill="hold">
+                                          <p:stCondLst>
+                                            <p:cond delay="0"/>
+                                          </p:stCondLst>
+                                        </p:cTn>
+                                        <p:tgtEl>
+                                          <p:spTgt spid="13"/>
+                                        </p:tgtEl>
+                                        <p:attrNameLst>
+                                          <p:attrName>style.visibility</p:attrName>
+                                        </p:attrNameLst>
+                                      </p:cBhvr>
+                                      <p:to>
+                                        <p:strVal val="visible"/>
+                                      </p:to>
+                                    </p:set>
+                                    <p:animEffect transition="in" filter="wipe(left)">
+                                      <p:cBhvr>
+                                        <p:cTn id="16" dur="1000"/>
+                                        <p:tgtEl>
+                                          <p:spTgt spid="13"/>
+                                        </p:tgtEl>
+                                      </p:cBhvr>
+                                    </p:animEffect>
+                                  </p:childTnLst>
+                                </p:cTn>
+                              </p:par>
+                            </p:childTnLst>
+                          </p:cTn>
+                        </p:par>
+                        <p:par>
+                          <p:cTn id="17" fill="hold">
+                            <p:stCondLst>
+                              <p:cond delay="1000"/>
+                            </p:stCondLst>
+                            <p:childTnLst>
+                              <p:par>
+                                <p:cTn id="18" presetID="22" presetClass="entr" presetSubtype="8" fill="hold" nodeType="afterEffect">
+                                  <p:stCondLst>
+                                    <p:cond delay="0"/>
+                                  </p:stCondLst>
+                                  <p:childTnLst>
+                                    <p:set>
+                                      <p:cBhvr>
+                                        <p:cTn id="19" dur="1" fill="hold">
+                                          <p:stCondLst>
+                                            <p:cond delay="0"/>
+                                          </p:stCondLst>
+                                        </p:cTn>
+                                        <p:tgtEl>
+                                          <p:spTgt spid="17">
+                                            <p:txEl>
+                                              <p:pRg st="0" end="0"/>
+                                            </p:txEl>
+                                          </p:spTgt>
+                                        </p:tgtEl>
+                                        <p:attrNameLst>
+                                          <p:attrName>style.visibility</p:attrName>
+                                        </p:attrNameLst>
+                                      </p:cBhvr>
+                                      <p:to>
+                                        <p:strVal val="visible"/>
+                                      </p:to>
+                                    </p:set>
+                                    <p:animEffect transition="in" filter="wipe(left)">
+                                      <p:cBhvr>
+                                        <p:cTn id="20" dur="1000"/>
+                                        <p:tgtEl>
+                                          <p:spTgt spid="17">
+                                            <p:txEl>
+                                              <p:pRg st="0" end="0"/>
+                                            </p:txEl>
+                                          </p:spTgt>
+                                        </p:tgtEl>
+                                      </p:cBhvr>
+                                    </p:animEffect>
+                                  </p:childTnLst>
+                                </p:cTn>
+                              </p:par>
+                            </p:childTnLst>
+                          </p:cTn>
+                        </p:par>
+                        <p:par>
+                          <p:cTn id="21" fill="hold">
+                            <p:stCondLst>
+                              <p:cond delay="2000"/>
+                            </p:stCondLst>
+                            <p:childTnLst>
+                              <p:par>
+                                <p:cTn id="22" presetID="22" presetClass="entr" presetSubtype="8" fill="hold" nodeType="afterEffect">
+                                  <p:stCondLst>
+                                    <p:cond delay="0"/>
+                                  </p:stCondLst>
+                                  <p:childTnLst>
+                                    <p:set>
+                                      <p:cBhvr>
+                                        <p:cTn id="23" dur="1" fill="hold">
+                                          <p:stCondLst>
+                                            <p:cond delay="0"/>
+                                          </p:stCondLst>
+                                        </p:cTn>
+                                        <p:tgtEl>
+                                          <p:spTgt spid="17">
+                                            <p:txEl>
+                                              <p:pRg st="1" end="1"/>
+                                            </p:txEl>
+                                          </p:spTgt>
+                                        </p:tgtEl>
+                                        <p:attrNameLst>
+                                          <p:attrName>style.visibility</p:attrName>
+                                        </p:attrNameLst>
+                                      </p:cBhvr>
+                                      <p:to>
+                                        <p:strVal val="visible"/>
+                                      </p:to>
+                                    </p:set>
+                                    <p:animEffect transition="in" filter="wipe(left)">
+                                      <p:cBhvr>
+                                        <p:cTn id="24" dur="1000"/>
+                                        <p:tgtEl>
+                                          <p:spTgt spid="17">
+                                            <p:txEl>
+                                              <p:pRg st="1" end="1"/>
+                                            </p:txEl>
+                                          </p:spTgt>
+                                        </p:tgtEl>
+                                      </p:cBhvr>
+                                    </p:animEffect>
+                                  </p:childTnLst>
+                                </p:cTn>
+                              </p:par>
+                            </p:childTnLst>
+                          </p:cTn>
+                        </p:par>
+                        <p:par>
+                          <p:cTn id="25" fill="hold">
+                            <p:stCondLst>
+                              <p:cond delay="3000"/>
+                            </p:stCondLst>
+                            <p:childTnLst>
+                              <p:par>
+                                <p:cTn id="26" presetID="22" presetClass="entr" presetSubtype="8" fill="hold" nodeType="afterEffect">
+                                  <p:stCondLst>
+                                    <p:cond delay="0"/>
+                                  </p:stCondLst>
+                                  <p:childTnLst>
+                                    <p:set>
+                                      <p:cBhvr>
+                                        <p:cTn id="27" dur="1" fill="hold">
+                                          <p:stCondLst>
+                                            <p:cond delay="0"/>
+                                          </p:stCondLst>
+                                        </p:cTn>
+                                        <p:tgtEl>
+                                          <p:spTgt spid="17">
+                                            <p:txEl>
+                                              <p:pRg st="2" end="2"/>
+                                            </p:txEl>
+                                          </p:spTgt>
+                                        </p:tgtEl>
+                                        <p:attrNameLst>
+                                          <p:attrName>style.visibility</p:attrName>
+                                        </p:attrNameLst>
+                                      </p:cBhvr>
+                                      <p:to>
+                                        <p:strVal val="visible"/>
+                                      </p:to>
+                                    </p:set>
+                                    <p:animEffect transition="in" filter="wipe(left)">
+                                      <p:cBhvr>
+                                        <p:cTn id="28" dur="1000"/>
+                                        <p:tgtEl>
+                                          <p:spTgt spid="17">
+                                            <p:txEl>
+                                              <p:pRg st="2" end="2"/>
+                                            </p:txEl>
+                                          </p:spTgt>
+                                        </p:tgtEl>
+                                      </p:cBhvr>
+                                    </p:animEffect>
+                                  </p:childTnLst>
+                                </p:cTn>
+                              </p:par>
+                            </p:childTnLst>
+                          </p:cTn>
+                        </p:par>
+                      </p:childTnLst>
+                    </p:cTn>
+                  </p:par>
+                  <p:par>
+                    <p:cTn id="29" fill="hold">
+                      <p:stCondLst>
+                        <p:cond delay="indefinite"/>
+                      </p:stCondLst>
+                      <p:childTnLst>
+                        <p:par>
+                          <p:cTn id="30" fill="hold">
+                            <p:stCondLst>
+                              <p:cond delay="0"/>
+                            </p:stCondLst>
+                            <p:childTnLst>
+                              <p:par>
+                                <p:cTn id="31" presetID="22" presetClass="entr" presetSubtype="8" fill="hold" grpId="0" nodeType="clickEffect">
+                                  <p:stCondLst>
+                                    <p:cond delay="0"/>
+                                  </p:stCondLst>
+                                  <p:childTnLst>
+                                    <p:set>
+                                      <p:cBhvr>
+                                        <p:cTn id="32" dur="1" fill="hold">
+                                          <p:stCondLst>
+                                            <p:cond delay="0"/>
+                                          </p:stCondLst>
+                                        </p:cTn>
+                                        <p:tgtEl>
+                                          <p:spTgt spid="14"/>
+                                        </p:tgtEl>
+                                        <p:attrNameLst>
+                                          <p:attrName>style.visibility</p:attrName>
+                                        </p:attrNameLst>
+                                      </p:cBhvr>
+                                      <p:to>
+                                        <p:strVal val="visible"/>
+                                      </p:to>
+                                    </p:set>
+                                    <p:animEffect transition="in" filter="wipe(left)">
+                                      <p:cBhvr>
+                                        <p:cTn id="33" dur="1000"/>
+                                        <p:tgtEl>
+                                          <p:spTgt spid="14"/>
+                                        </p:tgtEl>
+                                      </p:cBhvr>
+                                    </p:animEffect>
+                                  </p:childTnLst>
+                                </p:cTn>
+                              </p:par>
+                            </p:childTnLst>
+                          </p:cTn>
+                        </p:par>
+                        <p:par>
+                          <p:cTn id="34" fill="hold">
+                            <p:stCondLst>
+                              <p:cond delay="1000"/>
+                            </p:stCondLst>
+                            <p:childTnLst>
+                              <p:par>
+                                <p:cTn id="35" presetID="22" presetClass="entr" presetSubtype="8" fill="hold" nodeType="afterEffect">
+                                  <p:stCondLst>
+                                    <p:cond delay="0"/>
+                                  </p:stCondLst>
+                                  <p:childTnLst>
+                                    <p:set>
+                                      <p:cBhvr>
+                                        <p:cTn id="36" dur="1" fill="hold">
+                                          <p:stCondLst>
+                                            <p:cond delay="0"/>
+                                          </p:stCondLst>
+                                        </p:cTn>
+                                        <p:tgtEl>
+                                          <p:spTgt spid="18">
+                                            <p:txEl>
+                                              <p:pRg st="0" end="0"/>
+                                            </p:txEl>
+                                          </p:spTgt>
+                                        </p:tgtEl>
+                                        <p:attrNameLst>
+                                          <p:attrName>style.visibility</p:attrName>
+                                        </p:attrNameLst>
+                                      </p:cBhvr>
+                                      <p:to>
+                                        <p:strVal val="visible"/>
+                                      </p:to>
+                                    </p:set>
+                                    <p:animEffect transition="in" filter="wipe(left)">
+                                      <p:cBhvr>
+                                        <p:cTn id="37" dur="1000"/>
+                                        <p:tgtEl>
+                                          <p:spTgt spid="18">
+                                            <p:txEl>
+                                              <p:pRg st="0" end="0"/>
+                                            </p:txEl>
+                                          </p:spTgt>
+                                        </p:tgtEl>
+                                      </p:cBhvr>
+                                    </p:animEffect>
+                                  </p:childTnLst>
+                                </p:cTn>
+                              </p:par>
+                            </p:childTnLst>
+                          </p:cTn>
+                        </p:par>
+                        <p:par>
+                          <p:cTn id="38" fill="hold">
+                            <p:stCondLst>
+                              <p:cond delay="2000"/>
+                            </p:stCondLst>
+                            <p:childTnLst>
+                              <p:par>
+                                <p:cTn id="39" presetID="22" presetClass="entr" presetSubtype="8" fill="hold" nodeType="afterEffect">
+                                  <p:stCondLst>
+                                    <p:cond delay="0"/>
+                                  </p:stCondLst>
+                                  <p:childTnLst>
+                                    <p:set>
+                                      <p:cBhvr>
+                                        <p:cTn id="40" dur="1" fill="hold">
+                                          <p:stCondLst>
+                                            <p:cond delay="0"/>
+                                          </p:stCondLst>
+                                        </p:cTn>
+                                        <p:tgtEl>
+                                          <p:spTgt spid="18">
+                                            <p:txEl>
+                                              <p:pRg st="1" end="1"/>
+                                            </p:txEl>
+                                          </p:spTgt>
+                                        </p:tgtEl>
+                                        <p:attrNameLst>
+                                          <p:attrName>style.visibility</p:attrName>
+                                        </p:attrNameLst>
+                                      </p:cBhvr>
+                                      <p:to>
+                                        <p:strVal val="visible"/>
+                                      </p:to>
+                                    </p:set>
+                                    <p:animEffect transition="in" filter="wipe(left)">
+                                      <p:cBhvr>
+                                        <p:cTn id="41" dur="1000"/>
+                                        <p:tgtEl>
+                                          <p:spTgt spid="18">
+                                            <p:txEl>
+                                              <p:pRg st="1" end="1"/>
+                                            </p:txEl>
+                                          </p:spTgt>
+                                        </p:tgtEl>
+                                      </p:cBhvr>
+                                    </p:animEffect>
+                                  </p:childTnLst>
+                                </p:cTn>
+                              </p:par>
+                            </p:childTnLst>
+                          </p:cTn>
+                        </p:par>
+                        <p:par>
+                          <p:cTn id="42" fill="hold">
+                            <p:stCondLst>
+                              <p:cond delay="3000"/>
+                            </p:stCondLst>
+                            <p:childTnLst>
+                              <p:par>
+                                <p:cTn id="43" presetID="22" presetClass="entr" presetSubtype="8" fill="hold" nodeType="afterEffect">
+                                  <p:stCondLst>
+                                    <p:cond delay="0"/>
+                                  </p:stCondLst>
+                                  <p:childTnLst>
+                                    <p:set>
+                                      <p:cBhvr>
+                                        <p:cTn id="44" dur="1" fill="hold">
+                                          <p:stCondLst>
+                                            <p:cond delay="0"/>
+                                          </p:stCondLst>
+                                        </p:cTn>
+                                        <p:tgtEl>
+                                          <p:spTgt spid="18">
+                                            <p:txEl>
+                                              <p:pRg st="2" end="2"/>
+                                            </p:txEl>
+                                          </p:spTgt>
+                                        </p:tgtEl>
+                                        <p:attrNameLst>
+                                          <p:attrName>style.visibility</p:attrName>
+                                        </p:attrNameLst>
+                                      </p:cBhvr>
+                                      <p:to>
+                                        <p:strVal val="visible"/>
+                                      </p:to>
+                                    </p:set>
+                                    <p:animEffect transition="in" filter="wipe(left)">
+                                      <p:cBhvr>
+                                        <p:cTn id="45" dur="1000"/>
+                                        <p:tgtEl>
+                                          <p:spTgt spid="18">
+                                            <p:txEl>
+                                              <p:pRg st="2" end="2"/>
+                                            </p:txEl>
+                                          </p:spTgt>
+                                        </p:tgtEl>
+                                      </p:cBhvr>
+                                    </p:animEffect>
+                                  </p:childTnLst>
+                                </p:cTn>
+                              </p:par>
+                            </p:childTnLst>
+                          </p:cTn>
+                        </p:par>
+                        <p:par>
+                          <p:cTn id="46" fill="hold">
+                            <p:stCondLst>
+                              <p:cond delay="4000"/>
+                            </p:stCondLst>
+                            <p:childTnLst>
+                              <p:par>
+                                <p:cTn id="47" presetID="22" presetClass="entr" presetSubtype="8" fill="hold" nodeType="afterEffect">
+                                  <p:stCondLst>
+                                    <p:cond delay="0"/>
+                                  </p:stCondLst>
+                                  <p:childTnLst>
+                                    <p:set>
+                                      <p:cBhvr>
+                                        <p:cTn id="48" dur="1" fill="hold">
+                                          <p:stCondLst>
+                                            <p:cond delay="0"/>
+                                          </p:stCondLst>
+                                        </p:cTn>
+                                        <p:tgtEl>
+                                          <p:spTgt spid="18">
+                                            <p:txEl>
+                                              <p:pRg st="3" end="3"/>
+                                            </p:txEl>
+                                          </p:spTgt>
+                                        </p:tgtEl>
+                                        <p:attrNameLst>
+                                          <p:attrName>style.visibility</p:attrName>
+                                        </p:attrNameLst>
+                                      </p:cBhvr>
+                                      <p:to>
+                                        <p:strVal val="visible"/>
+                                      </p:to>
+                                    </p:set>
+                                    <p:animEffect transition="in" filter="wipe(left)">
+                                      <p:cBhvr>
+                                        <p:cTn id="49" dur="1000"/>
+                                        <p:tgtEl>
+                                          <p:spTgt spid="18">
+                                            <p:txEl>
+                                              <p:pRg st="3" end="3"/>
+                                            </p:txEl>
+                                          </p:spTgt>
+                                        </p:tgtEl>
+                                      </p:cBhvr>
+                                    </p:animEffect>
+                                  </p:childTnLst>
+                                </p:cTn>
+                              </p:par>
+                            </p:childTnLst>
+                          </p:cTn>
+                        </p:par>
+                      </p:childTnLst>
+                    </p:cTn>
+                  </p:par>
+                  <p:par>
+                    <p:cTn id="50" fill="hold">
+                      <p:stCondLst>
+                        <p:cond delay="indefinite"/>
+                      </p:stCondLst>
+                      <p:childTnLst>
+                        <p:par>
+                          <p:cTn id="51" fill="hold">
+                            <p:stCondLst>
+                              <p:cond delay="0"/>
+                            </p:stCondLst>
+                            <p:childTnLst>
+                              <p:par>
+                                <p:cTn id="52" presetID="22" presetClass="entr" presetSubtype="8" fill="hold" grpId="0" nodeType="clickEffect">
+                                  <p:stCondLst>
+                                    <p:cond delay="0"/>
+                                  </p:stCondLst>
+                                  <p:childTnLst>
+                                    <p:set>
+                                      <p:cBhvr>
+                                        <p:cTn id="53" dur="1" fill="hold">
+                                          <p:stCondLst>
+                                            <p:cond delay="0"/>
+                                          </p:stCondLst>
+                                        </p:cTn>
+                                        <p:tgtEl>
+                                          <p:spTgt spid="21"/>
+                                        </p:tgtEl>
+                                        <p:attrNameLst>
+                                          <p:attrName>style.visibility</p:attrName>
+                                        </p:attrNameLst>
+                                      </p:cBhvr>
+                                      <p:to>
+                                        <p:strVal val="visible"/>
+                                      </p:to>
+                                    </p:set>
+                                    <p:animEffect transition="in" filter="wipe(left)">
+                                      <p:cBhvr>
+                                        <p:cTn id="54" dur="1000"/>
+                                        <p:tgtEl>
+                                          <p:spTgt spid="21"/>
+                                        </p:tgtEl>
+                                      </p:cBhvr>
+                                    </p:animEffect>
+                                  </p:childTnLst>
+                                </p:cTn>
+                              </p:par>
+                            </p:childTnLst>
+                          </p:cTn>
+                        </p:par>
+                      </p:childTnLst>
+                    </p:cTn>
+                  </p:par>
+                  <p:par>
+                    <p:cTn id="55" fill="hold">
+                      <p:stCondLst>
+                        <p:cond delay="indefinite"/>
+                      </p:stCondLst>
+                      <p:childTnLst>
+                        <p:par>
+                          <p:cTn id="56" fill="hold">
+                            <p:stCondLst>
+                              <p:cond delay="0"/>
+                            </p:stCondLst>
+                            <p:childTnLst>
+                              <p:par>
+                                <p:cTn id="57" presetID="22" presetClass="entr" presetSubtype="8" fill="hold" grpId="0" nodeType="clickEffect">
+                                  <p:stCondLst>
+                                    <p:cond delay="0"/>
+                                  </p:stCondLst>
+                                  <p:childTnLst>
+                                    <p:set>
+                                      <p:cBhvr>
+                                        <p:cTn id="58" dur="1" fill="hold">
+                                          <p:stCondLst>
+                                            <p:cond delay="0"/>
+                                          </p:stCondLst>
+                                        </p:cTn>
+                                        <p:tgtEl>
+                                          <p:spTgt spid="22"/>
+                                        </p:tgtEl>
+                                        <p:attrNameLst>
+                                          <p:attrName>style.visibility</p:attrName>
+                                        </p:attrNameLst>
+                                      </p:cBhvr>
+                                      <p:to>
+                                        <p:strVal val="visible"/>
+                                      </p:to>
+                                    </p:set>
+                                    <p:animEffect transition="in" filter="wipe(left)">
+                                      <p:cBhvr>
+                                        <p:cTn id="59" dur="3000"/>
+                                        <p:tgtEl>
+                                          <p:spTgt spid="22"/>
+                                        </p:tgtEl>
+                                      </p:cBhvr>
+                                    </p:animEffect>
+                                  </p:childTnLst>
+                                </p:cTn>
+                              </p:par>
+                            </p:childTnLst>
+                          </p:cTn>
+                        </p:par>
+                      </p:childTnLst>
+                    </p:cTn>
+                  </p:par>
+                  <p:par>
+                    <p:cTn id="60" fill="hold">
+                      <p:stCondLst>
+                        <p:cond delay="indefinite"/>
+                      </p:stCondLst>
+                      <p:childTnLst>
+                        <p:par>
+                          <p:cTn id="61" fill="hold">
+                            <p:stCondLst>
+                              <p:cond delay="0"/>
+                            </p:stCondLst>
+                            <p:childTnLst>
+                              <p:par>
+                                <p:cTn id="62" presetID="22" presetClass="entr" presetSubtype="8" fill="hold" grpId="0" nodeType="clickEffect">
+                                  <p:stCondLst>
+                                    <p:cond delay="0"/>
+                                  </p:stCondLst>
+                                  <p:childTnLst>
+                                    <p:set>
+                                      <p:cBhvr>
+                                        <p:cTn id="63" dur="1" fill="hold">
+                                          <p:stCondLst>
+                                            <p:cond delay="0"/>
+                                          </p:stCondLst>
+                                        </p:cTn>
+                                        <p:tgtEl>
+                                          <p:spTgt spid="23"/>
+                                        </p:tgtEl>
+                                        <p:attrNameLst>
+                                          <p:attrName>style.visibility</p:attrName>
+                                        </p:attrNameLst>
+                                      </p:cBhvr>
+                                      <p:to>
+                                        <p:strVal val="visible"/>
+                                      </p:to>
+                                    </p:set>
+                                    <p:animEffect transition="in" filter="wipe(left)">
+                                      <p:cBhvr>
+                                        <p:cTn id="64" dur="3000"/>
+                                        <p:tgtEl>
+                                          <p:spTgt spid="23"/>
+                                        </p:tgtEl>
+                                      </p:cBhvr>
+                                    </p:animEffect>
+                                  </p:childTnLst>
+                                </p:cTn>
+                              </p:par>
+                            </p:childTnLst>
+                          </p:cTn>
+                        </p:par>
+                      </p:childTnLst>
+                    </p:cTn>
+                  </p:par>
+                </p:childTnLst>
+              </p:cTn>
+              <p:prevCondLst>
+                <p:cond evt="onPrev" delay="0">
+                  <p:tgtEl>
+                    <p:sldTgt/>
+                  </p:tgtEl>
+                </p:cond>
+              </p:prevCondLst>
+              <p:nextCondLst>
+                <p:cond evt="onNext" delay="0">
+                  <p:tgtEl>
+                    <p:sldTgt/>
+                  </p:tgtEl>
+                </p:cond>
+              </p:nextCondLst>
+            </p:seq>
+          </p:childTnLst>
+        </p:cTn>
+      </p:par>
+    </p:tnLst>
+    <p:bldLst>
+      <p:bldP spid="13" grpId="0" animBg="1"/>
+      <p:bldP spid="14" grpId="0" animBg="1"/>
+      <p:bldP spid="15" grpId="0" animBg="1"/>
+      <p:bldP spid="16" grpId="0"/>
+      <p:bldP spid="21" grpId="0"/>
+      <p:bldP spid="22" grpId="0" animBg="1"/>
+      <p:bldP spid="23" grpId="0"/>
+    </p:bldLst>
+  </p:timing>
 </p:sld>
 </file>
 
@@ -16514,7 +18661,7 @@
                     <a:schemeClr val="accent1"/>
                   </a:solidFill>
                 </a:rPr>
-                <a:t> person()</a:t>
+                <a:t> Person()</a:t>
               </a:r>
             </a:p>
             <a:p>
@@ -16875,7 +19022,7 @@
                     <a:schemeClr val="accent1"/>
                   </a:solidFill>
                 </a:rPr>
-                <a:t> pupil()</a:t>
+                <a:t> Pupil()</a:t>
               </a:r>
             </a:p>
             <a:p>
@@ -17186,7 +19333,7 @@
                     <a:schemeClr val="accent1"/>
                   </a:solidFill>
                 </a:rPr>
-                <a:t> staff() </a:t>
+                <a:t> Staff() </a:t>
               </a:r>
             </a:p>
             <a:p>

--- a/ah-cs/sdd/AH CS SDD Slides.pptx
+++ b/ah-cs/sdd/AH CS SDD Slides.pptx
@@ -5,7 +5,7 @@
     <p:sldMasterId id="2147483648" r:id="rId1"/>
   </p:sldMasterIdLst>
   <p:notesMasterIdLst>
-    <p:notesMasterId r:id="rId25"/>
+    <p:notesMasterId r:id="rId29"/>
   </p:notesMasterIdLst>
   <p:sldIdLst>
     <p:sldId id="434" r:id="rId2"/>
@@ -26,11 +26,15 @@
     <p:sldId id="882" r:id="rId17"/>
     <p:sldId id="886" r:id="rId18"/>
     <p:sldId id="887" r:id="rId19"/>
-    <p:sldId id="881" r:id="rId20"/>
-    <p:sldId id="884" r:id="rId21"/>
-    <p:sldId id="885" r:id="rId22"/>
-    <p:sldId id="879" r:id="rId23"/>
-    <p:sldId id="496" r:id="rId24"/>
+    <p:sldId id="891" r:id="rId20"/>
+    <p:sldId id="881" r:id="rId21"/>
+    <p:sldId id="892" r:id="rId22"/>
+    <p:sldId id="884" r:id="rId23"/>
+    <p:sldId id="893" r:id="rId24"/>
+    <p:sldId id="894" r:id="rId25"/>
+    <p:sldId id="885" r:id="rId26"/>
+    <p:sldId id="879" r:id="rId27"/>
+    <p:sldId id="496" r:id="rId28"/>
   </p:sldIdLst>
   <p:sldSz cx="12192000" cy="6858000"/>
   <p:notesSz cx="6669088" cy="9926638"/>
@@ -164,8 +168,16 @@
             <p14:sldId id="882"/>
             <p14:sldId id="886"/>
             <p14:sldId id="887"/>
+            <p14:sldId id="891"/>
             <p14:sldId id="881"/>
+            <p14:sldId id="892"/>
             <p14:sldId id="884"/>
+            <p14:sldId id="893"/>
+          </p14:sldIdLst>
+        </p14:section>
+        <p14:section name="Inheritance" id="{CDF11360-1310-480E-9F75-4AEDA98C8AEA}">
+          <p14:sldIdLst>
+            <p14:sldId id="894"/>
             <p14:sldId id="885"/>
           </p14:sldIdLst>
         </p14:section>
@@ -680,8 +692,8 @@
   </pc:docChgLst>
   <pc:docChgLst>
     <pc:chgData name="Al Friend" userId="e5ed79da-d858-46d4-9eed-a7a24903f2de" providerId="ADAL" clId="{C674B5A1-E3B2-40E8-863B-82D707DB4736}"/>
-    <pc:docChg chg="undo custSel addSld delSld modSld sldOrd modSection">
-      <pc:chgData name="Al Friend" userId="e5ed79da-d858-46d4-9eed-a7a24903f2de" providerId="ADAL" clId="{C674B5A1-E3B2-40E8-863B-82D707DB4736}" dt="2026-06-02T12:12:29.680" v="3599"/>
+    <pc:docChg chg="undo redo custSel addSld delSld modSld sldOrd modSection">
+      <pc:chgData name="Al Friend" userId="e5ed79da-d858-46d4-9eed-a7a24903f2de" providerId="ADAL" clId="{C674B5A1-E3B2-40E8-863B-82D707DB4736}" dt="2026-06-04T13:14:09.974" v="3792"/>
       <pc:docMkLst>
         <pc:docMk/>
       </pc:docMkLst>
@@ -1203,13 +1215,13 @@
         </pc:spChg>
       </pc:sldChg>
       <pc:sldChg chg="addSp delSp modSp add delAnim modAnim">
-        <pc:chgData name="Al Friend" userId="e5ed79da-d858-46d4-9eed-a7a24903f2de" providerId="ADAL" clId="{C674B5A1-E3B2-40E8-863B-82D707DB4736}" dt="2026-05-27T12:08:38.466" v="3441" actId="1037"/>
+        <pc:chgData name="Al Friend" userId="e5ed79da-d858-46d4-9eed-a7a24903f2de" providerId="ADAL" clId="{C674B5A1-E3B2-40E8-863B-82D707DB4736}" dt="2026-06-04T12:31:06.993" v="3727" actId="20577"/>
         <pc:sldMkLst>
           <pc:docMk/>
           <pc:sldMk cId="1900925123" sldId="881"/>
         </pc:sldMkLst>
         <pc:spChg chg="mod">
-          <ac:chgData name="Al Friend" userId="e5ed79da-d858-46d4-9eed-a7a24903f2de" providerId="ADAL" clId="{C674B5A1-E3B2-40E8-863B-82D707DB4736}" dt="2026-05-27T12:08:31.623" v="3410" actId="1076"/>
+          <ac:chgData name="Al Friend" userId="e5ed79da-d858-46d4-9eed-a7a24903f2de" providerId="ADAL" clId="{C674B5A1-E3B2-40E8-863B-82D707DB4736}" dt="2026-06-04T12:31:06.993" v="3727" actId="20577"/>
           <ac:spMkLst>
             <pc:docMk/>
             <pc:sldMk cId="1900925123" sldId="881"/>
@@ -1314,13 +1326,13 @@
         </pc:cxnChg>
       </pc:sldChg>
       <pc:sldChg chg="modSp">
-        <pc:chgData name="Al Friend" userId="e5ed79da-d858-46d4-9eed-a7a24903f2de" providerId="ADAL" clId="{C674B5A1-E3B2-40E8-863B-82D707DB4736}" dt="2026-05-20T11:22:14.990" v="1621" actId="20577"/>
+        <pc:chgData name="Al Friend" userId="e5ed79da-d858-46d4-9eed-a7a24903f2de" providerId="ADAL" clId="{C674B5A1-E3B2-40E8-863B-82D707DB4736}" dt="2026-06-04T12:09:31.328" v="3660" actId="6549"/>
         <pc:sldMkLst>
           <pc:docMk/>
           <pc:sldMk cId="4181631166" sldId="882"/>
         </pc:sldMkLst>
         <pc:spChg chg="mod">
-          <ac:chgData name="Al Friend" userId="e5ed79da-d858-46d4-9eed-a7a24903f2de" providerId="ADAL" clId="{C674B5A1-E3B2-40E8-863B-82D707DB4736}" dt="2026-05-20T11:22:14.990" v="1621" actId="20577"/>
+          <ac:chgData name="Al Friend" userId="e5ed79da-d858-46d4-9eed-a7a24903f2de" providerId="ADAL" clId="{C674B5A1-E3B2-40E8-863B-82D707DB4736}" dt="2026-06-04T12:09:31.328" v="3660" actId="6549"/>
           <ac:spMkLst>
             <pc:docMk/>
             <pc:sldMk cId="4181631166" sldId="882"/>
@@ -1423,12 +1435,20 @@
           </ac:cxnSpMkLst>
         </pc:cxnChg>
       </pc:sldChg>
-      <pc:sldChg chg="addSp delSp modSp add modNotesTx">
-        <pc:chgData name="Al Friend" userId="e5ed79da-d858-46d4-9eed-a7a24903f2de" providerId="ADAL" clId="{C674B5A1-E3B2-40E8-863B-82D707DB4736}" dt="2026-05-27T12:08:19.411" v="3408" actId="14100"/>
+      <pc:sldChg chg="addSp delSp modSp add addAnim delAnim modAnim modNotesTx">
+        <pc:chgData name="Al Friend" userId="e5ed79da-d858-46d4-9eed-a7a24903f2de" providerId="ADAL" clId="{C674B5A1-E3B2-40E8-863B-82D707DB4736}" dt="2026-06-04T13:14:09.974" v="3792"/>
         <pc:sldMkLst>
           <pc:docMk/>
           <pc:sldMk cId="1982100101" sldId="884"/>
         </pc:sldMkLst>
+        <pc:spChg chg="mod">
+          <ac:chgData name="Al Friend" userId="e5ed79da-d858-46d4-9eed-a7a24903f2de" providerId="ADAL" clId="{C674B5A1-E3B2-40E8-863B-82D707DB4736}" dt="2026-06-04T12:30:59.841" v="3721" actId="20577"/>
+          <ac:spMkLst>
+            <pc:docMk/>
+            <pc:sldMk cId="1982100101" sldId="884"/>
+            <ac:spMk id="2" creationId="{DF81EF6B-9990-4895-9A8F-2103C304A52F}"/>
+          </ac:spMkLst>
+        </pc:spChg>
         <pc:spChg chg="mod">
           <ac:chgData name="Al Friend" userId="e5ed79da-d858-46d4-9eed-a7a24903f2de" providerId="ADAL" clId="{C674B5A1-E3B2-40E8-863B-82D707DB4736}" dt="2026-05-27T10:44:51.356" v="2234" actId="14100"/>
           <ac:spMkLst>
@@ -1437,24 +1457,24 @@
             <ac:spMk id="9" creationId="{E06970F1-E4C6-493D-921A-F57A4EAA659D}"/>
           </ac:spMkLst>
         </pc:spChg>
-        <pc:spChg chg="mod">
-          <ac:chgData name="Al Friend" userId="e5ed79da-d858-46d4-9eed-a7a24903f2de" providerId="ADAL" clId="{C674B5A1-E3B2-40E8-863B-82D707DB4736}" dt="2026-05-27T12:08:07.283" v="3406" actId="1037"/>
+        <pc:spChg chg="add del mod">
+          <ac:chgData name="Al Friend" userId="e5ed79da-d858-46d4-9eed-a7a24903f2de" providerId="ADAL" clId="{C674B5A1-E3B2-40E8-863B-82D707DB4736}" dt="2026-06-04T12:07:39.376" v="3633" actId="478"/>
           <ac:spMkLst>
             <pc:docMk/>
             <pc:sldMk cId="1982100101" sldId="884"/>
             <ac:spMk id="13" creationId="{31DE4C51-5C31-4CFA-BE3D-731751DE74B0}"/>
           </ac:spMkLst>
         </pc:spChg>
-        <pc:spChg chg="mod">
-          <ac:chgData name="Al Friend" userId="e5ed79da-d858-46d4-9eed-a7a24903f2de" providerId="ADAL" clId="{C674B5A1-E3B2-40E8-863B-82D707DB4736}" dt="2026-05-27T12:08:07.283" v="3406" actId="1037"/>
+        <pc:spChg chg="add del mod">
+          <ac:chgData name="Al Friend" userId="e5ed79da-d858-46d4-9eed-a7a24903f2de" providerId="ADAL" clId="{C674B5A1-E3B2-40E8-863B-82D707DB4736}" dt="2026-06-04T12:07:38.953" v="3632" actId="478"/>
           <ac:spMkLst>
             <pc:docMk/>
             <pc:sldMk cId="1982100101" sldId="884"/>
             <ac:spMk id="14" creationId="{E5304D38-62A3-4A8C-98E0-6337163FA56E}"/>
           </ac:spMkLst>
         </pc:spChg>
-        <pc:spChg chg="mod">
-          <ac:chgData name="Al Friend" userId="e5ed79da-d858-46d4-9eed-a7a24903f2de" providerId="ADAL" clId="{C674B5A1-E3B2-40E8-863B-82D707DB4736}" dt="2026-05-27T12:08:07.283" v="3406" actId="1037"/>
+        <pc:spChg chg="add del mod">
+          <ac:chgData name="Al Friend" userId="e5ed79da-d858-46d4-9eed-a7a24903f2de" providerId="ADAL" clId="{C674B5A1-E3B2-40E8-863B-82D707DB4736}" dt="2026-06-04T12:07:40.053" v="3634" actId="478"/>
           <ac:spMkLst>
             <pc:docMk/>
             <pc:sldMk cId="1982100101" sldId="884"/>
@@ -1486,23 +1506,39 @@
           </ac:spMkLst>
         </pc:spChg>
         <pc:spChg chg="add mod">
-          <ac:chgData name="Al Friend" userId="e5ed79da-d858-46d4-9eed-a7a24903f2de" providerId="ADAL" clId="{C674B5A1-E3B2-40E8-863B-82D707DB4736}" dt="2026-05-27T12:08:07.283" v="3406" actId="1037"/>
+          <ac:chgData name="Al Friend" userId="e5ed79da-d858-46d4-9eed-a7a24903f2de" providerId="ADAL" clId="{C674B5A1-E3B2-40E8-863B-82D707DB4736}" dt="2026-06-04T13:13:16.118" v="3762" actId="1076"/>
+          <ac:spMkLst>
+            <pc:docMk/>
+            <pc:sldMk cId="1982100101" sldId="884"/>
+            <ac:spMk id="19" creationId="{6FDCD0ED-37D2-4509-B937-22AF1C6A2C79}"/>
+          </ac:spMkLst>
+        </pc:spChg>
+        <pc:spChg chg="add mod">
+          <ac:chgData name="Al Friend" userId="e5ed79da-d858-46d4-9eed-a7a24903f2de" providerId="ADAL" clId="{C674B5A1-E3B2-40E8-863B-82D707DB4736}" dt="2026-06-04T13:13:26.229" v="3773" actId="20577"/>
+          <ac:spMkLst>
+            <pc:docMk/>
+            <pc:sldMk cId="1982100101" sldId="884"/>
+            <ac:spMk id="20" creationId="{EE354554-5AFB-49A6-A53C-9776BB163FA1}"/>
+          </ac:spMkLst>
+        </pc:spChg>
+        <pc:spChg chg="add del mod">
+          <ac:chgData name="Al Friend" userId="e5ed79da-d858-46d4-9eed-a7a24903f2de" providerId="ADAL" clId="{C674B5A1-E3B2-40E8-863B-82D707DB4736}" dt="2026-06-04T12:07:38.233" v="3630" actId="478"/>
           <ac:spMkLst>
             <pc:docMk/>
             <pc:sldMk cId="1982100101" sldId="884"/>
             <ac:spMk id="21" creationId="{61BE2CD1-5F61-4B09-9AEC-39EA9BFBB6A9}"/>
           </ac:spMkLst>
         </pc:spChg>
-        <pc:spChg chg="add mod">
-          <ac:chgData name="Al Friend" userId="e5ed79da-d858-46d4-9eed-a7a24903f2de" providerId="ADAL" clId="{C674B5A1-E3B2-40E8-863B-82D707DB4736}" dt="2026-05-27T12:08:19.411" v="3408" actId="14100"/>
+        <pc:spChg chg="add del mod">
+          <ac:chgData name="Al Friend" userId="e5ed79da-d858-46d4-9eed-a7a24903f2de" providerId="ADAL" clId="{C674B5A1-E3B2-40E8-863B-82D707DB4736}" dt="2026-06-04T12:07:38.527" v="3631" actId="478"/>
           <ac:spMkLst>
             <pc:docMk/>
             <pc:sldMk cId="1982100101" sldId="884"/>
             <ac:spMk id="22" creationId="{26E50561-9E7A-49B1-BF1B-897BB0D6CA6D}"/>
           </ac:spMkLst>
         </pc:spChg>
-        <pc:spChg chg="add mod">
-          <ac:chgData name="Al Friend" userId="e5ed79da-d858-46d4-9eed-a7a24903f2de" providerId="ADAL" clId="{C674B5A1-E3B2-40E8-863B-82D707DB4736}" dt="2026-05-27T10:55:50.955" v="2478" actId="20577"/>
+        <pc:spChg chg="add del mod">
+          <ac:chgData name="Al Friend" userId="e5ed79da-d858-46d4-9eed-a7a24903f2de" providerId="ADAL" clId="{C674B5A1-E3B2-40E8-863B-82D707DB4736}" dt="2026-06-04T12:07:37.995" v="3629" actId="478"/>
           <ac:spMkLst>
             <pc:docMk/>
             <pc:sldMk cId="1982100101" sldId="884"/>
@@ -1733,6 +1769,36 @@
           </ac:cxnSpMkLst>
         </pc:cxnChg>
       </pc:sldChg>
+      <pc:sldChg chg="modSp">
+        <pc:chgData name="Al Friend" userId="e5ed79da-d858-46d4-9eed-a7a24903f2de" providerId="ADAL" clId="{C674B5A1-E3B2-40E8-863B-82D707DB4736}" dt="2026-06-04T12:28:17.473" v="3675" actId="20577"/>
+        <pc:sldMkLst>
+          <pc:docMk/>
+          <pc:sldMk cId="272324595" sldId="886"/>
+        </pc:sldMkLst>
+        <pc:spChg chg="mod">
+          <ac:chgData name="Al Friend" userId="e5ed79da-d858-46d4-9eed-a7a24903f2de" providerId="ADAL" clId="{C674B5A1-E3B2-40E8-863B-82D707DB4736}" dt="2026-06-04T12:28:17.473" v="3675" actId="20577"/>
+          <ac:spMkLst>
+            <pc:docMk/>
+            <pc:sldMk cId="272324595" sldId="886"/>
+            <ac:spMk id="2" creationId="{C8B033F8-8680-772C-2AD4-139DAFC19DE1}"/>
+          </ac:spMkLst>
+        </pc:spChg>
+      </pc:sldChg>
+      <pc:sldChg chg="modSp">
+        <pc:chgData name="Al Friend" userId="e5ed79da-d858-46d4-9eed-a7a24903f2de" providerId="ADAL" clId="{C674B5A1-E3B2-40E8-863B-82D707DB4736}" dt="2026-06-04T12:26:47.634" v="3661" actId="6549"/>
+        <pc:sldMkLst>
+          <pc:docMk/>
+          <pc:sldMk cId="2689299202" sldId="887"/>
+        </pc:sldMkLst>
+        <pc:spChg chg="mod">
+          <ac:chgData name="Al Friend" userId="e5ed79da-d858-46d4-9eed-a7a24903f2de" providerId="ADAL" clId="{C674B5A1-E3B2-40E8-863B-82D707DB4736}" dt="2026-06-04T12:26:47.634" v="3661" actId="6549"/>
+          <ac:spMkLst>
+            <pc:docMk/>
+            <pc:sldMk cId="2689299202" sldId="887"/>
+            <ac:spMk id="28" creationId="{7B412730-5CDA-D1F4-5FDC-B0A55A466C1D}"/>
+          </ac:spMkLst>
+        </pc:spChg>
+      </pc:sldChg>
       <pc:sldChg chg="modSp modAnim">
         <pc:chgData name="Al Friend" userId="e5ed79da-d858-46d4-9eed-a7a24903f2de" providerId="ADAL" clId="{C674B5A1-E3B2-40E8-863B-82D707DB4736}" dt="2026-06-02T08:33:57.345" v="3475"/>
         <pc:sldMkLst>
@@ -1865,6 +1931,242 @@
             <ac:picMk id="11" creationId="{32A0F86B-CA07-4894-B384-CE8C6EE159C1}"/>
           </ac:picMkLst>
         </pc:picChg>
+      </pc:sldChg>
+      <pc:sldChg chg="delSp modSp add modTransition delAnim modNotesTx">
+        <pc:chgData name="Al Friend" userId="e5ed79da-d858-46d4-9eed-a7a24903f2de" providerId="ADAL" clId="{C674B5A1-E3B2-40E8-863B-82D707DB4736}" dt="2026-06-04T12:08:12.884" v="3646" actId="6549"/>
+        <pc:sldMkLst>
+          <pc:docMk/>
+          <pc:sldMk cId="2672932940" sldId="891"/>
+        </pc:sldMkLst>
+        <pc:spChg chg="del">
+          <ac:chgData name="Al Friend" userId="e5ed79da-d858-46d4-9eed-a7a24903f2de" providerId="ADAL" clId="{C674B5A1-E3B2-40E8-863B-82D707DB4736}" dt="2026-06-04T12:06:50.792" v="3611" actId="478"/>
+          <ac:spMkLst>
+            <pc:docMk/>
+            <pc:sldMk cId="2672932940" sldId="891"/>
+            <ac:spMk id="20" creationId="{1821B1EE-C09C-B44F-9763-691373B40A43}"/>
+          </ac:spMkLst>
+        </pc:spChg>
+        <pc:spChg chg="del">
+          <ac:chgData name="Al Friend" userId="e5ed79da-d858-46d4-9eed-a7a24903f2de" providerId="ADAL" clId="{C674B5A1-E3B2-40E8-863B-82D707DB4736}" dt="2026-06-04T12:06:42.660" v="3608" actId="478"/>
+          <ac:spMkLst>
+            <pc:docMk/>
+            <pc:sldMk cId="2672932940" sldId="891"/>
+            <ac:spMk id="21" creationId="{5D10E706-C415-F069-6596-D6EB42794CEC}"/>
+          </ac:spMkLst>
+        </pc:spChg>
+        <pc:spChg chg="del">
+          <ac:chgData name="Al Friend" userId="e5ed79da-d858-46d4-9eed-a7a24903f2de" providerId="ADAL" clId="{C674B5A1-E3B2-40E8-863B-82D707DB4736}" dt="2026-06-04T12:06:51.913" v="3612" actId="478"/>
+          <ac:spMkLst>
+            <pc:docMk/>
+            <pc:sldMk cId="2672932940" sldId="891"/>
+            <ac:spMk id="22" creationId="{63D1B5CA-3293-8AB0-9AD8-32AAB374D400}"/>
+          </ac:spMkLst>
+        </pc:spChg>
+        <pc:spChg chg="del">
+          <ac:chgData name="Al Friend" userId="e5ed79da-d858-46d4-9eed-a7a24903f2de" providerId="ADAL" clId="{C674B5A1-E3B2-40E8-863B-82D707DB4736}" dt="2026-06-04T12:06:31.997" v="3602" actId="478"/>
+          <ac:spMkLst>
+            <pc:docMk/>
+            <pc:sldMk cId="2672932940" sldId="891"/>
+            <ac:spMk id="23" creationId="{E932A1AA-E488-B330-F5D4-C8F7E1AFEB79}"/>
+          </ac:spMkLst>
+        </pc:spChg>
+        <pc:spChg chg="del">
+          <ac:chgData name="Al Friend" userId="e5ed79da-d858-46d4-9eed-a7a24903f2de" providerId="ADAL" clId="{C674B5A1-E3B2-40E8-863B-82D707DB4736}" dt="2026-06-04T12:06:29.565" v="3601" actId="478"/>
+          <ac:spMkLst>
+            <pc:docMk/>
+            <pc:sldMk cId="2672932940" sldId="891"/>
+            <ac:spMk id="24" creationId="{ADBE2120-BC91-CBCB-2287-C05D78CF4327}"/>
+          </ac:spMkLst>
+        </pc:spChg>
+        <pc:spChg chg="del">
+          <ac:chgData name="Al Friend" userId="e5ed79da-d858-46d4-9eed-a7a24903f2de" providerId="ADAL" clId="{C674B5A1-E3B2-40E8-863B-82D707DB4736}" dt="2026-06-04T12:06:45.108" v="3610" actId="478"/>
+          <ac:spMkLst>
+            <pc:docMk/>
+            <pc:sldMk cId="2672932940" sldId="891"/>
+            <ac:spMk id="25" creationId="{1458AC3E-04C8-223F-64C1-CE57362A71C9}"/>
+          </ac:spMkLst>
+        </pc:spChg>
+        <pc:spChg chg="del">
+          <ac:chgData name="Al Friend" userId="e5ed79da-d858-46d4-9eed-a7a24903f2de" providerId="ADAL" clId="{C674B5A1-E3B2-40E8-863B-82D707DB4736}" dt="2026-06-04T12:06:43.620" v="3609" actId="478"/>
+          <ac:spMkLst>
+            <pc:docMk/>
+            <pc:sldMk cId="2672932940" sldId="891"/>
+            <ac:spMk id="26" creationId="{1B446702-FF50-E3E0-BBEC-4575EEF5350A}"/>
+          </ac:spMkLst>
+        </pc:spChg>
+        <pc:spChg chg="mod">
+          <ac:chgData name="Al Friend" userId="e5ed79da-d858-46d4-9eed-a7a24903f2de" providerId="ADAL" clId="{C674B5A1-E3B2-40E8-863B-82D707DB4736}" dt="2026-06-04T12:06:35.456" v="3603" actId="6549"/>
+          <ac:spMkLst>
+            <pc:docMk/>
+            <pc:sldMk cId="2672932940" sldId="891"/>
+            <ac:spMk id="27" creationId="{DE55E28E-12CA-4300-79D8-A465E7328BD1}"/>
+          </ac:spMkLst>
+        </pc:spChg>
+        <pc:spChg chg="mod">
+          <ac:chgData name="Al Friend" userId="e5ed79da-d858-46d4-9eed-a7a24903f2de" providerId="ADAL" clId="{C674B5A1-E3B2-40E8-863B-82D707DB4736}" dt="2026-06-04T12:06:40.034" v="3607" actId="6549"/>
+          <ac:spMkLst>
+            <pc:docMk/>
+            <pc:sldMk cId="2672932940" sldId="891"/>
+            <ac:spMk id="28" creationId="{7B412730-5CDA-D1F4-5FDC-B0A55A466C1D}"/>
+          </ac:spMkLst>
+        </pc:spChg>
+        <pc:spChg chg="del">
+          <ac:chgData name="Al Friend" userId="e5ed79da-d858-46d4-9eed-a7a24903f2de" providerId="ADAL" clId="{C674B5A1-E3B2-40E8-863B-82D707DB4736}" dt="2026-06-04T12:06:37.791" v="3604" actId="478"/>
+          <ac:spMkLst>
+            <pc:docMk/>
+            <pc:sldMk cId="2672932940" sldId="891"/>
+            <ac:spMk id="29" creationId="{41629774-E830-5865-08C7-3250472DAA8C}"/>
+          </ac:spMkLst>
+        </pc:spChg>
+        <pc:cxnChg chg="del mod">
+          <ac:chgData name="Al Friend" userId="e5ed79da-d858-46d4-9eed-a7a24903f2de" providerId="ADAL" clId="{C674B5A1-E3B2-40E8-863B-82D707DB4736}" dt="2026-06-04T12:06:39.068" v="3606" actId="478"/>
+          <ac:cxnSpMkLst>
+            <pc:docMk/>
+            <pc:sldMk cId="2672932940" sldId="891"/>
+            <ac:cxnSpMk id="30" creationId="{D24CFD43-E225-9A60-DD0D-39E2BF7507F3}"/>
+          </ac:cxnSpMkLst>
+        </pc:cxnChg>
+        <pc:cxnChg chg="del mod">
+          <ac:chgData name="Al Friend" userId="e5ed79da-d858-46d4-9eed-a7a24903f2de" providerId="ADAL" clId="{C674B5A1-E3B2-40E8-863B-82D707DB4736}" dt="2026-06-04T12:06:38.398" v="3605" actId="478"/>
+          <ac:cxnSpMkLst>
+            <pc:docMk/>
+            <pc:sldMk cId="2672932940" sldId="891"/>
+            <ac:cxnSpMk id="31" creationId="{1FEB3678-3EC2-9435-6703-DBA4673C5740}"/>
+          </ac:cxnSpMkLst>
+        </pc:cxnChg>
+      </pc:sldChg>
+      <pc:sldChg chg="addSp delSp modSp add modTransition addAnim delAnim modNotesTx">
+        <pc:chgData name="Al Friend" userId="e5ed79da-d858-46d4-9eed-a7a24903f2de" providerId="ADAL" clId="{C674B5A1-E3B2-40E8-863B-82D707DB4736}" dt="2026-06-04T12:31:03.553" v="3724" actId="20577"/>
+        <pc:sldMkLst>
+          <pc:docMk/>
+          <pc:sldMk cId="4001018099" sldId="892"/>
+        </pc:sldMkLst>
+        <pc:spChg chg="mod">
+          <ac:chgData name="Al Friend" userId="e5ed79da-d858-46d4-9eed-a7a24903f2de" providerId="ADAL" clId="{C674B5A1-E3B2-40E8-863B-82D707DB4736}" dt="2026-06-04T12:31:03.553" v="3724" actId="20577"/>
+          <ac:spMkLst>
+            <pc:docMk/>
+            <pc:sldMk cId="4001018099" sldId="892"/>
+            <ac:spMk id="2" creationId="{DF81EF6B-9990-4895-9A8F-2103C304A52F}"/>
+          </ac:spMkLst>
+        </pc:spChg>
+        <pc:spChg chg="del">
+          <ac:chgData name="Al Friend" userId="e5ed79da-d858-46d4-9eed-a7a24903f2de" providerId="ADAL" clId="{C674B5A1-E3B2-40E8-863B-82D707DB4736}" dt="2026-06-04T12:07:09.758" v="3617" actId="478"/>
+          <ac:spMkLst>
+            <pc:docMk/>
+            <pc:sldMk cId="4001018099" sldId="892"/>
+            <ac:spMk id="13" creationId="{31DE4C51-5C31-4CFA-BE3D-731751DE74B0}"/>
+          </ac:spMkLst>
+        </pc:spChg>
+        <pc:spChg chg="add del">
+          <ac:chgData name="Al Friend" userId="e5ed79da-d858-46d4-9eed-a7a24903f2de" providerId="ADAL" clId="{C674B5A1-E3B2-40E8-863B-82D707DB4736}" dt="2026-06-04T12:08:08.197" v="3643" actId="478"/>
+          <ac:spMkLst>
+            <pc:docMk/>
+            <pc:sldMk cId="4001018099" sldId="892"/>
+            <ac:spMk id="14" creationId="{E5304D38-62A3-4A8C-98E0-6337163FA56E}"/>
+          </ac:spMkLst>
+        </pc:spChg>
+        <pc:spChg chg="del">
+          <ac:chgData name="Al Friend" userId="e5ed79da-d858-46d4-9eed-a7a24903f2de" providerId="ADAL" clId="{C674B5A1-E3B2-40E8-863B-82D707DB4736}" dt="2026-06-04T12:07:07.913" v="3616" actId="478"/>
+          <ac:spMkLst>
+            <pc:docMk/>
+            <pc:sldMk cId="4001018099" sldId="892"/>
+            <ac:spMk id="15" creationId="{EFB1A153-6E9D-4603-B7E7-DB48DD6E2DED}"/>
+          </ac:spMkLst>
+        </pc:spChg>
+        <pc:spChg chg="add del">
+          <ac:chgData name="Al Friend" userId="e5ed79da-d858-46d4-9eed-a7a24903f2de" providerId="ADAL" clId="{C674B5A1-E3B2-40E8-863B-82D707DB4736}" dt="2026-06-04T12:08:09.834" v="3645" actId="478"/>
+          <ac:spMkLst>
+            <pc:docMk/>
+            <pc:sldMk cId="4001018099" sldId="892"/>
+            <ac:spMk id="19" creationId="{AE75B9AD-FFA7-46C7-8C97-FBD2DEC6546A}"/>
+          </ac:spMkLst>
+        </pc:spChg>
+        <pc:spChg chg="add del">
+          <ac:chgData name="Al Friend" userId="e5ed79da-d858-46d4-9eed-a7a24903f2de" providerId="ADAL" clId="{C674B5A1-E3B2-40E8-863B-82D707DB4736}" dt="2026-06-04T12:08:09.264" v="3644" actId="478"/>
+          <ac:spMkLst>
+            <pc:docMk/>
+            <pc:sldMk cId="4001018099" sldId="892"/>
+            <ac:spMk id="20" creationId="{11F1C24C-E417-4481-B9E5-EE522678B769}"/>
+          </ac:spMkLst>
+        </pc:spChg>
+      </pc:sldChg>
+      <pc:sldChg chg="delSp modSp add modTransition delAnim">
+        <pc:chgData name="Al Friend" userId="e5ed79da-d858-46d4-9eed-a7a24903f2de" providerId="ADAL" clId="{C674B5A1-E3B2-40E8-863B-82D707DB4736}" dt="2026-06-04T12:30:55.760" v="3718" actId="20577"/>
+        <pc:sldMkLst>
+          <pc:docMk/>
+          <pc:sldMk cId="3066646524" sldId="893"/>
+        </pc:sldMkLst>
+        <pc:spChg chg="mod">
+          <ac:chgData name="Al Friend" userId="e5ed79da-d858-46d4-9eed-a7a24903f2de" providerId="ADAL" clId="{C674B5A1-E3B2-40E8-863B-82D707DB4736}" dt="2026-06-04T12:30:55.760" v="3718" actId="20577"/>
+          <ac:spMkLst>
+            <pc:docMk/>
+            <pc:sldMk cId="3066646524" sldId="893"/>
+            <ac:spMk id="2" creationId="{DF81EF6B-9990-4895-9A8F-2103C304A52F}"/>
+          </ac:spMkLst>
+        </pc:spChg>
+        <pc:spChg chg="del">
+          <ac:chgData name="Al Friend" userId="e5ed79da-d858-46d4-9eed-a7a24903f2de" providerId="ADAL" clId="{C674B5A1-E3B2-40E8-863B-82D707DB4736}" dt="2026-06-04T12:08:19.790" v="3649" actId="478"/>
+          <ac:spMkLst>
+            <pc:docMk/>
+            <pc:sldMk cId="3066646524" sldId="893"/>
+            <ac:spMk id="13" creationId="{31DE4C51-5C31-4CFA-BE3D-731751DE74B0}"/>
+          </ac:spMkLst>
+        </pc:spChg>
+        <pc:spChg chg="del">
+          <ac:chgData name="Al Friend" userId="e5ed79da-d858-46d4-9eed-a7a24903f2de" providerId="ADAL" clId="{C674B5A1-E3B2-40E8-863B-82D707DB4736}" dt="2026-06-04T12:08:18.839" v="3648" actId="478"/>
+          <ac:spMkLst>
+            <pc:docMk/>
+            <pc:sldMk cId="3066646524" sldId="893"/>
+            <ac:spMk id="14" creationId="{E5304D38-62A3-4A8C-98E0-6337163FA56E}"/>
+          </ac:spMkLst>
+        </pc:spChg>
+        <pc:spChg chg="del">
+          <ac:chgData name="Al Friend" userId="e5ed79da-d858-46d4-9eed-a7a24903f2de" providerId="ADAL" clId="{C674B5A1-E3B2-40E8-863B-82D707DB4736}" dt="2026-06-04T12:08:20.497" v="3650" actId="478"/>
+          <ac:spMkLst>
+            <pc:docMk/>
+            <pc:sldMk cId="3066646524" sldId="893"/>
+            <ac:spMk id="15" creationId="{EFB1A153-6E9D-4603-B7E7-DB48DD6E2DED}"/>
+          </ac:spMkLst>
+        </pc:spChg>
+        <pc:spChg chg="del">
+          <ac:chgData name="Al Friend" userId="e5ed79da-d858-46d4-9eed-a7a24903f2de" providerId="ADAL" clId="{C674B5A1-E3B2-40E8-863B-82D707DB4736}" dt="2026-06-04T12:08:22.079" v="3651" actId="478"/>
+          <ac:spMkLst>
+            <pc:docMk/>
+            <pc:sldMk cId="3066646524" sldId="893"/>
+            <ac:spMk id="21" creationId="{61BE2CD1-5F61-4B09-9AEC-39EA9BFBB6A9}"/>
+          </ac:spMkLst>
+        </pc:spChg>
+        <pc:spChg chg="del">
+          <ac:chgData name="Al Friend" userId="e5ed79da-d858-46d4-9eed-a7a24903f2de" providerId="ADAL" clId="{C674B5A1-E3B2-40E8-863B-82D707DB4736}" dt="2026-06-04T12:08:23.716" v="3652" actId="478"/>
+          <ac:spMkLst>
+            <pc:docMk/>
+            <pc:sldMk cId="3066646524" sldId="893"/>
+            <ac:spMk id="22" creationId="{26E50561-9E7A-49B1-BF1B-897BB0D6CA6D}"/>
+          </ac:spMkLst>
+        </pc:spChg>
+        <pc:spChg chg="del">
+          <ac:chgData name="Al Friend" userId="e5ed79da-d858-46d4-9eed-a7a24903f2de" providerId="ADAL" clId="{C674B5A1-E3B2-40E8-863B-82D707DB4736}" dt="2026-06-04T12:08:24.568" v="3653" actId="478"/>
+          <ac:spMkLst>
+            <pc:docMk/>
+            <pc:sldMk cId="3066646524" sldId="893"/>
+            <ac:spMk id="23" creationId="{703AB56C-EA29-4B82-A3B9-946D93A89946}"/>
+          </ac:spMkLst>
+        </pc:spChg>
+      </pc:sldChg>
+      <pc:sldChg chg="modSp add ord">
+        <pc:chgData name="Al Friend" userId="e5ed79da-d858-46d4-9eed-a7a24903f2de" providerId="ADAL" clId="{C674B5A1-E3B2-40E8-863B-82D707DB4736}" dt="2026-06-04T12:09:24.565" v="3659" actId="6549"/>
+        <pc:sldMkLst>
+          <pc:docMk/>
+          <pc:sldMk cId="2004894556" sldId="894"/>
+        </pc:sldMkLst>
+        <pc:spChg chg="mod">
+          <ac:chgData name="Al Friend" userId="e5ed79da-d858-46d4-9eed-a7a24903f2de" providerId="ADAL" clId="{C674B5A1-E3B2-40E8-863B-82D707DB4736}" dt="2026-06-04T12:09:24.565" v="3659" actId="6549"/>
+          <ac:spMkLst>
+            <pc:docMk/>
+            <pc:sldMk cId="2004894556" sldId="894"/>
+            <ac:spMk id="3" creationId="{00000000-0000-0000-0000-000000000000}"/>
+          </ac:spMkLst>
+        </pc:spChg>
       </pc:sldChg>
     </pc:docChg>
   </pc:docChgLst>
@@ -5050,7 +5352,7 @@
           <a:p>
             <a:fld id="{0E35528A-819C-4AD3-BDC3-2CDCE7BEAF53}" type="datetimeFigureOut">
               <a:rPr lang="en-GB" smtClean="0"/>
-              <a:t>03/06/2026</a:t>
+              <a:t>04/06/2026</a:t>
             </a:fld>
             <a:endParaRPr lang="en-GB"/>
           </a:p>
@@ -5531,10 +5833,9 @@
           <a:lstStyle/>
           <a:p>
             <a:r>
-              <a:rPr lang="en-GB"/>
+              <a:rPr lang="en-GB" dirty="0"/>
               <a:t>https://www.omg.org/spec/UML/2.5.1/PDF#page=236</a:t>
             </a:r>
-            <a:endParaRPr lang="en-GB" dirty="0"/>
           </a:p>
         </p:txBody>
       </p:sp>
@@ -5712,10 +6013,7 @@
           <a:bodyPr/>
           <a:lstStyle/>
           <a:p>
-            <a:r>
-              <a:rPr lang="en-GB" dirty="0"/>
-              <a:t>https://www.youtube.com/watch?v=6XrL5jXmTwM</a:t>
-            </a:r>
+            <a:endParaRPr lang="en-GB" dirty="0"/>
           </a:p>
         </p:txBody>
       </p:sp>
@@ -5745,7 +6043,7 @@
     </p:spTree>
     <p:extLst>
       <p:ext uri="{BB962C8B-B14F-4D97-AF65-F5344CB8AC3E}">
-        <p14:creationId xmlns:p14="http://schemas.microsoft.com/office/powerpoint/2010/main" val="286042277"/>
+        <p14:creationId xmlns:p14="http://schemas.microsoft.com/office/powerpoint/2010/main" val="745499575"/>
       </p:ext>
     </p:extLst>
   </p:cSld>
@@ -5799,7 +6097,10 @@
           <a:bodyPr/>
           <a:lstStyle/>
           <a:p>
-            <a:endParaRPr lang="en-GB" dirty="0"/>
+            <a:r>
+              <a:rPr lang="en-GB" dirty="0"/>
+              <a:t>https://www.youtube.com/watch?v=6XrL5jXmTwM</a:t>
+            </a:r>
           </a:p>
         </p:txBody>
       </p:sp>
@@ -5829,7 +6130,7 @@
     </p:spTree>
     <p:extLst>
       <p:ext uri="{BB962C8B-B14F-4D97-AF65-F5344CB8AC3E}">
-        <p14:creationId xmlns:p14="http://schemas.microsoft.com/office/powerpoint/2010/main" val="1333487309"/>
+        <p14:creationId xmlns:p14="http://schemas.microsoft.com/office/powerpoint/2010/main" val="286042277"/>
       </p:ext>
     </p:extLst>
   </p:cSld>
@@ -5913,7 +6214,7 @@
     </p:spTree>
     <p:extLst>
       <p:ext uri="{BB962C8B-B14F-4D97-AF65-F5344CB8AC3E}">
-        <p14:creationId xmlns:p14="http://schemas.microsoft.com/office/powerpoint/2010/main" val="1106523398"/>
+        <p14:creationId xmlns:p14="http://schemas.microsoft.com/office/powerpoint/2010/main" val="3492010820"/>
       </p:ext>
     </p:extLst>
   </p:cSld>
@@ -5978,6 +6279,178 @@
             <a:spLocks noGrp="1"/>
           </p:cNvSpPr>
           <p:nvPr>
+            <p:ph type="sldNum" sz="quarter" idx="5"/>
+          </p:nvPr>
+        </p:nvSpPr>
+        <p:spPr/>
+        <p:txBody>
+          <a:bodyPr/>
+          <a:lstStyle/>
+          <a:p>
+            <a:fld id="{B71FE5B5-A979-4370-A255-218EAB36A5F4}" type="slidenum">
+              <a:rPr lang="en-GB" smtClean="0"/>
+              <a:t>22</a:t>
+            </a:fld>
+            <a:endParaRPr lang="en-GB"/>
+          </a:p>
+        </p:txBody>
+      </p:sp>
+    </p:spTree>
+    <p:extLst>
+      <p:ext uri="{BB962C8B-B14F-4D97-AF65-F5344CB8AC3E}">
+        <p14:creationId xmlns:p14="http://schemas.microsoft.com/office/powerpoint/2010/main" val="1333487309"/>
+      </p:ext>
+    </p:extLst>
+  </p:cSld>
+  <p:clrMapOvr>
+    <a:masterClrMapping/>
+  </p:clrMapOvr>
+</p:notes>
+</file>
+
+<file path=ppt/notesSlides/notesSlide17.xml><?xml version="1.0" encoding="utf-8"?>
+<p:notes xmlns:a="http://schemas.openxmlformats.org/drawingml/2006/main" xmlns:r="http://schemas.openxmlformats.org/officeDocument/2006/relationships" xmlns:p="http://schemas.openxmlformats.org/presentationml/2006/main">
+  <p:cSld>
+    <p:spTree>
+      <p:nvGrpSpPr>
+        <p:cNvPr id="1" name=""/>
+        <p:cNvGrpSpPr/>
+        <p:nvPr/>
+      </p:nvGrpSpPr>
+      <p:grpSpPr>
+        <a:xfrm>
+          <a:off x="0" y="0"/>
+          <a:ext cx="0" cy="0"/>
+          <a:chOff x="0" y="0"/>
+          <a:chExt cx="0" cy="0"/>
+        </a:xfrm>
+      </p:grpSpPr>
+      <p:sp>
+        <p:nvSpPr>
+          <p:cNvPr id="2" name="Slide Image Placeholder 1"/>
+          <p:cNvSpPr>
+            <a:spLocks noGrp="1" noRot="1" noChangeAspect="1"/>
+          </p:cNvSpPr>
+          <p:nvPr>
+            <p:ph type="sldImg"/>
+          </p:nvPr>
+        </p:nvSpPr>
+        <p:spPr/>
+      </p:sp>
+      <p:sp>
+        <p:nvSpPr>
+          <p:cNvPr id="3" name="Notes Placeholder 2"/>
+          <p:cNvSpPr>
+            <a:spLocks noGrp="1"/>
+          </p:cNvSpPr>
+          <p:nvPr>
+            <p:ph type="body" idx="1"/>
+          </p:nvPr>
+        </p:nvSpPr>
+        <p:spPr/>
+        <p:txBody>
+          <a:bodyPr/>
+          <a:lstStyle/>
+          <a:p>
+            <a:endParaRPr lang="en-GB" dirty="0"/>
+          </a:p>
+        </p:txBody>
+      </p:sp>
+      <p:sp>
+        <p:nvSpPr>
+          <p:cNvPr id="4" name="Slide Number Placeholder 3"/>
+          <p:cNvSpPr>
+            <a:spLocks noGrp="1"/>
+          </p:cNvSpPr>
+          <p:nvPr>
+            <p:ph type="sldNum" sz="quarter" idx="5"/>
+          </p:nvPr>
+        </p:nvSpPr>
+        <p:spPr/>
+        <p:txBody>
+          <a:bodyPr/>
+          <a:lstStyle/>
+          <a:p>
+            <a:fld id="{B71FE5B5-A979-4370-A255-218EAB36A5F4}" type="slidenum">
+              <a:rPr lang="en-GB" smtClean="0"/>
+              <a:t>23</a:t>
+            </a:fld>
+            <a:endParaRPr lang="en-GB"/>
+          </a:p>
+        </p:txBody>
+      </p:sp>
+    </p:spTree>
+    <p:extLst>
+      <p:ext uri="{BB962C8B-B14F-4D97-AF65-F5344CB8AC3E}">
+        <p14:creationId xmlns:p14="http://schemas.microsoft.com/office/powerpoint/2010/main" val="2885117076"/>
+      </p:ext>
+    </p:extLst>
+  </p:cSld>
+  <p:clrMapOvr>
+    <a:masterClrMapping/>
+  </p:clrMapOvr>
+</p:notes>
+</file>
+
+<file path=ppt/notesSlides/notesSlide18.xml><?xml version="1.0" encoding="utf-8"?>
+<p:notes xmlns:a="http://schemas.openxmlformats.org/drawingml/2006/main" xmlns:r="http://schemas.openxmlformats.org/officeDocument/2006/relationships" xmlns:p="http://schemas.openxmlformats.org/presentationml/2006/main">
+  <p:cSld>
+    <p:spTree>
+      <p:nvGrpSpPr>
+        <p:cNvPr id="1" name=""/>
+        <p:cNvGrpSpPr/>
+        <p:nvPr/>
+      </p:nvGrpSpPr>
+      <p:grpSpPr>
+        <a:xfrm>
+          <a:off x="0" y="0"/>
+          <a:ext cx="0" cy="0"/>
+          <a:chOff x="0" y="0"/>
+          <a:chExt cx="0" cy="0"/>
+        </a:xfrm>
+      </p:grpSpPr>
+      <p:sp>
+        <p:nvSpPr>
+          <p:cNvPr id="2" name="Slide Image Placeholder 1"/>
+          <p:cNvSpPr>
+            <a:spLocks noGrp="1" noRot="1" noChangeAspect="1"/>
+          </p:cNvSpPr>
+          <p:nvPr>
+            <p:ph type="sldImg"/>
+          </p:nvPr>
+        </p:nvSpPr>
+        <p:spPr/>
+      </p:sp>
+      <p:sp>
+        <p:nvSpPr>
+          <p:cNvPr id="3" name="Notes Placeholder 2"/>
+          <p:cNvSpPr>
+            <a:spLocks noGrp="1"/>
+          </p:cNvSpPr>
+          <p:nvPr>
+            <p:ph type="body" idx="1"/>
+          </p:nvPr>
+        </p:nvSpPr>
+        <p:spPr/>
+        <p:txBody>
+          <a:bodyPr/>
+          <a:lstStyle/>
+          <a:p>
+            <a:r>
+              <a:rPr lang="en-GB"/>
+              <a:t>https://www.omg.org/spec/UML/2.5.1/PDF#page=236</a:t>
+            </a:r>
+            <a:endParaRPr lang="en-GB" dirty="0"/>
+          </a:p>
+        </p:txBody>
+      </p:sp>
+      <p:sp>
+        <p:nvSpPr>
+          <p:cNvPr id="4" name="Slide Number Placeholder 3"/>
+          <p:cNvSpPr>
+            <a:spLocks noGrp="1"/>
+          </p:cNvSpPr>
+          <p:nvPr>
             <p:ph type="sldNum" sz="quarter" idx="10"/>
           </p:nvPr>
         </p:nvSpPr>
@@ -5988,7 +6461,7 @@
           <a:p>
             <a:fld id="{B71FE5B5-A979-4370-A255-218EAB36A5F4}" type="slidenum">
               <a:rPr lang="en-GB" smtClean="0"/>
-              <a:t>23</a:t>
+              <a:t>24</a:t>
             </a:fld>
             <a:endParaRPr lang="en-GB"/>
           </a:p>
@@ -5997,7 +6470,91 @@
     </p:spTree>
     <p:extLst>
       <p:ext uri="{BB962C8B-B14F-4D97-AF65-F5344CB8AC3E}">
-        <p14:creationId xmlns:p14="http://schemas.microsoft.com/office/powerpoint/2010/main" val="1864301648"/>
+        <p14:creationId xmlns:p14="http://schemas.microsoft.com/office/powerpoint/2010/main" val="3372085112"/>
+      </p:ext>
+    </p:extLst>
+  </p:cSld>
+  <p:clrMapOvr>
+    <a:masterClrMapping/>
+  </p:clrMapOvr>
+</p:notes>
+</file>
+
+<file path=ppt/notesSlides/notesSlide19.xml><?xml version="1.0" encoding="utf-8"?>
+<p:notes xmlns:a="http://schemas.openxmlformats.org/drawingml/2006/main" xmlns:r="http://schemas.openxmlformats.org/officeDocument/2006/relationships" xmlns:p="http://schemas.openxmlformats.org/presentationml/2006/main">
+  <p:cSld>
+    <p:spTree>
+      <p:nvGrpSpPr>
+        <p:cNvPr id="1" name=""/>
+        <p:cNvGrpSpPr/>
+        <p:nvPr/>
+      </p:nvGrpSpPr>
+      <p:grpSpPr>
+        <a:xfrm>
+          <a:off x="0" y="0"/>
+          <a:ext cx="0" cy="0"/>
+          <a:chOff x="0" y="0"/>
+          <a:chExt cx="0" cy="0"/>
+        </a:xfrm>
+      </p:grpSpPr>
+      <p:sp>
+        <p:nvSpPr>
+          <p:cNvPr id="2" name="Slide Image Placeholder 1"/>
+          <p:cNvSpPr>
+            <a:spLocks noGrp="1" noRot="1" noChangeAspect="1"/>
+          </p:cNvSpPr>
+          <p:nvPr>
+            <p:ph type="sldImg"/>
+          </p:nvPr>
+        </p:nvSpPr>
+        <p:spPr/>
+      </p:sp>
+      <p:sp>
+        <p:nvSpPr>
+          <p:cNvPr id="3" name="Notes Placeholder 2"/>
+          <p:cNvSpPr>
+            <a:spLocks noGrp="1"/>
+          </p:cNvSpPr>
+          <p:nvPr>
+            <p:ph type="body" idx="1"/>
+          </p:nvPr>
+        </p:nvSpPr>
+        <p:spPr/>
+        <p:txBody>
+          <a:bodyPr/>
+          <a:lstStyle/>
+          <a:p>
+            <a:endParaRPr lang="en-GB" dirty="0"/>
+          </a:p>
+        </p:txBody>
+      </p:sp>
+      <p:sp>
+        <p:nvSpPr>
+          <p:cNvPr id="4" name="Slide Number Placeholder 3"/>
+          <p:cNvSpPr>
+            <a:spLocks noGrp="1"/>
+          </p:cNvSpPr>
+          <p:nvPr>
+            <p:ph type="sldNum" sz="quarter" idx="5"/>
+          </p:nvPr>
+        </p:nvSpPr>
+        <p:spPr/>
+        <p:txBody>
+          <a:bodyPr/>
+          <a:lstStyle/>
+          <a:p>
+            <a:fld id="{B71FE5B5-A979-4370-A255-218EAB36A5F4}" type="slidenum">
+              <a:rPr lang="en-GB" smtClean="0"/>
+              <a:t>25</a:t>
+            </a:fld>
+            <a:endParaRPr lang="en-GB"/>
+          </a:p>
+        </p:txBody>
+      </p:sp>
+    </p:spTree>
+    <p:extLst>
+      <p:ext uri="{BB962C8B-B14F-4D97-AF65-F5344CB8AC3E}">
+        <p14:creationId xmlns:p14="http://schemas.microsoft.com/office/powerpoint/2010/main" val="1106523398"/>
       </p:ext>
     </p:extLst>
   </p:cSld>
@@ -6085,6 +6642,90 @@
     <p:extLst>
       <p:ext uri="{BB962C8B-B14F-4D97-AF65-F5344CB8AC3E}">
         <p14:creationId xmlns:p14="http://schemas.microsoft.com/office/powerpoint/2010/main" val="3666018575"/>
+      </p:ext>
+    </p:extLst>
+  </p:cSld>
+  <p:clrMapOvr>
+    <a:masterClrMapping/>
+  </p:clrMapOvr>
+</p:notes>
+</file>
+
+<file path=ppt/notesSlides/notesSlide20.xml><?xml version="1.0" encoding="utf-8"?>
+<p:notes xmlns:a="http://schemas.openxmlformats.org/drawingml/2006/main" xmlns:r="http://schemas.openxmlformats.org/officeDocument/2006/relationships" xmlns:p="http://schemas.openxmlformats.org/presentationml/2006/main">
+  <p:cSld>
+    <p:spTree>
+      <p:nvGrpSpPr>
+        <p:cNvPr id="1" name=""/>
+        <p:cNvGrpSpPr/>
+        <p:nvPr/>
+      </p:nvGrpSpPr>
+      <p:grpSpPr>
+        <a:xfrm>
+          <a:off x="0" y="0"/>
+          <a:ext cx="0" cy="0"/>
+          <a:chOff x="0" y="0"/>
+          <a:chExt cx="0" cy="0"/>
+        </a:xfrm>
+      </p:grpSpPr>
+      <p:sp>
+        <p:nvSpPr>
+          <p:cNvPr id="2" name="Slide Image Placeholder 1"/>
+          <p:cNvSpPr>
+            <a:spLocks noGrp="1" noRot="1" noChangeAspect="1"/>
+          </p:cNvSpPr>
+          <p:nvPr>
+            <p:ph type="sldImg"/>
+          </p:nvPr>
+        </p:nvSpPr>
+        <p:spPr/>
+      </p:sp>
+      <p:sp>
+        <p:nvSpPr>
+          <p:cNvPr id="3" name="Notes Placeholder 2"/>
+          <p:cNvSpPr>
+            <a:spLocks noGrp="1"/>
+          </p:cNvSpPr>
+          <p:nvPr>
+            <p:ph type="body" idx="1"/>
+          </p:nvPr>
+        </p:nvSpPr>
+        <p:spPr/>
+        <p:txBody>
+          <a:bodyPr/>
+          <a:lstStyle/>
+          <a:p>
+            <a:endParaRPr lang="en-GB" dirty="0"/>
+          </a:p>
+        </p:txBody>
+      </p:sp>
+      <p:sp>
+        <p:nvSpPr>
+          <p:cNvPr id="4" name="Slide Number Placeholder 3"/>
+          <p:cNvSpPr>
+            <a:spLocks noGrp="1"/>
+          </p:cNvSpPr>
+          <p:nvPr>
+            <p:ph type="sldNum" sz="quarter" idx="10"/>
+          </p:nvPr>
+        </p:nvSpPr>
+        <p:spPr/>
+        <p:txBody>
+          <a:bodyPr/>
+          <a:lstStyle/>
+          <a:p>
+            <a:fld id="{B71FE5B5-A979-4370-A255-218EAB36A5F4}" type="slidenum">
+              <a:rPr lang="en-GB" smtClean="0"/>
+              <a:t>27</a:t>
+            </a:fld>
+            <a:endParaRPr lang="en-GB"/>
+          </a:p>
+        </p:txBody>
+      </p:sp>
+    </p:spTree>
+    <p:extLst>
+      <p:ext uri="{BB962C8B-B14F-4D97-AF65-F5344CB8AC3E}">
+        <p14:creationId xmlns:p14="http://schemas.microsoft.com/office/powerpoint/2010/main" val="1864301648"/>
       </p:ext>
     </p:extLst>
   </p:cSld>
@@ -6890,7 +7531,7 @@
           <a:p>
             <a:fld id="{CBBB66F6-7471-47DA-8EED-C7BCCA53B015}" type="datetimeFigureOut">
               <a:rPr lang="en-GB" smtClean="0"/>
-              <a:t>03/06/2026</a:t>
+              <a:t>04/06/2026</a:t>
             </a:fld>
             <a:endParaRPr lang="en-GB"/>
           </a:p>
@@ -7090,7 +7731,7 @@
           <a:p>
             <a:fld id="{CBBB66F6-7471-47DA-8EED-C7BCCA53B015}" type="datetimeFigureOut">
               <a:rPr lang="en-GB" smtClean="0"/>
-              <a:t>03/06/2026</a:t>
+              <a:t>04/06/2026</a:t>
             </a:fld>
             <a:endParaRPr lang="en-GB"/>
           </a:p>
@@ -7300,7 +7941,7 @@
           <a:p>
             <a:fld id="{CBBB66F6-7471-47DA-8EED-C7BCCA53B015}" type="datetimeFigureOut">
               <a:rPr lang="en-GB" smtClean="0"/>
-              <a:t>03/06/2026</a:t>
+              <a:t>04/06/2026</a:t>
             </a:fld>
             <a:endParaRPr lang="en-GB"/>
           </a:p>
@@ -7500,7 +8141,7 @@
           <a:p>
             <a:fld id="{CBBB66F6-7471-47DA-8EED-C7BCCA53B015}" type="datetimeFigureOut">
               <a:rPr lang="en-GB" smtClean="0"/>
-              <a:t>03/06/2026</a:t>
+              <a:t>04/06/2026</a:t>
             </a:fld>
             <a:endParaRPr lang="en-GB"/>
           </a:p>
@@ -7776,7 +8417,7 @@
           <a:p>
             <a:fld id="{CBBB66F6-7471-47DA-8EED-C7BCCA53B015}" type="datetimeFigureOut">
               <a:rPr lang="en-GB" smtClean="0"/>
-              <a:t>03/06/2026</a:t>
+              <a:t>04/06/2026</a:t>
             </a:fld>
             <a:endParaRPr lang="en-GB"/>
           </a:p>
@@ -8044,7 +8685,7 @@
           <a:p>
             <a:fld id="{CBBB66F6-7471-47DA-8EED-C7BCCA53B015}" type="datetimeFigureOut">
               <a:rPr lang="en-GB" smtClean="0"/>
-              <a:t>03/06/2026</a:t>
+              <a:t>04/06/2026</a:t>
             </a:fld>
             <a:endParaRPr lang="en-GB"/>
           </a:p>
@@ -8459,7 +9100,7 @@
           <a:p>
             <a:fld id="{CBBB66F6-7471-47DA-8EED-C7BCCA53B015}" type="datetimeFigureOut">
               <a:rPr lang="en-GB" smtClean="0"/>
-              <a:t>03/06/2026</a:t>
+              <a:t>04/06/2026</a:t>
             </a:fld>
             <a:endParaRPr lang="en-GB"/>
           </a:p>
@@ -8601,7 +9242,7 @@
           <a:p>
             <a:fld id="{CBBB66F6-7471-47DA-8EED-C7BCCA53B015}" type="datetimeFigureOut">
               <a:rPr lang="en-GB" smtClean="0"/>
-              <a:t>03/06/2026</a:t>
+              <a:t>04/06/2026</a:t>
             </a:fld>
             <a:endParaRPr lang="en-GB"/>
           </a:p>
@@ -8714,7 +9355,7 @@
           <a:p>
             <a:fld id="{CBBB66F6-7471-47DA-8EED-C7BCCA53B015}" type="datetimeFigureOut">
               <a:rPr lang="en-GB" smtClean="0"/>
-              <a:t>03/06/2026</a:t>
+              <a:t>04/06/2026</a:t>
             </a:fld>
             <a:endParaRPr lang="en-GB"/>
           </a:p>
@@ -9027,7 +9668,7 @@
           <a:p>
             <a:fld id="{CBBB66F6-7471-47DA-8EED-C7BCCA53B015}" type="datetimeFigureOut">
               <a:rPr lang="en-GB" smtClean="0"/>
-              <a:t>03/06/2026</a:t>
+              <a:t>04/06/2026</a:t>
             </a:fld>
             <a:endParaRPr lang="en-GB"/>
           </a:p>
@@ -9316,7 +9957,7 @@
           <a:p>
             <a:fld id="{CBBB66F6-7471-47DA-8EED-C7BCCA53B015}" type="datetimeFigureOut">
               <a:rPr lang="en-GB" smtClean="0"/>
-              <a:t>03/06/2026</a:t>
+              <a:t>04/06/2026</a:t>
             </a:fld>
             <a:endParaRPr lang="en-GB"/>
           </a:p>
@@ -9565,7 +10206,7 @@
           <a:p>
             <a:fld id="{CBBB66F6-7471-47DA-8EED-C7BCCA53B015}" type="datetimeFigureOut">
               <a:rPr lang="en-GB" smtClean="0"/>
-              <a:t>03/06/2026</a:t>
+              <a:t>04/06/2026</a:t>
             </a:fld>
             <a:endParaRPr lang="en-GB"/>
           </a:p>
@@ -12826,40 +13467,6 @@
               <a:t>constructor</a:t>
             </a:r>
           </a:p>
-          <a:p>
-            <a:pPr lvl="1">
-              <a:lnSpc>
-                <a:spcPct val="100000"/>
-              </a:lnSpc>
-              <a:spcBef>
-                <a:spcPts val="0"/>
-              </a:spcBef>
-              <a:spcAft>
-                <a:spcPts val="600"/>
-              </a:spcAft>
-            </a:pPr>
-            <a:r>
-              <a:rPr lang="en-GB" sz="2800" dirty="0"/>
-              <a:t>array of objects</a:t>
-            </a:r>
-          </a:p>
-          <a:p>
-            <a:pPr lvl="1">
-              <a:lnSpc>
-                <a:spcPct val="100000"/>
-              </a:lnSpc>
-              <a:spcBef>
-                <a:spcPts val="0"/>
-              </a:spcBef>
-              <a:spcAft>
-                <a:spcPts val="600"/>
-              </a:spcAft>
-            </a:pPr>
-            <a:r>
-              <a:rPr lang="en-GB" sz="2800" dirty="0"/>
-              <a:t>inheritance</a:t>
-            </a:r>
-          </a:p>
         </p:txBody>
       </p:sp>
     </p:spTree>
@@ -12915,7 +13522,7 @@
           <a:p>
             <a:r>
               <a:rPr lang="en-GB" dirty="0"/>
-              <a:t>Class</a:t>
+              <a:t>Class – Overview</a:t>
             </a:r>
           </a:p>
         </p:txBody>
@@ -13077,10 +13684,10 @@
           <p:nvPr/>
         </p:nvPicPr>
         <p:blipFill>
-          <a:blip>
+          <a:blip r:embed="rId3">
             <a:extLst>
               <a:ext uri="{96DAC541-7B7A-43D3-8B79-37D633B846F1}">
-                <asvg:svgBlip xmlns:asvg="http://schemas.microsoft.com/office/drawing/2016/SVG/main" r:embed="rId3"/>
+                <asvg:svgBlip xmlns:asvg="http://schemas.microsoft.com/office/drawing/2016/SVG/main" r:embed="rId4"/>
               </a:ext>
             </a:extLst>
           </a:blip>
@@ -13113,10 +13720,10 @@
           <p:nvPr/>
         </p:nvPicPr>
         <p:blipFill>
-          <a:blip>
+          <a:blip r:embed="rId5">
             <a:extLst>
               <a:ext uri="{96DAC541-7B7A-43D3-8B79-37D633B846F1}">
-                <asvg:svgBlip xmlns:asvg="http://schemas.microsoft.com/office/drawing/2016/SVG/main" r:embed="rId4"/>
+                <asvg:svgBlip xmlns:asvg="http://schemas.microsoft.com/office/drawing/2016/SVG/main" r:embed="rId6"/>
               </a:ext>
             </a:extLst>
           </a:blip>
@@ -13149,10 +13756,10 @@
           <p:nvPr/>
         </p:nvPicPr>
         <p:blipFill>
-          <a:blip>
+          <a:blip r:embed="rId7">
             <a:extLst>
               <a:ext uri="{96DAC541-7B7A-43D3-8B79-37D633B846F1}">
-                <asvg:svgBlip xmlns:asvg="http://schemas.microsoft.com/office/drawing/2016/SVG/main" r:embed="rId5"/>
+                <asvg:svgBlip xmlns:asvg="http://schemas.microsoft.com/office/drawing/2016/SVG/main" r:embed="rId8"/>
               </a:ext>
             </a:extLst>
           </a:blip>
@@ -13185,10 +13792,10 @@
           <p:nvPr/>
         </p:nvPicPr>
         <p:blipFill>
-          <a:blip>
+          <a:blip r:embed="rId9">
             <a:extLst>
               <a:ext uri="{96DAC541-7B7A-43D3-8B79-37D633B846F1}">
-                <asvg:svgBlip xmlns:asvg="http://schemas.microsoft.com/office/drawing/2016/SVG/main" r:embed="rId6"/>
+                <asvg:svgBlip xmlns:asvg="http://schemas.microsoft.com/office/drawing/2016/SVG/main" r:embed="rId10"/>
               </a:ext>
             </a:extLst>
           </a:blip>
@@ -13221,10 +13828,10 @@
           <p:nvPr/>
         </p:nvPicPr>
         <p:blipFill>
-          <a:blip>
+          <a:blip r:embed="rId11">
             <a:extLst>
               <a:ext uri="{96DAC541-7B7A-43D3-8B79-37D633B846F1}">
-                <asvg:svgBlip xmlns:asvg="http://schemas.microsoft.com/office/drawing/2016/SVG/main" r:embed="rId7"/>
+                <asvg:svgBlip xmlns:asvg="http://schemas.microsoft.com/office/drawing/2016/SVG/main" r:embed="rId12"/>
               </a:ext>
             </a:extLst>
           </a:blip>
@@ -13257,10 +13864,10 @@
           <p:nvPr/>
         </p:nvPicPr>
         <p:blipFill>
-          <a:blip>
+          <a:blip r:embed="rId13">
             <a:extLst>
               <a:ext uri="{96DAC541-7B7A-43D3-8B79-37D633B846F1}">
-                <asvg:svgBlip xmlns:asvg="http://schemas.microsoft.com/office/drawing/2016/SVG/main" r:embed="rId8"/>
+                <asvg:svgBlip xmlns:asvg="http://schemas.microsoft.com/office/drawing/2016/SVG/main" r:embed="rId14"/>
               </a:ext>
             </a:extLst>
           </a:blip>
@@ -13293,10 +13900,10 @@
           <p:nvPr/>
         </p:nvPicPr>
         <p:blipFill>
-          <a:blip>
+          <a:blip r:embed="rId11">
             <a:extLst>
               <a:ext uri="{96DAC541-7B7A-43D3-8B79-37D633B846F1}">
-                <asvg:svgBlip xmlns:asvg="http://schemas.microsoft.com/office/drawing/2016/SVG/main" r:embed="rId7"/>
+                <asvg:svgBlip xmlns:asvg="http://schemas.microsoft.com/office/drawing/2016/SVG/main" r:embed="rId12"/>
               </a:ext>
             </a:extLst>
           </a:blip>
@@ -13329,10 +13936,10 @@
           <p:nvPr/>
         </p:nvPicPr>
         <p:blipFill>
-          <a:blip>
+          <a:blip r:embed="rId13">
             <a:extLst>
               <a:ext uri="{96DAC541-7B7A-43D3-8B79-37D633B846F1}">
-                <asvg:svgBlip xmlns:asvg="http://schemas.microsoft.com/office/drawing/2016/SVG/main" r:embed="rId8"/>
+                <asvg:svgBlip xmlns:asvg="http://schemas.microsoft.com/office/drawing/2016/SVG/main" r:embed="rId14"/>
               </a:ext>
             </a:extLst>
           </a:blip>
@@ -13751,7 +14358,7 @@
                   <a:srgbClr val="0070C0"/>
                 </a:solidFill>
               </a:rPr>
-              <a:t>Courses</a:t>
+              <a:t>Course</a:t>
             </a:r>
           </a:p>
         </p:txBody>
@@ -14794,7 +15401,7 @@
 </file>
 
 <file path=ppt/slides/slide19.xml><?xml version="1.0" encoding="utf-8"?>
-<p:sld xmlns:a="http://schemas.openxmlformats.org/drawingml/2006/main" xmlns:r="http://schemas.openxmlformats.org/officeDocument/2006/relationships" xmlns:p="http://schemas.openxmlformats.org/presentationml/2006/main">
+<p:sld xmlns:a="http://schemas.openxmlformats.org/drawingml/2006/main" xmlns:r="http://schemas.openxmlformats.org/officeDocument/2006/relationships" xmlns:p="http://schemas.openxmlformats.org/presentationml/2006/main" show="0">
   <p:cSld>
     <p:spTree>
       <p:nvGrpSpPr>
@@ -14815,7 +15422,7 @@
           <p:cNvPr id="2" name="Title 1">
             <a:extLst>
               <a:ext uri="{FF2B5EF4-FFF2-40B4-BE49-F238E27FC236}">
-                <a16:creationId xmlns:a16="http://schemas.microsoft.com/office/drawing/2014/main" id="{DF81EF6B-9990-4895-9A8F-2103C304A52F}"/>
+                <a16:creationId xmlns:a16="http://schemas.microsoft.com/office/drawing/2014/main" id="{F6E5DDAC-B7CC-945D-B74A-87246E8E6368}"/>
               </a:ext>
             </a:extLst>
           </p:cNvPr>
@@ -14826,404 +15433,312 @@
             <p:ph type="title"/>
           </p:nvPr>
         </p:nvSpPr>
-        <p:spPr>
-          <a:xfrm>
-            <a:off x="838200" y="365125"/>
-            <a:ext cx="10515600" cy="1325563"/>
-          </a:xfrm>
-        </p:spPr>
+        <p:spPr/>
         <p:txBody>
           <a:bodyPr/>
           <a:lstStyle/>
           <a:p>
             <a:r>
               <a:rPr lang="en-GB" dirty="0"/>
-              <a:t>UML Class Diagrams</a:t>
+              <a:t>Classes – School Example</a:t>
             </a:r>
           </a:p>
         </p:txBody>
       </p:sp>
-      <p:grpSp>
-        <p:nvGrpSpPr>
-          <p:cNvPr id="10" name="Group 9">
+      <p:pic>
+        <p:nvPicPr>
+          <p:cNvPr id="5" name="Graphic 4" descr="Man with solid fill">
             <a:extLst>
               <a:ext uri="{FF2B5EF4-FFF2-40B4-BE49-F238E27FC236}">
-                <a16:creationId xmlns:a16="http://schemas.microsoft.com/office/drawing/2014/main" id="{399CD5E7-76CA-46D4-8759-2AB56AB29762}"/>
+                <a16:creationId xmlns:a16="http://schemas.microsoft.com/office/drawing/2014/main" id="{19D019E1-9343-7DD7-F11F-1ADFAEBF51C6}"/>
               </a:ext>
             </a:extLst>
           </p:cNvPr>
-          <p:cNvGrpSpPr/>
+          <p:cNvPicPr>
+            <a:picLocks noChangeAspect="1"/>
+          </p:cNvPicPr>
           <p:nvPr/>
-        </p:nvGrpSpPr>
-        <p:grpSpPr>
+        </p:nvPicPr>
+        <p:blipFill>
+          <a:blip r:embed="rId3">
+            <a:extLst>
+              <a:ext uri="{96DAC541-7B7A-43D3-8B79-37D633B846F1}">
+                <asvg:svgBlip xmlns:asvg="http://schemas.microsoft.com/office/drawing/2016/SVG/main" r:embed="rId4"/>
+              </a:ext>
+            </a:extLst>
+          </a:blip>
+          <a:stretch>
+            <a:fillRect/>
+          </a:stretch>
+        </p:blipFill>
+        <p:spPr>
           <a:xfrm>
-            <a:off x="4309110" y="1965960"/>
-            <a:ext cx="3600000" cy="3657600"/>
-            <a:chOff x="3886200" y="1965960"/>
-            <a:chExt cx="3600000" cy="3657600"/>
+            <a:off x="2051091" y="2935493"/>
+            <a:ext cx="914400" cy="914400"/>
           </a:xfrm>
-        </p:grpSpPr>
-        <p:sp>
-          <p:nvSpPr>
-            <p:cNvPr id="4" name="Rectangle 3">
-              <a:extLst>
-                <a:ext uri="{FF2B5EF4-FFF2-40B4-BE49-F238E27FC236}">
-                  <a16:creationId xmlns:a16="http://schemas.microsoft.com/office/drawing/2014/main" id="{D68F3B12-91FF-4536-9BDF-3DFA0AD860B7}"/>
-                </a:ext>
-              </a:extLst>
-            </p:cNvPr>
-            <p:cNvSpPr/>
-            <p:nvPr/>
-          </p:nvSpPr>
-          <p:spPr>
-            <a:xfrm>
-              <a:off x="3886200" y="1965960"/>
-              <a:ext cx="3600000" cy="3657600"/>
-            </a:xfrm>
-            <a:prstGeom prst="rect">
-              <a:avLst/>
-            </a:prstGeom>
-            <a:noFill/>
-            <a:ln w="19050">
-              <a:solidFill>
-                <a:schemeClr val="tx1"/>
-              </a:solidFill>
-            </a:ln>
-          </p:spPr>
-          <p:style>
-            <a:lnRef idx="2">
-              <a:schemeClr val="accent1">
-                <a:shade val="50000"/>
-              </a:schemeClr>
-            </a:lnRef>
-            <a:fillRef idx="1">
-              <a:schemeClr val="accent1"/>
-            </a:fillRef>
-            <a:effectRef idx="0">
-              <a:schemeClr val="accent1"/>
-            </a:effectRef>
-            <a:fontRef idx="minor">
-              <a:schemeClr val="lt1"/>
-            </a:fontRef>
-          </p:style>
-          <p:txBody>
-            <a:bodyPr rtlCol="0" anchor="ctr"/>
-            <a:lstStyle/>
-            <a:p>
-              <a:pPr algn="ctr"/>
-              <a:endParaRPr lang="en-GB"/>
-            </a:p>
-          </p:txBody>
-        </p:sp>
-        <p:cxnSp>
-          <p:nvCxnSpPr>
-            <p:cNvPr id="8" name="Straight Connector 7">
-              <a:extLst>
-                <a:ext uri="{FF2B5EF4-FFF2-40B4-BE49-F238E27FC236}">
-                  <a16:creationId xmlns:a16="http://schemas.microsoft.com/office/drawing/2014/main" id="{0F620062-B2DF-4004-8305-6226A65C3AFF}"/>
-                </a:ext>
-              </a:extLst>
-            </p:cNvPr>
-            <p:cNvCxnSpPr/>
-            <p:nvPr/>
-          </p:nvCxnSpPr>
-          <p:spPr>
-            <a:xfrm>
-              <a:off x="3886200" y="4164330"/>
-              <a:ext cx="3600000" cy="0"/>
-            </a:xfrm>
-            <a:prstGeom prst="line">
-              <a:avLst/>
-            </a:prstGeom>
-            <a:ln w="19050">
-              <a:solidFill>
-                <a:schemeClr val="tx1"/>
-              </a:solidFill>
-            </a:ln>
-          </p:spPr>
-          <p:style>
-            <a:lnRef idx="1">
-              <a:schemeClr val="accent1"/>
-            </a:lnRef>
-            <a:fillRef idx="0">
-              <a:schemeClr val="accent1"/>
-            </a:fillRef>
-            <a:effectRef idx="0">
-              <a:schemeClr val="accent1"/>
-            </a:effectRef>
-            <a:fontRef idx="minor">
-              <a:schemeClr val="tx1"/>
-            </a:fontRef>
-          </p:style>
-        </p:cxnSp>
-        <p:sp>
-          <p:nvSpPr>
-            <p:cNvPr id="9" name="Rectangle 8">
-              <a:extLst>
-                <a:ext uri="{FF2B5EF4-FFF2-40B4-BE49-F238E27FC236}">
-                  <a16:creationId xmlns:a16="http://schemas.microsoft.com/office/drawing/2014/main" id="{E06970F1-E4C6-493D-921A-F57A4EAA659D}"/>
-                </a:ext>
-              </a:extLst>
-            </p:cNvPr>
-            <p:cNvSpPr/>
-            <p:nvPr/>
-          </p:nvSpPr>
-          <p:spPr>
-            <a:xfrm>
-              <a:off x="3886200" y="1965960"/>
-              <a:ext cx="3600000" cy="727710"/>
-            </a:xfrm>
-            <a:prstGeom prst="rect">
-              <a:avLst/>
-            </a:prstGeom>
-            <a:solidFill>
-              <a:schemeClr val="accent3">
-                <a:lumMod val="60000"/>
-                <a:lumOff val="40000"/>
-              </a:schemeClr>
-            </a:solidFill>
-            <a:ln w="19050">
-              <a:solidFill>
-                <a:schemeClr val="tx1"/>
-              </a:solidFill>
-            </a:ln>
-          </p:spPr>
-          <p:style>
-            <a:lnRef idx="2">
-              <a:schemeClr val="accent1">
-                <a:shade val="50000"/>
-              </a:schemeClr>
-            </a:lnRef>
-            <a:fillRef idx="1">
-              <a:schemeClr val="accent1"/>
-            </a:fillRef>
-            <a:effectRef idx="0">
-              <a:schemeClr val="accent1"/>
-            </a:effectRef>
-            <a:fontRef idx="minor">
-              <a:schemeClr val="lt1"/>
-            </a:fontRef>
-          </p:style>
-          <p:txBody>
-            <a:bodyPr rtlCol="0" anchor="ctr"/>
-            <a:lstStyle/>
-            <a:p>
-              <a:pPr algn="ctr"/>
-              <a:endParaRPr lang="en-GB"/>
-            </a:p>
-          </p:txBody>
-        </p:sp>
-      </p:grpSp>
-      <p:sp>
-        <p:nvSpPr>
-          <p:cNvPr id="13" name="Callout: Line with No Border 12">
+          <a:prstGeom prst="rect">
+            <a:avLst/>
+          </a:prstGeom>
+        </p:spPr>
+      </p:pic>
+      <p:pic>
+        <p:nvPicPr>
+          <p:cNvPr id="9" name="Graphic 8" descr="Woman with solid fill">
             <a:extLst>
               <a:ext uri="{FF2B5EF4-FFF2-40B4-BE49-F238E27FC236}">
-                <a16:creationId xmlns:a16="http://schemas.microsoft.com/office/drawing/2014/main" id="{31DE4C51-5C31-4CFA-BE3D-731751DE74B0}"/>
+                <a16:creationId xmlns:a16="http://schemas.microsoft.com/office/drawing/2014/main" id="{53CE0249-A61C-9215-8E46-9C5D4A4E0FCA}"/>
               </a:ext>
             </a:extLst>
           </p:cNvPr>
-          <p:cNvSpPr/>
+          <p:cNvPicPr>
+            <a:picLocks noChangeAspect="1"/>
+          </p:cNvPicPr>
           <p:nvPr/>
-        </p:nvSpPr>
+        </p:nvPicPr>
+        <p:blipFill>
+          <a:blip r:embed="rId5">
+            <a:extLst>
+              <a:ext uri="{96DAC541-7B7A-43D3-8B79-37D633B846F1}">
+                <asvg:svgBlip xmlns:asvg="http://schemas.microsoft.com/office/drawing/2016/SVG/main" r:embed="rId6"/>
+              </a:ext>
+            </a:extLst>
+          </a:blip>
+          <a:stretch>
+            <a:fillRect/>
+          </a:stretch>
+        </p:blipFill>
         <p:spPr>
           <a:xfrm>
-            <a:off x="1645920" y="3031958"/>
-            <a:ext cx="1748790" cy="818147"/>
+            <a:off x="3017254" y="2505499"/>
+            <a:ext cx="914400" cy="914400"/>
           </a:xfrm>
-          <a:prstGeom prst="callout1">
-            <a:avLst>
-              <a:gd name="adj1" fmla="val 50466"/>
-              <a:gd name="adj2" fmla="val 100987"/>
-              <a:gd name="adj3" fmla="val 50311"/>
-              <a:gd name="adj4" fmla="val 150987"/>
-            </a:avLst>
+          <a:prstGeom prst="rect">
+            <a:avLst/>
           </a:prstGeom>
-          <a:noFill/>
-          <a:ln w="38100">
-            <a:solidFill>
-              <a:schemeClr val="accent6">
-                <a:lumMod val="75000"/>
-              </a:schemeClr>
-            </a:solidFill>
-            <a:headEnd w="lg" len="lg"/>
-            <a:tailEnd type="triangle" w="lg" len="lg"/>
-          </a:ln>
         </p:spPr>
-        <p:style>
-          <a:lnRef idx="2">
-            <a:schemeClr val="accent1">
-              <a:shade val="50000"/>
-            </a:schemeClr>
-          </a:lnRef>
-          <a:fillRef idx="1">
-            <a:schemeClr val="accent1"/>
-          </a:fillRef>
-          <a:effectRef idx="0">
-            <a:schemeClr val="accent1"/>
-          </a:effectRef>
-          <a:fontRef idx="minor">
-            <a:schemeClr val="lt1"/>
-          </a:fontRef>
-        </p:style>
-        <p:txBody>
-          <a:bodyPr rtlCol="0" anchor="ctr"/>
-          <a:lstStyle/>
-          <a:p>
-            <a:pPr algn="r"/>
-            <a:r>
-              <a:rPr lang="en-GB" sz="2800" b="1" dirty="0">
-                <a:solidFill>
-                  <a:srgbClr val="7030A0"/>
-                </a:solidFill>
-              </a:rPr>
-              <a:t>Properties</a:t>
-            </a:r>
-          </a:p>
-        </p:txBody>
-      </p:sp>
-      <p:sp>
-        <p:nvSpPr>
-          <p:cNvPr id="14" name="Callout: Line with No Border 13">
+      </p:pic>
+      <p:pic>
+        <p:nvPicPr>
+          <p:cNvPr id="11" name="Graphic 10" descr="Woman outline">
             <a:extLst>
               <a:ext uri="{FF2B5EF4-FFF2-40B4-BE49-F238E27FC236}">
-                <a16:creationId xmlns:a16="http://schemas.microsoft.com/office/drawing/2014/main" id="{E5304D38-62A3-4A8C-98E0-6337163FA56E}"/>
+                <a16:creationId xmlns:a16="http://schemas.microsoft.com/office/drawing/2014/main" id="{26930976-710A-9121-E6A9-E1F1CF7BB12B}"/>
               </a:ext>
             </a:extLst>
           </p:cNvPr>
-          <p:cNvSpPr/>
+          <p:cNvPicPr>
+            <a:picLocks noChangeAspect="1"/>
+          </p:cNvPicPr>
           <p:nvPr/>
-        </p:nvSpPr>
+        </p:nvPicPr>
+        <p:blipFill>
+          <a:blip r:embed="rId7">
+            <a:extLst>
+              <a:ext uri="{96DAC541-7B7A-43D3-8B79-37D633B846F1}">
+                <asvg:svgBlip xmlns:asvg="http://schemas.microsoft.com/office/drawing/2016/SVG/main" r:embed="rId8"/>
+              </a:ext>
+            </a:extLst>
+          </a:blip>
+          <a:stretch>
+            <a:fillRect/>
+          </a:stretch>
+        </p:blipFill>
         <p:spPr>
           <a:xfrm>
-            <a:off x="1748790" y="4632197"/>
-            <a:ext cx="1668780" cy="458724"/>
+            <a:off x="1358562" y="2071279"/>
+            <a:ext cx="914400" cy="914400"/>
           </a:xfrm>
-          <a:prstGeom prst="callout1">
-            <a:avLst>
-              <a:gd name="adj1" fmla="val 50466"/>
-              <a:gd name="adj2" fmla="val 100987"/>
-              <a:gd name="adj3" fmla="val 50311"/>
-              <a:gd name="adj4" fmla="val 150987"/>
-            </a:avLst>
+          <a:prstGeom prst="rect">
+            <a:avLst/>
           </a:prstGeom>
-          <a:noFill/>
-          <a:ln w="38100">
-            <a:solidFill>
-              <a:schemeClr val="accent6">
-                <a:lumMod val="75000"/>
-              </a:schemeClr>
-            </a:solidFill>
-            <a:headEnd w="lg" len="lg"/>
-            <a:tailEnd type="triangle" w="lg" len="lg"/>
-          </a:ln>
         </p:spPr>
-        <p:style>
-          <a:lnRef idx="2">
-            <a:schemeClr val="accent1">
-              <a:shade val="50000"/>
-            </a:schemeClr>
-          </a:lnRef>
-          <a:fillRef idx="1">
-            <a:schemeClr val="accent1"/>
-          </a:fillRef>
-          <a:effectRef idx="0">
-            <a:schemeClr val="accent1"/>
-          </a:effectRef>
-          <a:fontRef idx="minor">
-            <a:schemeClr val="lt1"/>
-          </a:fontRef>
-        </p:style>
-        <p:txBody>
-          <a:bodyPr rtlCol="0" anchor="ctr"/>
-          <a:lstStyle/>
-          <a:p>
-            <a:pPr algn="r"/>
-            <a:r>
-              <a:rPr lang="en-GB" sz="2800" b="1" dirty="0">
-                <a:solidFill>
-                  <a:srgbClr val="7030A0"/>
-                </a:solidFill>
-              </a:rPr>
-              <a:t>Methods</a:t>
-            </a:r>
-          </a:p>
-        </p:txBody>
-      </p:sp>
-      <p:sp>
-        <p:nvSpPr>
-          <p:cNvPr id="15" name="Callout: Line with No Border 14">
+      </p:pic>
+      <p:pic>
+        <p:nvPicPr>
+          <p:cNvPr id="13" name="Graphic 12" descr="Man outline">
             <a:extLst>
               <a:ext uri="{FF2B5EF4-FFF2-40B4-BE49-F238E27FC236}">
-                <a16:creationId xmlns:a16="http://schemas.microsoft.com/office/drawing/2014/main" id="{EFB1A153-6E9D-4603-B7E7-DB48DD6E2DED}"/>
+                <a16:creationId xmlns:a16="http://schemas.microsoft.com/office/drawing/2014/main" id="{24FB712A-84E3-D214-D829-76438CF1FF71}"/>
               </a:ext>
             </a:extLst>
           </p:cNvPr>
-          <p:cNvSpPr/>
+          <p:cNvPicPr>
+            <a:picLocks noChangeAspect="1"/>
+          </p:cNvPicPr>
           <p:nvPr/>
-        </p:nvSpPr>
+        </p:nvPicPr>
+        <p:blipFill>
+          <a:blip r:embed="rId9">
+            <a:extLst>
+              <a:ext uri="{96DAC541-7B7A-43D3-8B79-37D633B846F1}">
+                <asvg:svgBlip xmlns:asvg="http://schemas.microsoft.com/office/drawing/2016/SVG/main" r:embed="rId10"/>
+              </a:ext>
+            </a:extLst>
+          </a:blip>
+          <a:stretch>
+            <a:fillRect/>
+          </a:stretch>
+        </p:blipFill>
         <p:spPr>
           <a:xfrm>
-            <a:off x="1551472" y="2100453"/>
-            <a:ext cx="1866098" cy="458724"/>
+            <a:off x="2267603" y="1617178"/>
+            <a:ext cx="914400" cy="914400"/>
           </a:xfrm>
-          <a:prstGeom prst="callout1">
-            <a:avLst>
-              <a:gd name="adj1" fmla="val 50466"/>
-              <a:gd name="adj2" fmla="val 100987"/>
-              <a:gd name="adj3" fmla="val 50311"/>
-              <a:gd name="adj4" fmla="val 145883"/>
-            </a:avLst>
+          <a:prstGeom prst="rect">
+            <a:avLst/>
           </a:prstGeom>
-          <a:noFill/>
-          <a:ln w="38100">
-            <a:solidFill>
-              <a:schemeClr val="accent6">
-                <a:lumMod val="75000"/>
-              </a:schemeClr>
-            </a:solidFill>
-            <a:headEnd w="lg" len="lg"/>
-            <a:tailEnd type="triangle" w="lg" len="lg"/>
-          </a:ln>
         </p:spPr>
-        <p:style>
-          <a:lnRef idx="2">
-            <a:schemeClr val="accent1">
-              <a:shade val="50000"/>
-            </a:schemeClr>
-          </a:lnRef>
-          <a:fillRef idx="1">
-            <a:schemeClr val="accent1"/>
-          </a:fillRef>
-          <a:effectRef idx="0">
-            <a:schemeClr val="accent1"/>
-          </a:effectRef>
-          <a:fontRef idx="minor">
-            <a:schemeClr val="lt1"/>
-          </a:fontRef>
-        </p:style>
-        <p:txBody>
-          <a:bodyPr rtlCol="0" anchor="ctr"/>
-          <a:lstStyle/>
-          <a:p>
-            <a:pPr algn="r"/>
-            <a:r>
-              <a:rPr lang="en-GB" sz="2800" b="1" dirty="0">
-                <a:solidFill>
-                  <a:srgbClr val="7030A0"/>
-                </a:solidFill>
-              </a:rPr>
-              <a:t>Class name</a:t>
-            </a:r>
-          </a:p>
-        </p:txBody>
-      </p:sp>
+      </p:pic>
+      <p:pic>
+        <p:nvPicPr>
+          <p:cNvPr id="15" name="Graphic 14" descr="Closed book with solid fill">
+            <a:extLst>
+              <a:ext uri="{FF2B5EF4-FFF2-40B4-BE49-F238E27FC236}">
+                <a16:creationId xmlns:a16="http://schemas.microsoft.com/office/drawing/2014/main" id="{C2FC3120-4859-0E36-9B84-AD9C76B1AA36}"/>
+              </a:ext>
+            </a:extLst>
+          </p:cNvPr>
+          <p:cNvPicPr>
+            <a:picLocks noChangeAspect="1"/>
+          </p:cNvPicPr>
+          <p:nvPr/>
+        </p:nvPicPr>
+        <p:blipFill>
+          <a:blip r:embed="rId11">
+            <a:extLst>
+              <a:ext uri="{96DAC541-7B7A-43D3-8B79-37D633B846F1}">
+                <asvg:svgBlip xmlns:asvg="http://schemas.microsoft.com/office/drawing/2016/SVG/main" r:embed="rId12"/>
+              </a:ext>
+            </a:extLst>
+          </a:blip>
+          <a:stretch>
+            <a:fillRect/>
+          </a:stretch>
+        </p:blipFill>
+        <p:spPr>
+          <a:xfrm>
+            <a:off x="7834348" y="1752419"/>
+            <a:ext cx="914400" cy="914400"/>
+          </a:xfrm>
+          <a:prstGeom prst="rect">
+            <a:avLst/>
+          </a:prstGeom>
+        </p:spPr>
+      </p:pic>
+      <p:pic>
+        <p:nvPicPr>
+          <p:cNvPr id="17" name="Graphic 16" descr="Closed book outline">
+            <a:extLst>
+              <a:ext uri="{FF2B5EF4-FFF2-40B4-BE49-F238E27FC236}">
+                <a16:creationId xmlns:a16="http://schemas.microsoft.com/office/drawing/2014/main" id="{58687F61-8D2B-ED11-7BDD-4ACE86BAE362}"/>
+              </a:ext>
+            </a:extLst>
+          </p:cNvPr>
+          <p:cNvPicPr>
+            <a:picLocks noChangeAspect="1"/>
+          </p:cNvPicPr>
+          <p:nvPr/>
+        </p:nvPicPr>
+        <p:blipFill>
+          <a:blip r:embed="rId13">
+            <a:extLst>
+              <a:ext uri="{96DAC541-7B7A-43D3-8B79-37D633B846F1}">
+                <asvg:svgBlip xmlns:asvg="http://schemas.microsoft.com/office/drawing/2016/SVG/main" r:embed="rId14"/>
+              </a:ext>
+            </a:extLst>
+          </a:blip>
+          <a:stretch>
+            <a:fillRect/>
+          </a:stretch>
+        </p:blipFill>
+        <p:spPr>
+          <a:xfrm>
+            <a:off x="7511065" y="2917953"/>
+            <a:ext cx="914400" cy="914400"/>
+          </a:xfrm>
+          <a:prstGeom prst="rect">
+            <a:avLst/>
+          </a:prstGeom>
+        </p:spPr>
+      </p:pic>
+      <p:pic>
+        <p:nvPicPr>
+          <p:cNvPr id="18" name="Graphic 17" descr="Closed book with solid fill">
+            <a:extLst>
+              <a:ext uri="{FF2B5EF4-FFF2-40B4-BE49-F238E27FC236}">
+                <a16:creationId xmlns:a16="http://schemas.microsoft.com/office/drawing/2014/main" id="{C8ECCEDB-84CB-E10E-29A0-6A7C6A8F8723}"/>
+              </a:ext>
+            </a:extLst>
+          </p:cNvPr>
+          <p:cNvPicPr>
+            <a:picLocks noChangeAspect="1"/>
+          </p:cNvPicPr>
+          <p:nvPr/>
+        </p:nvPicPr>
+        <p:blipFill>
+          <a:blip r:embed="rId11">
+            <a:extLst>
+              <a:ext uri="{96DAC541-7B7A-43D3-8B79-37D633B846F1}">
+                <asvg:svgBlip xmlns:asvg="http://schemas.microsoft.com/office/drawing/2016/SVG/main" r:embed="rId12"/>
+              </a:ext>
+            </a:extLst>
+          </a:blip>
+          <a:stretch>
+            <a:fillRect/>
+          </a:stretch>
+        </p:blipFill>
+        <p:spPr>
+          <a:xfrm>
+            <a:off x="8805412" y="3129636"/>
+            <a:ext cx="914400" cy="914400"/>
+          </a:xfrm>
+          <a:prstGeom prst="rect">
+            <a:avLst/>
+          </a:prstGeom>
+        </p:spPr>
+      </p:pic>
+      <p:pic>
+        <p:nvPicPr>
+          <p:cNvPr id="19" name="Graphic 18" descr="Closed book outline">
+            <a:extLst>
+              <a:ext uri="{FF2B5EF4-FFF2-40B4-BE49-F238E27FC236}">
+                <a16:creationId xmlns:a16="http://schemas.microsoft.com/office/drawing/2014/main" id="{F77B082A-3A6A-6638-5522-14D3AAE6115F}"/>
+              </a:ext>
+            </a:extLst>
+          </p:cNvPr>
+          <p:cNvPicPr>
+            <a:picLocks noChangeAspect="1"/>
+          </p:cNvPicPr>
+          <p:nvPr/>
+        </p:nvPicPr>
+        <p:blipFill>
+          <a:blip r:embed="rId13">
+            <a:extLst>
+              <a:ext uri="{96DAC541-7B7A-43D3-8B79-37D633B846F1}">
+                <asvg:svgBlip xmlns:asvg="http://schemas.microsoft.com/office/drawing/2016/SVG/main" r:embed="rId14"/>
+              </a:ext>
+            </a:extLst>
+          </a:blip>
+          <a:stretch>
+            <a:fillRect/>
+          </a:stretch>
+        </p:blipFill>
+        <p:spPr>
+          <a:xfrm>
+            <a:off x="9226509" y="1899565"/>
+            <a:ext cx="914400" cy="914400"/>
+          </a:xfrm>
+          <a:prstGeom prst="rect">
+            <a:avLst/>
+          </a:prstGeom>
+        </p:spPr>
+      </p:pic>
       <p:sp>
         <p:nvSpPr>
-          <p:cNvPr id="16" name="TextBox 15">
+          <p:cNvPr id="27" name="TextBox 26">
             <a:extLst>
               <a:ext uri="{FF2B5EF4-FFF2-40B4-BE49-F238E27FC236}">
-                <a16:creationId xmlns:a16="http://schemas.microsoft.com/office/drawing/2014/main" id="{F9DA67FF-CA17-47F2-BE12-2F4EF7BC1D21}"/>
+                <a16:creationId xmlns:a16="http://schemas.microsoft.com/office/drawing/2014/main" id="{DE55E28E-12CA-4300-79D8-A465E7328BD1}"/>
               </a:ext>
             </a:extLst>
           </p:cNvPr>
@@ -15232,38 +15747,40 @@
         </p:nvSpPr>
         <p:spPr>
           <a:xfrm>
-            <a:off x="5572743" y="2035957"/>
-            <a:ext cx="1072730" cy="523220"/>
+            <a:off x="2084902" y="5058509"/>
+            <a:ext cx="1279802" cy="584775"/>
           </a:xfrm>
           <a:prstGeom prst="rect">
             <a:avLst/>
           </a:prstGeom>
           <a:noFill/>
+          <a:ln w="19050">
+            <a:solidFill>
+              <a:schemeClr val="tx1"/>
+            </a:solidFill>
+          </a:ln>
         </p:spPr>
         <p:txBody>
-          <a:bodyPr wrap="none" rtlCol="0">
+          <a:bodyPr wrap="square" rtlCol="0">
             <a:spAutoFit/>
           </a:bodyPr>
           <a:lstStyle/>
           <a:p>
             <a:pPr algn="ctr"/>
-            <a:r>
-              <a:rPr lang="en-GB" sz="2800" b="1" dirty="0">
-                <a:solidFill>
-                  <a:schemeClr val="accent1"/>
-                </a:solidFill>
-              </a:rPr>
-              <a:t>Name</a:t>
-            </a:r>
+            <a:endParaRPr lang="en-GB" sz="3200" b="1" dirty="0">
+              <a:solidFill>
+                <a:srgbClr val="0070C0"/>
+              </a:solidFill>
+            </a:endParaRPr>
           </a:p>
         </p:txBody>
       </p:sp>
       <p:sp>
         <p:nvSpPr>
-          <p:cNvPr id="17" name="TextBox 16">
+          <p:cNvPr id="28" name="TextBox 27">
             <a:extLst>
               <a:ext uri="{FF2B5EF4-FFF2-40B4-BE49-F238E27FC236}">
-                <a16:creationId xmlns:a16="http://schemas.microsoft.com/office/drawing/2014/main" id="{AE596573-766B-4AFA-B34B-C56D5BA1BE63}"/>
+                <a16:creationId xmlns:a16="http://schemas.microsoft.com/office/drawing/2014/main" id="{7B412730-5CDA-D1F4-5FDC-B0A55A466C1D}"/>
               </a:ext>
             </a:extLst>
           </p:cNvPr>
@@ -15272,13 +15789,18 @@
         </p:nvSpPr>
         <p:spPr>
           <a:xfrm>
-            <a:off x="4623208" y="2730787"/>
-            <a:ext cx="2971800" cy="1384995"/>
+            <a:off x="7978519" y="5058508"/>
+            <a:ext cx="1540458" cy="584775"/>
           </a:xfrm>
           <a:prstGeom prst="rect">
             <a:avLst/>
           </a:prstGeom>
           <a:noFill/>
+          <a:ln w="19050">
+            <a:solidFill>
+              <a:schemeClr val="tx1"/>
+            </a:solidFill>
+          </a:ln>
         </p:spPr>
         <p:txBody>
           <a:bodyPr wrap="square" rtlCol="0">
@@ -15287,217 +15809,18 @@
           <a:lstStyle/>
           <a:p>
             <a:pPr algn="ctr"/>
-            <a:r>
-              <a:rPr lang="en-GB" sz="2800" b="1" dirty="0">
-                <a:solidFill>
-                  <a:schemeClr val="accent1"/>
-                </a:solidFill>
-              </a:rPr>
-              <a:t>Attributes /</a:t>
-            </a:r>
-          </a:p>
-          <a:p>
-            <a:pPr algn="ctr"/>
-            <a:r>
-              <a:rPr lang="en-GB" sz="2800" b="1" dirty="0">
-                <a:solidFill>
-                  <a:schemeClr val="accent1"/>
-                </a:solidFill>
-              </a:rPr>
-              <a:t> fields / </a:t>
-            </a:r>
-          </a:p>
-          <a:p>
-            <a:pPr algn="ctr"/>
-            <a:r>
-              <a:rPr lang="en-GB" sz="2800" b="1" dirty="0">
-                <a:solidFill>
-                  <a:schemeClr val="accent1"/>
-                </a:solidFill>
-              </a:rPr>
-              <a:t>instance variables</a:t>
-            </a:r>
-          </a:p>
-        </p:txBody>
-      </p:sp>
-      <p:sp>
-        <p:nvSpPr>
-          <p:cNvPr id="18" name="TextBox 17">
-            <a:extLst>
-              <a:ext uri="{FF2B5EF4-FFF2-40B4-BE49-F238E27FC236}">
-                <a16:creationId xmlns:a16="http://schemas.microsoft.com/office/drawing/2014/main" id="{D3DE1068-9C54-4D92-A45F-8DEAD06D3824}"/>
-              </a:ext>
-            </a:extLst>
-          </p:cNvPr>
-          <p:cNvSpPr txBox="1"/>
-          <p:nvPr/>
-        </p:nvSpPr>
-        <p:spPr>
-          <a:xfrm>
-            <a:off x="4966810" y="4439603"/>
-            <a:ext cx="2284600" cy="954107"/>
-          </a:xfrm>
-          <a:prstGeom prst="rect">
-            <a:avLst/>
-          </a:prstGeom>
-          <a:noFill/>
-        </p:spPr>
-        <p:txBody>
-          <a:bodyPr wrap="square" rtlCol="0">
-            <a:spAutoFit/>
-          </a:bodyPr>
-          <a:lstStyle/>
-          <a:p>
-            <a:pPr algn="ctr"/>
-            <a:r>
-              <a:rPr lang="en-GB" sz="2800" b="1" dirty="0">
-                <a:solidFill>
-                  <a:schemeClr val="accent1"/>
-                </a:solidFill>
-              </a:rPr>
-              <a:t>Functions / Procedures</a:t>
-            </a:r>
-          </a:p>
-        </p:txBody>
-      </p:sp>
-      <p:sp>
-        <p:nvSpPr>
-          <p:cNvPr id="19" name="Callout: Line with No Border 18">
-            <a:extLst>
-              <a:ext uri="{FF2B5EF4-FFF2-40B4-BE49-F238E27FC236}">
-                <a16:creationId xmlns:a16="http://schemas.microsoft.com/office/drawing/2014/main" id="{AE75B9AD-FFA7-46C7-8C97-FBD2DEC6546A}"/>
-              </a:ext>
-            </a:extLst>
-          </p:cNvPr>
-          <p:cNvSpPr/>
-          <p:nvPr/>
-        </p:nvSpPr>
-        <p:spPr>
-          <a:xfrm flipH="1">
-            <a:off x="8566810" y="3031958"/>
-            <a:ext cx="1200600" cy="818147"/>
-          </a:xfrm>
-          <a:prstGeom prst="callout1">
-            <a:avLst>
-              <a:gd name="adj1" fmla="val 50466"/>
-              <a:gd name="adj2" fmla="val 100987"/>
-              <a:gd name="adj3" fmla="val 50311"/>
-              <a:gd name="adj4" fmla="val 150987"/>
-            </a:avLst>
-          </a:prstGeom>
-          <a:noFill/>
-          <a:ln w="38100">
-            <a:solidFill>
-              <a:schemeClr val="accent6">
-                <a:lumMod val="75000"/>
-              </a:schemeClr>
-            </a:solidFill>
-            <a:headEnd w="lg" len="lg"/>
-            <a:tailEnd type="triangle" w="lg" len="lg"/>
-          </a:ln>
-        </p:spPr>
-        <p:style>
-          <a:lnRef idx="2">
-            <a:schemeClr val="accent1">
-              <a:shade val="50000"/>
-            </a:schemeClr>
-          </a:lnRef>
-          <a:fillRef idx="1">
-            <a:schemeClr val="accent1"/>
-          </a:fillRef>
-          <a:effectRef idx="0">
-            <a:schemeClr val="accent1"/>
-          </a:effectRef>
-          <a:fontRef idx="minor">
-            <a:schemeClr val="lt1"/>
-          </a:fontRef>
-        </p:style>
-        <p:txBody>
-          <a:bodyPr rtlCol="0" anchor="ctr"/>
-          <a:lstStyle/>
-          <a:p>
-            <a:r>
-              <a:rPr lang="en-GB" sz="2800" b="1" i="1" dirty="0">
-                <a:solidFill>
-                  <a:srgbClr val="7030A0"/>
-                </a:solidFill>
-              </a:rPr>
-              <a:t>Nouns</a:t>
-            </a:r>
-          </a:p>
-        </p:txBody>
-      </p:sp>
-      <p:sp>
-        <p:nvSpPr>
-          <p:cNvPr id="20" name="Callout: Line with No Border 19">
-            <a:extLst>
-              <a:ext uri="{FF2B5EF4-FFF2-40B4-BE49-F238E27FC236}">
-                <a16:creationId xmlns:a16="http://schemas.microsoft.com/office/drawing/2014/main" id="{11F1C24C-E417-4481-B9E5-EE522678B769}"/>
-              </a:ext>
-            </a:extLst>
-          </p:cNvPr>
-          <p:cNvSpPr/>
-          <p:nvPr/>
-        </p:nvSpPr>
-        <p:spPr>
-          <a:xfrm flipH="1">
-            <a:off x="8566810" y="4452485"/>
-            <a:ext cx="1200600" cy="818147"/>
-          </a:xfrm>
-          <a:prstGeom prst="callout1">
-            <a:avLst>
-              <a:gd name="adj1" fmla="val 50466"/>
-              <a:gd name="adj2" fmla="val 100987"/>
-              <a:gd name="adj3" fmla="val 50311"/>
-              <a:gd name="adj4" fmla="val 150987"/>
-            </a:avLst>
-          </a:prstGeom>
-          <a:noFill/>
-          <a:ln w="38100">
-            <a:solidFill>
-              <a:schemeClr val="accent6">
-                <a:lumMod val="75000"/>
-              </a:schemeClr>
-            </a:solidFill>
-            <a:headEnd w="lg" len="lg"/>
-            <a:tailEnd type="triangle" w="lg" len="lg"/>
-          </a:ln>
-        </p:spPr>
-        <p:style>
-          <a:lnRef idx="2">
-            <a:schemeClr val="accent1">
-              <a:shade val="50000"/>
-            </a:schemeClr>
-          </a:lnRef>
-          <a:fillRef idx="1">
-            <a:schemeClr val="accent1"/>
-          </a:fillRef>
-          <a:effectRef idx="0">
-            <a:schemeClr val="accent1"/>
-          </a:effectRef>
-          <a:fontRef idx="minor">
-            <a:schemeClr val="lt1"/>
-          </a:fontRef>
-        </p:style>
-        <p:txBody>
-          <a:bodyPr rtlCol="0" anchor="ctr"/>
-          <a:lstStyle/>
-          <a:p>
-            <a:r>
-              <a:rPr lang="en-GB" sz="2800" b="1" i="1" dirty="0">
-                <a:solidFill>
-                  <a:srgbClr val="7030A0"/>
-                </a:solidFill>
-              </a:rPr>
-              <a:t>Verbs</a:t>
-            </a:r>
+            <a:endParaRPr lang="en-GB" sz="3200" b="1" dirty="0">
+              <a:solidFill>
+                <a:srgbClr val="0070C0"/>
+              </a:solidFill>
+            </a:endParaRPr>
           </a:p>
         </p:txBody>
       </p:sp>
     </p:spTree>
     <p:extLst>
       <p:ext uri="{BB962C8B-B14F-4D97-AF65-F5344CB8AC3E}">
-        <p14:creationId xmlns:p14="http://schemas.microsoft.com/office/powerpoint/2010/main" val="1900925123"/>
+        <p14:creationId xmlns:p14="http://schemas.microsoft.com/office/powerpoint/2010/main" val="2672932940"/>
       </p:ext>
     </p:extLst>
   </p:cSld>
@@ -15525,7 +15848,7 @@
                             </p:stCondLst>
                             <p:childTnLst>
                               <p:par>
-                                <p:cTn id="5" presetID="22" presetClass="entr" presetSubtype="8" fill="hold" grpId="0" nodeType="clickEffect">
+                                <p:cTn id="5" presetID="22" presetClass="entr" presetSubtype="4" fill="hold" nodeType="clickEffect">
                                   <p:stCondLst>
                                     <p:cond delay="0"/>
                                   </p:stCondLst>
@@ -15533,6 +15856,164 @@
                                     <p:set>
                                       <p:cBhvr>
                                         <p:cTn id="6" dur="1" fill="hold">
+                                          <p:stCondLst>
+                                            <p:cond delay="0"/>
+                                          </p:stCondLst>
+                                        </p:cTn>
+                                        <p:tgtEl>
+                                          <p:spTgt spid="11"/>
+                                        </p:tgtEl>
+                                        <p:attrNameLst>
+                                          <p:attrName>style.visibility</p:attrName>
+                                        </p:attrNameLst>
+                                      </p:cBhvr>
+                                      <p:to>
+                                        <p:strVal val="visible"/>
+                                      </p:to>
+                                    </p:set>
+                                    <p:animEffect transition="in" filter="wipe(down)">
+                                      <p:cBhvr>
+                                        <p:cTn id="7" dur="1000"/>
+                                        <p:tgtEl>
+                                          <p:spTgt spid="11"/>
+                                        </p:tgtEl>
+                                      </p:cBhvr>
+                                    </p:animEffect>
+                                  </p:childTnLst>
+                                </p:cTn>
+                              </p:par>
+                              <p:par>
+                                <p:cTn id="8" presetID="22" presetClass="entr" presetSubtype="4" fill="hold" nodeType="withEffect">
+                                  <p:stCondLst>
+                                    <p:cond delay="0"/>
+                                  </p:stCondLst>
+                                  <p:childTnLst>
+                                    <p:set>
+                                      <p:cBhvr>
+                                        <p:cTn id="9" dur="1" fill="hold">
+                                          <p:stCondLst>
+                                            <p:cond delay="0"/>
+                                          </p:stCondLst>
+                                        </p:cTn>
+                                        <p:tgtEl>
+                                          <p:spTgt spid="13"/>
+                                        </p:tgtEl>
+                                        <p:attrNameLst>
+                                          <p:attrName>style.visibility</p:attrName>
+                                        </p:attrNameLst>
+                                      </p:cBhvr>
+                                      <p:to>
+                                        <p:strVal val="visible"/>
+                                      </p:to>
+                                    </p:set>
+                                    <p:animEffect transition="in" filter="wipe(down)">
+                                      <p:cBhvr>
+                                        <p:cTn id="10" dur="1000"/>
+                                        <p:tgtEl>
+                                          <p:spTgt spid="13"/>
+                                        </p:tgtEl>
+                                      </p:cBhvr>
+                                    </p:animEffect>
+                                  </p:childTnLst>
+                                </p:cTn>
+                              </p:par>
+                              <p:par>
+                                <p:cTn id="11" presetID="22" presetClass="entr" presetSubtype="4" fill="hold" nodeType="withEffect">
+                                  <p:stCondLst>
+                                    <p:cond delay="0"/>
+                                  </p:stCondLst>
+                                  <p:childTnLst>
+                                    <p:set>
+                                      <p:cBhvr>
+                                        <p:cTn id="12" dur="1" fill="hold">
+                                          <p:stCondLst>
+                                            <p:cond delay="0"/>
+                                          </p:stCondLst>
+                                        </p:cTn>
+                                        <p:tgtEl>
+                                          <p:spTgt spid="9"/>
+                                        </p:tgtEl>
+                                        <p:attrNameLst>
+                                          <p:attrName>style.visibility</p:attrName>
+                                        </p:attrNameLst>
+                                      </p:cBhvr>
+                                      <p:to>
+                                        <p:strVal val="visible"/>
+                                      </p:to>
+                                    </p:set>
+                                    <p:animEffect transition="in" filter="wipe(down)">
+                                      <p:cBhvr>
+                                        <p:cTn id="13" dur="1000"/>
+                                        <p:tgtEl>
+                                          <p:spTgt spid="9"/>
+                                        </p:tgtEl>
+                                      </p:cBhvr>
+                                    </p:animEffect>
+                                  </p:childTnLst>
+                                </p:cTn>
+                              </p:par>
+                              <p:par>
+                                <p:cTn id="14" presetID="22" presetClass="entr" presetSubtype="4" fill="hold" nodeType="withEffect">
+                                  <p:stCondLst>
+                                    <p:cond delay="0"/>
+                                  </p:stCondLst>
+                                  <p:childTnLst>
+                                    <p:set>
+                                      <p:cBhvr>
+                                        <p:cTn id="15" dur="1" fill="hold">
+                                          <p:stCondLst>
+                                            <p:cond delay="0"/>
+                                          </p:stCondLst>
+                                        </p:cTn>
+                                        <p:tgtEl>
+                                          <p:spTgt spid="5"/>
+                                        </p:tgtEl>
+                                        <p:attrNameLst>
+                                          <p:attrName>style.visibility</p:attrName>
+                                        </p:attrNameLst>
+                                      </p:cBhvr>
+                                      <p:to>
+                                        <p:strVal val="visible"/>
+                                      </p:to>
+                                    </p:set>
+                                    <p:animEffect transition="in" filter="wipe(down)">
+                                      <p:cBhvr>
+                                        <p:cTn id="16" dur="1000"/>
+                                        <p:tgtEl>
+                                          <p:spTgt spid="5"/>
+                                        </p:tgtEl>
+                                      </p:cBhvr>
+                                    </p:animEffect>
+                                  </p:childTnLst>
+                                </p:cTn>
+                              </p:par>
+                            </p:childTnLst>
+                          </p:cTn>
+                        </p:par>
+                      </p:childTnLst>
+                    </p:cTn>
+                  </p:par>
+                  <p:par>
+                    <p:cTn id="17" fill="hold">
+                      <p:stCondLst>
+                        <p:cond delay="indefinite"/>
+                      </p:stCondLst>
+                      <p:childTnLst>
+                        <p:par>
+                          <p:cTn id="18" fill="hold">
+                            <p:stCondLst>
+                              <p:cond delay="0"/>
+                            </p:stCondLst>
+                            <p:childTnLst>
+                              <p:par>
+                                <p:cTn id="19" presetID="22" presetClass="entr" presetSubtype="4" fill="hold" nodeType="clickEffect">
+                                  <p:stCondLst>
+                                    <p:cond delay="0"/>
+                                  </p:stCondLst>
+                                  <p:childTnLst>
+                                    <p:set>
+                                      <p:cBhvr>
+                                        <p:cTn id="20" dur="1" fill="hold">
                                           <p:stCondLst>
                                             <p:cond delay="0"/>
                                           </p:stCondLst>
@@ -15548,9 +16029,9 @@
                                         <p:strVal val="visible"/>
                                       </p:to>
                                     </p:set>
-                                    <p:animEffect transition="in" filter="wipe(left)">
+                                    <p:animEffect transition="in" filter="wipe(down)">
                                       <p:cBhvr>
-                                        <p:cTn id="7" dur="1500"/>
+                                        <p:cTn id="21" dur="1000"/>
                                         <p:tgtEl>
                                           <p:spTgt spid="15"/>
                                         </p:tgtEl>
@@ -15559,121 +16040,15 @@
                                   </p:childTnLst>
                                 </p:cTn>
                               </p:par>
-                            </p:childTnLst>
-                          </p:cTn>
-                        </p:par>
-                        <p:par>
-                          <p:cTn id="8" fill="hold">
-                            <p:stCondLst>
-                              <p:cond delay="1500"/>
-                            </p:stCondLst>
-                            <p:childTnLst>
                               <p:par>
-                                <p:cTn id="9" presetID="22" presetClass="entr" presetSubtype="8" fill="hold" grpId="0" nodeType="afterEffect">
+                                <p:cTn id="22" presetID="22" presetClass="entr" presetSubtype="4" fill="hold" nodeType="withEffect">
                                   <p:stCondLst>
                                     <p:cond delay="0"/>
                                   </p:stCondLst>
                                   <p:childTnLst>
                                     <p:set>
                                       <p:cBhvr>
-                                        <p:cTn id="10" dur="1" fill="hold">
-                                          <p:stCondLst>
-                                            <p:cond delay="0"/>
-                                          </p:stCondLst>
-                                        </p:cTn>
-                                        <p:tgtEl>
-                                          <p:spTgt spid="16"/>
-                                        </p:tgtEl>
-                                        <p:attrNameLst>
-                                          <p:attrName>style.visibility</p:attrName>
-                                        </p:attrNameLst>
-                                      </p:cBhvr>
-                                      <p:to>
-                                        <p:strVal val="visible"/>
-                                      </p:to>
-                                    </p:set>
-                                    <p:animEffect transition="in" filter="wipe(left)">
-                                      <p:cBhvr>
-                                        <p:cTn id="11" dur="1000"/>
-                                        <p:tgtEl>
-                                          <p:spTgt spid="16"/>
-                                        </p:tgtEl>
-                                      </p:cBhvr>
-                                    </p:animEffect>
-                                  </p:childTnLst>
-                                </p:cTn>
-                              </p:par>
-                            </p:childTnLst>
-                          </p:cTn>
-                        </p:par>
-                      </p:childTnLst>
-                    </p:cTn>
-                  </p:par>
-                  <p:par>
-                    <p:cTn id="12" fill="hold">
-                      <p:stCondLst>
-                        <p:cond delay="indefinite"/>
-                      </p:stCondLst>
-                      <p:childTnLst>
-                        <p:par>
-                          <p:cTn id="13" fill="hold">
-                            <p:stCondLst>
-                              <p:cond delay="0"/>
-                            </p:stCondLst>
-                            <p:childTnLst>
-                              <p:par>
-                                <p:cTn id="14" presetID="22" presetClass="entr" presetSubtype="8" fill="hold" grpId="0" nodeType="clickEffect">
-                                  <p:stCondLst>
-                                    <p:cond delay="0"/>
-                                  </p:stCondLst>
-                                  <p:childTnLst>
-                                    <p:set>
-                                      <p:cBhvr>
-                                        <p:cTn id="15" dur="1" fill="hold">
-                                          <p:stCondLst>
-                                            <p:cond delay="0"/>
-                                          </p:stCondLst>
-                                        </p:cTn>
-                                        <p:tgtEl>
-                                          <p:spTgt spid="13"/>
-                                        </p:tgtEl>
-                                        <p:attrNameLst>
-                                          <p:attrName>style.visibility</p:attrName>
-                                        </p:attrNameLst>
-                                      </p:cBhvr>
-                                      <p:to>
-                                        <p:strVal val="visible"/>
-                                      </p:to>
-                                    </p:set>
-                                    <p:animEffect transition="in" filter="wipe(left)">
-                                      <p:cBhvr>
-                                        <p:cTn id="16" dur="1500"/>
-                                        <p:tgtEl>
-                                          <p:spTgt spid="13"/>
-                                        </p:tgtEl>
-                                      </p:cBhvr>
-                                    </p:animEffect>
-                                  </p:childTnLst>
-                                </p:cTn>
-                              </p:par>
-                            </p:childTnLst>
-                          </p:cTn>
-                        </p:par>
-                        <p:par>
-                          <p:cTn id="17" fill="hold">
-                            <p:stCondLst>
-                              <p:cond delay="1500"/>
-                            </p:stCondLst>
-                            <p:childTnLst>
-                              <p:par>
-                                <p:cTn id="18" presetID="22" presetClass="entr" presetSubtype="1" fill="hold" grpId="0" nodeType="afterEffect">
-                                  <p:stCondLst>
-                                    <p:cond delay="0"/>
-                                  </p:stCondLst>
-                                  <p:childTnLst>
-                                    <p:set>
-                                      <p:cBhvr>
-                                        <p:cTn id="19" dur="1" fill="hold">
+                                        <p:cTn id="23" dur="1" fill="hold">
                                           <p:stCondLst>
                                             <p:cond delay="0"/>
                                           </p:stCondLst>
@@ -15689,9 +16064,9 @@
                                         <p:strVal val="visible"/>
                                       </p:to>
                                     </p:set>
-                                    <p:animEffect transition="in" filter="wipe(up)">
+                                    <p:animEffect transition="in" filter="wipe(down)">
                                       <p:cBhvr>
-                                        <p:cTn id="20" dur="1000"/>
+                                        <p:cTn id="24" dur="1000"/>
                                         <p:tgtEl>
                                           <p:spTgt spid="17"/>
                                         </p:tgtEl>
@@ -15700,39 +16075,21 @@
                                   </p:childTnLst>
                                 </p:cTn>
                               </p:par>
-                            </p:childTnLst>
-                          </p:cTn>
-                        </p:par>
-                      </p:childTnLst>
-                    </p:cTn>
-                  </p:par>
-                  <p:par>
-                    <p:cTn id="21" fill="hold">
-                      <p:stCondLst>
-                        <p:cond delay="indefinite"/>
-                      </p:stCondLst>
-                      <p:childTnLst>
-                        <p:par>
-                          <p:cTn id="22" fill="hold">
-                            <p:stCondLst>
-                              <p:cond delay="0"/>
-                            </p:stCondLst>
-                            <p:childTnLst>
                               <p:par>
-                                <p:cTn id="23" presetID="22" presetClass="entr" presetSubtype="8" fill="hold" grpId="0" nodeType="clickEffect">
+                                <p:cTn id="25" presetID="22" presetClass="entr" presetSubtype="4" fill="hold" nodeType="withEffect">
                                   <p:stCondLst>
                                     <p:cond delay="0"/>
                                   </p:stCondLst>
                                   <p:childTnLst>
                                     <p:set>
                                       <p:cBhvr>
-                                        <p:cTn id="24" dur="1" fill="hold">
+                                        <p:cTn id="26" dur="1" fill="hold">
                                           <p:stCondLst>
                                             <p:cond delay="0"/>
                                           </p:stCondLst>
                                         </p:cTn>
                                         <p:tgtEl>
-                                          <p:spTgt spid="14"/>
+                                          <p:spTgt spid="19"/>
                                         </p:tgtEl>
                                         <p:attrNameLst>
                                           <p:attrName>style.visibility</p:attrName>
@@ -15742,35 +16099,26 @@
                                         <p:strVal val="visible"/>
                                       </p:to>
                                     </p:set>
-                                    <p:animEffect transition="in" filter="wipe(left)">
+                                    <p:animEffect transition="in" filter="wipe(down)">
                                       <p:cBhvr>
-                                        <p:cTn id="25" dur="1500"/>
+                                        <p:cTn id="27" dur="1000"/>
                                         <p:tgtEl>
-                                          <p:spTgt spid="14"/>
+                                          <p:spTgt spid="19"/>
                                         </p:tgtEl>
                                       </p:cBhvr>
                                     </p:animEffect>
                                   </p:childTnLst>
                                 </p:cTn>
                               </p:par>
-                            </p:childTnLst>
-                          </p:cTn>
-                        </p:par>
-                        <p:par>
-                          <p:cTn id="26" fill="hold">
-                            <p:stCondLst>
-                              <p:cond delay="1500"/>
-                            </p:stCondLst>
-                            <p:childTnLst>
                               <p:par>
-                                <p:cTn id="27" presetID="22" presetClass="entr" presetSubtype="1" fill="hold" grpId="0" nodeType="afterEffect">
+                                <p:cTn id="28" presetID="22" presetClass="entr" presetSubtype="4" fill="hold" nodeType="withEffect">
                                   <p:stCondLst>
                                     <p:cond delay="0"/>
                                   </p:stCondLst>
                                   <p:childTnLst>
                                     <p:set>
                                       <p:cBhvr>
-                                        <p:cTn id="28" dur="1" fill="hold">
+                                        <p:cTn id="29" dur="1" fill="hold">
                                           <p:stCondLst>
                                             <p:cond delay="0"/>
                                           </p:stCondLst>
@@ -15786,9 +16134,9 @@
                                         <p:strVal val="visible"/>
                                       </p:to>
                                     </p:set>
-                                    <p:animEffect transition="in" filter="wipe(up)">
+                                    <p:animEffect transition="in" filter="wipe(down)">
                                       <p:cBhvr>
-                                        <p:cTn id="29" dur="1000"/>
+                                        <p:cTn id="30" dur="1000"/>
                                         <p:tgtEl>
                                           <p:spTgt spid="18"/>
                                         </p:tgtEl>
@@ -15804,32 +16152,32 @@
                     </p:cTn>
                   </p:par>
                   <p:par>
-                    <p:cTn id="30" fill="hold">
+                    <p:cTn id="31" fill="hold">
                       <p:stCondLst>
                         <p:cond delay="indefinite"/>
                       </p:stCondLst>
                       <p:childTnLst>
                         <p:par>
-                          <p:cTn id="31" fill="hold">
+                          <p:cTn id="32" fill="hold">
                             <p:stCondLst>
                               <p:cond delay="0"/>
                             </p:stCondLst>
                             <p:childTnLst>
                               <p:par>
-                                <p:cTn id="32" presetID="22" presetClass="entr" presetSubtype="8" fill="hold" grpId="0" nodeType="clickEffect">
+                                <p:cTn id="33" presetID="22" presetClass="entr" presetSubtype="8" fill="hold" grpId="0" nodeType="clickEffect">
                                   <p:stCondLst>
                                     <p:cond delay="0"/>
                                   </p:stCondLst>
                                   <p:childTnLst>
                                     <p:set>
                                       <p:cBhvr>
-                                        <p:cTn id="33" dur="1" fill="hold">
+                                        <p:cTn id="34" dur="1" fill="hold">
                                           <p:stCondLst>
                                             <p:cond delay="0"/>
                                           </p:stCondLst>
                                         </p:cTn>
                                         <p:tgtEl>
-                                          <p:spTgt spid="19"/>
+                                          <p:spTgt spid="27"/>
                                         </p:tgtEl>
                                         <p:attrNameLst>
                                           <p:attrName>style.visibility</p:attrName>
@@ -15841,48 +16189,30 @@
                                     </p:set>
                                     <p:animEffect transition="in" filter="wipe(left)">
                                       <p:cBhvr>
-                                        <p:cTn id="34" dur="1000"/>
+                                        <p:cTn id="35" dur="1000"/>
                                         <p:tgtEl>
-                                          <p:spTgt spid="19"/>
+                                          <p:spTgt spid="27"/>
                                         </p:tgtEl>
                                       </p:cBhvr>
                                     </p:animEffect>
                                   </p:childTnLst>
                                 </p:cTn>
                               </p:par>
-                            </p:childTnLst>
-                          </p:cTn>
-                        </p:par>
-                      </p:childTnLst>
-                    </p:cTn>
-                  </p:par>
-                  <p:par>
-                    <p:cTn id="35" fill="hold">
-                      <p:stCondLst>
-                        <p:cond delay="indefinite"/>
-                      </p:stCondLst>
-                      <p:childTnLst>
-                        <p:par>
-                          <p:cTn id="36" fill="hold">
-                            <p:stCondLst>
-                              <p:cond delay="0"/>
-                            </p:stCondLst>
-                            <p:childTnLst>
                               <p:par>
-                                <p:cTn id="37" presetID="22" presetClass="entr" presetSubtype="8" fill="hold" grpId="0" nodeType="clickEffect">
+                                <p:cTn id="36" presetID="22" presetClass="entr" presetSubtype="8" fill="hold" grpId="0" nodeType="withEffect">
                                   <p:stCondLst>
                                     <p:cond delay="0"/>
                                   </p:stCondLst>
                                   <p:childTnLst>
                                     <p:set>
                                       <p:cBhvr>
-                                        <p:cTn id="38" dur="1" fill="hold">
+                                        <p:cTn id="37" dur="1" fill="hold">
                                           <p:stCondLst>
                                             <p:cond delay="0"/>
                                           </p:stCondLst>
                                         </p:cTn>
                                         <p:tgtEl>
-                                          <p:spTgt spid="20"/>
+                                          <p:spTgt spid="28"/>
                                         </p:tgtEl>
                                         <p:attrNameLst>
                                           <p:attrName>style.visibility</p:attrName>
@@ -15894,9 +16224,9 @@
                                     </p:set>
                                     <p:animEffect transition="in" filter="wipe(left)">
                                       <p:cBhvr>
-                                        <p:cTn id="39" dur="1000"/>
+                                        <p:cTn id="38" dur="1000"/>
                                         <p:tgtEl>
-                                          <p:spTgt spid="20"/>
+                                          <p:spTgt spid="28"/>
                                         </p:tgtEl>
                                       </p:cBhvr>
                                     </p:animEffect>
@@ -15931,14 +16261,8 @@
       </p:par>
     </p:tnLst>
     <p:bldLst>
-      <p:bldP spid="13" grpId="0" animBg="1"/>
-      <p:bldP spid="14" grpId="0" animBg="1"/>
-      <p:bldP spid="15" grpId="0" animBg="1"/>
-      <p:bldP spid="16" grpId="0"/>
-      <p:bldP spid="17" grpId="0"/>
-      <p:bldP spid="18" grpId="0"/>
-      <p:bldP spid="19" grpId="0" animBg="1"/>
-      <p:bldP spid="20" grpId="0" animBg="1"/>
+      <p:bldP spid="27" grpId="0" animBg="1"/>
+      <p:bldP spid="28" grpId="0" animBg="1"/>
     </p:bldLst>
   </p:timing>
 </p:sld>
@@ -16642,6 +16966,1712 @@
             <p:ph type="title"/>
           </p:nvPr>
         </p:nvSpPr>
+        <p:spPr>
+          <a:xfrm>
+            <a:off x="838200" y="365125"/>
+            <a:ext cx="10515600" cy="1325563"/>
+          </a:xfrm>
+        </p:spPr>
+        <p:txBody>
+          <a:bodyPr/>
+          <a:lstStyle/>
+          <a:p>
+            <a:r>
+              <a:rPr lang="en-GB" dirty="0"/>
+              <a:t>UML Class Diagram – Overview</a:t>
+            </a:r>
+          </a:p>
+        </p:txBody>
+      </p:sp>
+      <p:grpSp>
+        <p:nvGrpSpPr>
+          <p:cNvPr id="10" name="Group 9">
+            <a:extLst>
+              <a:ext uri="{FF2B5EF4-FFF2-40B4-BE49-F238E27FC236}">
+                <a16:creationId xmlns:a16="http://schemas.microsoft.com/office/drawing/2014/main" id="{399CD5E7-76CA-46D4-8759-2AB56AB29762}"/>
+              </a:ext>
+            </a:extLst>
+          </p:cNvPr>
+          <p:cNvGrpSpPr/>
+          <p:nvPr/>
+        </p:nvGrpSpPr>
+        <p:grpSpPr>
+          <a:xfrm>
+            <a:off x="4309110" y="1965960"/>
+            <a:ext cx="3600000" cy="3657600"/>
+            <a:chOff x="3886200" y="1965960"/>
+            <a:chExt cx="3600000" cy="3657600"/>
+          </a:xfrm>
+        </p:grpSpPr>
+        <p:sp>
+          <p:nvSpPr>
+            <p:cNvPr id="4" name="Rectangle 3">
+              <a:extLst>
+                <a:ext uri="{FF2B5EF4-FFF2-40B4-BE49-F238E27FC236}">
+                  <a16:creationId xmlns:a16="http://schemas.microsoft.com/office/drawing/2014/main" id="{D68F3B12-91FF-4536-9BDF-3DFA0AD860B7}"/>
+                </a:ext>
+              </a:extLst>
+            </p:cNvPr>
+            <p:cNvSpPr/>
+            <p:nvPr/>
+          </p:nvSpPr>
+          <p:spPr>
+            <a:xfrm>
+              <a:off x="3886200" y="1965960"/>
+              <a:ext cx="3600000" cy="3657600"/>
+            </a:xfrm>
+            <a:prstGeom prst="rect">
+              <a:avLst/>
+            </a:prstGeom>
+            <a:noFill/>
+            <a:ln w="19050">
+              <a:solidFill>
+                <a:schemeClr val="tx1"/>
+              </a:solidFill>
+            </a:ln>
+          </p:spPr>
+          <p:style>
+            <a:lnRef idx="2">
+              <a:schemeClr val="accent1">
+                <a:shade val="50000"/>
+              </a:schemeClr>
+            </a:lnRef>
+            <a:fillRef idx="1">
+              <a:schemeClr val="accent1"/>
+            </a:fillRef>
+            <a:effectRef idx="0">
+              <a:schemeClr val="accent1"/>
+            </a:effectRef>
+            <a:fontRef idx="minor">
+              <a:schemeClr val="lt1"/>
+            </a:fontRef>
+          </p:style>
+          <p:txBody>
+            <a:bodyPr rtlCol="0" anchor="ctr"/>
+            <a:lstStyle/>
+            <a:p>
+              <a:pPr algn="ctr"/>
+              <a:endParaRPr lang="en-GB"/>
+            </a:p>
+          </p:txBody>
+        </p:sp>
+        <p:cxnSp>
+          <p:nvCxnSpPr>
+            <p:cNvPr id="8" name="Straight Connector 7">
+              <a:extLst>
+                <a:ext uri="{FF2B5EF4-FFF2-40B4-BE49-F238E27FC236}">
+                  <a16:creationId xmlns:a16="http://schemas.microsoft.com/office/drawing/2014/main" id="{0F620062-B2DF-4004-8305-6226A65C3AFF}"/>
+                </a:ext>
+              </a:extLst>
+            </p:cNvPr>
+            <p:cNvCxnSpPr/>
+            <p:nvPr/>
+          </p:nvCxnSpPr>
+          <p:spPr>
+            <a:xfrm>
+              <a:off x="3886200" y="4164330"/>
+              <a:ext cx="3600000" cy="0"/>
+            </a:xfrm>
+            <a:prstGeom prst="line">
+              <a:avLst/>
+            </a:prstGeom>
+            <a:ln w="19050">
+              <a:solidFill>
+                <a:schemeClr val="tx1"/>
+              </a:solidFill>
+            </a:ln>
+          </p:spPr>
+          <p:style>
+            <a:lnRef idx="1">
+              <a:schemeClr val="accent1"/>
+            </a:lnRef>
+            <a:fillRef idx="0">
+              <a:schemeClr val="accent1"/>
+            </a:fillRef>
+            <a:effectRef idx="0">
+              <a:schemeClr val="accent1"/>
+            </a:effectRef>
+            <a:fontRef idx="minor">
+              <a:schemeClr val="tx1"/>
+            </a:fontRef>
+          </p:style>
+        </p:cxnSp>
+        <p:sp>
+          <p:nvSpPr>
+            <p:cNvPr id="9" name="Rectangle 8">
+              <a:extLst>
+                <a:ext uri="{FF2B5EF4-FFF2-40B4-BE49-F238E27FC236}">
+                  <a16:creationId xmlns:a16="http://schemas.microsoft.com/office/drawing/2014/main" id="{E06970F1-E4C6-493D-921A-F57A4EAA659D}"/>
+                </a:ext>
+              </a:extLst>
+            </p:cNvPr>
+            <p:cNvSpPr/>
+            <p:nvPr/>
+          </p:nvSpPr>
+          <p:spPr>
+            <a:xfrm>
+              <a:off x="3886200" y="1965960"/>
+              <a:ext cx="3600000" cy="727710"/>
+            </a:xfrm>
+            <a:prstGeom prst="rect">
+              <a:avLst/>
+            </a:prstGeom>
+            <a:solidFill>
+              <a:schemeClr val="accent3">
+                <a:lumMod val="60000"/>
+                <a:lumOff val="40000"/>
+              </a:schemeClr>
+            </a:solidFill>
+            <a:ln w="19050">
+              <a:solidFill>
+                <a:schemeClr val="tx1"/>
+              </a:solidFill>
+            </a:ln>
+          </p:spPr>
+          <p:style>
+            <a:lnRef idx="2">
+              <a:schemeClr val="accent1">
+                <a:shade val="50000"/>
+              </a:schemeClr>
+            </a:lnRef>
+            <a:fillRef idx="1">
+              <a:schemeClr val="accent1"/>
+            </a:fillRef>
+            <a:effectRef idx="0">
+              <a:schemeClr val="accent1"/>
+            </a:effectRef>
+            <a:fontRef idx="minor">
+              <a:schemeClr val="lt1"/>
+            </a:fontRef>
+          </p:style>
+          <p:txBody>
+            <a:bodyPr rtlCol="0" anchor="ctr"/>
+            <a:lstStyle/>
+            <a:p>
+              <a:pPr algn="ctr"/>
+              <a:endParaRPr lang="en-GB"/>
+            </a:p>
+          </p:txBody>
+        </p:sp>
+      </p:grpSp>
+      <p:sp>
+        <p:nvSpPr>
+          <p:cNvPr id="13" name="Callout: Line with No Border 12">
+            <a:extLst>
+              <a:ext uri="{FF2B5EF4-FFF2-40B4-BE49-F238E27FC236}">
+                <a16:creationId xmlns:a16="http://schemas.microsoft.com/office/drawing/2014/main" id="{31DE4C51-5C31-4CFA-BE3D-731751DE74B0}"/>
+              </a:ext>
+            </a:extLst>
+          </p:cNvPr>
+          <p:cNvSpPr/>
+          <p:nvPr/>
+        </p:nvSpPr>
+        <p:spPr>
+          <a:xfrm>
+            <a:off x="1645920" y="3031958"/>
+            <a:ext cx="1748790" cy="818147"/>
+          </a:xfrm>
+          <a:prstGeom prst="callout1">
+            <a:avLst>
+              <a:gd name="adj1" fmla="val 50466"/>
+              <a:gd name="adj2" fmla="val 100987"/>
+              <a:gd name="adj3" fmla="val 50311"/>
+              <a:gd name="adj4" fmla="val 150987"/>
+            </a:avLst>
+          </a:prstGeom>
+          <a:noFill/>
+          <a:ln w="38100">
+            <a:solidFill>
+              <a:schemeClr val="accent6">
+                <a:lumMod val="75000"/>
+              </a:schemeClr>
+            </a:solidFill>
+            <a:headEnd w="lg" len="lg"/>
+            <a:tailEnd type="triangle" w="lg" len="lg"/>
+          </a:ln>
+        </p:spPr>
+        <p:style>
+          <a:lnRef idx="2">
+            <a:schemeClr val="accent1">
+              <a:shade val="50000"/>
+            </a:schemeClr>
+          </a:lnRef>
+          <a:fillRef idx="1">
+            <a:schemeClr val="accent1"/>
+          </a:fillRef>
+          <a:effectRef idx="0">
+            <a:schemeClr val="accent1"/>
+          </a:effectRef>
+          <a:fontRef idx="minor">
+            <a:schemeClr val="lt1"/>
+          </a:fontRef>
+        </p:style>
+        <p:txBody>
+          <a:bodyPr rtlCol="0" anchor="ctr"/>
+          <a:lstStyle/>
+          <a:p>
+            <a:pPr algn="r"/>
+            <a:r>
+              <a:rPr lang="en-GB" sz="2800" b="1" dirty="0">
+                <a:solidFill>
+                  <a:srgbClr val="7030A0"/>
+                </a:solidFill>
+              </a:rPr>
+              <a:t>Properties</a:t>
+            </a:r>
+          </a:p>
+        </p:txBody>
+      </p:sp>
+      <p:sp>
+        <p:nvSpPr>
+          <p:cNvPr id="14" name="Callout: Line with No Border 13">
+            <a:extLst>
+              <a:ext uri="{FF2B5EF4-FFF2-40B4-BE49-F238E27FC236}">
+                <a16:creationId xmlns:a16="http://schemas.microsoft.com/office/drawing/2014/main" id="{E5304D38-62A3-4A8C-98E0-6337163FA56E}"/>
+              </a:ext>
+            </a:extLst>
+          </p:cNvPr>
+          <p:cNvSpPr/>
+          <p:nvPr/>
+        </p:nvSpPr>
+        <p:spPr>
+          <a:xfrm>
+            <a:off x="1748790" y="4632197"/>
+            <a:ext cx="1668780" cy="458724"/>
+          </a:xfrm>
+          <a:prstGeom prst="callout1">
+            <a:avLst>
+              <a:gd name="adj1" fmla="val 50466"/>
+              <a:gd name="adj2" fmla="val 100987"/>
+              <a:gd name="adj3" fmla="val 50311"/>
+              <a:gd name="adj4" fmla="val 150987"/>
+            </a:avLst>
+          </a:prstGeom>
+          <a:noFill/>
+          <a:ln w="38100">
+            <a:solidFill>
+              <a:schemeClr val="accent6">
+                <a:lumMod val="75000"/>
+              </a:schemeClr>
+            </a:solidFill>
+            <a:headEnd w="lg" len="lg"/>
+            <a:tailEnd type="triangle" w="lg" len="lg"/>
+          </a:ln>
+        </p:spPr>
+        <p:style>
+          <a:lnRef idx="2">
+            <a:schemeClr val="accent1">
+              <a:shade val="50000"/>
+            </a:schemeClr>
+          </a:lnRef>
+          <a:fillRef idx="1">
+            <a:schemeClr val="accent1"/>
+          </a:fillRef>
+          <a:effectRef idx="0">
+            <a:schemeClr val="accent1"/>
+          </a:effectRef>
+          <a:fontRef idx="minor">
+            <a:schemeClr val="lt1"/>
+          </a:fontRef>
+        </p:style>
+        <p:txBody>
+          <a:bodyPr rtlCol="0" anchor="ctr"/>
+          <a:lstStyle/>
+          <a:p>
+            <a:pPr algn="r"/>
+            <a:r>
+              <a:rPr lang="en-GB" sz="2800" b="1" dirty="0">
+                <a:solidFill>
+                  <a:srgbClr val="7030A0"/>
+                </a:solidFill>
+              </a:rPr>
+              <a:t>Methods</a:t>
+            </a:r>
+          </a:p>
+        </p:txBody>
+      </p:sp>
+      <p:sp>
+        <p:nvSpPr>
+          <p:cNvPr id="15" name="Callout: Line with No Border 14">
+            <a:extLst>
+              <a:ext uri="{FF2B5EF4-FFF2-40B4-BE49-F238E27FC236}">
+                <a16:creationId xmlns:a16="http://schemas.microsoft.com/office/drawing/2014/main" id="{EFB1A153-6E9D-4603-B7E7-DB48DD6E2DED}"/>
+              </a:ext>
+            </a:extLst>
+          </p:cNvPr>
+          <p:cNvSpPr/>
+          <p:nvPr/>
+        </p:nvSpPr>
+        <p:spPr>
+          <a:xfrm>
+            <a:off x="1551472" y="2100453"/>
+            <a:ext cx="1866098" cy="458724"/>
+          </a:xfrm>
+          <a:prstGeom prst="callout1">
+            <a:avLst>
+              <a:gd name="adj1" fmla="val 50466"/>
+              <a:gd name="adj2" fmla="val 100987"/>
+              <a:gd name="adj3" fmla="val 50311"/>
+              <a:gd name="adj4" fmla="val 145883"/>
+            </a:avLst>
+          </a:prstGeom>
+          <a:noFill/>
+          <a:ln w="38100">
+            <a:solidFill>
+              <a:schemeClr val="accent6">
+                <a:lumMod val="75000"/>
+              </a:schemeClr>
+            </a:solidFill>
+            <a:headEnd w="lg" len="lg"/>
+            <a:tailEnd type="triangle" w="lg" len="lg"/>
+          </a:ln>
+        </p:spPr>
+        <p:style>
+          <a:lnRef idx="2">
+            <a:schemeClr val="accent1">
+              <a:shade val="50000"/>
+            </a:schemeClr>
+          </a:lnRef>
+          <a:fillRef idx="1">
+            <a:schemeClr val="accent1"/>
+          </a:fillRef>
+          <a:effectRef idx="0">
+            <a:schemeClr val="accent1"/>
+          </a:effectRef>
+          <a:fontRef idx="minor">
+            <a:schemeClr val="lt1"/>
+          </a:fontRef>
+        </p:style>
+        <p:txBody>
+          <a:bodyPr rtlCol="0" anchor="ctr"/>
+          <a:lstStyle/>
+          <a:p>
+            <a:pPr algn="r"/>
+            <a:r>
+              <a:rPr lang="en-GB" sz="2800" b="1" dirty="0">
+                <a:solidFill>
+                  <a:srgbClr val="7030A0"/>
+                </a:solidFill>
+              </a:rPr>
+              <a:t>Class name</a:t>
+            </a:r>
+          </a:p>
+        </p:txBody>
+      </p:sp>
+      <p:sp>
+        <p:nvSpPr>
+          <p:cNvPr id="16" name="TextBox 15">
+            <a:extLst>
+              <a:ext uri="{FF2B5EF4-FFF2-40B4-BE49-F238E27FC236}">
+                <a16:creationId xmlns:a16="http://schemas.microsoft.com/office/drawing/2014/main" id="{F9DA67FF-CA17-47F2-BE12-2F4EF7BC1D21}"/>
+              </a:ext>
+            </a:extLst>
+          </p:cNvPr>
+          <p:cNvSpPr txBox="1"/>
+          <p:nvPr/>
+        </p:nvSpPr>
+        <p:spPr>
+          <a:xfrm>
+            <a:off x="5572743" y="2035957"/>
+            <a:ext cx="1072730" cy="523220"/>
+          </a:xfrm>
+          <a:prstGeom prst="rect">
+            <a:avLst/>
+          </a:prstGeom>
+          <a:noFill/>
+        </p:spPr>
+        <p:txBody>
+          <a:bodyPr wrap="none" rtlCol="0">
+            <a:spAutoFit/>
+          </a:bodyPr>
+          <a:lstStyle/>
+          <a:p>
+            <a:pPr algn="ctr"/>
+            <a:r>
+              <a:rPr lang="en-GB" sz="2800" b="1" dirty="0">
+                <a:solidFill>
+                  <a:schemeClr val="accent1"/>
+                </a:solidFill>
+              </a:rPr>
+              <a:t>Name</a:t>
+            </a:r>
+          </a:p>
+        </p:txBody>
+      </p:sp>
+      <p:sp>
+        <p:nvSpPr>
+          <p:cNvPr id="17" name="TextBox 16">
+            <a:extLst>
+              <a:ext uri="{FF2B5EF4-FFF2-40B4-BE49-F238E27FC236}">
+                <a16:creationId xmlns:a16="http://schemas.microsoft.com/office/drawing/2014/main" id="{AE596573-766B-4AFA-B34B-C56D5BA1BE63}"/>
+              </a:ext>
+            </a:extLst>
+          </p:cNvPr>
+          <p:cNvSpPr txBox="1"/>
+          <p:nvPr/>
+        </p:nvSpPr>
+        <p:spPr>
+          <a:xfrm>
+            <a:off x="4623208" y="2730787"/>
+            <a:ext cx="2971800" cy="1384995"/>
+          </a:xfrm>
+          <a:prstGeom prst="rect">
+            <a:avLst/>
+          </a:prstGeom>
+          <a:noFill/>
+        </p:spPr>
+        <p:txBody>
+          <a:bodyPr wrap="square" rtlCol="0">
+            <a:spAutoFit/>
+          </a:bodyPr>
+          <a:lstStyle/>
+          <a:p>
+            <a:pPr algn="ctr"/>
+            <a:r>
+              <a:rPr lang="en-GB" sz="2800" b="1" dirty="0">
+                <a:solidFill>
+                  <a:schemeClr val="accent1"/>
+                </a:solidFill>
+              </a:rPr>
+              <a:t>Attributes /</a:t>
+            </a:r>
+          </a:p>
+          <a:p>
+            <a:pPr algn="ctr"/>
+            <a:r>
+              <a:rPr lang="en-GB" sz="2800" b="1" dirty="0">
+                <a:solidFill>
+                  <a:schemeClr val="accent1"/>
+                </a:solidFill>
+              </a:rPr>
+              <a:t> fields / </a:t>
+            </a:r>
+          </a:p>
+          <a:p>
+            <a:pPr algn="ctr"/>
+            <a:r>
+              <a:rPr lang="en-GB" sz="2800" b="1" dirty="0">
+                <a:solidFill>
+                  <a:schemeClr val="accent1"/>
+                </a:solidFill>
+              </a:rPr>
+              <a:t>instance variables</a:t>
+            </a:r>
+          </a:p>
+        </p:txBody>
+      </p:sp>
+      <p:sp>
+        <p:nvSpPr>
+          <p:cNvPr id="18" name="TextBox 17">
+            <a:extLst>
+              <a:ext uri="{FF2B5EF4-FFF2-40B4-BE49-F238E27FC236}">
+                <a16:creationId xmlns:a16="http://schemas.microsoft.com/office/drawing/2014/main" id="{D3DE1068-9C54-4D92-A45F-8DEAD06D3824}"/>
+              </a:ext>
+            </a:extLst>
+          </p:cNvPr>
+          <p:cNvSpPr txBox="1"/>
+          <p:nvPr/>
+        </p:nvSpPr>
+        <p:spPr>
+          <a:xfrm>
+            <a:off x="4966810" y="4439603"/>
+            <a:ext cx="2284600" cy="954107"/>
+          </a:xfrm>
+          <a:prstGeom prst="rect">
+            <a:avLst/>
+          </a:prstGeom>
+          <a:noFill/>
+        </p:spPr>
+        <p:txBody>
+          <a:bodyPr wrap="square" rtlCol="0">
+            <a:spAutoFit/>
+          </a:bodyPr>
+          <a:lstStyle/>
+          <a:p>
+            <a:pPr algn="ctr"/>
+            <a:r>
+              <a:rPr lang="en-GB" sz="2800" b="1" dirty="0">
+                <a:solidFill>
+                  <a:schemeClr val="accent1"/>
+                </a:solidFill>
+              </a:rPr>
+              <a:t>Functions / Procedures</a:t>
+            </a:r>
+          </a:p>
+        </p:txBody>
+      </p:sp>
+      <p:sp>
+        <p:nvSpPr>
+          <p:cNvPr id="19" name="Callout: Line with No Border 18">
+            <a:extLst>
+              <a:ext uri="{FF2B5EF4-FFF2-40B4-BE49-F238E27FC236}">
+                <a16:creationId xmlns:a16="http://schemas.microsoft.com/office/drawing/2014/main" id="{AE75B9AD-FFA7-46C7-8C97-FBD2DEC6546A}"/>
+              </a:ext>
+            </a:extLst>
+          </p:cNvPr>
+          <p:cNvSpPr/>
+          <p:nvPr/>
+        </p:nvSpPr>
+        <p:spPr>
+          <a:xfrm flipH="1">
+            <a:off x="8566810" y="3031958"/>
+            <a:ext cx="1200600" cy="818147"/>
+          </a:xfrm>
+          <a:prstGeom prst="callout1">
+            <a:avLst>
+              <a:gd name="adj1" fmla="val 50466"/>
+              <a:gd name="adj2" fmla="val 100987"/>
+              <a:gd name="adj3" fmla="val 50311"/>
+              <a:gd name="adj4" fmla="val 150987"/>
+            </a:avLst>
+          </a:prstGeom>
+          <a:noFill/>
+          <a:ln w="38100">
+            <a:solidFill>
+              <a:schemeClr val="accent6">
+                <a:lumMod val="75000"/>
+              </a:schemeClr>
+            </a:solidFill>
+            <a:headEnd w="lg" len="lg"/>
+            <a:tailEnd type="triangle" w="lg" len="lg"/>
+          </a:ln>
+        </p:spPr>
+        <p:style>
+          <a:lnRef idx="2">
+            <a:schemeClr val="accent1">
+              <a:shade val="50000"/>
+            </a:schemeClr>
+          </a:lnRef>
+          <a:fillRef idx="1">
+            <a:schemeClr val="accent1"/>
+          </a:fillRef>
+          <a:effectRef idx="0">
+            <a:schemeClr val="accent1"/>
+          </a:effectRef>
+          <a:fontRef idx="minor">
+            <a:schemeClr val="lt1"/>
+          </a:fontRef>
+        </p:style>
+        <p:txBody>
+          <a:bodyPr rtlCol="0" anchor="ctr"/>
+          <a:lstStyle/>
+          <a:p>
+            <a:r>
+              <a:rPr lang="en-GB" sz="2800" b="1" i="1" dirty="0">
+                <a:solidFill>
+                  <a:srgbClr val="7030A0"/>
+                </a:solidFill>
+              </a:rPr>
+              <a:t>Nouns</a:t>
+            </a:r>
+          </a:p>
+        </p:txBody>
+      </p:sp>
+      <p:sp>
+        <p:nvSpPr>
+          <p:cNvPr id="20" name="Callout: Line with No Border 19">
+            <a:extLst>
+              <a:ext uri="{FF2B5EF4-FFF2-40B4-BE49-F238E27FC236}">
+                <a16:creationId xmlns:a16="http://schemas.microsoft.com/office/drawing/2014/main" id="{11F1C24C-E417-4481-B9E5-EE522678B769}"/>
+              </a:ext>
+            </a:extLst>
+          </p:cNvPr>
+          <p:cNvSpPr/>
+          <p:nvPr/>
+        </p:nvSpPr>
+        <p:spPr>
+          <a:xfrm flipH="1">
+            <a:off x="8566810" y="4452485"/>
+            <a:ext cx="1200600" cy="818147"/>
+          </a:xfrm>
+          <a:prstGeom prst="callout1">
+            <a:avLst>
+              <a:gd name="adj1" fmla="val 50466"/>
+              <a:gd name="adj2" fmla="val 100987"/>
+              <a:gd name="adj3" fmla="val 50311"/>
+              <a:gd name="adj4" fmla="val 150987"/>
+            </a:avLst>
+          </a:prstGeom>
+          <a:noFill/>
+          <a:ln w="38100">
+            <a:solidFill>
+              <a:schemeClr val="accent6">
+                <a:lumMod val="75000"/>
+              </a:schemeClr>
+            </a:solidFill>
+            <a:headEnd w="lg" len="lg"/>
+            <a:tailEnd type="triangle" w="lg" len="lg"/>
+          </a:ln>
+        </p:spPr>
+        <p:style>
+          <a:lnRef idx="2">
+            <a:schemeClr val="accent1">
+              <a:shade val="50000"/>
+            </a:schemeClr>
+          </a:lnRef>
+          <a:fillRef idx="1">
+            <a:schemeClr val="accent1"/>
+          </a:fillRef>
+          <a:effectRef idx="0">
+            <a:schemeClr val="accent1"/>
+          </a:effectRef>
+          <a:fontRef idx="minor">
+            <a:schemeClr val="lt1"/>
+          </a:fontRef>
+        </p:style>
+        <p:txBody>
+          <a:bodyPr rtlCol="0" anchor="ctr"/>
+          <a:lstStyle/>
+          <a:p>
+            <a:r>
+              <a:rPr lang="en-GB" sz="2800" b="1" i="1" dirty="0">
+                <a:solidFill>
+                  <a:srgbClr val="7030A0"/>
+                </a:solidFill>
+              </a:rPr>
+              <a:t>Verbs</a:t>
+            </a:r>
+          </a:p>
+        </p:txBody>
+      </p:sp>
+    </p:spTree>
+    <p:extLst>
+      <p:ext uri="{BB962C8B-B14F-4D97-AF65-F5344CB8AC3E}">
+        <p14:creationId xmlns:p14="http://schemas.microsoft.com/office/powerpoint/2010/main" val="1900925123"/>
+      </p:ext>
+    </p:extLst>
+  </p:cSld>
+  <p:clrMapOvr>
+    <a:masterClrMapping/>
+  </p:clrMapOvr>
+  <p:timing>
+    <p:tnLst>
+      <p:par>
+        <p:cTn id="1" dur="indefinite" restart="never" nodeType="tmRoot">
+          <p:childTnLst>
+            <p:seq concurrent="1" nextAc="seek">
+              <p:cTn id="2" dur="indefinite" nodeType="mainSeq">
+                <p:childTnLst>
+                  <p:par>
+                    <p:cTn id="3" fill="hold">
+                      <p:stCondLst>
+                        <p:cond delay="indefinite"/>
+                      </p:stCondLst>
+                      <p:childTnLst>
+                        <p:par>
+                          <p:cTn id="4" fill="hold">
+                            <p:stCondLst>
+                              <p:cond delay="0"/>
+                            </p:stCondLst>
+                            <p:childTnLst>
+                              <p:par>
+                                <p:cTn id="5" presetID="22" presetClass="entr" presetSubtype="8" fill="hold" grpId="0" nodeType="clickEffect">
+                                  <p:stCondLst>
+                                    <p:cond delay="0"/>
+                                  </p:stCondLst>
+                                  <p:childTnLst>
+                                    <p:set>
+                                      <p:cBhvr>
+                                        <p:cTn id="6" dur="1" fill="hold">
+                                          <p:stCondLst>
+                                            <p:cond delay="0"/>
+                                          </p:stCondLst>
+                                        </p:cTn>
+                                        <p:tgtEl>
+                                          <p:spTgt spid="15"/>
+                                        </p:tgtEl>
+                                        <p:attrNameLst>
+                                          <p:attrName>style.visibility</p:attrName>
+                                        </p:attrNameLst>
+                                      </p:cBhvr>
+                                      <p:to>
+                                        <p:strVal val="visible"/>
+                                      </p:to>
+                                    </p:set>
+                                    <p:animEffect transition="in" filter="wipe(left)">
+                                      <p:cBhvr>
+                                        <p:cTn id="7" dur="1500"/>
+                                        <p:tgtEl>
+                                          <p:spTgt spid="15"/>
+                                        </p:tgtEl>
+                                      </p:cBhvr>
+                                    </p:animEffect>
+                                  </p:childTnLst>
+                                </p:cTn>
+                              </p:par>
+                            </p:childTnLst>
+                          </p:cTn>
+                        </p:par>
+                        <p:par>
+                          <p:cTn id="8" fill="hold">
+                            <p:stCondLst>
+                              <p:cond delay="1500"/>
+                            </p:stCondLst>
+                            <p:childTnLst>
+                              <p:par>
+                                <p:cTn id="9" presetID="22" presetClass="entr" presetSubtype="8" fill="hold" grpId="0" nodeType="afterEffect">
+                                  <p:stCondLst>
+                                    <p:cond delay="0"/>
+                                  </p:stCondLst>
+                                  <p:childTnLst>
+                                    <p:set>
+                                      <p:cBhvr>
+                                        <p:cTn id="10" dur="1" fill="hold">
+                                          <p:stCondLst>
+                                            <p:cond delay="0"/>
+                                          </p:stCondLst>
+                                        </p:cTn>
+                                        <p:tgtEl>
+                                          <p:spTgt spid="16"/>
+                                        </p:tgtEl>
+                                        <p:attrNameLst>
+                                          <p:attrName>style.visibility</p:attrName>
+                                        </p:attrNameLst>
+                                      </p:cBhvr>
+                                      <p:to>
+                                        <p:strVal val="visible"/>
+                                      </p:to>
+                                    </p:set>
+                                    <p:animEffect transition="in" filter="wipe(left)">
+                                      <p:cBhvr>
+                                        <p:cTn id="11" dur="1000"/>
+                                        <p:tgtEl>
+                                          <p:spTgt spid="16"/>
+                                        </p:tgtEl>
+                                      </p:cBhvr>
+                                    </p:animEffect>
+                                  </p:childTnLst>
+                                </p:cTn>
+                              </p:par>
+                            </p:childTnLst>
+                          </p:cTn>
+                        </p:par>
+                      </p:childTnLst>
+                    </p:cTn>
+                  </p:par>
+                  <p:par>
+                    <p:cTn id="12" fill="hold">
+                      <p:stCondLst>
+                        <p:cond delay="indefinite"/>
+                      </p:stCondLst>
+                      <p:childTnLst>
+                        <p:par>
+                          <p:cTn id="13" fill="hold">
+                            <p:stCondLst>
+                              <p:cond delay="0"/>
+                            </p:stCondLst>
+                            <p:childTnLst>
+                              <p:par>
+                                <p:cTn id="14" presetID="22" presetClass="entr" presetSubtype="8" fill="hold" grpId="0" nodeType="clickEffect">
+                                  <p:stCondLst>
+                                    <p:cond delay="0"/>
+                                  </p:stCondLst>
+                                  <p:childTnLst>
+                                    <p:set>
+                                      <p:cBhvr>
+                                        <p:cTn id="15" dur="1" fill="hold">
+                                          <p:stCondLst>
+                                            <p:cond delay="0"/>
+                                          </p:stCondLst>
+                                        </p:cTn>
+                                        <p:tgtEl>
+                                          <p:spTgt spid="13"/>
+                                        </p:tgtEl>
+                                        <p:attrNameLst>
+                                          <p:attrName>style.visibility</p:attrName>
+                                        </p:attrNameLst>
+                                      </p:cBhvr>
+                                      <p:to>
+                                        <p:strVal val="visible"/>
+                                      </p:to>
+                                    </p:set>
+                                    <p:animEffect transition="in" filter="wipe(left)">
+                                      <p:cBhvr>
+                                        <p:cTn id="16" dur="1500"/>
+                                        <p:tgtEl>
+                                          <p:spTgt spid="13"/>
+                                        </p:tgtEl>
+                                      </p:cBhvr>
+                                    </p:animEffect>
+                                  </p:childTnLst>
+                                </p:cTn>
+                              </p:par>
+                            </p:childTnLst>
+                          </p:cTn>
+                        </p:par>
+                        <p:par>
+                          <p:cTn id="17" fill="hold">
+                            <p:stCondLst>
+                              <p:cond delay="1500"/>
+                            </p:stCondLst>
+                            <p:childTnLst>
+                              <p:par>
+                                <p:cTn id="18" presetID="22" presetClass="entr" presetSubtype="1" fill="hold" grpId="0" nodeType="afterEffect">
+                                  <p:stCondLst>
+                                    <p:cond delay="0"/>
+                                  </p:stCondLst>
+                                  <p:childTnLst>
+                                    <p:set>
+                                      <p:cBhvr>
+                                        <p:cTn id="19" dur="1" fill="hold">
+                                          <p:stCondLst>
+                                            <p:cond delay="0"/>
+                                          </p:stCondLst>
+                                        </p:cTn>
+                                        <p:tgtEl>
+                                          <p:spTgt spid="17"/>
+                                        </p:tgtEl>
+                                        <p:attrNameLst>
+                                          <p:attrName>style.visibility</p:attrName>
+                                        </p:attrNameLst>
+                                      </p:cBhvr>
+                                      <p:to>
+                                        <p:strVal val="visible"/>
+                                      </p:to>
+                                    </p:set>
+                                    <p:animEffect transition="in" filter="wipe(up)">
+                                      <p:cBhvr>
+                                        <p:cTn id="20" dur="1000"/>
+                                        <p:tgtEl>
+                                          <p:spTgt spid="17"/>
+                                        </p:tgtEl>
+                                      </p:cBhvr>
+                                    </p:animEffect>
+                                  </p:childTnLst>
+                                </p:cTn>
+                              </p:par>
+                            </p:childTnLst>
+                          </p:cTn>
+                        </p:par>
+                      </p:childTnLst>
+                    </p:cTn>
+                  </p:par>
+                  <p:par>
+                    <p:cTn id="21" fill="hold">
+                      <p:stCondLst>
+                        <p:cond delay="indefinite"/>
+                      </p:stCondLst>
+                      <p:childTnLst>
+                        <p:par>
+                          <p:cTn id="22" fill="hold">
+                            <p:stCondLst>
+                              <p:cond delay="0"/>
+                            </p:stCondLst>
+                            <p:childTnLst>
+                              <p:par>
+                                <p:cTn id="23" presetID="22" presetClass="entr" presetSubtype="8" fill="hold" grpId="0" nodeType="clickEffect">
+                                  <p:stCondLst>
+                                    <p:cond delay="0"/>
+                                  </p:stCondLst>
+                                  <p:childTnLst>
+                                    <p:set>
+                                      <p:cBhvr>
+                                        <p:cTn id="24" dur="1" fill="hold">
+                                          <p:stCondLst>
+                                            <p:cond delay="0"/>
+                                          </p:stCondLst>
+                                        </p:cTn>
+                                        <p:tgtEl>
+                                          <p:spTgt spid="14"/>
+                                        </p:tgtEl>
+                                        <p:attrNameLst>
+                                          <p:attrName>style.visibility</p:attrName>
+                                        </p:attrNameLst>
+                                      </p:cBhvr>
+                                      <p:to>
+                                        <p:strVal val="visible"/>
+                                      </p:to>
+                                    </p:set>
+                                    <p:animEffect transition="in" filter="wipe(left)">
+                                      <p:cBhvr>
+                                        <p:cTn id="25" dur="1500"/>
+                                        <p:tgtEl>
+                                          <p:spTgt spid="14"/>
+                                        </p:tgtEl>
+                                      </p:cBhvr>
+                                    </p:animEffect>
+                                  </p:childTnLst>
+                                </p:cTn>
+                              </p:par>
+                            </p:childTnLst>
+                          </p:cTn>
+                        </p:par>
+                        <p:par>
+                          <p:cTn id="26" fill="hold">
+                            <p:stCondLst>
+                              <p:cond delay="1500"/>
+                            </p:stCondLst>
+                            <p:childTnLst>
+                              <p:par>
+                                <p:cTn id="27" presetID="22" presetClass="entr" presetSubtype="1" fill="hold" grpId="0" nodeType="afterEffect">
+                                  <p:stCondLst>
+                                    <p:cond delay="0"/>
+                                  </p:stCondLst>
+                                  <p:childTnLst>
+                                    <p:set>
+                                      <p:cBhvr>
+                                        <p:cTn id="28" dur="1" fill="hold">
+                                          <p:stCondLst>
+                                            <p:cond delay="0"/>
+                                          </p:stCondLst>
+                                        </p:cTn>
+                                        <p:tgtEl>
+                                          <p:spTgt spid="18"/>
+                                        </p:tgtEl>
+                                        <p:attrNameLst>
+                                          <p:attrName>style.visibility</p:attrName>
+                                        </p:attrNameLst>
+                                      </p:cBhvr>
+                                      <p:to>
+                                        <p:strVal val="visible"/>
+                                      </p:to>
+                                    </p:set>
+                                    <p:animEffect transition="in" filter="wipe(up)">
+                                      <p:cBhvr>
+                                        <p:cTn id="29" dur="1000"/>
+                                        <p:tgtEl>
+                                          <p:spTgt spid="18"/>
+                                        </p:tgtEl>
+                                      </p:cBhvr>
+                                    </p:animEffect>
+                                  </p:childTnLst>
+                                </p:cTn>
+                              </p:par>
+                            </p:childTnLst>
+                          </p:cTn>
+                        </p:par>
+                      </p:childTnLst>
+                    </p:cTn>
+                  </p:par>
+                  <p:par>
+                    <p:cTn id="30" fill="hold">
+                      <p:stCondLst>
+                        <p:cond delay="indefinite"/>
+                      </p:stCondLst>
+                      <p:childTnLst>
+                        <p:par>
+                          <p:cTn id="31" fill="hold">
+                            <p:stCondLst>
+                              <p:cond delay="0"/>
+                            </p:stCondLst>
+                            <p:childTnLst>
+                              <p:par>
+                                <p:cTn id="32" presetID="22" presetClass="entr" presetSubtype="8" fill="hold" grpId="0" nodeType="clickEffect">
+                                  <p:stCondLst>
+                                    <p:cond delay="0"/>
+                                  </p:stCondLst>
+                                  <p:childTnLst>
+                                    <p:set>
+                                      <p:cBhvr>
+                                        <p:cTn id="33" dur="1" fill="hold">
+                                          <p:stCondLst>
+                                            <p:cond delay="0"/>
+                                          </p:stCondLst>
+                                        </p:cTn>
+                                        <p:tgtEl>
+                                          <p:spTgt spid="19"/>
+                                        </p:tgtEl>
+                                        <p:attrNameLst>
+                                          <p:attrName>style.visibility</p:attrName>
+                                        </p:attrNameLst>
+                                      </p:cBhvr>
+                                      <p:to>
+                                        <p:strVal val="visible"/>
+                                      </p:to>
+                                    </p:set>
+                                    <p:animEffect transition="in" filter="wipe(left)">
+                                      <p:cBhvr>
+                                        <p:cTn id="34" dur="1000"/>
+                                        <p:tgtEl>
+                                          <p:spTgt spid="19"/>
+                                        </p:tgtEl>
+                                      </p:cBhvr>
+                                    </p:animEffect>
+                                  </p:childTnLst>
+                                </p:cTn>
+                              </p:par>
+                            </p:childTnLst>
+                          </p:cTn>
+                        </p:par>
+                      </p:childTnLst>
+                    </p:cTn>
+                  </p:par>
+                  <p:par>
+                    <p:cTn id="35" fill="hold">
+                      <p:stCondLst>
+                        <p:cond delay="indefinite"/>
+                      </p:stCondLst>
+                      <p:childTnLst>
+                        <p:par>
+                          <p:cTn id="36" fill="hold">
+                            <p:stCondLst>
+                              <p:cond delay="0"/>
+                            </p:stCondLst>
+                            <p:childTnLst>
+                              <p:par>
+                                <p:cTn id="37" presetID="22" presetClass="entr" presetSubtype="8" fill="hold" grpId="0" nodeType="clickEffect">
+                                  <p:stCondLst>
+                                    <p:cond delay="0"/>
+                                  </p:stCondLst>
+                                  <p:childTnLst>
+                                    <p:set>
+                                      <p:cBhvr>
+                                        <p:cTn id="38" dur="1" fill="hold">
+                                          <p:stCondLst>
+                                            <p:cond delay="0"/>
+                                          </p:stCondLst>
+                                        </p:cTn>
+                                        <p:tgtEl>
+                                          <p:spTgt spid="20"/>
+                                        </p:tgtEl>
+                                        <p:attrNameLst>
+                                          <p:attrName>style.visibility</p:attrName>
+                                        </p:attrNameLst>
+                                      </p:cBhvr>
+                                      <p:to>
+                                        <p:strVal val="visible"/>
+                                      </p:to>
+                                    </p:set>
+                                    <p:animEffect transition="in" filter="wipe(left)">
+                                      <p:cBhvr>
+                                        <p:cTn id="39" dur="1000"/>
+                                        <p:tgtEl>
+                                          <p:spTgt spid="20"/>
+                                        </p:tgtEl>
+                                      </p:cBhvr>
+                                    </p:animEffect>
+                                  </p:childTnLst>
+                                </p:cTn>
+                              </p:par>
+                            </p:childTnLst>
+                          </p:cTn>
+                        </p:par>
+                      </p:childTnLst>
+                    </p:cTn>
+                  </p:par>
+                </p:childTnLst>
+              </p:cTn>
+              <p:prevCondLst>
+                <p:cond evt="onPrev" delay="0">
+                  <p:tgtEl>
+                    <p:sldTgt/>
+                  </p:tgtEl>
+                </p:cond>
+              </p:prevCondLst>
+              <p:nextCondLst>
+                <p:cond evt="onNext" delay="0">
+                  <p:tgtEl>
+                    <p:sldTgt/>
+                  </p:tgtEl>
+                </p:cond>
+              </p:nextCondLst>
+            </p:seq>
+          </p:childTnLst>
+        </p:cTn>
+      </p:par>
+    </p:tnLst>
+    <p:bldLst>
+      <p:bldP spid="13" grpId="0" animBg="1"/>
+      <p:bldP spid="14" grpId="0" animBg="1"/>
+      <p:bldP spid="15" grpId="0" animBg="1"/>
+      <p:bldP spid="16" grpId="0"/>
+      <p:bldP spid="17" grpId="0"/>
+      <p:bldP spid="18" grpId="0"/>
+      <p:bldP spid="19" grpId="0" animBg="1"/>
+      <p:bldP spid="20" grpId="0" animBg="1"/>
+    </p:bldLst>
+  </p:timing>
+</p:sld>
+</file>
+
+<file path=ppt/slides/slide21.xml><?xml version="1.0" encoding="utf-8"?>
+<p:sld xmlns:a="http://schemas.openxmlformats.org/drawingml/2006/main" xmlns:r="http://schemas.openxmlformats.org/officeDocument/2006/relationships" xmlns:p="http://schemas.openxmlformats.org/presentationml/2006/main" show="0">
+  <p:cSld>
+    <p:spTree>
+      <p:nvGrpSpPr>
+        <p:cNvPr id="1" name=""/>
+        <p:cNvGrpSpPr/>
+        <p:nvPr/>
+      </p:nvGrpSpPr>
+      <p:grpSpPr>
+        <a:xfrm>
+          <a:off x="0" y="0"/>
+          <a:ext cx="0" cy="0"/>
+          <a:chOff x="0" y="0"/>
+          <a:chExt cx="0" cy="0"/>
+        </a:xfrm>
+      </p:grpSpPr>
+      <p:sp>
+        <p:nvSpPr>
+          <p:cNvPr id="2" name="Title 1">
+            <a:extLst>
+              <a:ext uri="{FF2B5EF4-FFF2-40B4-BE49-F238E27FC236}">
+                <a16:creationId xmlns:a16="http://schemas.microsoft.com/office/drawing/2014/main" id="{DF81EF6B-9990-4895-9A8F-2103C304A52F}"/>
+              </a:ext>
+            </a:extLst>
+          </p:cNvPr>
+          <p:cNvSpPr>
+            <a:spLocks noGrp="1"/>
+          </p:cNvSpPr>
+          <p:nvPr>
+            <p:ph type="title"/>
+          </p:nvPr>
+        </p:nvSpPr>
+        <p:spPr>
+          <a:xfrm>
+            <a:off x="838200" y="365125"/>
+            <a:ext cx="10515600" cy="1325563"/>
+          </a:xfrm>
+        </p:spPr>
+        <p:txBody>
+          <a:bodyPr/>
+          <a:lstStyle/>
+          <a:p>
+            <a:r>
+              <a:rPr lang="en-GB" dirty="0"/>
+              <a:t>UML Class Diagram – Overview</a:t>
+            </a:r>
+          </a:p>
+        </p:txBody>
+      </p:sp>
+      <p:grpSp>
+        <p:nvGrpSpPr>
+          <p:cNvPr id="10" name="Group 9">
+            <a:extLst>
+              <a:ext uri="{FF2B5EF4-FFF2-40B4-BE49-F238E27FC236}">
+                <a16:creationId xmlns:a16="http://schemas.microsoft.com/office/drawing/2014/main" id="{399CD5E7-76CA-46D4-8759-2AB56AB29762}"/>
+              </a:ext>
+            </a:extLst>
+          </p:cNvPr>
+          <p:cNvGrpSpPr/>
+          <p:nvPr/>
+        </p:nvGrpSpPr>
+        <p:grpSpPr>
+          <a:xfrm>
+            <a:off x="4309110" y="1965960"/>
+            <a:ext cx="3600000" cy="3657600"/>
+            <a:chOff x="3886200" y="1965960"/>
+            <a:chExt cx="3600000" cy="3657600"/>
+          </a:xfrm>
+        </p:grpSpPr>
+        <p:sp>
+          <p:nvSpPr>
+            <p:cNvPr id="4" name="Rectangle 3">
+              <a:extLst>
+                <a:ext uri="{FF2B5EF4-FFF2-40B4-BE49-F238E27FC236}">
+                  <a16:creationId xmlns:a16="http://schemas.microsoft.com/office/drawing/2014/main" id="{D68F3B12-91FF-4536-9BDF-3DFA0AD860B7}"/>
+                </a:ext>
+              </a:extLst>
+            </p:cNvPr>
+            <p:cNvSpPr/>
+            <p:nvPr/>
+          </p:nvSpPr>
+          <p:spPr>
+            <a:xfrm>
+              <a:off x="3886200" y="1965960"/>
+              <a:ext cx="3600000" cy="3657600"/>
+            </a:xfrm>
+            <a:prstGeom prst="rect">
+              <a:avLst/>
+            </a:prstGeom>
+            <a:noFill/>
+            <a:ln w="19050">
+              <a:solidFill>
+                <a:schemeClr val="tx1"/>
+              </a:solidFill>
+            </a:ln>
+          </p:spPr>
+          <p:style>
+            <a:lnRef idx="2">
+              <a:schemeClr val="accent1">
+                <a:shade val="50000"/>
+              </a:schemeClr>
+            </a:lnRef>
+            <a:fillRef idx="1">
+              <a:schemeClr val="accent1"/>
+            </a:fillRef>
+            <a:effectRef idx="0">
+              <a:schemeClr val="accent1"/>
+            </a:effectRef>
+            <a:fontRef idx="minor">
+              <a:schemeClr val="lt1"/>
+            </a:fontRef>
+          </p:style>
+          <p:txBody>
+            <a:bodyPr rtlCol="0" anchor="ctr"/>
+            <a:lstStyle/>
+            <a:p>
+              <a:pPr algn="ctr"/>
+              <a:endParaRPr lang="en-GB"/>
+            </a:p>
+          </p:txBody>
+        </p:sp>
+        <p:cxnSp>
+          <p:nvCxnSpPr>
+            <p:cNvPr id="8" name="Straight Connector 7">
+              <a:extLst>
+                <a:ext uri="{FF2B5EF4-FFF2-40B4-BE49-F238E27FC236}">
+                  <a16:creationId xmlns:a16="http://schemas.microsoft.com/office/drawing/2014/main" id="{0F620062-B2DF-4004-8305-6226A65C3AFF}"/>
+                </a:ext>
+              </a:extLst>
+            </p:cNvPr>
+            <p:cNvCxnSpPr/>
+            <p:nvPr/>
+          </p:nvCxnSpPr>
+          <p:spPr>
+            <a:xfrm>
+              <a:off x="3886200" y="4164330"/>
+              <a:ext cx="3600000" cy="0"/>
+            </a:xfrm>
+            <a:prstGeom prst="line">
+              <a:avLst/>
+            </a:prstGeom>
+            <a:ln w="19050">
+              <a:solidFill>
+                <a:schemeClr val="tx1"/>
+              </a:solidFill>
+            </a:ln>
+          </p:spPr>
+          <p:style>
+            <a:lnRef idx="1">
+              <a:schemeClr val="accent1"/>
+            </a:lnRef>
+            <a:fillRef idx="0">
+              <a:schemeClr val="accent1"/>
+            </a:fillRef>
+            <a:effectRef idx="0">
+              <a:schemeClr val="accent1"/>
+            </a:effectRef>
+            <a:fontRef idx="minor">
+              <a:schemeClr val="tx1"/>
+            </a:fontRef>
+          </p:style>
+        </p:cxnSp>
+        <p:sp>
+          <p:nvSpPr>
+            <p:cNvPr id="9" name="Rectangle 8">
+              <a:extLst>
+                <a:ext uri="{FF2B5EF4-FFF2-40B4-BE49-F238E27FC236}">
+                  <a16:creationId xmlns:a16="http://schemas.microsoft.com/office/drawing/2014/main" id="{E06970F1-E4C6-493D-921A-F57A4EAA659D}"/>
+                </a:ext>
+              </a:extLst>
+            </p:cNvPr>
+            <p:cNvSpPr/>
+            <p:nvPr/>
+          </p:nvSpPr>
+          <p:spPr>
+            <a:xfrm>
+              <a:off x="3886200" y="1965960"/>
+              <a:ext cx="3600000" cy="727710"/>
+            </a:xfrm>
+            <a:prstGeom prst="rect">
+              <a:avLst/>
+            </a:prstGeom>
+            <a:solidFill>
+              <a:schemeClr val="accent3">
+                <a:lumMod val="60000"/>
+                <a:lumOff val="40000"/>
+              </a:schemeClr>
+            </a:solidFill>
+            <a:ln w="19050">
+              <a:solidFill>
+                <a:schemeClr val="tx1"/>
+              </a:solidFill>
+            </a:ln>
+          </p:spPr>
+          <p:style>
+            <a:lnRef idx="2">
+              <a:schemeClr val="accent1">
+                <a:shade val="50000"/>
+              </a:schemeClr>
+            </a:lnRef>
+            <a:fillRef idx="1">
+              <a:schemeClr val="accent1"/>
+            </a:fillRef>
+            <a:effectRef idx="0">
+              <a:schemeClr val="accent1"/>
+            </a:effectRef>
+            <a:fontRef idx="minor">
+              <a:schemeClr val="lt1"/>
+            </a:fontRef>
+          </p:style>
+          <p:txBody>
+            <a:bodyPr rtlCol="0" anchor="ctr"/>
+            <a:lstStyle/>
+            <a:p>
+              <a:pPr algn="ctr"/>
+              <a:endParaRPr lang="en-GB"/>
+            </a:p>
+          </p:txBody>
+        </p:sp>
+      </p:grpSp>
+      <p:sp>
+        <p:nvSpPr>
+          <p:cNvPr id="16" name="TextBox 15">
+            <a:extLst>
+              <a:ext uri="{FF2B5EF4-FFF2-40B4-BE49-F238E27FC236}">
+                <a16:creationId xmlns:a16="http://schemas.microsoft.com/office/drawing/2014/main" id="{F9DA67FF-CA17-47F2-BE12-2F4EF7BC1D21}"/>
+              </a:ext>
+            </a:extLst>
+          </p:cNvPr>
+          <p:cNvSpPr txBox="1"/>
+          <p:nvPr/>
+        </p:nvSpPr>
+        <p:spPr>
+          <a:xfrm>
+            <a:off x="5572743" y="2035957"/>
+            <a:ext cx="1072730" cy="523220"/>
+          </a:xfrm>
+          <a:prstGeom prst="rect">
+            <a:avLst/>
+          </a:prstGeom>
+          <a:noFill/>
+        </p:spPr>
+        <p:txBody>
+          <a:bodyPr wrap="none" rtlCol="0">
+            <a:spAutoFit/>
+          </a:bodyPr>
+          <a:lstStyle/>
+          <a:p>
+            <a:pPr algn="ctr"/>
+            <a:r>
+              <a:rPr lang="en-GB" sz="2800" b="1" dirty="0">
+                <a:solidFill>
+                  <a:schemeClr val="accent1"/>
+                </a:solidFill>
+              </a:rPr>
+              <a:t>Name</a:t>
+            </a:r>
+          </a:p>
+        </p:txBody>
+      </p:sp>
+      <p:sp>
+        <p:nvSpPr>
+          <p:cNvPr id="17" name="TextBox 16">
+            <a:extLst>
+              <a:ext uri="{FF2B5EF4-FFF2-40B4-BE49-F238E27FC236}">
+                <a16:creationId xmlns:a16="http://schemas.microsoft.com/office/drawing/2014/main" id="{AE596573-766B-4AFA-B34B-C56D5BA1BE63}"/>
+              </a:ext>
+            </a:extLst>
+          </p:cNvPr>
+          <p:cNvSpPr txBox="1"/>
+          <p:nvPr/>
+        </p:nvSpPr>
+        <p:spPr>
+          <a:xfrm>
+            <a:off x="4623208" y="2730787"/>
+            <a:ext cx="2971800" cy="1384995"/>
+          </a:xfrm>
+          <a:prstGeom prst="rect">
+            <a:avLst/>
+          </a:prstGeom>
+          <a:noFill/>
+        </p:spPr>
+        <p:txBody>
+          <a:bodyPr wrap="square" rtlCol="0">
+            <a:spAutoFit/>
+          </a:bodyPr>
+          <a:lstStyle/>
+          <a:p>
+            <a:pPr algn="ctr"/>
+            <a:r>
+              <a:rPr lang="en-GB" sz="2800" b="1" dirty="0">
+                <a:solidFill>
+                  <a:schemeClr val="accent1"/>
+                </a:solidFill>
+              </a:rPr>
+              <a:t>Attributes /</a:t>
+            </a:r>
+          </a:p>
+          <a:p>
+            <a:pPr algn="ctr"/>
+            <a:r>
+              <a:rPr lang="en-GB" sz="2800" b="1" dirty="0">
+                <a:solidFill>
+                  <a:schemeClr val="accent1"/>
+                </a:solidFill>
+              </a:rPr>
+              <a:t> fields / </a:t>
+            </a:r>
+          </a:p>
+          <a:p>
+            <a:pPr algn="ctr"/>
+            <a:r>
+              <a:rPr lang="en-GB" sz="2800" b="1" dirty="0">
+                <a:solidFill>
+                  <a:schemeClr val="accent1"/>
+                </a:solidFill>
+              </a:rPr>
+              <a:t>instance variables</a:t>
+            </a:r>
+          </a:p>
+        </p:txBody>
+      </p:sp>
+      <p:sp>
+        <p:nvSpPr>
+          <p:cNvPr id="18" name="TextBox 17">
+            <a:extLst>
+              <a:ext uri="{FF2B5EF4-FFF2-40B4-BE49-F238E27FC236}">
+                <a16:creationId xmlns:a16="http://schemas.microsoft.com/office/drawing/2014/main" id="{D3DE1068-9C54-4D92-A45F-8DEAD06D3824}"/>
+              </a:ext>
+            </a:extLst>
+          </p:cNvPr>
+          <p:cNvSpPr txBox="1"/>
+          <p:nvPr/>
+        </p:nvSpPr>
+        <p:spPr>
+          <a:xfrm>
+            <a:off x="4966810" y="4439603"/>
+            <a:ext cx="2284600" cy="954107"/>
+          </a:xfrm>
+          <a:prstGeom prst="rect">
+            <a:avLst/>
+          </a:prstGeom>
+          <a:noFill/>
+        </p:spPr>
+        <p:txBody>
+          <a:bodyPr wrap="square" rtlCol="0">
+            <a:spAutoFit/>
+          </a:bodyPr>
+          <a:lstStyle/>
+          <a:p>
+            <a:pPr algn="ctr"/>
+            <a:r>
+              <a:rPr lang="en-GB" sz="2800" b="1" dirty="0">
+                <a:solidFill>
+                  <a:schemeClr val="accent1"/>
+                </a:solidFill>
+              </a:rPr>
+              <a:t>Functions / Procedures</a:t>
+            </a:r>
+          </a:p>
+        </p:txBody>
+      </p:sp>
+    </p:spTree>
+    <p:extLst>
+      <p:ext uri="{BB962C8B-B14F-4D97-AF65-F5344CB8AC3E}">
+        <p14:creationId xmlns:p14="http://schemas.microsoft.com/office/powerpoint/2010/main" val="4001018099"/>
+      </p:ext>
+    </p:extLst>
+  </p:cSld>
+  <p:clrMapOvr>
+    <a:masterClrMapping/>
+  </p:clrMapOvr>
+  <p:timing>
+    <p:tnLst>
+      <p:par>
+        <p:cTn id="1" dur="indefinite" restart="never" nodeType="tmRoot">
+          <p:childTnLst>
+            <p:seq concurrent="1" nextAc="seek">
+              <p:cTn id="2" dur="indefinite" nodeType="mainSeq">
+                <p:childTnLst>
+                  <p:par>
+                    <p:cTn id="3" fill="hold">
+                      <p:stCondLst>
+                        <p:cond delay="indefinite"/>
+                        <p:cond evt="onBegin" delay="0">
+                          <p:tn val="2"/>
+                        </p:cond>
+                      </p:stCondLst>
+                      <p:childTnLst>
+                        <p:par>
+                          <p:cTn id="4" fill="hold">
+                            <p:stCondLst>
+                              <p:cond delay="0"/>
+                            </p:stCondLst>
+                            <p:childTnLst>
+                              <p:par>
+                                <p:cTn id="5" presetID="22" presetClass="entr" presetSubtype="8" fill="hold" grpId="0" nodeType="afterEffect">
+                                  <p:stCondLst>
+                                    <p:cond delay="0"/>
+                                  </p:stCondLst>
+                                  <p:childTnLst>
+                                    <p:set>
+                                      <p:cBhvr>
+                                        <p:cTn id="6" dur="1" fill="hold">
+                                          <p:stCondLst>
+                                            <p:cond delay="0"/>
+                                          </p:stCondLst>
+                                        </p:cTn>
+                                        <p:tgtEl>
+                                          <p:spTgt spid="16"/>
+                                        </p:tgtEl>
+                                        <p:attrNameLst>
+                                          <p:attrName>style.visibility</p:attrName>
+                                        </p:attrNameLst>
+                                      </p:cBhvr>
+                                      <p:to>
+                                        <p:strVal val="visible"/>
+                                      </p:to>
+                                    </p:set>
+                                    <p:animEffect transition="in" filter="wipe(left)">
+                                      <p:cBhvr>
+                                        <p:cTn id="7" dur="1000"/>
+                                        <p:tgtEl>
+                                          <p:spTgt spid="16"/>
+                                        </p:tgtEl>
+                                      </p:cBhvr>
+                                    </p:animEffect>
+                                  </p:childTnLst>
+                                </p:cTn>
+                              </p:par>
+                            </p:childTnLst>
+                          </p:cTn>
+                        </p:par>
+                        <p:par>
+                          <p:cTn id="8" fill="hold">
+                            <p:stCondLst>
+                              <p:cond delay="1000"/>
+                            </p:stCondLst>
+                            <p:childTnLst>
+                              <p:par>
+                                <p:cTn id="9" presetID="22" presetClass="entr" presetSubtype="1" fill="hold" grpId="0" nodeType="afterEffect">
+                                  <p:stCondLst>
+                                    <p:cond delay="0"/>
+                                  </p:stCondLst>
+                                  <p:childTnLst>
+                                    <p:set>
+                                      <p:cBhvr>
+                                        <p:cTn id="10" dur="1" fill="hold">
+                                          <p:stCondLst>
+                                            <p:cond delay="0"/>
+                                          </p:stCondLst>
+                                        </p:cTn>
+                                        <p:tgtEl>
+                                          <p:spTgt spid="17"/>
+                                        </p:tgtEl>
+                                        <p:attrNameLst>
+                                          <p:attrName>style.visibility</p:attrName>
+                                        </p:attrNameLst>
+                                      </p:cBhvr>
+                                      <p:to>
+                                        <p:strVal val="visible"/>
+                                      </p:to>
+                                    </p:set>
+                                    <p:animEffect transition="in" filter="wipe(up)">
+                                      <p:cBhvr>
+                                        <p:cTn id="11" dur="1000"/>
+                                        <p:tgtEl>
+                                          <p:spTgt spid="17"/>
+                                        </p:tgtEl>
+                                      </p:cBhvr>
+                                    </p:animEffect>
+                                  </p:childTnLst>
+                                </p:cTn>
+                              </p:par>
+                            </p:childTnLst>
+                          </p:cTn>
+                        </p:par>
+                        <p:par>
+                          <p:cTn id="12" fill="hold">
+                            <p:stCondLst>
+                              <p:cond delay="2000"/>
+                            </p:stCondLst>
+                            <p:childTnLst>
+                              <p:par>
+                                <p:cTn id="13" presetID="22" presetClass="entr" presetSubtype="1" fill="hold" grpId="0" nodeType="afterEffect">
+                                  <p:stCondLst>
+                                    <p:cond delay="0"/>
+                                  </p:stCondLst>
+                                  <p:childTnLst>
+                                    <p:set>
+                                      <p:cBhvr>
+                                        <p:cTn id="14" dur="1" fill="hold">
+                                          <p:stCondLst>
+                                            <p:cond delay="0"/>
+                                          </p:stCondLst>
+                                        </p:cTn>
+                                        <p:tgtEl>
+                                          <p:spTgt spid="18"/>
+                                        </p:tgtEl>
+                                        <p:attrNameLst>
+                                          <p:attrName>style.visibility</p:attrName>
+                                        </p:attrNameLst>
+                                      </p:cBhvr>
+                                      <p:to>
+                                        <p:strVal val="visible"/>
+                                      </p:to>
+                                    </p:set>
+                                    <p:animEffect transition="in" filter="wipe(up)">
+                                      <p:cBhvr>
+                                        <p:cTn id="15" dur="1000"/>
+                                        <p:tgtEl>
+                                          <p:spTgt spid="18"/>
+                                        </p:tgtEl>
+                                      </p:cBhvr>
+                                    </p:animEffect>
+                                  </p:childTnLst>
+                                </p:cTn>
+                              </p:par>
+                            </p:childTnLst>
+                          </p:cTn>
+                        </p:par>
+                      </p:childTnLst>
+                    </p:cTn>
+                  </p:par>
+                </p:childTnLst>
+              </p:cTn>
+              <p:prevCondLst>
+                <p:cond evt="onPrev" delay="0">
+                  <p:tgtEl>
+                    <p:sldTgt/>
+                  </p:tgtEl>
+                </p:cond>
+              </p:prevCondLst>
+              <p:nextCondLst>
+                <p:cond evt="onNext" delay="0">
+                  <p:tgtEl>
+                    <p:sldTgt/>
+                  </p:tgtEl>
+                </p:cond>
+              </p:nextCondLst>
+            </p:seq>
+          </p:childTnLst>
+        </p:cTn>
+      </p:par>
+    </p:tnLst>
+    <p:bldLst>
+      <p:bldP spid="16" grpId="0"/>
+      <p:bldP spid="17" grpId="0"/>
+      <p:bldP spid="18" grpId="0"/>
+    </p:bldLst>
+  </p:timing>
+</p:sld>
+</file>
+
+<file path=ppt/slides/slide22.xml><?xml version="1.0" encoding="utf-8"?>
+<p:sld xmlns:a="http://schemas.openxmlformats.org/drawingml/2006/main" xmlns:r="http://schemas.openxmlformats.org/officeDocument/2006/relationships" xmlns:p="http://schemas.openxmlformats.org/presentationml/2006/main">
+  <p:cSld>
+    <p:spTree>
+      <p:nvGrpSpPr>
+        <p:cNvPr id="1" name=""/>
+        <p:cNvGrpSpPr/>
+        <p:nvPr/>
+      </p:nvGrpSpPr>
+      <p:grpSpPr>
+        <a:xfrm>
+          <a:off x="0" y="0"/>
+          <a:ext cx="0" cy="0"/>
+          <a:chOff x="0" y="0"/>
+          <a:chExt cx="0" cy="0"/>
+        </a:xfrm>
+      </p:grpSpPr>
+      <p:sp>
+        <p:nvSpPr>
+          <p:cNvPr id="2" name="Title 1">
+            <a:extLst>
+              <a:ext uri="{FF2B5EF4-FFF2-40B4-BE49-F238E27FC236}">
+                <a16:creationId xmlns:a16="http://schemas.microsoft.com/office/drawing/2014/main" id="{DF81EF6B-9990-4895-9A8F-2103C304A52F}"/>
+              </a:ext>
+            </a:extLst>
+          </p:cNvPr>
+          <p:cNvSpPr>
+            <a:spLocks noGrp="1"/>
+          </p:cNvSpPr>
+          <p:nvPr>
+            <p:ph type="title"/>
+          </p:nvPr>
+        </p:nvSpPr>
         <p:spPr/>
         <p:txBody>
           <a:bodyPr/>
@@ -16649,7 +18679,7 @@
           <a:p>
             <a:r>
               <a:rPr lang="en-GB" dirty="0"/>
-              <a:t>UML Class Diagrams</a:t>
+              <a:t>UML Class Diagram – Example</a:t>
             </a:r>
           </a:p>
         </p:txBody>
@@ -17472,6 +19502,94 @@
                 </a:solidFill>
               </a:rPr>
               <a:t>Private properties / methods only accessible to the object! </a:t>
+            </a:r>
+            <a:endParaRPr lang="en-GB" sz="2800" b="1" dirty="0">
+              <a:solidFill>
+                <a:srgbClr val="7030A0"/>
+              </a:solidFill>
+            </a:endParaRPr>
+          </a:p>
+        </p:txBody>
+      </p:sp>
+      <p:sp>
+        <p:nvSpPr>
+          <p:cNvPr id="19" name="Rectangle 18">
+            <a:extLst>
+              <a:ext uri="{FF2B5EF4-FFF2-40B4-BE49-F238E27FC236}">
+                <a16:creationId xmlns:a16="http://schemas.microsoft.com/office/drawing/2014/main" id="{6FDCD0ED-37D2-4509-B937-22AF1C6A2C79}"/>
+              </a:ext>
+            </a:extLst>
+          </p:cNvPr>
+          <p:cNvSpPr/>
+          <p:nvPr/>
+        </p:nvSpPr>
+        <p:spPr>
+          <a:xfrm>
+            <a:off x="786945" y="3576336"/>
+            <a:ext cx="1109151" cy="523220"/>
+          </a:xfrm>
+          <a:prstGeom prst="rect">
+            <a:avLst/>
+          </a:prstGeom>
+        </p:spPr>
+        <p:txBody>
+          <a:bodyPr wrap="none">
+            <a:spAutoFit/>
+          </a:bodyPr>
+          <a:lstStyle/>
+          <a:p>
+            <a:pPr algn="ctr"/>
+            <a:r>
+              <a:rPr lang="en-GB" sz="2800" b="1" dirty="0">
+                <a:solidFill>
+                  <a:srgbClr val="FF0000"/>
+                </a:solidFill>
+              </a:rPr>
+              <a:t>(Data)</a:t>
+            </a:r>
+            <a:endParaRPr lang="en-GB" sz="2800" b="1" dirty="0">
+              <a:solidFill>
+                <a:srgbClr val="7030A0"/>
+              </a:solidFill>
+            </a:endParaRPr>
+          </a:p>
+        </p:txBody>
+      </p:sp>
+      <p:sp>
+        <p:nvSpPr>
+          <p:cNvPr id="20" name="Rectangle 19">
+            <a:extLst>
+              <a:ext uri="{FF2B5EF4-FFF2-40B4-BE49-F238E27FC236}">
+                <a16:creationId xmlns:a16="http://schemas.microsoft.com/office/drawing/2014/main" id="{EE354554-5AFB-49A6-A53C-9776BB163FA1}"/>
+              </a:ext>
+            </a:extLst>
+          </p:cNvPr>
+          <p:cNvSpPr/>
+          <p:nvPr/>
+        </p:nvSpPr>
+        <p:spPr>
+          <a:xfrm>
+            <a:off x="575378" y="5218168"/>
+            <a:ext cx="1928478" cy="523220"/>
+          </a:xfrm>
+          <a:prstGeom prst="rect">
+            <a:avLst/>
+          </a:prstGeom>
+        </p:spPr>
+        <p:txBody>
+          <a:bodyPr wrap="none">
+            <a:spAutoFit/>
+          </a:bodyPr>
+          <a:lstStyle/>
+          <a:p>
+            <a:pPr algn="ctr"/>
+            <a:r>
+              <a:rPr lang="en-GB" sz="2800" b="1" dirty="0">
+                <a:solidFill>
+                  <a:srgbClr val="FF0000"/>
+                </a:solidFill>
+              </a:rPr>
+              <a:t>(Behaviour)</a:t>
             </a:r>
             <a:endParaRPr lang="en-GB" sz="2800" b="1" dirty="0">
               <a:solidFill>
@@ -18092,7 +20210,7 @@
                                           </p:stCondLst>
                                         </p:cTn>
                                         <p:tgtEl>
-                                          <p:spTgt spid="21"/>
+                                          <p:spTgt spid="19"/>
                                         </p:tgtEl>
                                         <p:attrNameLst>
                                           <p:attrName>style.visibility</p:attrName>
@@ -18104,9 +20222,9 @@
                                     </p:set>
                                     <p:animEffect transition="in" filter="wipe(left)">
                                       <p:cBhvr>
-                                        <p:cTn id="54" dur="1000"/>
+                                        <p:cTn id="54" dur="500"/>
                                         <p:tgtEl>
-                                          <p:spTgt spid="21"/>
+                                          <p:spTgt spid="19"/>
                                         </p:tgtEl>
                                       </p:cBhvr>
                                     </p:animEffect>
@@ -18145,7 +20263,7 @@
                                           </p:stCondLst>
                                         </p:cTn>
                                         <p:tgtEl>
-                                          <p:spTgt spid="22"/>
+                                          <p:spTgt spid="20"/>
                                         </p:tgtEl>
                                         <p:attrNameLst>
                                           <p:attrName>style.visibility</p:attrName>
@@ -18157,9 +20275,9 @@
                                     </p:set>
                                     <p:animEffect transition="in" filter="wipe(left)">
                                       <p:cBhvr>
-                                        <p:cTn id="59" dur="3000"/>
+                                        <p:cTn id="59" dur="1000"/>
                                         <p:tgtEl>
-                                          <p:spTgt spid="22"/>
+                                          <p:spTgt spid="20"/>
                                         </p:tgtEl>
                                       </p:cBhvr>
                                     </p:animEffect>
@@ -18198,6 +20316,112 @@
                                           </p:stCondLst>
                                         </p:cTn>
                                         <p:tgtEl>
+                                          <p:spTgt spid="21"/>
+                                        </p:tgtEl>
+                                        <p:attrNameLst>
+                                          <p:attrName>style.visibility</p:attrName>
+                                        </p:attrNameLst>
+                                      </p:cBhvr>
+                                      <p:to>
+                                        <p:strVal val="visible"/>
+                                      </p:to>
+                                    </p:set>
+                                    <p:animEffect transition="in" filter="wipe(left)">
+                                      <p:cBhvr>
+                                        <p:cTn id="64" dur="1000"/>
+                                        <p:tgtEl>
+                                          <p:spTgt spid="21"/>
+                                        </p:tgtEl>
+                                      </p:cBhvr>
+                                    </p:animEffect>
+                                  </p:childTnLst>
+                                </p:cTn>
+                              </p:par>
+                            </p:childTnLst>
+                          </p:cTn>
+                        </p:par>
+                      </p:childTnLst>
+                    </p:cTn>
+                  </p:par>
+                  <p:par>
+                    <p:cTn id="65" fill="hold">
+                      <p:stCondLst>
+                        <p:cond delay="indefinite"/>
+                      </p:stCondLst>
+                      <p:childTnLst>
+                        <p:par>
+                          <p:cTn id="66" fill="hold">
+                            <p:stCondLst>
+                              <p:cond delay="0"/>
+                            </p:stCondLst>
+                            <p:childTnLst>
+                              <p:par>
+                                <p:cTn id="67" presetID="22" presetClass="entr" presetSubtype="8" fill="hold" grpId="0" nodeType="clickEffect">
+                                  <p:stCondLst>
+                                    <p:cond delay="0"/>
+                                  </p:stCondLst>
+                                  <p:childTnLst>
+                                    <p:set>
+                                      <p:cBhvr>
+                                        <p:cTn id="68" dur="1" fill="hold">
+                                          <p:stCondLst>
+                                            <p:cond delay="0"/>
+                                          </p:stCondLst>
+                                        </p:cTn>
+                                        <p:tgtEl>
+                                          <p:spTgt spid="22"/>
+                                        </p:tgtEl>
+                                        <p:attrNameLst>
+                                          <p:attrName>style.visibility</p:attrName>
+                                        </p:attrNameLst>
+                                      </p:cBhvr>
+                                      <p:to>
+                                        <p:strVal val="visible"/>
+                                      </p:to>
+                                    </p:set>
+                                    <p:animEffect transition="in" filter="wipe(left)">
+                                      <p:cBhvr>
+                                        <p:cTn id="69" dur="3000"/>
+                                        <p:tgtEl>
+                                          <p:spTgt spid="22"/>
+                                        </p:tgtEl>
+                                      </p:cBhvr>
+                                    </p:animEffect>
+                                  </p:childTnLst>
+                                </p:cTn>
+                              </p:par>
+                            </p:childTnLst>
+                          </p:cTn>
+                        </p:par>
+                      </p:childTnLst>
+                    </p:cTn>
+                  </p:par>
+                  <p:par>
+                    <p:cTn id="70" fill="hold">
+                      <p:stCondLst>
+                        <p:cond delay="indefinite"/>
+                      </p:stCondLst>
+                      <p:childTnLst>
+                        <p:par>
+                          <p:cTn id="71" fill="hold">
+                            <p:stCondLst>
+                              <p:cond delay="0"/>
+                            </p:stCondLst>
+                            <p:childTnLst>
+                              <p:par>
+                                <p:cTn id="72" presetID="22" presetClass="entr" presetSubtype="8" fill="hold" grpId="0" nodeType="clickEffect">
+                                  <p:stCondLst>
+                                    <p:cond delay="0"/>
+                                  </p:stCondLst>
+                                  <p:childTnLst>
+                                    <p:set>
+                                      <p:cBhvr>
+                                        <p:cTn id="73" dur="1" fill="hold">
+                                          <p:stCondLst>
+                                            <p:cond delay="0"/>
+                                          </p:stCondLst>
+                                        </p:cTn>
+                                        <p:tgtEl>
                                           <p:spTgt spid="23"/>
                                         </p:tgtEl>
                                         <p:attrNameLst>
@@ -18210,7 +20434,7 @@
                                     </p:set>
                                     <p:animEffect transition="in" filter="wipe(left)">
                                       <p:cBhvr>
-                                        <p:cTn id="64" dur="3000"/>
+                                        <p:cTn id="74" dur="3000"/>
                                         <p:tgtEl>
                                           <p:spTgt spid="23"/>
                                         </p:tgtEl>
@@ -18254,12 +20478,1090 @@
       <p:bldP spid="21" grpId="0"/>
       <p:bldP spid="22" grpId="0" animBg="1"/>
       <p:bldP spid="23" grpId="0"/>
+      <p:bldP spid="19" grpId="0"/>
+      <p:bldP spid="20" grpId="0"/>
     </p:bldLst>
   </p:timing>
 </p:sld>
 </file>
 
-<file path=ppt/slides/slide21.xml><?xml version="1.0" encoding="utf-8"?>
+<file path=ppt/slides/slide23.xml><?xml version="1.0" encoding="utf-8"?>
+<p:sld xmlns:a="http://schemas.openxmlformats.org/drawingml/2006/main" xmlns:r="http://schemas.openxmlformats.org/officeDocument/2006/relationships" xmlns:p="http://schemas.openxmlformats.org/presentationml/2006/main" show="0">
+  <p:cSld>
+    <p:spTree>
+      <p:nvGrpSpPr>
+        <p:cNvPr id="1" name=""/>
+        <p:cNvGrpSpPr/>
+        <p:nvPr/>
+      </p:nvGrpSpPr>
+      <p:grpSpPr>
+        <a:xfrm>
+          <a:off x="0" y="0"/>
+          <a:ext cx="0" cy="0"/>
+          <a:chOff x="0" y="0"/>
+          <a:chExt cx="0" cy="0"/>
+        </a:xfrm>
+      </p:grpSpPr>
+      <p:sp>
+        <p:nvSpPr>
+          <p:cNvPr id="2" name="Title 1">
+            <a:extLst>
+              <a:ext uri="{FF2B5EF4-FFF2-40B4-BE49-F238E27FC236}">
+                <a16:creationId xmlns:a16="http://schemas.microsoft.com/office/drawing/2014/main" id="{DF81EF6B-9990-4895-9A8F-2103C304A52F}"/>
+              </a:ext>
+            </a:extLst>
+          </p:cNvPr>
+          <p:cNvSpPr>
+            <a:spLocks noGrp="1"/>
+          </p:cNvSpPr>
+          <p:nvPr>
+            <p:ph type="title"/>
+          </p:nvPr>
+        </p:nvSpPr>
+        <p:spPr/>
+        <p:txBody>
+          <a:bodyPr/>
+          <a:lstStyle/>
+          <a:p>
+            <a:r>
+              <a:rPr lang="en-GB" dirty="0"/>
+              <a:t>UML Class Diagram – Example</a:t>
+            </a:r>
+          </a:p>
+        </p:txBody>
+      </p:sp>
+      <p:grpSp>
+        <p:nvGrpSpPr>
+          <p:cNvPr id="10" name="Group 9">
+            <a:extLst>
+              <a:ext uri="{FF2B5EF4-FFF2-40B4-BE49-F238E27FC236}">
+                <a16:creationId xmlns:a16="http://schemas.microsoft.com/office/drawing/2014/main" id="{399CD5E7-76CA-46D4-8759-2AB56AB29762}"/>
+              </a:ext>
+            </a:extLst>
+          </p:cNvPr>
+          <p:cNvGrpSpPr/>
+          <p:nvPr/>
+        </p:nvGrpSpPr>
+        <p:grpSpPr>
+          <a:xfrm>
+            <a:off x="3166110" y="1965960"/>
+            <a:ext cx="3600000" cy="4103370"/>
+            <a:chOff x="3886200" y="1965960"/>
+            <a:chExt cx="3600000" cy="3657600"/>
+          </a:xfrm>
+        </p:grpSpPr>
+        <p:sp>
+          <p:nvSpPr>
+            <p:cNvPr id="4" name="Rectangle 3">
+              <a:extLst>
+                <a:ext uri="{FF2B5EF4-FFF2-40B4-BE49-F238E27FC236}">
+                  <a16:creationId xmlns:a16="http://schemas.microsoft.com/office/drawing/2014/main" id="{D68F3B12-91FF-4536-9BDF-3DFA0AD860B7}"/>
+                </a:ext>
+              </a:extLst>
+            </p:cNvPr>
+            <p:cNvSpPr/>
+            <p:nvPr/>
+          </p:nvSpPr>
+          <p:spPr>
+            <a:xfrm>
+              <a:off x="3886200" y="1965960"/>
+              <a:ext cx="3600000" cy="3657600"/>
+            </a:xfrm>
+            <a:prstGeom prst="rect">
+              <a:avLst/>
+            </a:prstGeom>
+            <a:noFill/>
+            <a:ln w="19050">
+              <a:solidFill>
+                <a:schemeClr val="tx1"/>
+              </a:solidFill>
+            </a:ln>
+          </p:spPr>
+          <p:style>
+            <a:lnRef idx="2">
+              <a:schemeClr val="accent1">
+                <a:shade val="50000"/>
+              </a:schemeClr>
+            </a:lnRef>
+            <a:fillRef idx="1">
+              <a:schemeClr val="accent1"/>
+            </a:fillRef>
+            <a:effectRef idx="0">
+              <a:schemeClr val="accent1"/>
+            </a:effectRef>
+            <a:fontRef idx="minor">
+              <a:schemeClr val="lt1"/>
+            </a:fontRef>
+          </p:style>
+          <p:txBody>
+            <a:bodyPr rtlCol="0" anchor="ctr"/>
+            <a:lstStyle/>
+            <a:p>
+              <a:pPr algn="ctr"/>
+              <a:endParaRPr lang="en-GB"/>
+            </a:p>
+          </p:txBody>
+        </p:sp>
+        <p:cxnSp>
+          <p:nvCxnSpPr>
+            <p:cNvPr id="8" name="Straight Connector 7">
+              <a:extLst>
+                <a:ext uri="{FF2B5EF4-FFF2-40B4-BE49-F238E27FC236}">
+                  <a16:creationId xmlns:a16="http://schemas.microsoft.com/office/drawing/2014/main" id="{0F620062-B2DF-4004-8305-6226A65C3AFF}"/>
+                </a:ext>
+              </a:extLst>
+            </p:cNvPr>
+            <p:cNvCxnSpPr/>
+            <p:nvPr/>
+          </p:nvCxnSpPr>
+          <p:spPr>
+            <a:xfrm>
+              <a:off x="3886200" y="3909619"/>
+              <a:ext cx="3600000" cy="0"/>
+            </a:xfrm>
+            <a:prstGeom prst="line">
+              <a:avLst/>
+            </a:prstGeom>
+            <a:ln w="19050">
+              <a:solidFill>
+                <a:schemeClr val="tx1"/>
+              </a:solidFill>
+            </a:ln>
+          </p:spPr>
+          <p:style>
+            <a:lnRef idx="1">
+              <a:schemeClr val="accent1"/>
+            </a:lnRef>
+            <a:fillRef idx="0">
+              <a:schemeClr val="accent1"/>
+            </a:fillRef>
+            <a:effectRef idx="0">
+              <a:schemeClr val="accent1"/>
+            </a:effectRef>
+            <a:fontRef idx="minor">
+              <a:schemeClr val="tx1"/>
+            </a:fontRef>
+          </p:style>
+        </p:cxnSp>
+        <p:sp>
+          <p:nvSpPr>
+            <p:cNvPr id="9" name="Rectangle 8">
+              <a:extLst>
+                <a:ext uri="{FF2B5EF4-FFF2-40B4-BE49-F238E27FC236}">
+                  <a16:creationId xmlns:a16="http://schemas.microsoft.com/office/drawing/2014/main" id="{E06970F1-E4C6-493D-921A-F57A4EAA659D}"/>
+                </a:ext>
+              </a:extLst>
+            </p:cNvPr>
+            <p:cNvSpPr/>
+            <p:nvPr/>
+          </p:nvSpPr>
+          <p:spPr>
+            <a:xfrm>
+              <a:off x="3886200" y="1965960"/>
+              <a:ext cx="3600000" cy="686832"/>
+            </a:xfrm>
+            <a:prstGeom prst="rect">
+              <a:avLst/>
+            </a:prstGeom>
+            <a:solidFill>
+              <a:schemeClr val="accent3">
+                <a:lumMod val="60000"/>
+                <a:lumOff val="40000"/>
+              </a:schemeClr>
+            </a:solidFill>
+            <a:ln w="19050">
+              <a:solidFill>
+                <a:schemeClr val="tx1"/>
+              </a:solidFill>
+            </a:ln>
+          </p:spPr>
+          <p:style>
+            <a:lnRef idx="2">
+              <a:schemeClr val="accent1">
+                <a:shade val="50000"/>
+              </a:schemeClr>
+            </a:lnRef>
+            <a:fillRef idx="1">
+              <a:schemeClr val="accent1"/>
+            </a:fillRef>
+            <a:effectRef idx="0">
+              <a:schemeClr val="accent1"/>
+            </a:effectRef>
+            <a:fontRef idx="minor">
+              <a:schemeClr val="lt1"/>
+            </a:fontRef>
+          </p:style>
+          <p:txBody>
+            <a:bodyPr rtlCol="0" anchor="ctr"/>
+            <a:lstStyle/>
+            <a:p>
+              <a:pPr algn="ctr"/>
+              <a:endParaRPr lang="en-GB"/>
+            </a:p>
+          </p:txBody>
+        </p:sp>
+      </p:grpSp>
+      <p:sp>
+        <p:nvSpPr>
+          <p:cNvPr id="16" name="TextBox 15">
+            <a:extLst>
+              <a:ext uri="{FF2B5EF4-FFF2-40B4-BE49-F238E27FC236}">
+                <a16:creationId xmlns:a16="http://schemas.microsoft.com/office/drawing/2014/main" id="{F9DA67FF-CA17-47F2-BE12-2F4EF7BC1D21}"/>
+              </a:ext>
+            </a:extLst>
+          </p:cNvPr>
+          <p:cNvSpPr txBox="1"/>
+          <p:nvPr/>
+        </p:nvSpPr>
+        <p:spPr>
+          <a:xfrm>
+            <a:off x="4365079" y="2035957"/>
+            <a:ext cx="1202060" cy="523220"/>
+          </a:xfrm>
+          <a:prstGeom prst="rect">
+            <a:avLst/>
+          </a:prstGeom>
+          <a:noFill/>
+        </p:spPr>
+        <p:txBody>
+          <a:bodyPr wrap="none" rtlCol="0">
+            <a:spAutoFit/>
+          </a:bodyPr>
+          <a:lstStyle/>
+          <a:p>
+            <a:pPr algn="ctr"/>
+            <a:r>
+              <a:rPr lang="en-GB" sz="2800" b="1" dirty="0">
+                <a:solidFill>
+                  <a:schemeClr val="accent1"/>
+                </a:solidFill>
+              </a:rPr>
+              <a:t>Person</a:t>
+            </a:r>
+          </a:p>
+        </p:txBody>
+      </p:sp>
+      <p:sp>
+        <p:nvSpPr>
+          <p:cNvPr id="17" name="TextBox 16">
+            <a:extLst>
+              <a:ext uri="{FF2B5EF4-FFF2-40B4-BE49-F238E27FC236}">
+                <a16:creationId xmlns:a16="http://schemas.microsoft.com/office/drawing/2014/main" id="{AE596573-766B-4AFA-B34B-C56D5BA1BE63}"/>
+              </a:ext>
+            </a:extLst>
+          </p:cNvPr>
+          <p:cNvSpPr txBox="1"/>
+          <p:nvPr/>
+        </p:nvSpPr>
+        <p:spPr>
+          <a:xfrm>
+            <a:off x="3437890" y="2736502"/>
+            <a:ext cx="3060700" cy="1404000"/>
+          </a:xfrm>
+          <a:prstGeom prst="rect">
+            <a:avLst/>
+          </a:prstGeom>
+          <a:noFill/>
+        </p:spPr>
+        <p:txBody>
+          <a:bodyPr wrap="square" rtlCol="0">
+            <a:spAutoFit/>
+          </a:bodyPr>
+          <a:lstStyle/>
+          <a:p>
+            <a:r>
+              <a:rPr lang="en-GB" sz="2800" b="1" dirty="0">
+                <a:solidFill>
+                  <a:srgbClr val="FF0000"/>
+                </a:solidFill>
+              </a:rPr>
+              <a:t>-</a:t>
+            </a:r>
+            <a:r>
+              <a:rPr lang="en-GB" sz="2800" b="1" dirty="0">
+                <a:solidFill>
+                  <a:schemeClr val="accent1"/>
+                </a:solidFill>
+              </a:rPr>
+              <a:t> forename: String</a:t>
+            </a:r>
+          </a:p>
+          <a:p>
+            <a:r>
+              <a:rPr lang="en-GB" sz="2800" b="1" dirty="0">
+                <a:solidFill>
+                  <a:srgbClr val="FF0000"/>
+                </a:solidFill>
+              </a:rPr>
+              <a:t>-</a:t>
+            </a:r>
+            <a:r>
+              <a:rPr lang="en-GB" sz="2800" b="1" dirty="0">
+                <a:solidFill>
+                  <a:schemeClr val="accent1"/>
+                </a:solidFill>
+              </a:rPr>
+              <a:t> surname: String</a:t>
+            </a:r>
+          </a:p>
+          <a:p>
+            <a:r>
+              <a:rPr lang="en-GB" sz="2800" b="1" dirty="0">
+                <a:solidFill>
+                  <a:srgbClr val="FF0000"/>
+                </a:solidFill>
+              </a:rPr>
+              <a:t>-</a:t>
+            </a:r>
+            <a:r>
+              <a:rPr lang="en-GB" sz="2800" b="1" dirty="0">
+                <a:solidFill>
+                  <a:schemeClr val="accent1"/>
+                </a:solidFill>
+              </a:rPr>
+              <a:t> age: Integer</a:t>
+            </a:r>
+          </a:p>
+        </p:txBody>
+      </p:sp>
+      <p:sp>
+        <p:nvSpPr>
+          <p:cNvPr id="18" name="TextBox 17">
+            <a:extLst>
+              <a:ext uri="{FF2B5EF4-FFF2-40B4-BE49-F238E27FC236}">
+                <a16:creationId xmlns:a16="http://schemas.microsoft.com/office/drawing/2014/main" id="{D3DE1068-9C54-4D92-A45F-8DEAD06D3824}"/>
+              </a:ext>
+            </a:extLst>
+          </p:cNvPr>
+          <p:cNvSpPr txBox="1"/>
+          <p:nvPr/>
+        </p:nvSpPr>
+        <p:spPr>
+          <a:xfrm>
+            <a:off x="3437890" y="4193974"/>
+            <a:ext cx="2284600" cy="1815882"/>
+          </a:xfrm>
+          <a:prstGeom prst="rect">
+            <a:avLst/>
+          </a:prstGeom>
+          <a:noFill/>
+        </p:spPr>
+        <p:txBody>
+          <a:bodyPr wrap="square" rtlCol="0">
+            <a:spAutoFit/>
+          </a:bodyPr>
+          <a:lstStyle/>
+          <a:p>
+            <a:r>
+              <a:rPr lang="en-GB" sz="2800" b="1" dirty="0">
+                <a:solidFill>
+                  <a:srgbClr val="FF0000"/>
+                </a:solidFill>
+              </a:rPr>
+              <a:t>+</a:t>
+            </a:r>
+            <a:r>
+              <a:rPr lang="en-GB" sz="2800" b="1" dirty="0">
+                <a:solidFill>
+                  <a:schemeClr val="accent1"/>
+                </a:solidFill>
+              </a:rPr>
+              <a:t> Person()</a:t>
+            </a:r>
+          </a:p>
+          <a:p>
+            <a:r>
+              <a:rPr lang="en-GB" sz="2800" b="1" dirty="0">
+                <a:solidFill>
+                  <a:srgbClr val="FF0000"/>
+                </a:solidFill>
+              </a:rPr>
+              <a:t>+</a:t>
+            </a:r>
+            <a:r>
+              <a:rPr lang="en-GB" sz="2800" b="1" dirty="0">
+                <a:solidFill>
+                  <a:schemeClr val="accent1"/>
+                </a:solidFill>
+              </a:rPr>
+              <a:t> </a:t>
+            </a:r>
+            <a:r>
+              <a:rPr lang="en-GB" sz="2800" b="1" dirty="0" err="1">
+                <a:solidFill>
+                  <a:schemeClr val="accent1"/>
+                </a:solidFill>
+              </a:rPr>
+              <a:t>getName</a:t>
+            </a:r>
+            <a:r>
+              <a:rPr lang="en-GB" sz="2800" b="1" dirty="0">
+                <a:solidFill>
+                  <a:schemeClr val="accent1"/>
+                </a:solidFill>
+              </a:rPr>
+              <a:t>()</a:t>
+            </a:r>
+          </a:p>
+          <a:p>
+            <a:r>
+              <a:rPr lang="en-GB" sz="2800" b="1" dirty="0">
+                <a:solidFill>
+                  <a:srgbClr val="FF0000"/>
+                </a:solidFill>
+              </a:rPr>
+              <a:t>+</a:t>
+            </a:r>
+            <a:r>
+              <a:rPr lang="en-GB" sz="2800" b="1" dirty="0">
+                <a:solidFill>
+                  <a:schemeClr val="accent1"/>
+                </a:solidFill>
+              </a:rPr>
+              <a:t> </a:t>
+            </a:r>
+            <a:r>
+              <a:rPr lang="en-GB" sz="2800" b="1" dirty="0" err="1">
+                <a:solidFill>
+                  <a:schemeClr val="accent1"/>
+                </a:solidFill>
+              </a:rPr>
+              <a:t>getAge</a:t>
+            </a:r>
+            <a:r>
+              <a:rPr lang="en-GB" sz="2800" b="1" dirty="0">
+                <a:solidFill>
+                  <a:schemeClr val="accent1"/>
+                </a:solidFill>
+              </a:rPr>
+              <a:t>()</a:t>
+            </a:r>
+          </a:p>
+          <a:p>
+            <a:r>
+              <a:rPr lang="en-GB" sz="2800" b="1" dirty="0">
+                <a:solidFill>
+                  <a:srgbClr val="FF0000"/>
+                </a:solidFill>
+              </a:rPr>
+              <a:t>+</a:t>
+            </a:r>
+            <a:r>
+              <a:rPr lang="en-GB" sz="2800" b="1" dirty="0">
+                <a:solidFill>
+                  <a:schemeClr val="accent1"/>
+                </a:solidFill>
+              </a:rPr>
+              <a:t> </a:t>
+            </a:r>
+            <a:r>
+              <a:rPr lang="en-GB" sz="2800" b="1" dirty="0" err="1">
+                <a:solidFill>
+                  <a:schemeClr val="accent1"/>
+                </a:solidFill>
+              </a:rPr>
+              <a:t>setAge</a:t>
+            </a:r>
+            <a:r>
+              <a:rPr lang="en-GB" sz="2800" b="1" dirty="0">
+                <a:solidFill>
+                  <a:schemeClr val="accent1"/>
+                </a:solidFill>
+              </a:rPr>
+              <a:t>()</a:t>
+            </a:r>
+          </a:p>
+        </p:txBody>
+      </p:sp>
+    </p:spTree>
+    <p:extLst>
+      <p:ext uri="{BB962C8B-B14F-4D97-AF65-F5344CB8AC3E}">
+        <p14:creationId xmlns:p14="http://schemas.microsoft.com/office/powerpoint/2010/main" val="3066646524"/>
+      </p:ext>
+    </p:extLst>
+  </p:cSld>
+  <p:clrMapOvr>
+    <a:masterClrMapping/>
+  </p:clrMapOvr>
+  <p:timing>
+    <p:tnLst>
+      <p:par>
+        <p:cTn id="1" dur="indefinite" restart="never" nodeType="tmRoot">
+          <p:childTnLst>
+            <p:seq concurrent="1" nextAc="seek">
+              <p:cTn id="2" dur="indefinite" nodeType="mainSeq">
+                <p:childTnLst>
+                  <p:par>
+                    <p:cTn id="3" fill="hold">
+                      <p:stCondLst>
+                        <p:cond delay="indefinite"/>
+                        <p:cond evt="onBegin" delay="0">
+                          <p:tn val="2"/>
+                        </p:cond>
+                      </p:stCondLst>
+                      <p:childTnLst>
+                        <p:par>
+                          <p:cTn id="4" fill="hold">
+                            <p:stCondLst>
+                              <p:cond delay="0"/>
+                            </p:stCondLst>
+                            <p:childTnLst>
+                              <p:par>
+                                <p:cTn id="5" presetID="22" presetClass="entr" presetSubtype="8" fill="hold" grpId="0" nodeType="afterEffect">
+                                  <p:stCondLst>
+                                    <p:cond delay="0"/>
+                                  </p:stCondLst>
+                                  <p:childTnLst>
+                                    <p:set>
+                                      <p:cBhvr>
+                                        <p:cTn id="6" dur="1" fill="hold">
+                                          <p:stCondLst>
+                                            <p:cond delay="0"/>
+                                          </p:stCondLst>
+                                        </p:cTn>
+                                        <p:tgtEl>
+                                          <p:spTgt spid="16"/>
+                                        </p:tgtEl>
+                                        <p:attrNameLst>
+                                          <p:attrName>style.visibility</p:attrName>
+                                        </p:attrNameLst>
+                                      </p:cBhvr>
+                                      <p:to>
+                                        <p:strVal val="visible"/>
+                                      </p:to>
+                                    </p:set>
+                                    <p:animEffect transition="in" filter="wipe(left)">
+                                      <p:cBhvr>
+                                        <p:cTn id="7" dur="1000"/>
+                                        <p:tgtEl>
+                                          <p:spTgt spid="16"/>
+                                        </p:tgtEl>
+                                      </p:cBhvr>
+                                    </p:animEffect>
+                                  </p:childTnLst>
+                                </p:cTn>
+                              </p:par>
+                            </p:childTnLst>
+                          </p:cTn>
+                        </p:par>
+                        <p:par>
+                          <p:cTn id="8" fill="hold">
+                            <p:stCondLst>
+                              <p:cond delay="1000"/>
+                            </p:stCondLst>
+                            <p:childTnLst>
+                              <p:par>
+                                <p:cTn id="9" presetID="22" presetClass="entr" presetSubtype="8" fill="hold" nodeType="afterEffect">
+                                  <p:stCondLst>
+                                    <p:cond delay="0"/>
+                                  </p:stCondLst>
+                                  <p:childTnLst>
+                                    <p:set>
+                                      <p:cBhvr>
+                                        <p:cTn id="10" dur="1" fill="hold">
+                                          <p:stCondLst>
+                                            <p:cond delay="0"/>
+                                          </p:stCondLst>
+                                        </p:cTn>
+                                        <p:tgtEl>
+                                          <p:spTgt spid="17">
+                                            <p:txEl>
+                                              <p:pRg st="0" end="0"/>
+                                            </p:txEl>
+                                          </p:spTgt>
+                                        </p:tgtEl>
+                                        <p:attrNameLst>
+                                          <p:attrName>style.visibility</p:attrName>
+                                        </p:attrNameLst>
+                                      </p:cBhvr>
+                                      <p:to>
+                                        <p:strVal val="visible"/>
+                                      </p:to>
+                                    </p:set>
+                                    <p:animEffect transition="in" filter="wipe(left)">
+                                      <p:cBhvr>
+                                        <p:cTn id="11" dur="1000"/>
+                                        <p:tgtEl>
+                                          <p:spTgt spid="17">
+                                            <p:txEl>
+                                              <p:pRg st="0" end="0"/>
+                                            </p:txEl>
+                                          </p:spTgt>
+                                        </p:tgtEl>
+                                      </p:cBhvr>
+                                    </p:animEffect>
+                                  </p:childTnLst>
+                                </p:cTn>
+                              </p:par>
+                            </p:childTnLst>
+                          </p:cTn>
+                        </p:par>
+                        <p:par>
+                          <p:cTn id="12" fill="hold">
+                            <p:stCondLst>
+                              <p:cond delay="2000"/>
+                            </p:stCondLst>
+                            <p:childTnLst>
+                              <p:par>
+                                <p:cTn id="13" presetID="22" presetClass="entr" presetSubtype="8" fill="hold" nodeType="afterEffect">
+                                  <p:stCondLst>
+                                    <p:cond delay="0"/>
+                                  </p:stCondLst>
+                                  <p:childTnLst>
+                                    <p:set>
+                                      <p:cBhvr>
+                                        <p:cTn id="14" dur="1" fill="hold">
+                                          <p:stCondLst>
+                                            <p:cond delay="0"/>
+                                          </p:stCondLst>
+                                        </p:cTn>
+                                        <p:tgtEl>
+                                          <p:spTgt spid="17">
+                                            <p:txEl>
+                                              <p:pRg st="1" end="1"/>
+                                            </p:txEl>
+                                          </p:spTgt>
+                                        </p:tgtEl>
+                                        <p:attrNameLst>
+                                          <p:attrName>style.visibility</p:attrName>
+                                        </p:attrNameLst>
+                                      </p:cBhvr>
+                                      <p:to>
+                                        <p:strVal val="visible"/>
+                                      </p:to>
+                                    </p:set>
+                                    <p:animEffect transition="in" filter="wipe(left)">
+                                      <p:cBhvr>
+                                        <p:cTn id="15" dur="1000"/>
+                                        <p:tgtEl>
+                                          <p:spTgt spid="17">
+                                            <p:txEl>
+                                              <p:pRg st="1" end="1"/>
+                                            </p:txEl>
+                                          </p:spTgt>
+                                        </p:tgtEl>
+                                      </p:cBhvr>
+                                    </p:animEffect>
+                                  </p:childTnLst>
+                                </p:cTn>
+                              </p:par>
+                            </p:childTnLst>
+                          </p:cTn>
+                        </p:par>
+                        <p:par>
+                          <p:cTn id="16" fill="hold">
+                            <p:stCondLst>
+                              <p:cond delay="3000"/>
+                            </p:stCondLst>
+                            <p:childTnLst>
+                              <p:par>
+                                <p:cTn id="17" presetID="22" presetClass="entr" presetSubtype="8" fill="hold" nodeType="afterEffect">
+                                  <p:stCondLst>
+                                    <p:cond delay="0"/>
+                                  </p:stCondLst>
+                                  <p:childTnLst>
+                                    <p:set>
+                                      <p:cBhvr>
+                                        <p:cTn id="18" dur="1" fill="hold">
+                                          <p:stCondLst>
+                                            <p:cond delay="0"/>
+                                          </p:stCondLst>
+                                        </p:cTn>
+                                        <p:tgtEl>
+                                          <p:spTgt spid="17">
+                                            <p:txEl>
+                                              <p:pRg st="2" end="2"/>
+                                            </p:txEl>
+                                          </p:spTgt>
+                                        </p:tgtEl>
+                                        <p:attrNameLst>
+                                          <p:attrName>style.visibility</p:attrName>
+                                        </p:attrNameLst>
+                                      </p:cBhvr>
+                                      <p:to>
+                                        <p:strVal val="visible"/>
+                                      </p:to>
+                                    </p:set>
+                                    <p:animEffect transition="in" filter="wipe(left)">
+                                      <p:cBhvr>
+                                        <p:cTn id="19" dur="1000"/>
+                                        <p:tgtEl>
+                                          <p:spTgt spid="17">
+                                            <p:txEl>
+                                              <p:pRg st="2" end="2"/>
+                                            </p:txEl>
+                                          </p:spTgt>
+                                        </p:tgtEl>
+                                      </p:cBhvr>
+                                    </p:animEffect>
+                                  </p:childTnLst>
+                                </p:cTn>
+                              </p:par>
+                            </p:childTnLst>
+                          </p:cTn>
+                        </p:par>
+                        <p:par>
+                          <p:cTn id="20" fill="hold">
+                            <p:stCondLst>
+                              <p:cond delay="4000"/>
+                            </p:stCondLst>
+                            <p:childTnLst>
+                              <p:par>
+                                <p:cTn id="21" presetID="22" presetClass="entr" presetSubtype="8" fill="hold" nodeType="afterEffect">
+                                  <p:stCondLst>
+                                    <p:cond delay="0"/>
+                                  </p:stCondLst>
+                                  <p:childTnLst>
+                                    <p:set>
+                                      <p:cBhvr>
+                                        <p:cTn id="22" dur="1" fill="hold">
+                                          <p:stCondLst>
+                                            <p:cond delay="0"/>
+                                          </p:stCondLst>
+                                        </p:cTn>
+                                        <p:tgtEl>
+                                          <p:spTgt spid="18">
+                                            <p:txEl>
+                                              <p:pRg st="0" end="0"/>
+                                            </p:txEl>
+                                          </p:spTgt>
+                                        </p:tgtEl>
+                                        <p:attrNameLst>
+                                          <p:attrName>style.visibility</p:attrName>
+                                        </p:attrNameLst>
+                                      </p:cBhvr>
+                                      <p:to>
+                                        <p:strVal val="visible"/>
+                                      </p:to>
+                                    </p:set>
+                                    <p:animEffect transition="in" filter="wipe(left)">
+                                      <p:cBhvr>
+                                        <p:cTn id="23" dur="1000"/>
+                                        <p:tgtEl>
+                                          <p:spTgt spid="18">
+                                            <p:txEl>
+                                              <p:pRg st="0" end="0"/>
+                                            </p:txEl>
+                                          </p:spTgt>
+                                        </p:tgtEl>
+                                      </p:cBhvr>
+                                    </p:animEffect>
+                                  </p:childTnLst>
+                                </p:cTn>
+                              </p:par>
+                            </p:childTnLst>
+                          </p:cTn>
+                        </p:par>
+                        <p:par>
+                          <p:cTn id="24" fill="hold">
+                            <p:stCondLst>
+                              <p:cond delay="5000"/>
+                            </p:stCondLst>
+                            <p:childTnLst>
+                              <p:par>
+                                <p:cTn id="25" presetID="22" presetClass="entr" presetSubtype="8" fill="hold" nodeType="afterEffect">
+                                  <p:stCondLst>
+                                    <p:cond delay="0"/>
+                                  </p:stCondLst>
+                                  <p:childTnLst>
+                                    <p:set>
+                                      <p:cBhvr>
+                                        <p:cTn id="26" dur="1" fill="hold">
+                                          <p:stCondLst>
+                                            <p:cond delay="0"/>
+                                          </p:stCondLst>
+                                        </p:cTn>
+                                        <p:tgtEl>
+                                          <p:spTgt spid="18">
+                                            <p:txEl>
+                                              <p:pRg st="1" end="1"/>
+                                            </p:txEl>
+                                          </p:spTgt>
+                                        </p:tgtEl>
+                                        <p:attrNameLst>
+                                          <p:attrName>style.visibility</p:attrName>
+                                        </p:attrNameLst>
+                                      </p:cBhvr>
+                                      <p:to>
+                                        <p:strVal val="visible"/>
+                                      </p:to>
+                                    </p:set>
+                                    <p:animEffect transition="in" filter="wipe(left)">
+                                      <p:cBhvr>
+                                        <p:cTn id="27" dur="1000"/>
+                                        <p:tgtEl>
+                                          <p:spTgt spid="18">
+                                            <p:txEl>
+                                              <p:pRg st="1" end="1"/>
+                                            </p:txEl>
+                                          </p:spTgt>
+                                        </p:tgtEl>
+                                      </p:cBhvr>
+                                    </p:animEffect>
+                                  </p:childTnLst>
+                                </p:cTn>
+                              </p:par>
+                            </p:childTnLst>
+                          </p:cTn>
+                        </p:par>
+                        <p:par>
+                          <p:cTn id="28" fill="hold">
+                            <p:stCondLst>
+                              <p:cond delay="6000"/>
+                            </p:stCondLst>
+                            <p:childTnLst>
+                              <p:par>
+                                <p:cTn id="29" presetID="22" presetClass="entr" presetSubtype="8" fill="hold" nodeType="afterEffect">
+                                  <p:stCondLst>
+                                    <p:cond delay="0"/>
+                                  </p:stCondLst>
+                                  <p:childTnLst>
+                                    <p:set>
+                                      <p:cBhvr>
+                                        <p:cTn id="30" dur="1" fill="hold">
+                                          <p:stCondLst>
+                                            <p:cond delay="0"/>
+                                          </p:stCondLst>
+                                        </p:cTn>
+                                        <p:tgtEl>
+                                          <p:spTgt spid="18">
+                                            <p:txEl>
+                                              <p:pRg st="2" end="2"/>
+                                            </p:txEl>
+                                          </p:spTgt>
+                                        </p:tgtEl>
+                                        <p:attrNameLst>
+                                          <p:attrName>style.visibility</p:attrName>
+                                        </p:attrNameLst>
+                                      </p:cBhvr>
+                                      <p:to>
+                                        <p:strVal val="visible"/>
+                                      </p:to>
+                                    </p:set>
+                                    <p:animEffect transition="in" filter="wipe(left)">
+                                      <p:cBhvr>
+                                        <p:cTn id="31" dur="1000"/>
+                                        <p:tgtEl>
+                                          <p:spTgt spid="18">
+                                            <p:txEl>
+                                              <p:pRg st="2" end="2"/>
+                                            </p:txEl>
+                                          </p:spTgt>
+                                        </p:tgtEl>
+                                      </p:cBhvr>
+                                    </p:animEffect>
+                                  </p:childTnLst>
+                                </p:cTn>
+                              </p:par>
+                            </p:childTnLst>
+                          </p:cTn>
+                        </p:par>
+                        <p:par>
+                          <p:cTn id="32" fill="hold">
+                            <p:stCondLst>
+                              <p:cond delay="7000"/>
+                            </p:stCondLst>
+                            <p:childTnLst>
+                              <p:par>
+                                <p:cTn id="33" presetID="22" presetClass="entr" presetSubtype="8" fill="hold" nodeType="afterEffect">
+                                  <p:stCondLst>
+                                    <p:cond delay="0"/>
+                                  </p:stCondLst>
+                                  <p:childTnLst>
+                                    <p:set>
+                                      <p:cBhvr>
+                                        <p:cTn id="34" dur="1" fill="hold">
+                                          <p:stCondLst>
+                                            <p:cond delay="0"/>
+                                          </p:stCondLst>
+                                        </p:cTn>
+                                        <p:tgtEl>
+                                          <p:spTgt spid="18">
+                                            <p:txEl>
+                                              <p:pRg st="3" end="3"/>
+                                            </p:txEl>
+                                          </p:spTgt>
+                                        </p:tgtEl>
+                                        <p:attrNameLst>
+                                          <p:attrName>style.visibility</p:attrName>
+                                        </p:attrNameLst>
+                                      </p:cBhvr>
+                                      <p:to>
+                                        <p:strVal val="visible"/>
+                                      </p:to>
+                                    </p:set>
+                                    <p:animEffect transition="in" filter="wipe(left)">
+                                      <p:cBhvr>
+                                        <p:cTn id="35" dur="1000"/>
+                                        <p:tgtEl>
+                                          <p:spTgt spid="18">
+                                            <p:txEl>
+                                              <p:pRg st="3" end="3"/>
+                                            </p:txEl>
+                                          </p:spTgt>
+                                        </p:tgtEl>
+                                      </p:cBhvr>
+                                    </p:animEffect>
+                                  </p:childTnLst>
+                                </p:cTn>
+                              </p:par>
+                            </p:childTnLst>
+                          </p:cTn>
+                        </p:par>
+                      </p:childTnLst>
+                    </p:cTn>
+                  </p:par>
+                </p:childTnLst>
+              </p:cTn>
+              <p:prevCondLst>
+                <p:cond evt="onPrev" delay="0">
+                  <p:tgtEl>
+                    <p:sldTgt/>
+                  </p:tgtEl>
+                </p:cond>
+              </p:prevCondLst>
+              <p:nextCondLst>
+                <p:cond evt="onNext" delay="0">
+                  <p:tgtEl>
+                    <p:sldTgt/>
+                  </p:tgtEl>
+                </p:cond>
+              </p:nextCondLst>
+            </p:seq>
+          </p:childTnLst>
+        </p:cTn>
+      </p:par>
+    </p:tnLst>
+    <p:bldLst>
+      <p:bldP spid="16" grpId="0"/>
+    </p:bldLst>
+  </p:timing>
+</p:sld>
+</file>
+
+<file path=ppt/slides/slide24.xml><?xml version="1.0" encoding="utf-8"?>
+<p:sld xmlns:a="http://schemas.openxmlformats.org/drawingml/2006/main" xmlns:r="http://schemas.openxmlformats.org/officeDocument/2006/relationships" xmlns:p="http://schemas.openxmlformats.org/presentationml/2006/main">
+  <p:cSld>
+    <p:spTree>
+      <p:nvGrpSpPr>
+        <p:cNvPr id="1" name=""/>
+        <p:cNvGrpSpPr/>
+        <p:nvPr/>
+      </p:nvGrpSpPr>
+      <p:grpSpPr>
+        <a:xfrm>
+          <a:off x="0" y="0"/>
+          <a:ext cx="0" cy="0"/>
+          <a:chOff x="0" y="0"/>
+          <a:chExt cx="0" cy="0"/>
+        </a:xfrm>
+      </p:grpSpPr>
+      <p:sp>
+        <p:nvSpPr>
+          <p:cNvPr id="2" name="Title 1"/>
+          <p:cNvSpPr>
+            <a:spLocks noGrp="1"/>
+          </p:cNvSpPr>
+          <p:nvPr>
+            <p:ph type="title"/>
+          </p:nvPr>
+        </p:nvSpPr>
+        <p:spPr/>
+        <p:txBody>
+          <a:bodyPr/>
+          <a:lstStyle/>
+          <a:p>
+            <a:r>
+              <a:rPr lang="en-GB" dirty="0"/>
+              <a:t>Learning Intentions</a:t>
+            </a:r>
+          </a:p>
+        </p:txBody>
+      </p:sp>
+      <p:sp>
+        <p:nvSpPr>
+          <p:cNvPr id="3" name="Content Placeholder 2"/>
+          <p:cNvSpPr>
+            <a:spLocks noGrp="1"/>
+          </p:cNvSpPr>
+          <p:nvPr>
+            <p:ph idx="1"/>
+          </p:nvPr>
+        </p:nvSpPr>
+        <p:spPr/>
+        <p:txBody>
+          <a:bodyPr>
+            <a:normAutofit/>
+          </a:bodyPr>
+          <a:lstStyle/>
+          <a:p>
+            <a:pPr marL="0" indent="0">
+              <a:lnSpc>
+                <a:spcPct val="100000"/>
+              </a:lnSpc>
+              <a:spcBef>
+                <a:spcPts val="0"/>
+              </a:spcBef>
+              <a:spcAft>
+                <a:spcPts val="600"/>
+              </a:spcAft>
+              <a:buNone/>
+            </a:pPr>
+            <a:r>
+              <a:rPr lang="en-GB" dirty="0"/>
+              <a:t>Describe, exemplify, and implement UML for class diagrams:</a:t>
+            </a:r>
+          </a:p>
+          <a:p>
+            <a:pPr lvl="1">
+              <a:lnSpc>
+                <a:spcPct val="100000"/>
+              </a:lnSpc>
+              <a:spcBef>
+                <a:spcPts val="0"/>
+              </a:spcBef>
+              <a:spcAft>
+                <a:spcPts val="600"/>
+              </a:spcAft>
+            </a:pPr>
+            <a:r>
+              <a:rPr lang="en-GB" sz="2800" dirty="0"/>
+              <a:t>array of objects</a:t>
+            </a:r>
+          </a:p>
+          <a:p>
+            <a:pPr lvl="1">
+              <a:lnSpc>
+                <a:spcPct val="100000"/>
+              </a:lnSpc>
+              <a:spcBef>
+                <a:spcPts val="0"/>
+              </a:spcBef>
+              <a:spcAft>
+                <a:spcPts val="600"/>
+              </a:spcAft>
+            </a:pPr>
+            <a:r>
+              <a:rPr lang="en-GB" sz="2800" dirty="0"/>
+              <a:t>inheritance</a:t>
+            </a:r>
+          </a:p>
+        </p:txBody>
+      </p:sp>
+    </p:spTree>
+    <p:extLst>
+      <p:ext uri="{BB962C8B-B14F-4D97-AF65-F5344CB8AC3E}">
+        <p14:creationId xmlns:p14="http://schemas.microsoft.com/office/powerpoint/2010/main" val="2004894556"/>
+      </p:ext>
+    </p:extLst>
+  </p:cSld>
+  <p:clrMapOvr>
+    <a:masterClrMapping/>
+  </p:clrMapOvr>
+</p:sld>
+</file>
+
+<file path=ppt/slides/slide25.xml><?xml version="1.0" encoding="utf-8"?>
 <p:sld xmlns:a="http://schemas.openxmlformats.org/drawingml/2006/main" xmlns:r="http://schemas.openxmlformats.org/officeDocument/2006/relationships" xmlns:p="http://schemas.openxmlformats.org/presentationml/2006/main">
   <p:cSld>
     <p:spTree>
@@ -19781,7 +23083,7 @@
 </p:sld>
 </file>
 
-<file path=ppt/slides/slide22.xml><?xml version="1.0" encoding="utf-8"?>
+<file path=ppt/slides/slide26.xml><?xml version="1.0" encoding="utf-8"?>
 <p:sld xmlns:a="http://schemas.openxmlformats.org/drawingml/2006/main" xmlns:r="http://schemas.openxmlformats.org/officeDocument/2006/relationships" xmlns:p="http://schemas.openxmlformats.org/presentationml/2006/main">
   <p:cSld>
     <p:spTree>
@@ -19855,7 +23157,7 @@
 </p:sld>
 </file>
 
-<file path=ppt/slides/slide23.xml><?xml version="1.0" encoding="utf-8"?>
+<file path=ppt/slides/slide27.xml><?xml version="1.0" encoding="utf-8"?>
 <p:sld xmlns:a="http://schemas.openxmlformats.org/drawingml/2006/main" xmlns:r="http://schemas.openxmlformats.org/officeDocument/2006/relationships" xmlns:p="http://schemas.openxmlformats.org/presentationml/2006/main">
   <p:cSld>
     <p:spTree>
